--- a/topic08-inheritance/unit-08a-lectures/talk-3-inheritance-v2/a-inheritance-v2.pptx
+++ b/topic08-inheritance/unit-08a-lectures/talk-3-inheritance-v2/a-inheritance-v2.pptx
@@ -2,7 +2,7 @@
 <file path=ppt/presentation.xml><?xml version="1.0" encoding="utf-8"?>
 <p:presentation xmlns:a="http://schemas.openxmlformats.org/drawingml/2006/main" xmlns:r="http://schemas.openxmlformats.org/officeDocument/2006/relationships" xmlns:p="http://schemas.openxmlformats.org/presentationml/2006/main" saveSubsetFonts="1" autoCompressPictures="0">
   <p:sldMasterIdLst>
-    <p:sldMasterId id="2147483648" r:id="rId4"/>
+    <p:sldMasterId id="2147483661" r:id="rId4"/>
   </p:sldMasterIdLst>
   <p:notesMasterIdLst>
     <p:notesMasterId r:id="rId26"/>
@@ -270,7 +270,7 @@
           <a:p>
             <a:fld id="{73FB268A-CA3A-0048-9013-6E7C8FF5127F}" type="datetimeFigureOut">
               <a:rPr lang="en-US" smtClean="0"/>
-              <a:t>3/14/25</a:t>
+              <a:t>3/12/26</a:t>
             </a:fld>
             <a:endParaRPr lang="en-US"/>
           </a:p>
@@ -2305,7 +2305,7 @@
 </file>
 
 <file path=ppt/slideLayouts/slideLayout1.xml><?xml version="1.0" encoding="utf-8"?>
-<p:sldLayout xmlns:a="http://schemas.openxmlformats.org/drawingml/2006/main" xmlns:r="http://schemas.openxmlformats.org/officeDocument/2006/relationships" xmlns:p="http://schemas.openxmlformats.org/presentationml/2006/main" showMasterSp="0" type="title" preserve="1">
+<p:sldLayout xmlns:a="http://schemas.openxmlformats.org/drawingml/2006/main" xmlns:r="http://schemas.openxmlformats.org/officeDocument/2006/relationships" xmlns:p="http://schemas.openxmlformats.org/presentationml/2006/main" type="title" preserve="1">
   <p:cSld name="Title Slide">
     <p:spTree>
       <p:nvGrpSpPr>
@@ -2323,13 +2323,7 @@
       </p:grpSpPr>
       <p:sp>
         <p:nvSpPr>
-          <p:cNvPr id="2" name="Title 1">
-            <a:extLst>
-              <a:ext uri="{FF2B5EF4-FFF2-40B4-BE49-F238E27FC236}">
-                <a16:creationId xmlns:a16="http://schemas.microsoft.com/office/drawing/2014/main" id="{D320BDA7-D71E-A617-27B7-787DE42F72E7}"/>
-              </a:ext>
-            </a:extLst>
-          </p:cNvPr>
+          <p:cNvPr id="2" name="Title 1"/>
           <p:cNvSpPr>
             <a:spLocks noGrp="1"/>
           </p:cNvSpPr>
@@ -2339,35 +2333,25 @@
         </p:nvSpPr>
         <p:spPr>
           <a:xfrm>
-            <a:off x="1524000" y="1122363"/>
-            <a:ext cx="9144000" cy="2387600"/>
+            <a:off x="914400" y="2130426"/>
+            <a:ext cx="10363200" cy="1470025"/>
           </a:xfrm>
         </p:spPr>
         <p:txBody>
-          <a:bodyPr anchor="b"/>
-          <a:lstStyle>
-            <a:lvl1pPr algn="ctr">
-              <a:defRPr sz="6000"/>
-            </a:lvl1pPr>
-          </a:lstStyle>
+          <a:bodyPr/>
+          <a:lstStyle/>
           <a:p>
             <a:r>
               <a:rPr lang="en-GB"/>
               <a:t>Click to edit Master title style</a:t>
             </a:r>
-            <a:endParaRPr lang="en-US"/>
+            <a:endParaRPr lang="en-IE"/>
           </a:p>
         </p:txBody>
       </p:sp>
       <p:sp>
         <p:nvSpPr>
-          <p:cNvPr id="3" name="Subtitle 2">
-            <a:extLst>
-              <a:ext uri="{FF2B5EF4-FFF2-40B4-BE49-F238E27FC236}">
-                <a16:creationId xmlns:a16="http://schemas.microsoft.com/office/drawing/2014/main" id="{F23FDDF3-9F54-4D1C-4DAE-AEDCD366F1DE}"/>
-              </a:ext>
-            </a:extLst>
-          </p:cNvPr>
+          <p:cNvPr id="3" name="Subtitle 2"/>
           <p:cNvSpPr>
             <a:spLocks noGrp="1"/>
           </p:cNvSpPr>
@@ -2377,8 +2361,8 @@
         </p:nvSpPr>
         <p:spPr>
           <a:xfrm>
-            <a:off x="1524000" y="3602038"/>
-            <a:ext cx="9144000" cy="1655762"/>
+            <a:off x="1828800" y="3886200"/>
+            <a:ext cx="8534400" cy="1752600"/>
           </a:xfrm>
         </p:spPr>
         <p:txBody>
@@ -2386,39 +2370,93 @@
           <a:lstStyle>
             <a:lvl1pPr marL="0" indent="0" algn="ctr">
               <a:buNone/>
-              <a:defRPr sz="2400"/>
+              <a:defRPr>
+                <a:solidFill>
+                  <a:schemeClr val="tx1">
+                    <a:tint val="75000"/>
+                  </a:schemeClr>
+                </a:solidFill>
+              </a:defRPr>
             </a:lvl1pPr>
             <a:lvl2pPr marL="457200" indent="0" algn="ctr">
               <a:buNone/>
-              <a:defRPr sz="2000"/>
+              <a:defRPr>
+                <a:solidFill>
+                  <a:schemeClr val="tx1">
+                    <a:tint val="75000"/>
+                  </a:schemeClr>
+                </a:solidFill>
+              </a:defRPr>
             </a:lvl2pPr>
             <a:lvl3pPr marL="914400" indent="0" algn="ctr">
               <a:buNone/>
-              <a:defRPr sz="1800"/>
+              <a:defRPr>
+                <a:solidFill>
+                  <a:schemeClr val="tx1">
+                    <a:tint val="75000"/>
+                  </a:schemeClr>
+                </a:solidFill>
+              </a:defRPr>
             </a:lvl3pPr>
             <a:lvl4pPr marL="1371600" indent="0" algn="ctr">
               <a:buNone/>
-              <a:defRPr sz="1600"/>
+              <a:defRPr>
+                <a:solidFill>
+                  <a:schemeClr val="tx1">
+                    <a:tint val="75000"/>
+                  </a:schemeClr>
+                </a:solidFill>
+              </a:defRPr>
             </a:lvl4pPr>
             <a:lvl5pPr marL="1828800" indent="0" algn="ctr">
               <a:buNone/>
-              <a:defRPr sz="1600"/>
+              <a:defRPr>
+                <a:solidFill>
+                  <a:schemeClr val="tx1">
+                    <a:tint val="75000"/>
+                  </a:schemeClr>
+                </a:solidFill>
+              </a:defRPr>
             </a:lvl5pPr>
             <a:lvl6pPr marL="2286000" indent="0" algn="ctr">
               <a:buNone/>
-              <a:defRPr sz="1600"/>
+              <a:defRPr>
+                <a:solidFill>
+                  <a:schemeClr val="tx1">
+                    <a:tint val="75000"/>
+                  </a:schemeClr>
+                </a:solidFill>
+              </a:defRPr>
             </a:lvl6pPr>
             <a:lvl7pPr marL="2743200" indent="0" algn="ctr">
               <a:buNone/>
-              <a:defRPr sz="1600"/>
+              <a:defRPr>
+                <a:solidFill>
+                  <a:schemeClr val="tx1">
+                    <a:tint val="75000"/>
+                  </a:schemeClr>
+                </a:solidFill>
+              </a:defRPr>
             </a:lvl7pPr>
             <a:lvl8pPr marL="3200400" indent="0" algn="ctr">
               <a:buNone/>
-              <a:defRPr sz="1600"/>
+              <a:defRPr>
+                <a:solidFill>
+                  <a:schemeClr val="tx1">
+                    <a:tint val="75000"/>
+                  </a:schemeClr>
+                </a:solidFill>
+              </a:defRPr>
             </a:lvl8pPr>
             <a:lvl9pPr marL="3657600" indent="0" algn="ctr">
               <a:buNone/>
-              <a:defRPr sz="1600"/>
+              <a:defRPr>
+                <a:solidFill>
+                  <a:schemeClr val="tx1">
+                    <a:tint val="75000"/>
+                  </a:schemeClr>
+                </a:solidFill>
+              </a:defRPr>
             </a:lvl9pPr>
           </a:lstStyle>
           <a:p>
@@ -2426,16 +2464,83 @@
               <a:rPr lang="en-GB"/>
               <a:t>Click to edit Master subtitle style</a:t>
             </a:r>
+            <a:endParaRPr lang="en-IE"/>
+          </a:p>
+        </p:txBody>
+      </p:sp>
+      <p:sp>
+        <p:nvSpPr>
+          <p:cNvPr id="4" name="Date Placeholder 3"/>
+          <p:cNvSpPr>
+            <a:spLocks noGrp="1"/>
+          </p:cNvSpPr>
+          <p:nvPr>
+            <p:ph type="dt" sz="half" idx="10"/>
+          </p:nvPr>
+        </p:nvSpPr>
+        <p:spPr/>
+        <p:txBody>
+          <a:bodyPr/>
+          <a:lstStyle/>
+          <a:p>
+            <a:fld id="{1D8BD707-D9CF-40AE-B4C6-C98DA3205C09}" type="datetimeFigureOut">
+              <a:rPr lang="en-US" smtClean="0"/>
+              <a:pPr/>
+              <a:t>3/12/26</a:t>
+            </a:fld>
+            <a:endParaRPr lang="en-US"/>
+          </a:p>
+        </p:txBody>
+      </p:sp>
+      <p:sp>
+        <p:nvSpPr>
+          <p:cNvPr id="5" name="Footer Placeholder 4"/>
+          <p:cNvSpPr>
+            <a:spLocks noGrp="1"/>
+          </p:cNvSpPr>
+          <p:nvPr>
+            <p:ph type="ftr" sz="quarter" idx="11"/>
+          </p:nvPr>
+        </p:nvSpPr>
+        <p:spPr/>
+        <p:txBody>
+          <a:bodyPr/>
+          <a:lstStyle/>
+          <a:p>
+            <a:endParaRPr lang="en-US"/>
+          </a:p>
+        </p:txBody>
+      </p:sp>
+      <p:sp>
+        <p:nvSpPr>
+          <p:cNvPr id="6" name="Slide Number Placeholder 5"/>
+          <p:cNvSpPr>
+            <a:spLocks noGrp="1"/>
+          </p:cNvSpPr>
+          <p:nvPr>
+            <p:ph type="sldNum" sz="quarter" idx="12"/>
+          </p:nvPr>
+        </p:nvSpPr>
+        <p:spPr/>
+        <p:txBody>
+          <a:bodyPr/>
+          <a:lstStyle/>
+          <a:p>
+            <a:fld id="{B6F15528-21DE-4FAA-801E-634DDDAF4B2B}" type="slidenum">
+              <a:rPr lang="en-US" smtClean="0"/>
+              <a:pPr/>
+              <a:t>‹#›</a:t>
+            </a:fld>
             <a:endParaRPr lang="en-US"/>
           </a:p>
         </p:txBody>
       </p:sp>
       <p:pic>
         <p:nvPicPr>
-          <p:cNvPr id="8" name="Picture 7" descr="Text&#10;&#10;Description automatically generated">
+          <p:cNvPr id="7" name="Picture 6" descr="Text&#10;&#10;Description automatically generated">
             <a:extLst>
               <a:ext uri="{FF2B5EF4-FFF2-40B4-BE49-F238E27FC236}">
-                <a16:creationId xmlns:a16="http://schemas.microsoft.com/office/drawing/2014/main" id="{FFB5B4B7-D13B-783E-5F1E-412BDC5D91CA}"/>
+                <a16:creationId xmlns:a16="http://schemas.microsoft.com/office/drawing/2014/main" id="{998FED43-5408-87D4-C6B6-D65F6384E528}"/>
               </a:ext>
             </a:extLst>
           </p:cNvPr>
@@ -2463,7 +2568,7 @@
     </p:spTree>
     <p:extLst>
       <p:ext uri="{BB962C8B-B14F-4D97-AF65-F5344CB8AC3E}">
-        <p14:creationId xmlns:p14="http://schemas.microsoft.com/office/powerpoint/2010/main" val="3711607115"/>
+        <p14:creationId xmlns:p14="http://schemas.microsoft.com/office/powerpoint/2010/main" val="654489662"/>
       </p:ext>
     </p:extLst>
   </p:cSld>
@@ -2477,8 +2582,8 @@
 </file>
 
 <file path=ppt/slideLayouts/slideLayout10.xml><?xml version="1.0" encoding="utf-8"?>
-<p:sldLayout xmlns:a="http://schemas.openxmlformats.org/drawingml/2006/main" xmlns:r="http://schemas.openxmlformats.org/officeDocument/2006/relationships" xmlns:p="http://schemas.openxmlformats.org/presentationml/2006/main" showMasterSp="0" type="picTx" preserve="1">
-  <p:cSld name="Picture with Caption">
+<p:sldLayout xmlns:a="http://schemas.openxmlformats.org/drawingml/2006/main" xmlns:r="http://schemas.openxmlformats.org/officeDocument/2006/relationships" xmlns:p="http://schemas.openxmlformats.org/presentationml/2006/main" type="vertTx" preserve="1">
+  <p:cSld name="Title and Vertical Text">
     <p:spTree>
       <p:nvGrpSpPr>
         <p:cNvPr id="1" name=""/>
@@ -2495,13 +2600,7 @@
       </p:grpSpPr>
       <p:sp>
         <p:nvSpPr>
-          <p:cNvPr id="2" name="Title 1">
-            <a:extLst>
-              <a:ext uri="{FF2B5EF4-FFF2-40B4-BE49-F238E27FC236}">
-                <a16:creationId xmlns:a16="http://schemas.microsoft.com/office/drawing/2014/main" id="{BDF0F6A3-1FA6-365B-EAE9-C97A97FA28EE}"/>
-              </a:ext>
-            </a:extLst>
-          </p:cNvPr>
+          <p:cNvPr id="2" name="Title 1"/>
           <p:cNvSpPr>
             <a:spLocks noGrp="1"/>
           </p:cNvSpPr>
@@ -2509,172 +2608,139 @@
             <p:ph type="title"/>
           </p:nvPr>
         </p:nvSpPr>
-        <p:spPr>
-          <a:xfrm>
-            <a:off x="839788" y="457200"/>
-            <a:ext cx="3932237" cy="1600200"/>
-          </a:xfrm>
-        </p:spPr>
+        <p:spPr/>
         <p:txBody>
-          <a:bodyPr anchor="b"/>
-          <a:lstStyle>
-            <a:lvl1pPr>
-              <a:defRPr sz="3200"/>
-            </a:lvl1pPr>
-          </a:lstStyle>
+          <a:bodyPr/>
+          <a:lstStyle/>
           <a:p>
             <a:r>
               <a:rPr lang="en-GB"/>
               <a:t>Click to edit Master title style</a:t>
             </a:r>
-            <a:endParaRPr lang="en-US"/>
+            <a:endParaRPr lang="en-IE"/>
           </a:p>
         </p:txBody>
       </p:sp>
       <p:sp>
         <p:nvSpPr>
-          <p:cNvPr id="3" name="Picture Placeholder 2">
-            <a:extLst>
-              <a:ext uri="{FF2B5EF4-FFF2-40B4-BE49-F238E27FC236}">
-                <a16:creationId xmlns:a16="http://schemas.microsoft.com/office/drawing/2014/main" id="{4BF0FE55-436B-BE4B-A625-5596F318B108}"/>
-              </a:ext>
-            </a:extLst>
-          </p:cNvPr>
+          <p:cNvPr id="3" name="Vertical Text Placeholder 2"/>
           <p:cNvSpPr>
             <a:spLocks noGrp="1"/>
           </p:cNvSpPr>
           <p:nvPr>
-            <p:ph type="pic" idx="1"/>
+            <p:ph type="body" orient="vert" idx="1"/>
           </p:nvPr>
         </p:nvSpPr>
-        <p:spPr>
-          <a:xfrm>
-            <a:off x="5183188" y="987426"/>
-            <a:ext cx="6172200" cy="4580618"/>
-          </a:xfrm>
-        </p:spPr>
+        <p:spPr/>
         <p:txBody>
-          <a:bodyPr/>
-          <a:lstStyle>
-            <a:lvl1pPr marL="0" indent="0">
-              <a:buNone/>
-              <a:defRPr sz="3200"/>
-            </a:lvl1pPr>
-            <a:lvl2pPr marL="457200" indent="0">
-              <a:buNone/>
-              <a:defRPr sz="2800"/>
-            </a:lvl2pPr>
-            <a:lvl3pPr marL="914400" indent="0">
-              <a:buNone/>
-              <a:defRPr sz="2400"/>
-            </a:lvl3pPr>
-            <a:lvl4pPr marL="1371600" indent="0">
-              <a:buNone/>
-              <a:defRPr sz="2000"/>
-            </a:lvl4pPr>
-            <a:lvl5pPr marL="1828800" indent="0">
-              <a:buNone/>
-              <a:defRPr sz="2000"/>
-            </a:lvl5pPr>
-            <a:lvl6pPr marL="2286000" indent="0">
-              <a:buNone/>
-              <a:defRPr sz="2000"/>
-            </a:lvl6pPr>
-            <a:lvl7pPr marL="2743200" indent="0">
-              <a:buNone/>
-              <a:defRPr sz="2000"/>
-            </a:lvl7pPr>
-            <a:lvl8pPr marL="3200400" indent="0">
-              <a:buNone/>
-              <a:defRPr sz="2000"/>
-            </a:lvl8pPr>
-            <a:lvl9pPr marL="3657600" indent="0">
-              <a:buNone/>
-              <a:defRPr sz="2000"/>
-            </a:lvl9pPr>
-          </a:lstStyle>
-          <a:p>
-            <a:endParaRPr lang="en-US"/>
+          <a:bodyPr vert="eaVert"/>
+          <a:lstStyle/>
+          <a:p>
+            <a:pPr lvl="0"/>
+            <a:r>
+              <a:rPr lang="en-GB"/>
+              <a:t>Click to edit Master text styles</a:t>
+            </a:r>
+          </a:p>
+          <a:p>
+            <a:pPr lvl="1"/>
+            <a:r>
+              <a:rPr lang="en-GB"/>
+              <a:t>Second level</a:t>
+            </a:r>
+          </a:p>
+          <a:p>
+            <a:pPr lvl="2"/>
+            <a:r>
+              <a:rPr lang="en-GB"/>
+              <a:t>Third level</a:t>
+            </a:r>
+          </a:p>
+          <a:p>
+            <a:pPr lvl="3"/>
+            <a:r>
+              <a:rPr lang="en-GB"/>
+              <a:t>Fourth level</a:t>
+            </a:r>
+          </a:p>
+          <a:p>
+            <a:pPr lvl="4"/>
+            <a:r>
+              <a:rPr lang="en-GB"/>
+              <a:t>Fifth level</a:t>
+            </a:r>
+            <a:endParaRPr lang="en-IE"/>
           </a:p>
         </p:txBody>
       </p:sp>
       <p:sp>
         <p:nvSpPr>
-          <p:cNvPr id="4" name="Text Placeholder 3">
-            <a:extLst>
-              <a:ext uri="{FF2B5EF4-FFF2-40B4-BE49-F238E27FC236}">
-                <a16:creationId xmlns:a16="http://schemas.microsoft.com/office/drawing/2014/main" id="{80E895F3-5234-BC3A-AA83-2EC6C8BFBED4}"/>
-              </a:ext>
-            </a:extLst>
-          </p:cNvPr>
+          <p:cNvPr id="4" name="Date Placeholder 3"/>
           <p:cNvSpPr>
             <a:spLocks noGrp="1"/>
           </p:cNvSpPr>
           <p:nvPr>
-            <p:ph type="body" sz="half" idx="2"/>
+            <p:ph type="dt" sz="half" idx="10"/>
           </p:nvPr>
         </p:nvSpPr>
-        <p:spPr>
-          <a:xfrm>
-            <a:off x="839788" y="2057400"/>
-            <a:ext cx="3932237" cy="3510643"/>
-          </a:xfrm>
-        </p:spPr>
+        <p:spPr/>
         <p:txBody>
           <a:bodyPr/>
-          <a:lstStyle>
-            <a:lvl1pPr marL="0" indent="0">
-              <a:buNone/>
-              <a:defRPr sz="1600"/>
-            </a:lvl1pPr>
-            <a:lvl2pPr marL="457200" indent="0">
-              <a:buNone/>
-              <a:defRPr sz="1400"/>
-            </a:lvl2pPr>
-            <a:lvl3pPr marL="914400" indent="0">
-              <a:buNone/>
-              <a:defRPr sz="1200"/>
-            </a:lvl3pPr>
-            <a:lvl4pPr marL="1371600" indent="0">
-              <a:buNone/>
-              <a:defRPr sz="1000"/>
-            </a:lvl4pPr>
-            <a:lvl5pPr marL="1828800" indent="0">
-              <a:buNone/>
-              <a:defRPr sz="1000"/>
-            </a:lvl5pPr>
-            <a:lvl6pPr marL="2286000" indent="0">
-              <a:buNone/>
-              <a:defRPr sz="1000"/>
-            </a:lvl6pPr>
-            <a:lvl7pPr marL="2743200" indent="0">
-              <a:buNone/>
-              <a:defRPr sz="1000"/>
-            </a:lvl7pPr>
-            <a:lvl8pPr marL="3200400" indent="0">
-              <a:buNone/>
-              <a:defRPr sz="1000"/>
-            </a:lvl8pPr>
-            <a:lvl9pPr marL="3657600" indent="0">
-              <a:buNone/>
-              <a:defRPr sz="1000"/>
-            </a:lvl9pPr>
-          </a:lstStyle>
-          <a:p>
-            <a:pPr lvl="0"/>
-            <a:r>
-              <a:rPr lang="en-GB"/>
-              <a:t>Click to edit Master text styles</a:t>
-            </a:r>
+          <a:lstStyle/>
+          <a:p>
+            <a:fld id="{1D8BD707-D9CF-40AE-B4C6-C98DA3205C09}" type="datetimeFigureOut">
+              <a:rPr lang="en-US" smtClean="0"/>
+              <a:pPr/>
+              <a:t>3/12/26</a:t>
+            </a:fld>
+            <a:endParaRPr lang="en-US"/>
           </a:p>
         </p:txBody>
       </p:sp>
       <p:sp>
         <p:nvSpPr>
-          <p:cNvPr id="8" name="Rectangle 7">
+          <p:cNvPr id="5" name="Footer Placeholder 4"/>
+          <p:cNvSpPr>
+            <a:spLocks noGrp="1"/>
+          </p:cNvSpPr>
+          <p:nvPr>
+            <p:ph type="ftr" sz="quarter" idx="11"/>
+          </p:nvPr>
+        </p:nvSpPr>
+        <p:spPr/>
+        <p:txBody>
+          <a:bodyPr/>
+          <a:lstStyle/>
+          <a:p>
+            <a:endParaRPr lang="en-US"/>
+          </a:p>
+        </p:txBody>
+      </p:sp>
+      <p:sp>
+        <p:nvSpPr>
+          <p:cNvPr id="6" name="Slide Number Placeholder 5"/>
+          <p:cNvSpPr>
+            <a:spLocks noGrp="1"/>
+          </p:cNvSpPr>
+          <p:nvPr>
+            <p:ph type="sldNum" sz="quarter" idx="12"/>
+          </p:nvPr>
+        </p:nvSpPr>
+        <p:spPr/>
+        <p:txBody>
+          <a:bodyPr/>
+          <a:lstStyle/>
+          <a:p>
+            <a:endParaRPr lang="en-US" dirty="0"/>
+          </a:p>
+        </p:txBody>
+      </p:sp>
+      <p:sp>
+        <p:nvSpPr>
+          <p:cNvPr id="7" name="Rectangle 6">
             <a:extLst>
               <a:ext uri="{FF2B5EF4-FFF2-40B4-BE49-F238E27FC236}">
-                <a16:creationId xmlns:a16="http://schemas.microsoft.com/office/drawing/2014/main" id="{554B8120-3457-7741-DD19-9CE4C0C22B4A}"/>
+                <a16:creationId xmlns:a16="http://schemas.microsoft.com/office/drawing/2014/main" id="{B2D8A923-EFCA-6EAE-9B2C-39D178828204}"/>
               </a:ext>
             </a:extLst>
           </p:cNvPr>
@@ -2720,10 +2786,10 @@
       </p:sp>
       <p:pic>
         <p:nvPicPr>
-          <p:cNvPr id="9" name="Picture 8" descr="Text&#10;&#10;Description automatically generated">
+          <p:cNvPr id="8" name="Picture 7" descr="Text&#10;&#10;Description automatically generated">
             <a:extLst>
               <a:ext uri="{FF2B5EF4-FFF2-40B4-BE49-F238E27FC236}">
-                <a16:creationId xmlns:a16="http://schemas.microsoft.com/office/drawing/2014/main" id="{70E58948-512F-FE8B-DC74-07D466B3C558}"/>
+                <a16:creationId xmlns:a16="http://schemas.microsoft.com/office/drawing/2014/main" id="{F01AB359-6666-5050-F710-2AA5C4959DD3}"/>
               </a:ext>
             </a:extLst>
           </p:cNvPr>
@@ -2750,10 +2816,10 @@
       </p:pic>
       <p:sp>
         <p:nvSpPr>
-          <p:cNvPr id="10" name="TextBox 9">
+          <p:cNvPr id="9" name="TextBox 8">
             <a:extLst>
               <a:ext uri="{FF2B5EF4-FFF2-40B4-BE49-F238E27FC236}">
-                <a16:creationId xmlns:a16="http://schemas.microsoft.com/office/drawing/2014/main" id="{8261E89E-CE00-6AFD-C38F-ED89F0C488AB}"/>
+                <a16:creationId xmlns:a16="http://schemas.microsoft.com/office/drawing/2014/main" id="{DED48E06-A1DF-912E-0082-4ACF52E6D028}"/>
               </a:ext>
             </a:extLst>
           </p:cNvPr>
@@ -2808,55 +2874,12 @@
           </a:p>
         </p:txBody>
       </p:sp>
-      <p:sp>
-        <p:nvSpPr>
-          <p:cNvPr id="11" name="Slide Number Placeholder 4">
+      <p:pic>
+        <p:nvPicPr>
+          <p:cNvPr id="10" name="Graphic 9">
             <a:extLst>
               <a:ext uri="{FF2B5EF4-FFF2-40B4-BE49-F238E27FC236}">
-                <a16:creationId xmlns:a16="http://schemas.microsoft.com/office/drawing/2014/main" id="{9115F357-D0A9-D2BE-D6C4-1DE4D5FB18EC}"/>
-              </a:ext>
-            </a:extLst>
-          </p:cNvPr>
-          <p:cNvSpPr>
-            <a:spLocks noGrp="1"/>
-          </p:cNvSpPr>
-          <p:nvPr>
-            <p:ph type="sldNum" sz="quarter" idx="12"/>
-          </p:nvPr>
-        </p:nvSpPr>
-        <p:spPr>
-          <a:xfrm>
-            <a:off x="4718957" y="6365301"/>
-            <a:ext cx="2743200" cy="365125"/>
-          </a:xfrm>
-          <a:prstGeom prst="rect">
-            <a:avLst/>
-          </a:prstGeom>
-        </p:spPr>
-        <p:txBody>
-          <a:bodyPr/>
-          <a:lstStyle>
-            <a:lvl1pPr algn="ctr">
-              <a:defRPr sz="1400">
-                <a:solidFill>
-                  <a:schemeClr val="bg1"/>
-                </a:solidFill>
-                <a:latin typeface="Inter" panose="02000503000000020004" pitchFamily="2" charset="0"/>
-                <a:ea typeface="Inter" panose="02000503000000020004" pitchFamily="2" charset="0"/>
-              </a:defRPr>
-            </a:lvl1pPr>
-          </a:lstStyle>
-          <a:p>
-            <a:endParaRPr lang="en-US" dirty="0"/>
-          </a:p>
-        </p:txBody>
-      </p:sp>
-      <p:pic>
-        <p:nvPicPr>
-          <p:cNvPr id="5" name="Graphic 4">
-            <a:extLst>
-              <a:ext uri="{FF2B5EF4-FFF2-40B4-BE49-F238E27FC236}">
-                <a16:creationId xmlns:a16="http://schemas.microsoft.com/office/drawing/2014/main" id="{A539925D-2713-A52D-751E-374F477B25EB}"/>
+                <a16:creationId xmlns:a16="http://schemas.microsoft.com/office/drawing/2014/main" id="{9F4C9ECA-345B-E887-5184-07DBFF32F956}"/>
               </a:ext>
             </a:extLst>
           </p:cNvPr>
@@ -2866,10 +2889,10 @@
           <p:nvPr userDrawn="1"/>
         </p:nvPicPr>
         <p:blipFill>
-          <a:blip r:embed="rId3">
+          <a:blip>
             <a:extLst>
               <a:ext uri="{96DAC541-7B7A-43D3-8B79-37D633B846F1}">
-                <asvg:svgBlip xmlns:asvg="http://schemas.microsoft.com/office/drawing/2016/SVG/main" r:embed="rId4"/>
+                <asvg:svgBlip xmlns:asvg="http://schemas.microsoft.com/office/drawing/2016/SVG/main" r:embed="rId3"/>
               </a:ext>
             </a:extLst>
           </a:blip>
@@ -2890,7 +2913,7 @@
     </p:spTree>
     <p:extLst>
       <p:ext uri="{BB962C8B-B14F-4D97-AF65-F5344CB8AC3E}">
-        <p14:creationId xmlns:p14="http://schemas.microsoft.com/office/powerpoint/2010/main" val="331285067"/>
+        <p14:creationId xmlns:p14="http://schemas.microsoft.com/office/powerpoint/2010/main" val="94789847"/>
       </p:ext>
     </p:extLst>
   </p:cSld>
@@ -2904,8 +2927,8 @@
 </file>
 
 <file path=ppt/slideLayouts/slideLayout11.xml><?xml version="1.0" encoding="utf-8"?>
-<p:sldLayout xmlns:a="http://schemas.openxmlformats.org/drawingml/2006/main" xmlns:r="http://schemas.openxmlformats.org/officeDocument/2006/relationships" xmlns:p="http://schemas.openxmlformats.org/presentationml/2006/main" showMasterSp="0" type="vertTx" preserve="1">
-  <p:cSld name="Title and Vertical Text">
+<p:sldLayout xmlns:a="http://schemas.openxmlformats.org/drawingml/2006/main" xmlns:r="http://schemas.openxmlformats.org/officeDocument/2006/relationships" xmlns:p="http://schemas.openxmlformats.org/presentationml/2006/main" type="vertTitleAndTx" preserve="1">
+  <p:cSld name="Vertical Title and Text">
     <p:spTree>
       <p:nvGrpSpPr>
         <p:cNvPr id="1" name=""/>
@@ -2922,42 +2945,35 @@
       </p:grpSpPr>
       <p:sp>
         <p:nvSpPr>
-          <p:cNvPr id="2" name="Title 1">
-            <a:extLst>
-              <a:ext uri="{FF2B5EF4-FFF2-40B4-BE49-F238E27FC236}">
-                <a16:creationId xmlns:a16="http://schemas.microsoft.com/office/drawing/2014/main" id="{8286E7A3-2933-9A9D-1B68-1C4E7E0E0AF5}"/>
-              </a:ext>
-            </a:extLst>
-          </p:cNvPr>
+          <p:cNvPr id="2" name="Vertical Title 1"/>
           <p:cNvSpPr>
             <a:spLocks noGrp="1"/>
           </p:cNvSpPr>
           <p:nvPr>
-            <p:ph type="title"/>
+            <p:ph type="title" orient="vert"/>
           </p:nvPr>
         </p:nvSpPr>
-        <p:spPr/>
+        <p:spPr>
+          <a:xfrm>
+            <a:off x="8839200" y="274639"/>
+            <a:ext cx="2743200" cy="5851525"/>
+          </a:xfrm>
+        </p:spPr>
         <p:txBody>
-          <a:bodyPr/>
+          <a:bodyPr vert="eaVert"/>
           <a:lstStyle/>
           <a:p>
             <a:r>
               <a:rPr lang="en-GB"/>
               <a:t>Click to edit Master title style</a:t>
             </a:r>
-            <a:endParaRPr lang="en-US"/>
+            <a:endParaRPr lang="en-IE"/>
           </a:p>
         </p:txBody>
       </p:sp>
       <p:sp>
         <p:nvSpPr>
-          <p:cNvPr id="3" name="Vertical Text Placeholder 2">
-            <a:extLst>
-              <a:ext uri="{FF2B5EF4-FFF2-40B4-BE49-F238E27FC236}">
-                <a16:creationId xmlns:a16="http://schemas.microsoft.com/office/drawing/2014/main" id="{4C0D318C-66EC-4B7A-FD04-653E50045DC1}"/>
-              </a:ext>
-            </a:extLst>
-          </p:cNvPr>
+          <p:cNvPr id="3" name="Vertical Text Placeholder 2"/>
           <p:cNvSpPr>
             <a:spLocks noGrp="1"/>
           </p:cNvSpPr>
@@ -2965,7 +2981,12 @@
             <p:ph type="body" orient="vert" idx="1"/>
           </p:nvPr>
         </p:nvSpPr>
-        <p:spPr/>
+        <p:spPr>
+          <a:xfrm>
+            <a:off x="609600" y="274639"/>
+            <a:ext cx="8026400" cy="5851525"/>
+          </a:xfrm>
+        </p:spPr>
         <p:txBody>
           <a:bodyPr vert="eaVert"/>
           <a:lstStyle/>
@@ -3003,7 +3024,69 @@
               <a:rPr lang="en-GB"/>
               <a:t>Fifth level</a:t>
             </a:r>
+            <a:endParaRPr lang="en-IE"/>
+          </a:p>
+        </p:txBody>
+      </p:sp>
+      <p:sp>
+        <p:nvSpPr>
+          <p:cNvPr id="4" name="Date Placeholder 3"/>
+          <p:cNvSpPr>
+            <a:spLocks noGrp="1"/>
+          </p:cNvSpPr>
+          <p:nvPr>
+            <p:ph type="dt" sz="half" idx="10"/>
+          </p:nvPr>
+        </p:nvSpPr>
+        <p:spPr/>
+        <p:txBody>
+          <a:bodyPr/>
+          <a:lstStyle/>
+          <a:p>
+            <a:fld id="{1D8BD707-D9CF-40AE-B4C6-C98DA3205C09}" type="datetimeFigureOut">
+              <a:rPr lang="en-US" smtClean="0"/>
+              <a:pPr/>
+              <a:t>3/12/26</a:t>
+            </a:fld>
             <a:endParaRPr lang="en-US"/>
+          </a:p>
+        </p:txBody>
+      </p:sp>
+      <p:sp>
+        <p:nvSpPr>
+          <p:cNvPr id="5" name="Footer Placeholder 4"/>
+          <p:cNvSpPr>
+            <a:spLocks noGrp="1"/>
+          </p:cNvSpPr>
+          <p:nvPr>
+            <p:ph type="ftr" sz="quarter" idx="11"/>
+          </p:nvPr>
+        </p:nvSpPr>
+        <p:spPr/>
+        <p:txBody>
+          <a:bodyPr/>
+          <a:lstStyle/>
+          <a:p>
+            <a:endParaRPr lang="en-US"/>
+          </a:p>
+        </p:txBody>
+      </p:sp>
+      <p:sp>
+        <p:nvSpPr>
+          <p:cNvPr id="6" name="Slide Number Placeholder 5"/>
+          <p:cNvSpPr>
+            <a:spLocks noGrp="1"/>
+          </p:cNvSpPr>
+          <p:nvPr>
+            <p:ph type="sldNum" sz="quarter" idx="12"/>
+          </p:nvPr>
+        </p:nvSpPr>
+        <p:spPr/>
+        <p:txBody>
+          <a:bodyPr/>
+          <a:lstStyle/>
+          <a:p>
+            <a:endParaRPr lang="en-US" dirty="0"/>
           </a:p>
         </p:txBody>
       </p:sp>
@@ -3012,7 +3095,7 @@
           <p:cNvPr id="7" name="Rectangle 6">
             <a:extLst>
               <a:ext uri="{FF2B5EF4-FFF2-40B4-BE49-F238E27FC236}">
-                <a16:creationId xmlns:a16="http://schemas.microsoft.com/office/drawing/2014/main" id="{4BB3A924-D1C2-80FA-9A28-1F83C8252CD7}"/>
+                <a16:creationId xmlns:a16="http://schemas.microsoft.com/office/drawing/2014/main" id="{69D308D4-6ED0-088E-FA06-7B24935BBE1E}"/>
               </a:ext>
             </a:extLst>
           </p:cNvPr>
@@ -3061,7 +3144,7 @@
           <p:cNvPr id="8" name="Picture 7" descr="Text&#10;&#10;Description automatically generated">
             <a:extLst>
               <a:ext uri="{FF2B5EF4-FFF2-40B4-BE49-F238E27FC236}">
-                <a16:creationId xmlns:a16="http://schemas.microsoft.com/office/drawing/2014/main" id="{A8580AF9-B3B8-8FCD-D5F6-72F55C10E548}"/>
+                <a16:creationId xmlns:a16="http://schemas.microsoft.com/office/drawing/2014/main" id="{51A4228B-708D-E9D1-4FF2-B6F5FFD3E39B}"/>
               </a:ext>
             </a:extLst>
           </p:cNvPr>
@@ -3091,7 +3174,7 @@
           <p:cNvPr id="9" name="TextBox 8">
             <a:extLst>
               <a:ext uri="{FF2B5EF4-FFF2-40B4-BE49-F238E27FC236}">
-                <a16:creationId xmlns:a16="http://schemas.microsoft.com/office/drawing/2014/main" id="{768DA9D1-70B7-518A-1D12-6840DCAE9DB6}"/>
+                <a16:creationId xmlns:a16="http://schemas.microsoft.com/office/drawing/2014/main" id="{6AAAEFEA-CF5E-B8F1-89E0-3CA496AC081E}"/>
               </a:ext>
             </a:extLst>
           </p:cNvPr>
@@ -3146,55 +3229,12 @@
           </a:p>
         </p:txBody>
       </p:sp>
-      <p:sp>
-        <p:nvSpPr>
-          <p:cNvPr id="10" name="Slide Number Placeholder 4">
+      <p:pic>
+        <p:nvPicPr>
+          <p:cNvPr id="10" name="Graphic 9">
             <a:extLst>
               <a:ext uri="{FF2B5EF4-FFF2-40B4-BE49-F238E27FC236}">
-                <a16:creationId xmlns:a16="http://schemas.microsoft.com/office/drawing/2014/main" id="{820A38DC-2F95-7186-592B-18167E2BCC5D}"/>
-              </a:ext>
-            </a:extLst>
-          </p:cNvPr>
-          <p:cNvSpPr>
-            <a:spLocks noGrp="1"/>
-          </p:cNvSpPr>
-          <p:nvPr>
-            <p:ph type="sldNum" sz="quarter" idx="12"/>
-          </p:nvPr>
-        </p:nvSpPr>
-        <p:spPr>
-          <a:xfrm>
-            <a:off x="4718957" y="6365301"/>
-            <a:ext cx="2743200" cy="365125"/>
-          </a:xfrm>
-          <a:prstGeom prst="rect">
-            <a:avLst/>
-          </a:prstGeom>
-        </p:spPr>
-        <p:txBody>
-          <a:bodyPr/>
-          <a:lstStyle>
-            <a:lvl1pPr algn="ctr">
-              <a:defRPr sz="1400">
-                <a:solidFill>
-                  <a:schemeClr val="bg1"/>
-                </a:solidFill>
-                <a:latin typeface="Inter" panose="02000503000000020004" pitchFamily="2" charset="0"/>
-                <a:ea typeface="Inter" panose="02000503000000020004" pitchFamily="2" charset="0"/>
-              </a:defRPr>
-            </a:lvl1pPr>
-          </a:lstStyle>
-          <a:p>
-            <a:endParaRPr lang="en-US" dirty="0"/>
-          </a:p>
-        </p:txBody>
-      </p:sp>
-      <p:pic>
-        <p:nvPicPr>
-          <p:cNvPr id="4" name="Graphic 3">
-            <a:extLst>
-              <a:ext uri="{FF2B5EF4-FFF2-40B4-BE49-F238E27FC236}">
-                <a16:creationId xmlns:a16="http://schemas.microsoft.com/office/drawing/2014/main" id="{0369CF7F-4015-09B0-0671-F93589D2D936}"/>
+                <a16:creationId xmlns:a16="http://schemas.microsoft.com/office/drawing/2014/main" id="{91A84C97-6604-F6EC-9E09-42DE163CD37F}"/>
               </a:ext>
             </a:extLst>
           </p:cNvPr>
@@ -3204,358 +3244,10 @@
           <p:nvPr userDrawn="1"/>
         </p:nvPicPr>
         <p:blipFill>
-          <a:blip r:embed="rId3">
+          <a:blip>
             <a:extLst>
               <a:ext uri="{96DAC541-7B7A-43D3-8B79-37D633B846F1}">
-                <asvg:svgBlip xmlns:asvg="http://schemas.microsoft.com/office/drawing/2016/SVG/main" r:embed="rId4"/>
-              </a:ext>
-            </a:extLst>
-          </a:blip>
-          <a:stretch>
-            <a:fillRect/>
-          </a:stretch>
-        </p:blipFill>
-        <p:spPr>
-          <a:xfrm>
-            <a:off x="9203245" y="6176176"/>
-            <a:ext cx="1120090" cy="603766"/>
-          </a:xfrm>
-          <a:prstGeom prst="rect">
-            <a:avLst/>
-          </a:prstGeom>
-        </p:spPr>
-      </p:pic>
-    </p:spTree>
-    <p:extLst>
-      <p:ext uri="{BB962C8B-B14F-4D97-AF65-F5344CB8AC3E}">
-        <p14:creationId xmlns:p14="http://schemas.microsoft.com/office/powerpoint/2010/main" val="1913234116"/>
-      </p:ext>
-    </p:extLst>
-  </p:cSld>
-  <p:clrMapOvr>
-    <a:masterClrMapping/>
-  </p:clrMapOvr>
-  <p:transition spd="slow">
-    <p:push dir="u"/>
-  </p:transition>
-</p:sldLayout>
-</file>
-
-<file path=ppt/slideLayouts/slideLayout12.xml><?xml version="1.0" encoding="utf-8"?>
-<p:sldLayout xmlns:a="http://schemas.openxmlformats.org/drawingml/2006/main" xmlns:r="http://schemas.openxmlformats.org/officeDocument/2006/relationships" xmlns:p="http://schemas.openxmlformats.org/presentationml/2006/main" showMasterSp="0" type="vertTitleAndTx" preserve="1">
-  <p:cSld name="Vertical Title and Text">
-    <p:spTree>
-      <p:nvGrpSpPr>
-        <p:cNvPr id="1" name=""/>
-        <p:cNvGrpSpPr/>
-        <p:nvPr/>
-      </p:nvGrpSpPr>
-      <p:grpSpPr>
-        <a:xfrm>
-          <a:off x="0" y="0"/>
-          <a:ext cx="0" cy="0"/>
-          <a:chOff x="0" y="0"/>
-          <a:chExt cx="0" cy="0"/>
-        </a:xfrm>
-      </p:grpSpPr>
-      <p:sp>
-        <p:nvSpPr>
-          <p:cNvPr id="2" name="Vertical Title 1">
-            <a:extLst>
-              <a:ext uri="{FF2B5EF4-FFF2-40B4-BE49-F238E27FC236}">
-                <a16:creationId xmlns:a16="http://schemas.microsoft.com/office/drawing/2014/main" id="{DC05D519-5C13-B1DA-C03B-E55280B89625}"/>
-              </a:ext>
-            </a:extLst>
-          </p:cNvPr>
-          <p:cNvSpPr>
-            <a:spLocks noGrp="1"/>
-          </p:cNvSpPr>
-          <p:nvPr>
-            <p:ph type="title" orient="vert"/>
-          </p:nvPr>
-        </p:nvSpPr>
-        <p:spPr>
-          <a:xfrm>
-            <a:off x="8724900" y="365125"/>
-            <a:ext cx="2628900" cy="5382532"/>
-          </a:xfrm>
-        </p:spPr>
-        <p:txBody>
-          <a:bodyPr vert="eaVert"/>
-          <a:lstStyle/>
-          <a:p>
-            <a:r>
-              <a:rPr lang="en-GB"/>
-              <a:t>Click to edit Master title style</a:t>
-            </a:r>
-            <a:endParaRPr lang="en-US"/>
-          </a:p>
-        </p:txBody>
-      </p:sp>
-      <p:sp>
-        <p:nvSpPr>
-          <p:cNvPr id="3" name="Vertical Text Placeholder 2">
-            <a:extLst>
-              <a:ext uri="{FF2B5EF4-FFF2-40B4-BE49-F238E27FC236}">
-                <a16:creationId xmlns:a16="http://schemas.microsoft.com/office/drawing/2014/main" id="{ED5BE02F-1224-E3C9-A8BB-96F822DB8925}"/>
-              </a:ext>
-            </a:extLst>
-          </p:cNvPr>
-          <p:cNvSpPr>
-            <a:spLocks noGrp="1"/>
-          </p:cNvSpPr>
-          <p:nvPr>
-            <p:ph type="body" orient="vert" idx="1"/>
-          </p:nvPr>
-        </p:nvSpPr>
-        <p:spPr>
-          <a:xfrm>
-            <a:off x="838200" y="365125"/>
-            <a:ext cx="7734300" cy="5382532"/>
-          </a:xfrm>
-        </p:spPr>
-        <p:txBody>
-          <a:bodyPr vert="eaVert"/>
-          <a:lstStyle/>
-          <a:p>
-            <a:pPr lvl="0"/>
-            <a:r>
-              <a:rPr lang="en-GB"/>
-              <a:t>Click to edit Master text styles</a:t>
-            </a:r>
-          </a:p>
-          <a:p>
-            <a:pPr lvl="1"/>
-            <a:r>
-              <a:rPr lang="en-GB"/>
-              <a:t>Second level</a:t>
-            </a:r>
-          </a:p>
-          <a:p>
-            <a:pPr lvl="2"/>
-            <a:r>
-              <a:rPr lang="en-GB"/>
-              <a:t>Third level</a:t>
-            </a:r>
-          </a:p>
-          <a:p>
-            <a:pPr lvl="3"/>
-            <a:r>
-              <a:rPr lang="en-GB"/>
-              <a:t>Fourth level</a:t>
-            </a:r>
-          </a:p>
-          <a:p>
-            <a:pPr lvl="4"/>
-            <a:r>
-              <a:rPr lang="en-GB"/>
-              <a:t>Fifth level</a:t>
-            </a:r>
-            <a:endParaRPr lang="en-US"/>
-          </a:p>
-        </p:txBody>
-      </p:sp>
-      <p:sp>
-        <p:nvSpPr>
-          <p:cNvPr id="7" name="Rectangle 6">
-            <a:extLst>
-              <a:ext uri="{FF2B5EF4-FFF2-40B4-BE49-F238E27FC236}">
-                <a16:creationId xmlns:a16="http://schemas.microsoft.com/office/drawing/2014/main" id="{8C4E5451-8045-E9BC-4D1D-8CF1DD1B3874}"/>
-              </a:ext>
-            </a:extLst>
-          </p:cNvPr>
-          <p:cNvSpPr/>
-          <p:nvPr userDrawn="1"/>
-        </p:nvSpPr>
-        <p:spPr>
-          <a:xfrm>
-            <a:off x="-440871" y="6104965"/>
-            <a:ext cx="13062857" cy="885799"/>
-          </a:xfrm>
-          <a:prstGeom prst="rect">
-            <a:avLst/>
-          </a:prstGeom>
-          <a:solidFill>
-            <a:srgbClr val="435765"/>
-          </a:solidFill>
-        </p:spPr>
-        <p:style>
-          <a:lnRef idx="2">
-            <a:schemeClr val="accent1">
-              <a:shade val="50000"/>
-            </a:schemeClr>
-          </a:lnRef>
-          <a:fillRef idx="1">
-            <a:schemeClr val="accent1"/>
-          </a:fillRef>
-          <a:effectRef idx="0">
-            <a:schemeClr val="accent1"/>
-          </a:effectRef>
-          <a:fontRef idx="minor">
-            <a:schemeClr val="lt1"/>
-          </a:fontRef>
-        </p:style>
-        <p:txBody>
-          <a:bodyPr rtlCol="0" anchor="ctr"/>
-          <a:lstStyle/>
-          <a:p>
-            <a:pPr algn="ctr"/>
-            <a:endParaRPr lang="en-US"/>
-          </a:p>
-        </p:txBody>
-      </p:sp>
-      <p:pic>
-        <p:nvPicPr>
-          <p:cNvPr id="8" name="Picture 7" descr="Text&#10;&#10;Description automatically generated">
-            <a:extLst>
-              <a:ext uri="{FF2B5EF4-FFF2-40B4-BE49-F238E27FC236}">
-                <a16:creationId xmlns:a16="http://schemas.microsoft.com/office/drawing/2014/main" id="{3581C137-70E6-F86A-90ED-817935AD6A86}"/>
-              </a:ext>
-            </a:extLst>
-          </p:cNvPr>
-          <p:cNvPicPr>
-            <a:picLocks noChangeAspect="1"/>
-          </p:cNvPicPr>
-          <p:nvPr userDrawn="1"/>
-        </p:nvPicPr>
-        <p:blipFill>
-          <a:blip r:embed="rId2"/>
-          <a:stretch>
-            <a:fillRect/>
-          </a:stretch>
-        </p:blipFill>
-        <p:spPr>
-          <a:xfrm>
-            <a:off x="10467415" y="6013271"/>
-            <a:ext cx="1743635" cy="977493"/>
-          </a:xfrm>
-          <a:prstGeom prst="rect">
-            <a:avLst/>
-          </a:prstGeom>
-        </p:spPr>
-      </p:pic>
-      <p:sp>
-        <p:nvSpPr>
-          <p:cNvPr id="9" name="TextBox 8">
-            <a:extLst>
-              <a:ext uri="{FF2B5EF4-FFF2-40B4-BE49-F238E27FC236}">
-                <a16:creationId xmlns:a16="http://schemas.microsoft.com/office/drawing/2014/main" id="{1E7DE500-850E-C45D-5905-16C7BED700DC}"/>
-              </a:ext>
-            </a:extLst>
-          </p:cNvPr>
-          <p:cNvSpPr txBox="1"/>
-          <p:nvPr userDrawn="1"/>
-        </p:nvSpPr>
-        <p:spPr>
-          <a:xfrm>
-            <a:off x="259216" y="6209629"/>
-            <a:ext cx="2132315" cy="584775"/>
-          </a:xfrm>
-          <a:prstGeom prst="rect">
-            <a:avLst/>
-          </a:prstGeom>
-          <a:noFill/>
-        </p:spPr>
-        <p:txBody>
-          <a:bodyPr wrap="none" rtlCol="0">
-            <a:spAutoFit/>
-          </a:bodyPr>
-          <a:lstStyle/>
-          <a:p>
-            <a:r>
-              <a:rPr lang="en-US" sz="1600" dirty="0">
-                <a:solidFill>
-                  <a:srgbClr val="FCCA3A"/>
-                </a:solidFill>
-                <a:latin typeface="Inter Medium" panose="02000503000000020004" pitchFamily="2" charset="0"/>
-                <a:ea typeface="Inter Medium" panose="02000503000000020004" pitchFamily="2" charset="0"/>
-              </a:rPr>
-              <a:t>Dave Hearne</a:t>
-            </a:r>
-          </a:p>
-          <a:p>
-            <a:r>
-              <a:rPr lang="en-US" sz="1600" dirty="0" err="1">
-                <a:solidFill>
-                  <a:srgbClr val="FCCA3A"/>
-                </a:solidFill>
-                <a:latin typeface="Inter Medium" panose="02000503000000020004" pitchFamily="2" charset="0"/>
-                <a:ea typeface="Inter Medium" panose="02000503000000020004" pitchFamily="2" charset="0"/>
-              </a:rPr>
-              <a:t>dave.hearne@wit.ie</a:t>
-            </a:r>
-            <a:endParaRPr lang="en-US" sz="1600" dirty="0">
-              <a:solidFill>
-                <a:srgbClr val="FCCA3A"/>
-              </a:solidFill>
-              <a:latin typeface="Inter Medium" panose="02000503000000020004" pitchFamily="2" charset="0"/>
-              <a:ea typeface="Inter Medium" panose="02000503000000020004" pitchFamily="2" charset="0"/>
-            </a:endParaRPr>
-          </a:p>
-        </p:txBody>
-      </p:sp>
-      <p:sp>
-        <p:nvSpPr>
-          <p:cNvPr id="10" name="Slide Number Placeholder 4">
-            <a:extLst>
-              <a:ext uri="{FF2B5EF4-FFF2-40B4-BE49-F238E27FC236}">
-                <a16:creationId xmlns:a16="http://schemas.microsoft.com/office/drawing/2014/main" id="{C638537D-9021-8EF8-E16B-C1CF5CF9867F}"/>
-              </a:ext>
-            </a:extLst>
-          </p:cNvPr>
-          <p:cNvSpPr>
-            <a:spLocks noGrp="1"/>
-          </p:cNvSpPr>
-          <p:nvPr>
-            <p:ph type="sldNum" sz="quarter" idx="12"/>
-          </p:nvPr>
-        </p:nvSpPr>
-        <p:spPr>
-          <a:xfrm>
-            <a:off x="4718957" y="6365301"/>
-            <a:ext cx="2743200" cy="365125"/>
-          </a:xfrm>
-          <a:prstGeom prst="rect">
-            <a:avLst/>
-          </a:prstGeom>
-        </p:spPr>
-        <p:txBody>
-          <a:bodyPr/>
-          <a:lstStyle>
-            <a:lvl1pPr algn="ctr">
-              <a:defRPr sz="1400">
-                <a:solidFill>
-                  <a:schemeClr val="bg1"/>
-                </a:solidFill>
-                <a:latin typeface="Inter" panose="02000503000000020004" pitchFamily="2" charset="0"/>
-                <a:ea typeface="Inter" panose="02000503000000020004" pitchFamily="2" charset="0"/>
-              </a:defRPr>
-            </a:lvl1pPr>
-          </a:lstStyle>
-          <a:p>
-            <a:endParaRPr lang="en-US" dirty="0"/>
-          </a:p>
-        </p:txBody>
-      </p:sp>
-      <p:pic>
-        <p:nvPicPr>
-          <p:cNvPr id="4" name="Graphic 3">
-            <a:extLst>
-              <a:ext uri="{FF2B5EF4-FFF2-40B4-BE49-F238E27FC236}">
-                <a16:creationId xmlns:a16="http://schemas.microsoft.com/office/drawing/2014/main" id="{CE01E724-D140-6BA0-9EC5-95685A2B7813}"/>
-              </a:ext>
-            </a:extLst>
-          </p:cNvPr>
-          <p:cNvPicPr>
-            <a:picLocks noChangeAspect="1"/>
-          </p:cNvPicPr>
-          <p:nvPr userDrawn="1"/>
-        </p:nvPicPr>
-        <p:blipFill>
-          <a:blip r:embed="rId3">
-            <a:extLst>
-              <a:ext uri="{96DAC541-7B7A-43D3-8B79-37D633B846F1}">
-                <asvg:svgBlip xmlns:asvg="http://schemas.microsoft.com/office/drawing/2016/SVG/main" r:embed="rId4"/>
+                <asvg:svgBlip xmlns:asvg="http://schemas.microsoft.com/office/drawing/2016/SVG/main" r:embed="rId3"/>
               </a:ext>
             </a:extLst>
           </a:blip>
@@ -3576,7 +3268,7 @@
     </p:spTree>
     <p:extLst>
       <p:ext uri="{BB962C8B-B14F-4D97-AF65-F5344CB8AC3E}">
-        <p14:creationId xmlns:p14="http://schemas.microsoft.com/office/powerpoint/2010/main" val="2473898839"/>
+        <p14:creationId xmlns:p14="http://schemas.microsoft.com/office/powerpoint/2010/main" val="3282572487"/>
       </p:ext>
     </p:extLst>
   </p:cSld>
@@ -3589,2038 +3281,9 @@
 </p:sldLayout>
 </file>
 
-<file path=ppt/slideLayouts/slideLayout2.xml><?xml version="1.0" encoding="utf-8"?>
-<p:sldLayout xmlns:a="http://schemas.openxmlformats.org/drawingml/2006/main" xmlns:r="http://schemas.openxmlformats.org/officeDocument/2006/relationships" xmlns:p="http://schemas.openxmlformats.org/presentationml/2006/main" showMasterSp="0" type="obj" preserve="1">
-  <p:cSld name="Title and Content">
-    <p:spTree>
-      <p:nvGrpSpPr>
-        <p:cNvPr id="1" name=""/>
-        <p:cNvGrpSpPr/>
-        <p:nvPr/>
-      </p:nvGrpSpPr>
-      <p:grpSpPr>
-        <a:xfrm>
-          <a:off x="0" y="0"/>
-          <a:ext cx="0" cy="0"/>
-          <a:chOff x="0" y="0"/>
-          <a:chExt cx="0" cy="0"/>
-        </a:xfrm>
-      </p:grpSpPr>
-      <p:sp>
-        <p:nvSpPr>
-          <p:cNvPr id="2" name="Title 1">
-            <a:extLst>
-              <a:ext uri="{FF2B5EF4-FFF2-40B4-BE49-F238E27FC236}">
-                <a16:creationId xmlns:a16="http://schemas.microsoft.com/office/drawing/2014/main" id="{FE83661B-17E5-AEB4-5039-12B9E644B067}"/>
-              </a:ext>
-            </a:extLst>
-          </p:cNvPr>
-          <p:cNvSpPr>
-            <a:spLocks noGrp="1"/>
-          </p:cNvSpPr>
-          <p:nvPr>
-            <p:ph type="title"/>
-          </p:nvPr>
-        </p:nvSpPr>
-        <p:spPr/>
-        <p:txBody>
-          <a:bodyPr/>
-          <a:lstStyle/>
-          <a:p>
-            <a:r>
-              <a:rPr lang="en-GB"/>
-              <a:t>Click to edit Master title style</a:t>
-            </a:r>
-            <a:endParaRPr lang="en-US"/>
-          </a:p>
-        </p:txBody>
-      </p:sp>
-      <p:sp>
-        <p:nvSpPr>
-          <p:cNvPr id="3" name="Content Placeholder 2">
-            <a:extLst>
-              <a:ext uri="{FF2B5EF4-FFF2-40B4-BE49-F238E27FC236}">
-                <a16:creationId xmlns:a16="http://schemas.microsoft.com/office/drawing/2014/main" id="{01E5D0D1-C408-E0A1-E29C-6EC06180378D}"/>
-              </a:ext>
-            </a:extLst>
-          </p:cNvPr>
-          <p:cNvSpPr>
-            <a:spLocks noGrp="1"/>
-          </p:cNvSpPr>
-          <p:nvPr>
-            <p:ph idx="1"/>
-          </p:nvPr>
-        </p:nvSpPr>
-        <p:spPr>
-          <a:xfrm>
-            <a:off x="838200" y="1825625"/>
-            <a:ext cx="10515600" cy="3546475"/>
-          </a:xfrm>
-        </p:spPr>
-        <p:txBody>
-          <a:bodyPr/>
-          <a:lstStyle>
-            <a:lvl1pPr>
-              <a:lnSpc>
-                <a:spcPct val="150000"/>
-              </a:lnSpc>
-              <a:defRPr/>
-            </a:lvl1pPr>
-            <a:lvl2pPr>
-              <a:lnSpc>
-                <a:spcPct val="150000"/>
-              </a:lnSpc>
-              <a:defRPr/>
-            </a:lvl2pPr>
-            <a:lvl3pPr>
-              <a:lnSpc>
-                <a:spcPct val="150000"/>
-              </a:lnSpc>
-              <a:defRPr/>
-            </a:lvl3pPr>
-            <a:lvl4pPr>
-              <a:lnSpc>
-                <a:spcPct val="150000"/>
-              </a:lnSpc>
-              <a:defRPr/>
-            </a:lvl4pPr>
-            <a:lvl5pPr>
-              <a:lnSpc>
-                <a:spcPct val="150000"/>
-              </a:lnSpc>
-              <a:defRPr/>
-            </a:lvl5pPr>
-          </a:lstStyle>
-          <a:p>
-            <a:pPr lvl="0"/>
-            <a:r>
-              <a:rPr lang="en-GB" dirty="0"/>
-              <a:t>Click to edit Master text styles</a:t>
-            </a:r>
-          </a:p>
-          <a:p>
-            <a:pPr lvl="1"/>
-            <a:r>
-              <a:rPr lang="en-GB" dirty="0"/>
-              <a:t>Second level</a:t>
-            </a:r>
-          </a:p>
-          <a:p>
-            <a:pPr lvl="2"/>
-            <a:r>
-              <a:rPr lang="en-GB" dirty="0"/>
-              <a:t>Third level</a:t>
-            </a:r>
-          </a:p>
-          <a:p>
-            <a:pPr lvl="3"/>
-            <a:r>
-              <a:rPr lang="en-GB" dirty="0"/>
-              <a:t>Fourth level</a:t>
-            </a:r>
-          </a:p>
-          <a:p>
-            <a:pPr lvl="4"/>
-            <a:r>
-              <a:rPr lang="en-GB" dirty="0"/>
-              <a:t>Fifth level</a:t>
-            </a:r>
-            <a:endParaRPr lang="en-US" dirty="0"/>
-          </a:p>
-        </p:txBody>
-      </p:sp>
-      <p:sp>
-        <p:nvSpPr>
-          <p:cNvPr id="7" name="Rectangle 6">
-            <a:extLst>
-              <a:ext uri="{FF2B5EF4-FFF2-40B4-BE49-F238E27FC236}">
-                <a16:creationId xmlns:a16="http://schemas.microsoft.com/office/drawing/2014/main" id="{3D547124-F0EB-380D-6A94-29423FE38752}"/>
-              </a:ext>
-            </a:extLst>
-          </p:cNvPr>
-          <p:cNvSpPr/>
-          <p:nvPr userDrawn="1"/>
-        </p:nvSpPr>
-        <p:spPr>
-          <a:xfrm>
-            <a:off x="-440871" y="6104965"/>
-            <a:ext cx="13062857" cy="885799"/>
-          </a:xfrm>
-          <a:prstGeom prst="rect">
-            <a:avLst/>
-          </a:prstGeom>
-          <a:solidFill>
-            <a:srgbClr val="435765"/>
-          </a:solidFill>
-        </p:spPr>
-        <p:style>
-          <a:lnRef idx="2">
-            <a:schemeClr val="accent1">
-              <a:shade val="50000"/>
-            </a:schemeClr>
-          </a:lnRef>
-          <a:fillRef idx="1">
-            <a:schemeClr val="accent1"/>
-          </a:fillRef>
-          <a:effectRef idx="0">
-            <a:schemeClr val="accent1"/>
-          </a:effectRef>
-          <a:fontRef idx="minor">
-            <a:schemeClr val="lt1"/>
-          </a:fontRef>
-        </p:style>
-        <p:txBody>
-          <a:bodyPr rtlCol="0" anchor="ctr"/>
-          <a:lstStyle/>
-          <a:p>
-            <a:pPr algn="ctr"/>
-            <a:endParaRPr lang="en-US"/>
-          </a:p>
-        </p:txBody>
-      </p:sp>
-      <p:pic>
-        <p:nvPicPr>
-          <p:cNvPr id="8" name="Picture 7" descr="Text&#10;&#10;Description automatically generated">
-            <a:extLst>
-              <a:ext uri="{FF2B5EF4-FFF2-40B4-BE49-F238E27FC236}">
-                <a16:creationId xmlns:a16="http://schemas.microsoft.com/office/drawing/2014/main" id="{EAC70C1C-2BF7-2D24-0C1A-5761BAA46369}"/>
-              </a:ext>
-            </a:extLst>
-          </p:cNvPr>
-          <p:cNvPicPr>
-            <a:picLocks noChangeAspect="1"/>
-          </p:cNvPicPr>
-          <p:nvPr userDrawn="1"/>
-        </p:nvPicPr>
-        <p:blipFill>
-          <a:blip r:embed="rId2"/>
-          <a:stretch>
-            <a:fillRect/>
-          </a:stretch>
-        </p:blipFill>
-        <p:spPr>
-          <a:xfrm>
-            <a:off x="10467415" y="6013271"/>
-            <a:ext cx="1743635" cy="977493"/>
-          </a:xfrm>
-          <a:prstGeom prst="rect">
-            <a:avLst/>
-          </a:prstGeom>
-        </p:spPr>
-      </p:pic>
-      <p:sp>
-        <p:nvSpPr>
-          <p:cNvPr id="9" name="TextBox 8">
-            <a:extLst>
-              <a:ext uri="{FF2B5EF4-FFF2-40B4-BE49-F238E27FC236}">
-                <a16:creationId xmlns:a16="http://schemas.microsoft.com/office/drawing/2014/main" id="{4CFB1B1F-BD41-EF6A-29B6-DFF0CE207B39}"/>
-              </a:ext>
-            </a:extLst>
-          </p:cNvPr>
-          <p:cNvSpPr txBox="1"/>
-          <p:nvPr userDrawn="1"/>
-        </p:nvSpPr>
-        <p:spPr>
-          <a:xfrm>
-            <a:off x="259216" y="6209629"/>
-            <a:ext cx="2132315" cy="584775"/>
-          </a:xfrm>
-          <a:prstGeom prst="rect">
-            <a:avLst/>
-          </a:prstGeom>
-          <a:noFill/>
-        </p:spPr>
-        <p:txBody>
-          <a:bodyPr wrap="none" rtlCol="0">
-            <a:spAutoFit/>
-          </a:bodyPr>
-          <a:lstStyle/>
-          <a:p>
-            <a:r>
-              <a:rPr lang="en-US" sz="1600" dirty="0">
-                <a:solidFill>
-                  <a:srgbClr val="FCCA3A"/>
-                </a:solidFill>
-                <a:latin typeface="Inter Medium" panose="02000503000000020004" pitchFamily="2" charset="0"/>
-                <a:ea typeface="Inter Medium" panose="02000503000000020004" pitchFamily="2" charset="0"/>
-              </a:rPr>
-              <a:t>Dave Hearne</a:t>
-            </a:r>
-          </a:p>
-          <a:p>
-            <a:r>
-              <a:rPr lang="en-US" sz="1600" dirty="0" err="1">
-                <a:solidFill>
-                  <a:srgbClr val="FCCA3A"/>
-                </a:solidFill>
-                <a:latin typeface="Inter Medium" panose="02000503000000020004" pitchFamily="2" charset="0"/>
-                <a:ea typeface="Inter Medium" panose="02000503000000020004" pitchFamily="2" charset="0"/>
-              </a:rPr>
-              <a:t>dave.hearne@wit.ie</a:t>
-            </a:r>
-            <a:endParaRPr lang="en-US" sz="1600" dirty="0">
-              <a:solidFill>
-                <a:srgbClr val="FCCA3A"/>
-              </a:solidFill>
-              <a:latin typeface="Inter Medium" panose="02000503000000020004" pitchFamily="2" charset="0"/>
-              <a:ea typeface="Inter Medium" panose="02000503000000020004" pitchFamily="2" charset="0"/>
-            </a:endParaRPr>
-          </a:p>
-        </p:txBody>
-      </p:sp>
-      <p:sp>
-        <p:nvSpPr>
-          <p:cNvPr id="10" name="Slide Number Placeholder 4">
-            <a:extLst>
-              <a:ext uri="{FF2B5EF4-FFF2-40B4-BE49-F238E27FC236}">
-                <a16:creationId xmlns:a16="http://schemas.microsoft.com/office/drawing/2014/main" id="{4D162732-2B8A-90F2-EB70-67F0CC6CE5FE}"/>
-              </a:ext>
-            </a:extLst>
-          </p:cNvPr>
-          <p:cNvSpPr>
-            <a:spLocks noGrp="1"/>
-          </p:cNvSpPr>
-          <p:nvPr>
-            <p:ph type="sldNum" sz="quarter" idx="12"/>
-          </p:nvPr>
-        </p:nvSpPr>
-        <p:spPr>
-          <a:xfrm>
-            <a:off x="4718957" y="6365301"/>
-            <a:ext cx="2743200" cy="365125"/>
-          </a:xfrm>
-          <a:prstGeom prst="rect">
-            <a:avLst/>
-          </a:prstGeom>
-        </p:spPr>
-        <p:txBody>
-          <a:bodyPr/>
-          <a:lstStyle>
-            <a:lvl1pPr algn="ctr">
-              <a:defRPr sz="1400">
-                <a:solidFill>
-                  <a:schemeClr val="bg1"/>
-                </a:solidFill>
-                <a:latin typeface="Inter" panose="02000503000000020004" pitchFamily="2" charset="0"/>
-                <a:ea typeface="Inter" panose="02000503000000020004" pitchFamily="2" charset="0"/>
-              </a:defRPr>
-            </a:lvl1pPr>
-          </a:lstStyle>
-          <a:p>
-            <a:endParaRPr lang="en-US" dirty="0"/>
-          </a:p>
-        </p:txBody>
-      </p:sp>
-      <p:pic>
-        <p:nvPicPr>
-          <p:cNvPr id="4" name="Graphic 3">
-            <a:extLst>
-              <a:ext uri="{FF2B5EF4-FFF2-40B4-BE49-F238E27FC236}">
-                <a16:creationId xmlns:a16="http://schemas.microsoft.com/office/drawing/2014/main" id="{27706159-FD7A-7A51-FEE5-D8D445CD1DEA}"/>
-              </a:ext>
-            </a:extLst>
-          </p:cNvPr>
-          <p:cNvPicPr>
-            <a:picLocks noChangeAspect="1"/>
-          </p:cNvPicPr>
-          <p:nvPr userDrawn="1"/>
-        </p:nvPicPr>
-        <p:blipFill>
-          <a:blip r:embed="rId3">
-            <a:extLst>
-              <a:ext uri="{96DAC541-7B7A-43D3-8B79-37D633B846F1}">
-                <asvg:svgBlip xmlns:asvg="http://schemas.microsoft.com/office/drawing/2016/SVG/main" r:embed="rId4"/>
-              </a:ext>
-            </a:extLst>
-          </a:blip>
-          <a:stretch>
-            <a:fillRect/>
-          </a:stretch>
-        </p:blipFill>
-        <p:spPr>
-          <a:xfrm>
-            <a:off x="9203245" y="6176176"/>
-            <a:ext cx="1120090" cy="603766"/>
-          </a:xfrm>
-          <a:prstGeom prst="rect">
-            <a:avLst/>
-          </a:prstGeom>
-        </p:spPr>
-      </p:pic>
-    </p:spTree>
-    <p:extLst>
-      <p:ext uri="{BB962C8B-B14F-4D97-AF65-F5344CB8AC3E}">
-        <p14:creationId xmlns:p14="http://schemas.microsoft.com/office/powerpoint/2010/main" val="1220090110"/>
-      </p:ext>
-    </p:extLst>
-  </p:cSld>
-  <p:clrMapOvr>
-    <a:masterClrMapping/>
-  </p:clrMapOvr>
-  <p:transition spd="slow">
-    <p:push dir="u"/>
-  </p:transition>
-</p:sldLayout>
-</file>
-
-<file path=ppt/slideLayouts/slideLayout3.xml><?xml version="1.0" encoding="utf-8"?>
-<p:sldLayout xmlns:a="http://schemas.openxmlformats.org/drawingml/2006/main" xmlns:r="http://schemas.openxmlformats.org/officeDocument/2006/relationships" xmlns:p="http://schemas.openxmlformats.org/presentationml/2006/main" showMasterSp="0" type="secHead" preserve="1">
-  <p:cSld name="Section Header">
-    <p:spTree>
-      <p:nvGrpSpPr>
-        <p:cNvPr id="1" name=""/>
-        <p:cNvGrpSpPr/>
-        <p:nvPr/>
-      </p:nvGrpSpPr>
-      <p:grpSpPr>
-        <a:xfrm>
-          <a:off x="0" y="0"/>
-          <a:ext cx="0" cy="0"/>
-          <a:chOff x="0" y="0"/>
-          <a:chExt cx="0" cy="0"/>
-        </a:xfrm>
-      </p:grpSpPr>
-      <p:sp>
-        <p:nvSpPr>
-          <p:cNvPr id="2" name="Title 1">
-            <a:extLst>
-              <a:ext uri="{FF2B5EF4-FFF2-40B4-BE49-F238E27FC236}">
-                <a16:creationId xmlns:a16="http://schemas.microsoft.com/office/drawing/2014/main" id="{FF97BE43-B9A7-BC93-E56F-486BC93A97CE}"/>
-              </a:ext>
-            </a:extLst>
-          </p:cNvPr>
-          <p:cNvSpPr>
-            <a:spLocks noGrp="1"/>
-          </p:cNvSpPr>
-          <p:nvPr>
-            <p:ph type="title"/>
-          </p:nvPr>
-        </p:nvSpPr>
-        <p:spPr>
-          <a:xfrm>
-            <a:off x="838200" y="127574"/>
-            <a:ext cx="10515600" cy="860425"/>
-          </a:xfrm>
-        </p:spPr>
-        <p:txBody>
-          <a:bodyPr anchor="b">
-            <a:normAutofit/>
-          </a:bodyPr>
-          <a:lstStyle>
-            <a:lvl1pPr>
-              <a:defRPr sz="4400"/>
-            </a:lvl1pPr>
-          </a:lstStyle>
-          <a:p>
-            <a:r>
-              <a:rPr lang="en-GB" dirty="0"/>
-              <a:t>Click to edit Master title style</a:t>
-            </a:r>
-            <a:endParaRPr lang="en-US" dirty="0"/>
-          </a:p>
-        </p:txBody>
-      </p:sp>
-      <p:sp>
-        <p:nvSpPr>
-          <p:cNvPr id="3" name="Text Placeholder 2">
-            <a:extLst>
-              <a:ext uri="{FF2B5EF4-FFF2-40B4-BE49-F238E27FC236}">
-                <a16:creationId xmlns:a16="http://schemas.microsoft.com/office/drawing/2014/main" id="{2CCDDD06-17FD-1299-4C21-B4BD9A733F9F}"/>
-              </a:ext>
-            </a:extLst>
-          </p:cNvPr>
-          <p:cNvSpPr>
-            <a:spLocks noGrp="1"/>
-          </p:cNvSpPr>
-          <p:nvPr>
-            <p:ph type="body" idx="1"/>
-          </p:nvPr>
-        </p:nvSpPr>
-        <p:spPr>
-          <a:xfrm>
-            <a:off x="838200" y="1248336"/>
-            <a:ext cx="10515600" cy="4253486"/>
-          </a:xfrm>
-        </p:spPr>
-        <p:txBody>
-          <a:bodyPr/>
-          <a:lstStyle>
-            <a:lvl1pPr marL="0" indent="0">
-              <a:buNone/>
-              <a:defRPr sz="2400">
-                <a:solidFill>
-                  <a:schemeClr val="tx1">
-                    <a:tint val="75000"/>
-                  </a:schemeClr>
-                </a:solidFill>
-              </a:defRPr>
-            </a:lvl1pPr>
-            <a:lvl2pPr marL="457200" indent="0">
-              <a:buNone/>
-              <a:defRPr sz="2000">
-                <a:solidFill>
-                  <a:schemeClr val="tx1">
-                    <a:tint val="75000"/>
-                  </a:schemeClr>
-                </a:solidFill>
-              </a:defRPr>
-            </a:lvl2pPr>
-            <a:lvl3pPr marL="914400" indent="0">
-              <a:buNone/>
-              <a:defRPr sz="1800">
-                <a:solidFill>
-                  <a:schemeClr val="tx1">
-                    <a:tint val="75000"/>
-                  </a:schemeClr>
-                </a:solidFill>
-              </a:defRPr>
-            </a:lvl3pPr>
-            <a:lvl4pPr marL="1371600" indent="0">
-              <a:buNone/>
-              <a:defRPr sz="1600">
-                <a:solidFill>
-                  <a:schemeClr val="tx1">
-                    <a:tint val="75000"/>
-                  </a:schemeClr>
-                </a:solidFill>
-              </a:defRPr>
-            </a:lvl4pPr>
-            <a:lvl5pPr marL="1828800" indent="0">
-              <a:buNone/>
-              <a:defRPr sz="1600">
-                <a:solidFill>
-                  <a:schemeClr val="tx1">
-                    <a:tint val="75000"/>
-                  </a:schemeClr>
-                </a:solidFill>
-              </a:defRPr>
-            </a:lvl5pPr>
-            <a:lvl6pPr marL="2286000" indent="0">
-              <a:buNone/>
-              <a:defRPr sz="1600">
-                <a:solidFill>
-                  <a:schemeClr val="tx1">
-                    <a:tint val="75000"/>
-                  </a:schemeClr>
-                </a:solidFill>
-              </a:defRPr>
-            </a:lvl6pPr>
-            <a:lvl7pPr marL="2743200" indent="0">
-              <a:buNone/>
-              <a:defRPr sz="1600">
-                <a:solidFill>
-                  <a:schemeClr val="tx1">
-                    <a:tint val="75000"/>
-                  </a:schemeClr>
-                </a:solidFill>
-              </a:defRPr>
-            </a:lvl7pPr>
-            <a:lvl8pPr marL="3200400" indent="0">
-              <a:buNone/>
-              <a:defRPr sz="1600">
-                <a:solidFill>
-                  <a:schemeClr val="tx1">
-                    <a:tint val="75000"/>
-                  </a:schemeClr>
-                </a:solidFill>
-              </a:defRPr>
-            </a:lvl8pPr>
-            <a:lvl9pPr marL="3657600" indent="0">
-              <a:buNone/>
-              <a:defRPr sz="1600">
-                <a:solidFill>
-                  <a:schemeClr val="tx1">
-                    <a:tint val="75000"/>
-                  </a:schemeClr>
-                </a:solidFill>
-              </a:defRPr>
-            </a:lvl9pPr>
-          </a:lstStyle>
-          <a:p>
-            <a:pPr lvl="0"/>
-            <a:r>
-              <a:rPr lang="en-GB" dirty="0"/>
-              <a:t>Click to edit Master text styles</a:t>
-            </a:r>
-          </a:p>
-        </p:txBody>
-      </p:sp>
-      <p:sp>
-        <p:nvSpPr>
-          <p:cNvPr id="7" name="Rectangle 6">
-            <a:extLst>
-              <a:ext uri="{FF2B5EF4-FFF2-40B4-BE49-F238E27FC236}">
-                <a16:creationId xmlns:a16="http://schemas.microsoft.com/office/drawing/2014/main" id="{7A2D0BB6-0690-69C2-7913-4E641FA5263B}"/>
-              </a:ext>
-            </a:extLst>
-          </p:cNvPr>
-          <p:cNvSpPr/>
-          <p:nvPr userDrawn="1"/>
-        </p:nvSpPr>
-        <p:spPr>
-          <a:xfrm>
-            <a:off x="-440871" y="6104965"/>
-            <a:ext cx="13062857" cy="885799"/>
-          </a:xfrm>
-          <a:prstGeom prst="rect">
-            <a:avLst/>
-          </a:prstGeom>
-          <a:solidFill>
-            <a:srgbClr val="435765"/>
-          </a:solidFill>
-        </p:spPr>
-        <p:style>
-          <a:lnRef idx="2">
-            <a:schemeClr val="accent1">
-              <a:shade val="50000"/>
-            </a:schemeClr>
-          </a:lnRef>
-          <a:fillRef idx="1">
-            <a:schemeClr val="accent1"/>
-          </a:fillRef>
-          <a:effectRef idx="0">
-            <a:schemeClr val="accent1"/>
-          </a:effectRef>
-          <a:fontRef idx="minor">
-            <a:schemeClr val="lt1"/>
-          </a:fontRef>
-        </p:style>
-        <p:txBody>
-          <a:bodyPr rtlCol="0" anchor="ctr"/>
-          <a:lstStyle/>
-          <a:p>
-            <a:pPr algn="ctr"/>
-            <a:endParaRPr lang="en-US"/>
-          </a:p>
-        </p:txBody>
-      </p:sp>
-      <p:pic>
-        <p:nvPicPr>
-          <p:cNvPr id="8" name="Picture 7" descr="Text&#10;&#10;Description automatically generated">
-            <a:extLst>
-              <a:ext uri="{FF2B5EF4-FFF2-40B4-BE49-F238E27FC236}">
-                <a16:creationId xmlns:a16="http://schemas.microsoft.com/office/drawing/2014/main" id="{4942315C-0F65-972F-774D-73078C31C3D0}"/>
-              </a:ext>
-            </a:extLst>
-          </p:cNvPr>
-          <p:cNvPicPr>
-            <a:picLocks noChangeAspect="1"/>
-          </p:cNvPicPr>
-          <p:nvPr userDrawn="1"/>
-        </p:nvPicPr>
-        <p:blipFill>
-          <a:blip r:embed="rId2"/>
-          <a:stretch>
-            <a:fillRect/>
-          </a:stretch>
-        </p:blipFill>
-        <p:spPr>
-          <a:xfrm>
-            <a:off x="10467415" y="6013271"/>
-            <a:ext cx="1743635" cy="977493"/>
-          </a:xfrm>
-          <a:prstGeom prst="rect">
-            <a:avLst/>
-          </a:prstGeom>
-        </p:spPr>
-      </p:pic>
-      <p:sp>
-        <p:nvSpPr>
-          <p:cNvPr id="9" name="TextBox 8">
-            <a:extLst>
-              <a:ext uri="{FF2B5EF4-FFF2-40B4-BE49-F238E27FC236}">
-                <a16:creationId xmlns:a16="http://schemas.microsoft.com/office/drawing/2014/main" id="{945D37C6-695B-A413-C7D8-CC729BE4A5E7}"/>
-              </a:ext>
-            </a:extLst>
-          </p:cNvPr>
-          <p:cNvSpPr txBox="1"/>
-          <p:nvPr userDrawn="1"/>
-        </p:nvSpPr>
-        <p:spPr>
-          <a:xfrm>
-            <a:off x="259216" y="6209629"/>
-            <a:ext cx="2132315" cy="584775"/>
-          </a:xfrm>
-          <a:prstGeom prst="rect">
-            <a:avLst/>
-          </a:prstGeom>
-          <a:noFill/>
-        </p:spPr>
-        <p:txBody>
-          <a:bodyPr wrap="none" rtlCol="0">
-            <a:spAutoFit/>
-          </a:bodyPr>
-          <a:lstStyle/>
-          <a:p>
-            <a:r>
-              <a:rPr lang="en-US" sz="1600" dirty="0">
-                <a:solidFill>
-                  <a:srgbClr val="FCCA3A"/>
-                </a:solidFill>
-                <a:latin typeface="Inter Medium" panose="02000503000000020004" pitchFamily="2" charset="0"/>
-                <a:ea typeface="Inter Medium" panose="02000503000000020004" pitchFamily="2" charset="0"/>
-              </a:rPr>
-              <a:t>Dave Hearne</a:t>
-            </a:r>
-          </a:p>
-          <a:p>
-            <a:r>
-              <a:rPr lang="en-US" sz="1600" dirty="0" err="1">
-                <a:solidFill>
-                  <a:srgbClr val="FCCA3A"/>
-                </a:solidFill>
-                <a:latin typeface="Inter Medium" panose="02000503000000020004" pitchFamily="2" charset="0"/>
-                <a:ea typeface="Inter Medium" panose="02000503000000020004" pitchFamily="2" charset="0"/>
-              </a:rPr>
-              <a:t>dave.hearne@wit.ie</a:t>
-            </a:r>
-            <a:endParaRPr lang="en-US" sz="1600" dirty="0">
-              <a:solidFill>
-                <a:srgbClr val="FCCA3A"/>
-              </a:solidFill>
-              <a:latin typeface="Inter Medium" panose="02000503000000020004" pitchFamily="2" charset="0"/>
-              <a:ea typeface="Inter Medium" panose="02000503000000020004" pitchFamily="2" charset="0"/>
-            </a:endParaRPr>
-          </a:p>
-        </p:txBody>
-      </p:sp>
-      <p:sp>
-        <p:nvSpPr>
-          <p:cNvPr id="10" name="Slide Number Placeholder 4">
-            <a:extLst>
-              <a:ext uri="{FF2B5EF4-FFF2-40B4-BE49-F238E27FC236}">
-                <a16:creationId xmlns:a16="http://schemas.microsoft.com/office/drawing/2014/main" id="{AF08D71D-633D-03D6-837B-2EC45E80E61A}"/>
-              </a:ext>
-            </a:extLst>
-          </p:cNvPr>
-          <p:cNvSpPr>
-            <a:spLocks noGrp="1"/>
-          </p:cNvSpPr>
-          <p:nvPr>
-            <p:ph type="sldNum" sz="quarter" idx="12"/>
-          </p:nvPr>
-        </p:nvSpPr>
-        <p:spPr>
-          <a:xfrm>
-            <a:off x="4718957" y="6365301"/>
-            <a:ext cx="2743200" cy="365125"/>
-          </a:xfrm>
-          <a:prstGeom prst="rect">
-            <a:avLst/>
-          </a:prstGeom>
-        </p:spPr>
-        <p:txBody>
-          <a:bodyPr/>
-          <a:lstStyle>
-            <a:lvl1pPr algn="ctr">
-              <a:defRPr sz="1400">
-                <a:solidFill>
-                  <a:schemeClr val="bg1"/>
-                </a:solidFill>
-                <a:latin typeface="Inter" panose="02000503000000020004" pitchFamily="2" charset="0"/>
-                <a:ea typeface="Inter" panose="02000503000000020004" pitchFamily="2" charset="0"/>
-              </a:defRPr>
-            </a:lvl1pPr>
-          </a:lstStyle>
-          <a:p>
-            <a:endParaRPr lang="en-US" dirty="0"/>
-          </a:p>
-        </p:txBody>
-      </p:sp>
-      <p:pic>
-        <p:nvPicPr>
-          <p:cNvPr id="4" name="Graphic 3">
-            <a:extLst>
-              <a:ext uri="{FF2B5EF4-FFF2-40B4-BE49-F238E27FC236}">
-                <a16:creationId xmlns:a16="http://schemas.microsoft.com/office/drawing/2014/main" id="{67F271E0-EC9F-70B2-AF3B-ED4F3927D4AD}"/>
-              </a:ext>
-            </a:extLst>
-          </p:cNvPr>
-          <p:cNvPicPr>
-            <a:picLocks noChangeAspect="1"/>
-          </p:cNvPicPr>
-          <p:nvPr userDrawn="1"/>
-        </p:nvPicPr>
-        <p:blipFill>
-          <a:blip r:embed="rId3">
-            <a:extLst>
-              <a:ext uri="{96DAC541-7B7A-43D3-8B79-37D633B846F1}">
-                <asvg:svgBlip xmlns:asvg="http://schemas.microsoft.com/office/drawing/2016/SVG/main" r:embed="rId4"/>
-              </a:ext>
-            </a:extLst>
-          </a:blip>
-          <a:stretch>
-            <a:fillRect/>
-          </a:stretch>
-        </p:blipFill>
-        <p:spPr>
-          <a:xfrm>
-            <a:off x="9203245" y="6176176"/>
-            <a:ext cx="1120090" cy="603766"/>
-          </a:xfrm>
-          <a:prstGeom prst="rect">
-            <a:avLst/>
-          </a:prstGeom>
-        </p:spPr>
-      </p:pic>
-    </p:spTree>
-    <p:extLst>
-      <p:ext uri="{BB962C8B-B14F-4D97-AF65-F5344CB8AC3E}">
-        <p14:creationId xmlns:p14="http://schemas.microsoft.com/office/powerpoint/2010/main" val="505842452"/>
-      </p:ext>
-    </p:extLst>
-  </p:cSld>
-  <p:clrMapOvr>
-    <a:masterClrMapping/>
-  </p:clrMapOvr>
-  <p:transition spd="slow">
-    <p:push dir="u"/>
-  </p:transition>
-</p:sldLayout>
-</file>
-
-<file path=ppt/slideLayouts/slideLayout4.xml><?xml version="1.0" encoding="utf-8"?>
-<p:sldLayout xmlns:a="http://schemas.openxmlformats.org/drawingml/2006/main" xmlns:r="http://schemas.openxmlformats.org/officeDocument/2006/relationships" xmlns:p="http://schemas.openxmlformats.org/presentationml/2006/main" showMasterSp="0" type="twoObj" preserve="1">
-  <p:cSld name="Two Content">
-    <p:spTree>
-      <p:nvGrpSpPr>
-        <p:cNvPr id="1" name=""/>
-        <p:cNvGrpSpPr/>
-        <p:nvPr/>
-      </p:nvGrpSpPr>
-      <p:grpSpPr>
-        <a:xfrm>
-          <a:off x="0" y="0"/>
-          <a:ext cx="0" cy="0"/>
-          <a:chOff x="0" y="0"/>
-          <a:chExt cx="0" cy="0"/>
-        </a:xfrm>
-      </p:grpSpPr>
-      <p:sp>
-        <p:nvSpPr>
-          <p:cNvPr id="2" name="Title 1">
-            <a:extLst>
-              <a:ext uri="{FF2B5EF4-FFF2-40B4-BE49-F238E27FC236}">
-                <a16:creationId xmlns:a16="http://schemas.microsoft.com/office/drawing/2014/main" id="{AC583A76-6FDB-3575-CC11-5859A712D735}"/>
-              </a:ext>
-            </a:extLst>
-          </p:cNvPr>
-          <p:cNvSpPr>
-            <a:spLocks noGrp="1"/>
-          </p:cNvSpPr>
-          <p:nvPr>
-            <p:ph type="title"/>
-          </p:nvPr>
-        </p:nvSpPr>
-        <p:spPr/>
-        <p:txBody>
-          <a:bodyPr/>
-          <a:lstStyle/>
-          <a:p>
-            <a:r>
-              <a:rPr lang="en-GB"/>
-              <a:t>Click to edit Master title style</a:t>
-            </a:r>
-            <a:endParaRPr lang="en-US"/>
-          </a:p>
-        </p:txBody>
-      </p:sp>
-      <p:sp>
-        <p:nvSpPr>
-          <p:cNvPr id="3" name="Content Placeholder 2">
-            <a:extLst>
-              <a:ext uri="{FF2B5EF4-FFF2-40B4-BE49-F238E27FC236}">
-                <a16:creationId xmlns:a16="http://schemas.microsoft.com/office/drawing/2014/main" id="{7C08481B-3779-5250-135C-D2B0AFD851A2}"/>
-              </a:ext>
-            </a:extLst>
-          </p:cNvPr>
-          <p:cNvSpPr>
-            <a:spLocks noGrp="1"/>
-          </p:cNvSpPr>
-          <p:nvPr>
-            <p:ph sz="half" idx="1"/>
-          </p:nvPr>
-        </p:nvSpPr>
-        <p:spPr>
-          <a:xfrm>
-            <a:off x="838200" y="1825625"/>
-            <a:ext cx="5181600" cy="3399518"/>
-          </a:xfrm>
-        </p:spPr>
-        <p:txBody>
-          <a:bodyPr/>
-          <a:lstStyle/>
-          <a:p>
-            <a:pPr lvl="0"/>
-            <a:r>
-              <a:rPr lang="en-GB"/>
-              <a:t>Click to edit Master text styles</a:t>
-            </a:r>
-          </a:p>
-          <a:p>
-            <a:pPr lvl="1"/>
-            <a:r>
-              <a:rPr lang="en-GB"/>
-              <a:t>Second level</a:t>
-            </a:r>
-          </a:p>
-          <a:p>
-            <a:pPr lvl="2"/>
-            <a:r>
-              <a:rPr lang="en-GB"/>
-              <a:t>Third level</a:t>
-            </a:r>
-          </a:p>
-          <a:p>
-            <a:pPr lvl="3"/>
-            <a:r>
-              <a:rPr lang="en-GB"/>
-              <a:t>Fourth level</a:t>
-            </a:r>
-          </a:p>
-          <a:p>
-            <a:pPr lvl="4"/>
-            <a:r>
-              <a:rPr lang="en-GB"/>
-              <a:t>Fifth level</a:t>
-            </a:r>
-            <a:endParaRPr lang="en-US"/>
-          </a:p>
-        </p:txBody>
-      </p:sp>
-      <p:sp>
-        <p:nvSpPr>
-          <p:cNvPr id="4" name="Content Placeholder 3">
-            <a:extLst>
-              <a:ext uri="{FF2B5EF4-FFF2-40B4-BE49-F238E27FC236}">
-                <a16:creationId xmlns:a16="http://schemas.microsoft.com/office/drawing/2014/main" id="{23150A12-6140-2CE2-EA49-754591148839}"/>
-              </a:ext>
-            </a:extLst>
-          </p:cNvPr>
-          <p:cNvSpPr>
-            <a:spLocks noGrp="1"/>
-          </p:cNvSpPr>
-          <p:nvPr>
-            <p:ph sz="half" idx="2"/>
-          </p:nvPr>
-        </p:nvSpPr>
-        <p:spPr>
-          <a:xfrm>
-            <a:off x="6172200" y="1825625"/>
-            <a:ext cx="5181600" cy="3399518"/>
-          </a:xfrm>
-        </p:spPr>
-        <p:txBody>
-          <a:bodyPr/>
-          <a:lstStyle/>
-          <a:p>
-            <a:pPr lvl="0"/>
-            <a:r>
-              <a:rPr lang="en-GB"/>
-              <a:t>Click to edit Master text styles</a:t>
-            </a:r>
-          </a:p>
-          <a:p>
-            <a:pPr lvl="1"/>
-            <a:r>
-              <a:rPr lang="en-GB"/>
-              <a:t>Second level</a:t>
-            </a:r>
-          </a:p>
-          <a:p>
-            <a:pPr lvl="2"/>
-            <a:r>
-              <a:rPr lang="en-GB"/>
-              <a:t>Third level</a:t>
-            </a:r>
-          </a:p>
-          <a:p>
-            <a:pPr lvl="3"/>
-            <a:r>
-              <a:rPr lang="en-GB"/>
-              <a:t>Fourth level</a:t>
-            </a:r>
-          </a:p>
-          <a:p>
-            <a:pPr lvl="4"/>
-            <a:r>
-              <a:rPr lang="en-GB"/>
-              <a:t>Fifth level</a:t>
-            </a:r>
-            <a:endParaRPr lang="en-US"/>
-          </a:p>
-        </p:txBody>
-      </p:sp>
-      <p:sp>
-        <p:nvSpPr>
-          <p:cNvPr id="8" name="Rectangle 7">
-            <a:extLst>
-              <a:ext uri="{FF2B5EF4-FFF2-40B4-BE49-F238E27FC236}">
-                <a16:creationId xmlns:a16="http://schemas.microsoft.com/office/drawing/2014/main" id="{39F03AFF-B4F8-FCBD-2728-065160B5E346}"/>
-              </a:ext>
-            </a:extLst>
-          </p:cNvPr>
-          <p:cNvSpPr/>
-          <p:nvPr userDrawn="1"/>
-        </p:nvSpPr>
-        <p:spPr>
-          <a:xfrm>
-            <a:off x="-440871" y="6104965"/>
-            <a:ext cx="13062857" cy="885799"/>
-          </a:xfrm>
-          <a:prstGeom prst="rect">
-            <a:avLst/>
-          </a:prstGeom>
-          <a:solidFill>
-            <a:srgbClr val="435765"/>
-          </a:solidFill>
-        </p:spPr>
-        <p:style>
-          <a:lnRef idx="2">
-            <a:schemeClr val="accent1">
-              <a:shade val="50000"/>
-            </a:schemeClr>
-          </a:lnRef>
-          <a:fillRef idx="1">
-            <a:schemeClr val="accent1"/>
-          </a:fillRef>
-          <a:effectRef idx="0">
-            <a:schemeClr val="accent1"/>
-          </a:effectRef>
-          <a:fontRef idx="minor">
-            <a:schemeClr val="lt1"/>
-          </a:fontRef>
-        </p:style>
-        <p:txBody>
-          <a:bodyPr rtlCol="0" anchor="ctr"/>
-          <a:lstStyle/>
-          <a:p>
-            <a:pPr algn="ctr"/>
-            <a:endParaRPr lang="en-US"/>
-          </a:p>
-        </p:txBody>
-      </p:sp>
-      <p:pic>
-        <p:nvPicPr>
-          <p:cNvPr id="9" name="Picture 8" descr="Text&#10;&#10;Description automatically generated">
-            <a:extLst>
-              <a:ext uri="{FF2B5EF4-FFF2-40B4-BE49-F238E27FC236}">
-                <a16:creationId xmlns:a16="http://schemas.microsoft.com/office/drawing/2014/main" id="{D13D03AA-0896-FE80-2DAE-DE4C27A47CDD}"/>
-              </a:ext>
-            </a:extLst>
-          </p:cNvPr>
-          <p:cNvPicPr>
-            <a:picLocks noChangeAspect="1"/>
-          </p:cNvPicPr>
-          <p:nvPr userDrawn="1"/>
-        </p:nvPicPr>
-        <p:blipFill>
-          <a:blip r:embed="rId2"/>
-          <a:stretch>
-            <a:fillRect/>
-          </a:stretch>
-        </p:blipFill>
-        <p:spPr>
-          <a:xfrm>
-            <a:off x="10467415" y="6013271"/>
-            <a:ext cx="1743635" cy="977493"/>
-          </a:xfrm>
-          <a:prstGeom prst="rect">
-            <a:avLst/>
-          </a:prstGeom>
-        </p:spPr>
-      </p:pic>
-      <p:sp>
-        <p:nvSpPr>
-          <p:cNvPr id="10" name="TextBox 9">
-            <a:extLst>
-              <a:ext uri="{FF2B5EF4-FFF2-40B4-BE49-F238E27FC236}">
-                <a16:creationId xmlns:a16="http://schemas.microsoft.com/office/drawing/2014/main" id="{3CA233C6-37BC-F82E-A892-76CA5AB4B7C5}"/>
-              </a:ext>
-            </a:extLst>
-          </p:cNvPr>
-          <p:cNvSpPr txBox="1"/>
-          <p:nvPr userDrawn="1"/>
-        </p:nvSpPr>
-        <p:spPr>
-          <a:xfrm>
-            <a:off x="259216" y="6209629"/>
-            <a:ext cx="2132315" cy="584775"/>
-          </a:xfrm>
-          <a:prstGeom prst="rect">
-            <a:avLst/>
-          </a:prstGeom>
-          <a:noFill/>
-        </p:spPr>
-        <p:txBody>
-          <a:bodyPr wrap="none" rtlCol="0">
-            <a:spAutoFit/>
-          </a:bodyPr>
-          <a:lstStyle/>
-          <a:p>
-            <a:r>
-              <a:rPr lang="en-US" sz="1600" dirty="0">
-                <a:solidFill>
-                  <a:srgbClr val="FCCA3A"/>
-                </a:solidFill>
-                <a:latin typeface="Inter Medium" panose="02000503000000020004" pitchFamily="2" charset="0"/>
-                <a:ea typeface="Inter Medium" panose="02000503000000020004" pitchFamily="2" charset="0"/>
-              </a:rPr>
-              <a:t>Dave Hearne</a:t>
-            </a:r>
-          </a:p>
-          <a:p>
-            <a:r>
-              <a:rPr lang="en-US" sz="1600" dirty="0" err="1">
-                <a:solidFill>
-                  <a:srgbClr val="FCCA3A"/>
-                </a:solidFill>
-                <a:latin typeface="Inter Medium" panose="02000503000000020004" pitchFamily="2" charset="0"/>
-                <a:ea typeface="Inter Medium" panose="02000503000000020004" pitchFamily="2" charset="0"/>
-              </a:rPr>
-              <a:t>dave.hearne@wit.ie</a:t>
-            </a:r>
-            <a:endParaRPr lang="en-US" sz="1600" dirty="0">
-              <a:solidFill>
-                <a:srgbClr val="FCCA3A"/>
-              </a:solidFill>
-              <a:latin typeface="Inter Medium" panose="02000503000000020004" pitchFamily="2" charset="0"/>
-              <a:ea typeface="Inter Medium" panose="02000503000000020004" pitchFamily="2" charset="0"/>
-            </a:endParaRPr>
-          </a:p>
-        </p:txBody>
-      </p:sp>
-      <p:sp>
-        <p:nvSpPr>
-          <p:cNvPr id="11" name="Slide Number Placeholder 4">
-            <a:extLst>
-              <a:ext uri="{FF2B5EF4-FFF2-40B4-BE49-F238E27FC236}">
-                <a16:creationId xmlns:a16="http://schemas.microsoft.com/office/drawing/2014/main" id="{F030FD0F-2DD6-2272-51EE-2BF33059EA06}"/>
-              </a:ext>
-            </a:extLst>
-          </p:cNvPr>
-          <p:cNvSpPr>
-            <a:spLocks noGrp="1"/>
-          </p:cNvSpPr>
-          <p:nvPr>
-            <p:ph type="sldNum" sz="quarter" idx="12"/>
-          </p:nvPr>
-        </p:nvSpPr>
-        <p:spPr>
-          <a:xfrm>
-            <a:off x="4718957" y="6365301"/>
-            <a:ext cx="2743200" cy="365125"/>
-          </a:xfrm>
-          <a:prstGeom prst="rect">
-            <a:avLst/>
-          </a:prstGeom>
-        </p:spPr>
-        <p:txBody>
-          <a:bodyPr/>
-          <a:lstStyle>
-            <a:lvl1pPr algn="ctr">
-              <a:defRPr sz="1400">
-                <a:solidFill>
-                  <a:schemeClr val="bg1"/>
-                </a:solidFill>
-                <a:latin typeface="Inter" panose="02000503000000020004" pitchFamily="2" charset="0"/>
-                <a:ea typeface="Inter" panose="02000503000000020004" pitchFamily="2" charset="0"/>
-              </a:defRPr>
-            </a:lvl1pPr>
-          </a:lstStyle>
-          <a:p>
-            <a:endParaRPr lang="en-US" dirty="0"/>
-          </a:p>
-        </p:txBody>
-      </p:sp>
-      <p:pic>
-        <p:nvPicPr>
-          <p:cNvPr id="5" name="Graphic 4">
-            <a:extLst>
-              <a:ext uri="{FF2B5EF4-FFF2-40B4-BE49-F238E27FC236}">
-                <a16:creationId xmlns:a16="http://schemas.microsoft.com/office/drawing/2014/main" id="{D88EF9FD-1D1E-7A85-9B87-8B09737419AB}"/>
-              </a:ext>
-            </a:extLst>
-          </p:cNvPr>
-          <p:cNvPicPr>
-            <a:picLocks noChangeAspect="1"/>
-          </p:cNvPicPr>
-          <p:nvPr userDrawn="1"/>
-        </p:nvPicPr>
-        <p:blipFill>
-          <a:blip r:embed="rId3">
-            <a:extLst>
-              <a:ext uri="{96DAC541-7B7A-43D3-8B79-37D633B846F1}">
-                <asvg:svgBlip xmlns:asvg="http://schemas.microsoft.com/office/drawing/2016/SVG/main" r:embed="rId4"/>
-              </a:ext>
-            </a:extLst>
-          </a:blip>
-          <a:stretch>
-            <a:fillRect/>
-          </a:stretch>
-        </p:blipFill>
-        <p:spPr>
-          <a:xfrm>
-            <a:off x="9203245" y="6176176"/>
-            <a:ext cx="1120090" cy="603766"/>
-          </a:xfrm>
-          <a:prstGeom prst="rect">
-            <a:avLst/>
-          </a:prstGeom>
-        </p:spPr>
-      </p:pic>
-    </p:spTree>
-    <p:extLst>
-      <p:ext uri="{BB962C8B-B14F-4D97-AF65-F5344CB8AC3E}">
-        <p14:creationId xmlns:p14="http://schemas.microsoft.com/office/powerpoint/2010/main" val="2297829845"/>
-      </p:ext>
-    </p:extLst>
-  </p:cSld>
-  <p:clrMapOvr>
-    <a:masterClrMapping/>
-  </p:clrMapOvr>
-  <p:transition spd="slow">
-    <p:push dir="u"/>
-  </p:transition>
-</p:sldLayout>
-</file>
-
-<file path=ppt/slideLayouts/slideLayout5.xml><?xml version="1.0" encoding="utf-8"?>
-<p:sldLayout xmlns:a="http://schemas.openxmlformats.org/drawingml/2006/main" xmlns:r="http://schemas.openxmlformats.org/officeDocument/2006/relationships" xmlns:p="http://schemas.openxmlformats.org/presentationml/2006/main" showMasterSp="0" type="twoTxTwoObj" preserve="1">
-  <p:cSld name="Comparison">
-    <p:spTree>
-      <p:nvGrpSpPr>
-        <p:cNvPr id="1" name=""/>
-        <p:cNvGrpSpPr/>
-        <p:nvPr/>
-      </p:nvGrpSpPr>
-      <p:grpSpPr>
-        <a:xfrm>
-          <a:off x="0" y="0"/>
-          <a:ext cx="0" cy="0"/>
-          <a:chOff x="0" y="0"/>
-          <a:chExt cx="0" cy="0"/>
-        </a:xfrm>
-      </p:grpSpPr>
-      <p:sp>
-        <p:nvSpPr>
-          <p:cNvPr id="2" name="Title 1">
-            <a:extLst>
-              <a:ext uri="{FF2B5EF4-FFF2-40B4-BE49-F238E27FC236}">
-                <a16:creationId xmlns:a16="http://schemas.microsoft.com/office/drawing/2014/main" id="{D13F1BAE-F1D1-9BFF-E81C-9EB6F7E29A72}"/>
-              </a:ext>
-            </a:extLst>
-          </p:cNvPr>
-          <p:cNvSpPr>
-            <a:spLocks noGrp="1"/>
-          </p:cNvSpPr>
-          <p:nvPr>
-            <p:ph type="title"/>
-          </p:nvPr>
-        </p:nvSpPr>
-        <p:spPr>
-          <a:xfrm>
-            <a:off x="839788" y="365125"/>
-            <a:ext cx="10515600" cy="1325563"/>
-          </a:xfrm>
-        </p:spPr>
-        <p:txBody>
-          <a:bodyPr/>
-          <a:lstStyle/>
-          <a:p>
-            <a:r>
-              <a:rPr lang="en-GB"/>
-              <a:t>Click to edit Master title style</a:t>
-            </a:r>
-            <a:endParaRPr lang="en-US"/>
-          </a:p>
-        </p:txBody>
-      </p:sp>
-      <p:sp>
-        <p:nvSpPr>
-          <p:cNvPr id="3" name="Text Placeholder 2">
-            <a:extLst>
-              <a:ext uri="{FF2B5EF4-FFF2-40B4-BE49-F238E27FC236}">
-                <a16:creationId xmlns:a16="http://schemas.microsoft.com/office/drawing/2014/main" id="{B1FDD2EF-5122-99B1-1482-73F47DCFB6D5}"/>
-              </a:ext>
-            </a:extLst>
-          </p:cNvPr>
-          <p:cNvSpPr>
-            <a:spLocks noGrp="1"/>
-          </p:cNvSpPr>
-          <p:nvPr>
-            <p:ph type="body" idx="1"/>
-          </p:nvPr>
-        </p:nvSpPr>
-        <p:spPr>
-          <a:xfrm>
-            <a:off x="839788" y="1681163"/>
-            <a:ext cx="5157787" cy="823912"/>
-          </a:xfrm>
-        </p:spPr>
-        <p:txBody>
-          <a:bodyPr anchor="b"/>
-          <a:lstStyle>
-            <a:lvl1pPr marL="0" indent="0">
-              <a:buNone/>
-              <a:defRPr sz="2400" b="1"/>
-            </a:lvl1pPr>
-            <a:lvl2pPr marL="457200" indent="0">
-              <a:buNone/>
-              <a:defRPr sz="2000" b="1"/>
-            </a:lvl2pPr>
-            <a:lvl3pPr marL="914400" indent="0">
-              <a:buNone/>
-              <a:defRPr sz="1800" b="1"/>
-            </a:lvl3pPr>
-            <a:lvl4pPr marL="1371600" indent="0">
-              <a:buNone/>
-              <a:defRPr sz="1600" b="1"/>
-            </a:lvl4pPr>
-            <a:lvl5pPr marL="1828800" indent="0">
-              <a:buNone/>
-              <a:defRPr sz="1600" b="1"/>
-            </a:lvl5pPr>
-            <a:lvl6pPr marL="2286000" indent="0">
-              <a:buNone/>
-              <a:defRPr sz="1600" b="1"/>
-            </a:lvl6pPr>
-            <a:lvl7pPr marL="2743200" indent="0">
-              <a:buNone/>
-              <a:defRPr sz="1600" b="1"/>
-            </a:lvl7pPr>
-            <a:lvl8pPr marL="3200400" indent="0">
-              <a:buNone/>
-              <a:defRPr sz="1600" b="1"/>
-            </a:lvl8pPr>
-            <a:lvl9pPr marL="3657600" indent="0">
-              <a:buNone/>
-              <a:defRPr sz="1600" b="1"/>
-            </a:lvl9pPr>
-          </a:lstStyle>
-          <a:p>
-            <a:pPr lvl="0"/>
-            <a:r>
-              <a:rPr lang="en-GB"/>
-              <a:t>Click to edit Master text styles</a:t>
-            </a:r>
-          </a:p>
-        </p:txBody>
-      </p:sp>
-      <p:sp>
-        <p:nvSpPr>
-          <p:cNvPr id="4" name="Content Placeholder 3">
-            <a:extLst>
-              <a:ext uri="{FF2B5EF4-FFF2-40B4-BE49-F238E27FC236}">
-                <a16:creationId xmlns:a16="http://schemas.microsoft.com/office/drawing/2014/main" id="{3B2AD250-B4A0-9994-DEFD-1003746CE2F4}"/>
-              </a:ext>
-            </a:extLst>
-          </p:cNvPr>
-          <p:cNvSpPr>
-            <a:spLocks noGrp="1"/>
-          </p:cNvSpPr>
-          <p:nvPr>
-            <p:ph sz="half" idx="2"/>
-          </p:nvPr>
-        </p:nvSpPr>
-        <p:spPr>
-          <a:xfrm>
-            <a:off x="839788" y="2505075"/>
-            <a:ext cx="5157787" cy="2867025"/>
-          </a:xfrm>
-        </p:spPr>
-        <p:txBody>
-          <a:bodyPr/>
-          <a:lstStyle/>
-          <a:p>
-            <a:pPr lvl="0"/>
-            <a:r>
-              <a:rPr lang="en-GB"/>
-              <a:t>Click to edit Master text styles</a:t>
-            </a:r>
-          </a:p>
-          <a:p>
-            <a:pPr lvl="1"/>
-            <a:r>
-              <a:rPr lang="en-GB"/>
-              <a:t>Second level</a:t>
-            </a:r>
-          </a:p>
-          <a:p>
-            <a:pPr lvl="2"/>
-            <a:r>
-              <a:rPr lang="en-GB"/>
-              <a:t>Third level</a:t>
-            </a:r>
-          </a:p>
-          <a:p>
-            <a:pPr lvl="3"/>
-            <a:r>
-              <a:rPr lang="en-GB"/>
-              <a:t>Fourth level</a:t>
-            </a:r>
-          </a:p>
-          <a:p>
-            <a:pPr lvl="4"/>
-            <a:r>
-              <a:rPr lang="en-GB"/>
-              <a:t>Fifth level</a:t>
-            </a:r>
-            <a:endParaRPr lang="en-US"/>
-          </a:p>
-        </p:txBody>
-      </p:sp>
-      <p:sp>
-        <p:nvSpPr>
-          <p:cNvPr id="5" name="Text Placeholder 4">
-            <a:extLst>
-              <a:ext uri="{FF2B5EF4-FFF2-40B4-BE49-F238E27FC236}">
-                <a16:creationId xmlns:a16="http://schemas.microsoft.com/office/drawing/2014/main" id="{EE033373-B31C-8067-F4C0-5D8722EE0D94}"/>
-              </a:ext>
-            </a:extLst>
-          </p:cNvPr>
-          <p:cNvSpPr>
-            <a:spLocks noGrp="1"/>
-          </p:cNvSpPr>
-          <p:nvPr>
-            <p:ph type="body" sz="quarter" idx="3"/>
-          </p:nvPr>
-        </p:nvSpPr>
-        <p:spPr>
-          <a:xfrm>
-            <a:off x="6172200" y="1681163"/>
-            <a:ext cx="5183188" cy="823912"/>
-          </a:xfrm>
-        </p:spPr>
-        <p:txBody>
-          <a:bodyPr anchor="b"/>
-          <a:lstStyle>
-            <a:lvl1pPr marL="0" indent="0">
-              <a:buNone/>
-              <a:defRPr sz="2400" b="1"/>
-            </a:lvl1pPr>
-            <a:lvl2pPr marL="457200" indent="0">
-              <a:buNone/>
-              <a:defRPr sz="2000" b="1"/>
-            </a:lvl2pPr>
-            <a:lvl3pPr marL="914400" indent="0">
-              <a:buNone/>
-              <a:defRPr sz="1800" b="1"/>
-            </a:lvl3pPr>
-            <a:lvl4pPr marL="1371600" indent="0">
-              <a:buNone/>
-              <a:defRPr sz="1600" b="1"/>
-            </a:lvl4pPr>
-            <a:lvl5pPr marL="1828800" indent="0">
-              <a:buNone/>
-              <a:defRPr sz="1600" b="1"/>
-            </a:lvl5pPr>
-            <a:lvl6pPr marL="2286000" indent="0">
-              <a:buNone/>
-              <a:defRPr sz="1600" b="1"/>
-            </a:lvl6pPr>
-            <a:lvl7pPr marL="2743200" indent="0">
-              <a:buNone/>
-              <a:defRPr sz="1600" b="1"/>
-            </a:lvl7pPr>
-            <a:lvl8pPr marL="3200400" indent="0">
-              <a:buNone/>
-              <a:defRPr sz="1600" b="1"/>
-            </a:lvl8pPr>
-            <a:lvl9pPr marL="3657600" indent="0">
-              <a:buNone/>
-              <a:defRPr sz="1600" b="1"/>
-            </a:lvl9pPr>
-          </a:lstStyle>
-          <a:p>
-            <a:pPr lvl="0"/>
-            <a:r>
-              <a:rPr lang="en-GB"/>
-              <a:t>Click to edit Master text styles</a:t>
-            </a:r>
-          </a:p>
-        </p:txBody>
-      </p:sp>
-      <p:sp>
-        <p:nvSpPr>
-          <p:cNvPr id="6" name="Content Placeholder 5">
-            <a:extLst>
-              <a:ext uri="{FF2B5EF4-FFF2-40B4-BE49-F238E27FC236}">
-                <a16:creationId xmlns:a16="http://schemas.microsoft.com/office/drawing/2014/main" id="{B5E033B8-3B84-5BAF-41E3-F01F70FD2E9D}"/>
-              </a:ext>
-            </a:extLst>
-          </p:cNvPr>
-          <p:cNvSpPr>
-            <a:spLocks noGrp="1"/>
-          </p:cNvSpPr>
-          <p:nvPr>
-            <p:ph sz="quarter" idx="4"/>
-          </p:nvPr>
-        </p:nvSpPr>
-        <p:spPr>
-          <a:xfrm>
-            <a:off x="6172200" y="2505075"/>
-            <a:ext cx="5183188" cy="2867025"/>
-          </a:xfrm>
-        </p:spPr>
-        <p:txBody>
-          <a:bodyPr/>
-          <a:lstStyle/>
-          <a:p>
-            <a:pPr lvl="0"/>
-            <a:r>
-              <a:rPr lang="en-GB"/>
-              <a:t>Click to edit Master text styles</a:t>
-            </a:r>
-          </a:p>
-          <a:p>
-            <a:pPr lvl="1"/>
-            <a:r>
-              <a:rPr lang="en-GB"/>
-              <a:t>Second level</a:t>
-            </a:r>
-          </a:p>
-          <a:p>
-            <a:pPr lvl="2"/>
-            <a:r>
-              <a:rPr lang="en-GB"/>
-              <a:t>Third level</a:t>
-            </a:r>
-          </a:p>
-          <a:p>
-            <a:pPr lvl="3"/>
-            <a:r>
-              <a:rPr lang="en-GB"/>
-              <a:t>Fourth level</a:t>
-            </a:r>
-          </a:p>
-          <a:p>
-            <a:pPr lvl="4"/>
-            <a:r>
-              <a:rPr lang="en-GB"/>
-              <a:t>Fifth level</a:t>
-            </a:r>
-            <a:endParaRPr lang="en-US"/>
-          </a:p>
-        </p:txBody>
-      </p:sp>
-      <p:sp>
-        <p:nvSpPr>
-          <p:cNvPr id="10" name="Rectangle 9">
-            <a:extLst>
-              <a:ext uri="{FF2B5EF4-FFF2-40B4-BE49-F238E27FC236}">
-                <a16:creationId xmlns:a16="http://schemas.microsoft.com/office/drawing/2014/main" id="{F4DBF12C-7C0A-66CC-800F-81E7C7511108}"/>
-              </a:ext>
-            </a:extLst>
-          </p:cNvPr>
-          <p:cNvSpPr/>
-          <p:nvPr userDrawn="1"/>
-        </p:nvSpPr>
-        <p:spPr>
-          <a:xfrm>
-            <a:off x="-440871" y="6104965"/>
-            <a:ext cx="13062857" cy="885799"/>
-          </a:xfrm>
-          <a:prstGeom prst="rect">
-            <a:avLst/>
-          </a:prstGeom>
-          <a:solidFill>
-            <a:srgbClr val="435765"/>
-          </a:solidFill>
-        </p:spPr>
-        <p:style>
-          <a:lnRef idx="2">
-            <a:schemeClr val="accent1">
-              <a:shade val="50000"/>
-            </a:schemeClr>
-          </a:lnRef>
-          <a:fillRef idx="1">
-            <a:schemeClr val="accent1"/>
-          </a:fillRef>
-          <a:effectRef idx="0">
-            <a:schemeClr val="accent1"/>
-          </a:effectRef>
-          <a:fontRef idx="minor">
-            <a:schemeClr val="lt1"/>
-          </a:fontRef>
-        </p:style>
-        <p:txBody>
-          <a:bodyPr rtlCol="0" anchor="ctr"/>
-          <a:lstStyle/>
-          <a:p>
-            <a:pPr algn="ctr"/>
-            <a:endParaRPr lang="en-US"/>
-          </a:p>
-        </p:txBody>
-      </p:sp>
-      <p:pic>
-        <p:nvPicPr>
-          <p:cNvPr id="11" name="Picture 10" descr="Text&#10;&#10;Description automatically generated">
-            <a:extLst>
-              <a:ext uri="{FF2B5EF4-FFF2-40B4-BE49-F238E27FC236}">
-                <a16:creationId xmlns:a16="http://schemas.microsoft.com/office/drawing/2014/main" id="{2A6757DB-F33F-B6B9-4AB7-673BFD0C04CF}"/>
-              </a:ext>
-            </a:extLst>
-          </p:cNvPr>
-          <p:cNvPicPr>
-            <a:picLocks noChangeAspect="1"/>
-          </p:cNvPicPr>
-          <p:nvPr userDrawn="1"/>
-        </p:nvPicPr>
-        <p:blipFill>
-          <a:blip r:embed="rId2"/>
-          <a:stretch>
-            <a:fillRect/>
-          </a:stretch>
-        </p:blipFill>
-        <p:spPr>
-          <a:xfrm>
-            <a:off x="10467415" y="6013271"/>
-            <a:ext cx="1743635" cy="977493"/>
-          </a:xfrm>
-          <a:prstGeom prst="rect">
-            <a:avLst/>
-          </a:prstGeom>
-        </p:spPr>
-      </p:pic>
-      <p:sp>
-        <p:nvSpPr>
-          <p:cNvPr id="12" name="TextBox 11">
-            <a:extLst>
-              <a:ext uri="{FF2B5EF4-FFF2-40B4-BE49-F238E27FC236}">
-                <a16:creationId xmlns:a16="http://schemas.microsoft.com/office/drawing/2014/main" id="{288376F0-4941-20F3-0634-CC3CA047EBEE}"/>
-              </a:ext>
-            </a:extLst>
-          </p:cNvPr>
-          <p:cNvSpPr txBox="1"/>
-          <p:nvPr userDrawn="1"/>
-        </p:nvSpPr>
-        <p:spPr>
-          <a:xfrm>
-            <a:off x="259216" y="6209629"/>
-            <a:ext cx="2132315" cy="584775"/>
-          </a:xfrm>
-          <a:prstGeom prst="rect">
-            <a:avLst/>
-          </a:prstGeom>
-          <a:noFill/>
-        </p:spPr>
-        <p:txBody>
-          <a:bodyPr wrap="none" rtlCol="0">
-            <a:spAutoFit/>
-          </a:bodyPr>
-          <a:lstStyle/>
-          <a:p>
-            <a:r>
-              <a:rPr lang="en-US" sz="1600" dirty="0">
-                <a:solidFill>
-                  <a:srgbClr val="FCCA3A"/>
-                </a:solidFill>
-                <a:latin typeface="Inter Medium" panose="02000503000000020004" pitchFamily="2" charset="0"/>
-                <a:ea typeface="Inter Medium" panose="02000503000000020004" pitchFamily="2" charset="0"/>
-              </a:rPr>
-              <a:t>Dave Hearne</a:t>
-            </a:r>
-          </a:p>
-          <a:p>
-            <a:r>
-              <a:rPr lang="en-US" sz="1600" dirty="0" err="1">
-                <a:solidFill>
-                  <a:srgbClr val="FCCA3A"/>
-                </a:solidFill>
-                <a:latin typeface="Inter Medium" panose="02000503000000020004" pitchFamily="2" charset="0"/>
-                <a:ea typeface="Inter Medium" panose="02000503000000020004" pitchFamily="2" charset="0"/>
-              </a:rPr>
-              <a:t>dave.hearne@wit.ie</a:t>
-            </a:r>
-            <a:endParaRPr lang="en-US" sz="1600" dirty="0">
-              <a:solidFill>
-                <a:srgbClr val="FCCA3A"/>
-              </a:solidFill>
-              <a:latin typeface="Inter Medium" panose="02000503000000020004" pitchFamily="2" charset="0"/>
-              <a:ea typeface="Inter Medium" panose="02000503000000020004" pitchFamily="2" charset="0"/>
-            </a:endParaRPr>
-          </a:p>
-        </p:txBody>
-      </p:sp>
-      <p:sp>
-        <p:nvSpPr>
-          <p:cNvPr id="13" name="Slide Number Placeholder 4">
-            <a:extLst>
-              <a:ext uri="{FF2B5EF4-FFF2-40B4-BE49-F238E27FC236}">
-                <a16:creationId xmlns:a16="http://schemas.microsoft.com/office/drawing/2014/main" id="{98434014-9B29-BB02-AFCC-26F5DD9D1E71}"/>
-              </a:ext>
-            </a:extLst>
-          </p:cNvPr>
-          <p:cNvSpPr>
-            <a:spLocks noGrp="1"/>
-          </p:cNvSpPr>
-          <p:nvPr>
-            <p:ph type="sldNum" sz="quarter" idx="12"/>
-          </p:nvPr>
-        </p:nvSpPr>
-        <p:spPr>
-          <a:xfrm>
-            <a:off x="4718957" y="6365301"/>
-            <a:ext cx="2743200" cy="365125"/>
-          </a:xfrm>
-          <a:prstGeom prst="rect">
-            <a:avLst/>
-          </a:prstGeom>
-        </p:spPr>
-        <p:txBody>
-          <a:bodyPr/>
-          <a:lstStyle>
-            <a:lvl1pPr algn="ctr">
-              <a:defRPr sz="1400">
-                <a:solidFill>
-                  <a:schemeClr val="bg1"/>
-                </a:solidFill>
-                <a:latin typeface="Inter" panose="02000503000000020004" pitchFamily="2" charset="0"/>
-                <a:ea typeface="Inter" panose="02000503000000020004" pitchFamily="2" charset="0"/>
-              </a:defRPr>
-            </a:lvl1pPr>
-          </a:lstStyle>
-          <a:p>
-            <a:endParaRPr lang="en-US" dirty="0"/>
-          </a:p>
-        </p:txBody>
-      </p:sp>
-      <p:pic>
-        <p:nvPicPr>
-          <p:cNvPr id="7" name="Graphic 6">
-            <a:extLst>
-              <a:ext uri="{FF2B5EF4-FFF2-40B4-BE49-F238E27FC236}">
-                <a16:creationId xmlns:a16="http://schemas.microsoft.com/office/drawing/2014/main" id="{4EA3A214-C271-27A6-1BA5-A7E92A0C4F80}"/>
-              </a:ext>
-            </a:extLst>
-          </p:cNvPr>
-          <p:cNvPicPr>
-            <a:picLocks noChangeAspect="1"/>
-          </p:cNvPicPr>
-          <p:nvPr userDrawn="1"/>
-        </p:nvPicPr>
-        <p:blipFill>
-          <a:blip r:embed="rId3">
-            <a:extLst>
-              <a:ext uri="{96DAC541-7B7A-43D3-8B79-37D633B846F1}">
-                <asvg:svgBlip xmlns:asvg="http://schemas.microsoft.com/office/drawing/2016/SVG/main" r:embed="rId4"/>
-              </a:ext>
-            </a:extLst>
-          </a:blip>
-          <a:stretch>
-            <a:fillRect/>
-          </a:stretch>
-        </p:blipFill>
-        <p:spPr>
-          <a:xfrm>
-            <a:off x="9203245" y="6176176"/>
-            <a:ext cx="1120090" cy="603766"/>
-          </a:xfrm>
-          <a:prstGeom prst="rect">
-            <a:avLst/>
-          </a:prstGeom>
-        </p:spPr>
-      </p:pic>
-    </p:spTree>
-    <p:extLst>
-      <p:ext uri="{BB962C8B-B14F-4D97-AF65-F5344CB8AC3E}">
-        <p14:creationId xmlns:p14="http://schemas.microsoft.com/office/powerpoint/2010/main" val="3578829577"/>
-      </p:ext>
-    </p:extLst>
-  </p:cSld>
-  <p:clrMapOvr>
-    <a:masterClrMapping/>
-  </p:clrMapOvr>
-  <p:transition spd="slow">
-    <p:push dir="u"/>
-  </p:transition>
-</p:sldLayout>
-</file>
-
-<file path=ppt/slideLayouts/slideLayout6.xml><?xml version="1.0" encoding="utf-8"?>
-<p:sldLayout xmlns:a="http://schemas.openxmlformats.org/drawingml/2006/main" xmlns:r="http://schemas.openxmlformats.org/officeDocument/2006/relationships" xmlns:p="http://schemas.openxmlformats.org/presentationml/2006/main" showMasterSp="0" type="titleOnly" preserve="1">
-  <p:cSld name="Title Only">
-    <p:spTree>
-      <p:nvGrpSpPr>
-        <p:cNvPr id="1" name=""/>
-        <p:cNvGrpSpPr/>
-        <p:nvPr/>
-      </p:nvGrpSpPr>
-      <p:grpSpPr>
-        <a:xfrm>
-          <a:off x="0" y="0"/>
-          <a:ext cx="0" cy="0"/>
-          <a:chOff x="0" y="0"/>
-          <a:chExt cx="0" cy="0"/>
-        </a:xfrm>
-      </p:grpSpPr>
-      <p:sp>
-        <p:nvSpPr>
-          <p:cNvPr id="6" name="Rectangle 5">
-            <a:extLst>
-              <a:ext uri="{FF2B5EF4-FFF2-40B4-BE49-F238E27FC236}">
-                <a16:creationId xmlns:a16="http://schemas.microsoft.com/office/drawing/2014/main" id="{32FC2BC5-A41F-AF1E-87C1-6C3884228EE1}"/>
-              </a:ext>
-            </a:extLst>
-          </p:cNvPr>
-          <p:cNvSpPr/>
-          <p:nvPr userDrawn="1"/>
-        </p:nvSpPr>
-        <p:spPr>
-          <a:xfrm>
-            <a:off x="-440871" y="6104965"/>
-            <a:ext cx="13062857" cy="885799"/>
-          </a:xfrm>
-          <a:prstGeom prst="rect">
-            <a:avLst/>
-          </a:prstGeom>
-          <a:solidFill>
-            <a:srgbClr val="435765"/>
-          </a:solidFill>
-        </p:spPr>
-        <p:style>
-          <a:lnRef idx="2">
-            <a:schemeClr val="accent1">
-              <a:shade val="50000"/>
-            </a:schemeClr>
-          </a:lnRef>
-          <a:fillRef idx="1">
-            <a:schemeClr val="accent1"/>
-          </a:fillRef>
-          <a:effectRef idx="0">
-            <a:schemeClr val="accent1"/>
-          </a:effectRef>
-          <a:fontRef idx="minor">
-            <a:schemeClr val="lt1"/>
-          </a:fontRef>
-        </p:style>
-        <p:txBody>
-          <a:bodyPr rtlCol="0" anchor="ctr"/>
-          <a:lstStyle/>
-          <a:p>
-            <a:pPr algn="ctr"/>
-            <a:endParaRPr lang="en-US"/>
-          </a:p>
-        </p:txBody>
-      </p:sp>
-      <p:pic>
-        <p:nvPicPr>
-          <p:cNvPr id="7" name="Picture 6" descr="Text&#10;&#10;Description automatically generated">
-            <a:extLst>
-              <a:ext uri="{FF2B5EF4-FFF2-40B4-BE49-F238E27FC236}">
-                <a16:creationId xmlns:a16="http://schemas.microsoft.com/office/drawing/2014/main" id="{BB80B376-718E-5A67-D7A2-E9C5D8488671}"/>
-              </a:ext>
-            </a:extLst>
-          </p:cNvPr>
-          <p:cNvPicPr>
-            <a:picLocks noChangeAspect="1"/>
-          </p:cNvPicPr>
-          <p:nvPr userDrawn="1"/>
-        </p:nvPicPr>
-        <p:blipFill>
-          <a:blip r:embed="rId2"/>
-          <a:stretch>
-            <a:fillRect/>
-          </a:stretch>
-        </p:blipFill>
-        <p:spPr>
-          <a:xfrm>
-            <a:off x="10467415" y="6013271"/>
-            <a:ext cx="1743635" cy="977493"/>
-          </a:xfrm>
-          <a:prstGeom prst="rect">
-            <a:avLst/>
-          </a:prstGeom>
-        </p:spPr>
-      </p:pic>
-      <p:sp>
-        <p:nvSpPr>
-          <p:cNvPr id="8" name="TextBox 7">
-            <a:extLst>
-              <a:ext uri="{FF2B5EF4-FFF2-40B4-BE49-F238E27FC236}">
-                <a16:creationId xmlns:a16="http://schemas.microsoft.com/office/drawing/2014/main" id="{340C9288-DA64-5E12-B226-91527D193BD7}"/>
-              </a:ext>
-            </a:extLst>
-          </p:cNvPr>
-          <p:cNvSpPr txBox="1"/>
-          <p:nvPr userDrawn="1"/>
-        </p:nvSpPr>
-        <p:spPr>
-          <a:xfrm>
-            <a:off x="259216" y="6209629"/>
-            <a:ext cx="2132315" cy="584775"/>
-          </a:xfrm>
-          <a:prstGeom prst="rect">
-            <a:avLst/>
-          </a:prstGeom>
-          <a:noFill/>
-        </p:spPr>
-        <p:txBody>
-          <a:bodyPr wrap="none" rtlCol="0">
-            <a:spAutoFit/>
-          </a:bodyPr>
-          <a:lstStyle/>
-          <a:p>
-            <a:r>
-              <a:rPr lang="en-US" sz="1600" dirty="0">
-                <a:solidFill>
-                  <a:srgbClr val="FCCA3A"/>
-                </a:solidFill>
-                <a:latin typeface="Inter Medium" panose="02000503000000020004" pitchFamily="2" charset="0"/>
-                <a:ea typeface="Inter Medium" panose="02000503000000020004" pitchFamily="2" charset="0"/>
-              </a:rPr>
-              <a:t>Dave Hearne</a:t>
-            </a:r>
-          </a:p>
-          <a:p>
-            <a:r>
-              <a:rPr lang="en-US" sz="1600" dirty="0" err="1">
-                <a:solidFill>
-                  <a:srgbClr val="FCCA3A"/>
-                </a:solidFill>
-                <a:latin typeface="Inter Medium" panose="02000503000000020004" pitchFamily="2" charset="0"/>
-                <a:ea typeface="Inter Medium" panose="02000503000000020004" pitchFamily="2" charset="0"/>
-              </a:rPr>
-              <a:t>dave.hearne@wit.ie</a:t>
-            </a:r>
-            <a:endParaRPr lang="en-US" sz="1600" dirty="0">
-              <a:solidFill>
-                <a:srgbClr val="FCCA3A"/>
-              </a:solidFill>
-              <a:latin typeface="Inter Medium" panose="02000503000000020004" pitchFamily="2" charset="0"/>
-              <a:ea typeface="Inter Medium" panose="02000503000000020004" pitchFamily="2" charset="0"/>
-            </a:endParaRPr>
-          </a:p>
-        </p:txBody>
-      </p:sp>
-      <p:sp>
-        <p:nvSpPr>
-          <p:cNvPr id="2" name="Title 1">
-            <a:extLst>
-              <a:ext uri="{FF2B5EF4-FFF2-40B4-BE49-F238E27FC236}">
-                <a16:creationId xmlns:a16="http://schemas.microsoft.com/office/drawing/2014/main" id="{B31B9D84-933C-5819-53CE-724AA8A87C1B}"/>
-              </a:ext>
-            </a:extLst>
-          </p:cNvPr>
-          <p:cNvSpPr>
-            <a:spLocks noGrp="1"/>
-          </p:cNvSpPr>
-          <p:nvPr>
-            <p:ph type="title"/>
-          </p:nvPr>
-        </p:nvSpPr>
-        <p:spPr/>
-        <p:txBody>
-          <a:bodyPr/>
-          <a:lstStyle/>
-          <a:p>
-            <a:r>
-              <a:rPr lang="en-GB" dirty="0"/>
-              <a:t>Click to edit Master title style</a:t>
-            </a:r>
-            <a:endParaRPr lang="en-US" dirty="0"/>
-          </a:p>
-        </p:txBody>
-      </p:sp>
-      <p:sp>
-        <p:nvSpPr>
-          <p:cNvPr id="9" name="Slide Number Placeholder 4">
-            <a:extLst>
-              <a:ext uri="{FF2B5EF4-FFF2-40B4-BE49-F238E27FC236}">
-                <a16:creationId xmlns:a16="http://schemas.microsoft.com/office/drawing/2014/main" id="{661670FA-CFD1-A883-55F9-FC87F3B1BCC8}"/>
-              </a:ext>
-            </a:extLst>
-          </p:cNvPr>
-          <p:cNvSpPr>
-            <a:spLocks noGrp="1"/>
-          </p:cNvSpPr>
-          <p:nvPr>
-            <p:ph type="sldNum" sz="quarter" idx="12"/>
-          </p:nvPr>
-        </p:nvSpPr>
-        <p:spPr>
-          <a:xfrm>
-            <a:off x="4718957" y="6365301"/>
-            <a:ext cx="2743200" cy="365125"/>
-          </a:xfrm>
-          <a:prstGeom prst="rect">
-            <a:avLst/>
-          </a:prstGeom>
-        </p:spPr>
-        <p:txBody>
-          <a:bodyPr/>
-          <a:lstStyle>
-            <a:lvl1pPr algn="ctr">
-              <a:defRPr sz="1400">
-                <a:solidFill>
-                  <a:schemeClr val="bg1"/>
-                </a:solidFill>
-                <a:latin typeface="Inter" panose="02000503000000020004" pitchFamily="2" charset="0"/>
-                <a:ea typeface="Inter" panose="02000503000000020004" pitchFamily="2" charset="0"/>
-              </a:defRPr>
-            </a:lvl1pPr>
-          </a:lstStyle>
-          <a:p>
-            <a:endParaRPr lang="en-US" dirty="0"/>
-          </a:p>
-        </p:txBody>
-      </p:sp>
-      <p:pic>
-        <p:nvPicPr>
-          <p:cNvPr id="4" name="Graphic 3">
-            <a:extLst>
-              <a:ext uri="{FF2B5EF4-FFF2-40B4-BE49-F238E27FC236}">
-                <a16:creationId xmlns:a16="http://schemas.microsoft.com/office/drawing/2014/main" id="{8934E70C-E8D9-B2C2-6196-CB37462C2AA7}"/>
-              </a:ext>
-            </a:extLst>
-          </p:cNvPr>
-          <p:cNvPicPr>
-            <a:picLocks noChangeAspect="1"/>
-          </p:cNvPicPr>
-          <p:nvPr userDrawn="1"/>
-        </p:nvPicPr>
-        <p:blipFill>
-          <a:blip r:embed="rId3">
-            <a:extLst>
-              <a:ext uri="{96DAC541-7B7A-43D3-8B79-37D633B846F1}">
-                <asvg:svgBlip xmlns:asvg="http://schemas.microsoft.com/office/drawing/2016/SVG/main" r:embed="rId4"/>
-              </a:ext>
-            </a:extLst>
-          </a:blip>
-          <a:stretch>
-            <a:fillRect/>
-          </a:stretch>
-        </p:blipFill>
-        <p:spPr>
-          <a:xfrm>
-            <a:off x="9203245" y="6153874"/>
-            <a:ext cx="1120090" cy="603766"/>
-          </a:xfrm>
-          <a:prstGeom prst="rect">
-            <a:avLst/>
-          </a:prstGeom>
-        </p:spPr>
-      </p:pic>
-    </p:spTree>
-    <p:extLst>
-      <p:ext uri="{BB962C8B-B14F-4D97-AF65-F5344CB8AC3E}">
-        <p14:creationId xmlns:p14="http://schemas.microsoft.com/office/powerpoint/2010/main" val="3801777632"/>
-      </p:ext>
-    </p:extLst>
-  </p:cSld>
-  <p:clrMapOvr>
-    <a:masterClrMapping/>
-  </p:clrMapOvr>
-  <p:transition spd="slow">
-    <p:push dir="u"/>
-  </p:transition>
-</p:sldLayout>
-</file>
-
-<file path=ppt/slideLayouts/slideLayout7.xml><?xml version="1.0" encoding="utf-8"?>
-<p:sldLayout xmlns:a="http://schemas.openxmlformats.org/drawingml/2006/main" xmlns:r="http://schemas.openxmlformats.org/officeDocument/2006/relationships" xmlns:p="http://schemas.openxmlformats.org/presentationml/2006/main" showMasterSp="0" preserve="1" userDrawn="1">
-  <p:cSld name="Blank">
+<file path=ppt/slideLayouts/slideLayout12.xml><?xml version="1.0" encoding="utf-8"?>
+<p:sldLayout xmlns:a="http://schemas.openxmlformats.org/drawingml/2006/main" xmlns:r="http://schemas.openxmlformats.org/officeDocument/2006/relationships" xmlns:p="http://schemas.openxmlformats.org/presentationml/2006/main" showMasterSp="0" userDrawn="1">
+  <p:cSld name="1_Blank">
     <p:spTree>
       <p:nvGrpSpPr>
         <p:cNvPr id="1" name=""/>
@@ -5907,10 +3570,10 @@
           <p:nvPr userDrawn="1"/>
         </p:nvPicPr>
         <p:blipFill>
-          <a:blip r:embed="rId4">
+          <a:blip>
             <a:extLst>
               <a:ext uri="{96DAC541-7B7A-43D3-8B79-37D633B846F1}">
-                <asvg:svgBlip xmlns:asvg="http://schemas.microsoft.com/office/drawing/2016/SVG/main" r:embed="rId5"/>
+                <asvg:svgBlip xmlns:asvg="http://schemas.microsoft.com/office/drawing/2016/SVG/main" r:embed="rId4"/>
               </a:ext>
             </a:extLst>
           </a:blip>
@@ -5931,7 +3594,7 @@
     </p:spTree>
     <p:extLst>
       <p:ext uri="{BB962C8B-B14F-4D97-AF65-F5344CB8AC3E}">
-        <p14:creationId xmlns:p14="http://schemas.microsoft.com/office/powerpoint/2010/main" val="345431182"/>
+        <p14:creationId xmlns:p14="http://schemas.microsoft.com/office/powerpoint/2010/main" val="3123110048"/>
       </p:ext>
     </p:extLst>
   </p:cSld>
@@ -5944,9 +3607,9 @@
 </p:sldLayout>
 </file>
 
-<file path=ppt/slideLayouts/slideLayout8.xml><?xml version="1.0" encoding="utf-8"?>
-<p:sldLayout xmlns:a="http://schemas.openxmlformats.org/drawingml/2006/main" xmlns:r="http://schemas.openxmlformats.org/officeDocument/2006/relationships" xmlns:p="http://schemas.openxmlformats.org/presentationml/2006/main" showMasterSp="0" preserve="1" userDrawn="1">
-  <p:cSld name="1_Blank">
+<file path=ppt/slideLayouts/slideLayout13.xml><?xml version="1.0" encoding="utf-8"?>
+<p:sldLayout xmlns:a="http://schemas.openxmlformats.org/drawingml/2006/main" xmlns:r="http://schemas.openxmlformats.org/officeDocument/2006/relationships" xmlns:p="http://schemas.openxmlformats.org/presentationml/2006/main" showMasterSp="0" userDrawn="1">
+  <p:cSld name="2_Blank">
     <p:spTree>
       <p:nvGrpSpPr>
         <p:cNvPr id="1" name=""/>
@@ -6197,10 +3860,10 @@
           <p:nvPr userDrawn="1"/>
         </p:nvPicPr>
         <p:blipFill>
-          <a:blip r:embed="rId5">
+          <a:blip>
             <a:extLst>
               <a:ext uri="{96DAC541-7B7A-43D3-8B79-37D633B846F1}">
-                <asvg:svgBlip xmlns:asvg="http://schemas.microsoft.com/office/drawing/2016/SVG/main" r:embed="rId6"/>
+                <asvg:svgBlip xmlns:asvg="http://schemas.microsoft.com/office/drawing/2016/SVG/main" r:embed="rId5"/>
               </a:ext>
             </a:extLst>
           </a:blip>
@@ -6221,7 +3884,7 @@
     </p:spTree>
     <p:extLst>
       <p:ext uri="{BB962C8B-B14F-4D97-AF65-F5344CB8AC3E}">
-        <p14:creationId xmlns:p14="http://schemas.microsoft.com/office/powerpoint/2010/main" val="2285440779"/>
+        <p14:creationId xmlns:p14="http://schemas.microsoft.com/office/powerpoint/2010/main" val="3754929285"/>
       </p:ext>
     </p:extLst>
   </p:cSld>
@@ -6234,9 +3897,9 @@
 </p:sldLayout>
 </file>
 
-<file path=ppt/slideLayouts/slideLayout9.xml><?xml version="1.0" encoding="utf-8"?>
-<p:sldLayout xmlns:a="http://schemas.openxmlformats.org/drawingml/2006/main" xmlns:r="http://schemas.openxmlformats.org/officeDocument/2006/relationships" xmlns:p="http://schemas.openxmlformats.org/presentationml/2006/main" showMasterSp="0" type="objTx" preserve="1">
-  <p:cSld name="Content with Caption">
+<file path=ppt/slideLayouts/slideLayout2.xml><?xml version="1.0" encoding="utf-8"?>
+<p:sldLayout xmlns:a="http://schemas.openxmlformats.org/drawingml/2006/main" xmlns:r="http://schemas.openxmlformats.org/officeDocument/2006/relationships" xmlns:p="http://schemas.openxmlformats.org/presentationml/2006/main" type="obj" preserve="1">
+  <p:cSld name="Title and Content">
     <p:spTree>
       <p:nvGrpSpPr>
         <p:cNvPr id="1" name=""/>
@@ -6253,13 +3916,7 @@
       </p:grpSpPr>
       <p:sp>
         <p:nvSpPr>
-          <p:cNvPr id="2" name="Title 1">
-            <a:extLst>
-              <a:ext uri="{FF2B5EF4-FFF2-40B4-BE49-F238E27FC236}">
-                <a16:creationId xmlns:a16="http://schemas.microsoft.com/office/drawing/2014/main" id="{11D6F86B-6715-92BC-715F-DFA9AD39F22A}"/>
-              </a:ext>
-            </a:extLst>
-          </p:cNvPr>
+          <p:cNvPr id="2" name="Title 1"/>
           <p:cNvSpPr>
             <a:spLocks noGrp="1"/>
           </p:cNvSpPr>
@@ -6267,37 +3924,22 @@
             <p:ph type="title"/>
           </p:nvPr>
         </p:nvSpPr>
-        <p:spPr>
-          <a:xfrm>
-            <a:off x="839788" y="457200"/>
-            <a:ext cx="3932237" cy="1600200"/>
-          </a:xfrm>
-        </p:spPr>
+        <p:spPr/>
         <p:txBody>
-          <a:bodyPr anchor="b"/>
-          <a:lstStyle>
-            <a:lvl1pPr>
-              <a:defRPr sz="3200"/>
-            </a:lvl1pPr>
-          </a:lstStyle>
+          <a:bodyPr/>
+          <a:lstStyle/>
           <a:p>
             <a:r>
               <a:rPr lang="en-GB"/>
               <a:t>Click to edit Master title style</a:t>
             </a:r>
-            <a:endParaRPr lang="en-US"/>
+            <a:endParaRPr lang="en-IE"/>
           </a:p>
         </p:txBody>
       </p:sp>
       <p:sp>
         <p:nvSpPr>
-          <p:cNvPr id="3" name="Content Placeholder 2">
-            <a:extLst>
-              <a:ext uri="{FF2B5EF4-FFF2-40B4-BE49-F238E27FC236}">
-                <a16:creationId xmlns:a16="http://schemas.microsoft.com/office/drawing/2014/main" id="{A908AFA0-81E3-E9B4-F6E0-8B926D239EE4}"/>
-              </a:ext>
-            </a:extLst>
-          </p:cNvPr>
+          <p:cNvPr id="3" name="Content Placeholder 2"/>
           <p:cNvSpPr>
             <a:spLocks noGrp="1"/>
           </p:cNvSpPr>
@@ -6305,43 +3947,10 @@
             <p:ph idx="1"/>
           </p:nvPr>
         </p:nvSpPr>
-        <p:spPr>
-          <a:xfrm>
-            <a:off x="5183188" y="987426"/>
-            <a:ext cx="6172200" cy="4286704"/>
-          </a:xfrm>
-        </p:spPr>
+        <p:spPr/>
         <p:txBody>
           <a:bodyPr/>
-          <a:lstStyle>
-            <a:lvl1pPr>
-              <a:defRPr sz="3200"/>
-            </a:lvl1pPr>
-            <a:lvl2pPr>
-              <a:defRPr sz="2800"/>
-            </a:lvl2pPr>
-            <a:lvl3pPr>
-              <a:defRPr sz="2400"/>
-            </a:lvl3pPr>
-            <a:lvl4pPr>
-              <a:defRPr sz="2000"/>
-            </a:lvl4pPr>
-            <a:lvl5pPr>
-              <a:defRPr sz="2000"/>
-            </a:lvl5pPr>
-            <a:lvl6pPr>
-              <a:defRPr sz="2000"/>
-            </a:lvl6pPr>
-            <a:lvl7pPr>
-              <a:defRPr sz="2000"/>
-            </a:lvl7pPr>
-            <a:lvl8pPr>
-              <a:defRPr sz="2000"/>
-            </a:lvl8pPr>
-            <a:lvl9pPr>
-              <a:defRPr sz="2000"/>
-            </a:lvl9pPr>
-          </a:lstStyle>
+          <a:lstStyle/>
           <a:p>
             <a:pPr lvl="0"/>
             <a:r>
@@ -6376,87 +3985,116 @@
               <a:rPr lang="en-GB"/>
               <a:t>Fifth level</a:t>
             </a:r>
-            <a:endParaRPr lang="en-US"/>
+            <a:endParaRPr lang="en-IE"/>
           </a:p>
         </p:txBody>
       </p:sp>
       <p:sp>
         <p:nvSpPr>
-          <p:cNvPr id="4" name="Text Placeholder 3">
-            <a:extLst>
-              <a:ext uri="{FF2B5EF4-FFF2-40B4-BE49-F238E27FC236}">
-                <a16:creationId xmlns:a16="http://schemas.microsoft.com/office/drawing/2014/main" id="{C54034E6-8F9A-4869-D336-F1BAA76F02CC}"/>
-              </a:ext>
-            </a:extLst>
-          </p:cNvPr>
+          <p:cNvPr id="4" name="Date Placeholder 3"/>
           <p:cNvSpPr>
             <a:spLocks noGrp="1"/>
           </p:cNvSpPr>
           <p:nvPr>
-            <p:ph type="body" sz="half" idx="2"/>
+            <p:ph type="dt" sz="half" idx="10"/>
           </p:nvPr>
         </p:nvSpPr>
-        <p:spPr>
-          <a:xfrm>
-            <a:off x="839788" y="2057400"/>
-            <a:ext cx="3932237" cy="3216729"/>
-          </a:xfrm>
-        </p:spPr>
+        <p:spPr/>
         <p:txBody>
           <a:bodyPr/>
-          <a:lstStyle>
-            <a:lvl1pPr marL="0" indent="0">
-              <a:buNone/>
-              <a:defRPr sz="1600"/>
-            </a:lvl1pPr>
-            <a:lvl2pPr marL="457200" indent="0">
-              <a:buNone/>
-              <a:defRPr sz="1400"/>
-            </a:lvl2pPr>
-            <a:lvl3pPr marL="914400" indent="0">
-              <a:buNone/>
-              <a:defRPr sz="1200"/>
-            </a:lvl3pPr>
-            <a:lvl4pPr marL="1371600" indent="0">
-              <a:buNone/>
-              <a:defRPr sz="1000"/>
-            </a:lvl4pPr>
-            <a:lvl5pPr marL="1828800" indent="0">
-              <a:buNone/>
-              <a:defRPr sz="1000"/>
-            </a:lvl5pPr>
-            <a:lvl6pPr marL="2286000" indent="0">
-              <a:buNone/>
-              <a:defRPr sz="1000"/>
-            </a:lvl6pPr>
-            <a:lvl7pPr marL="2743200" indent="0">
-              <a:buNone/>
-              <a:defRPr sz="1000"/>
-            </a:lvl7pPr>
-            <a:lvl8pPr marL="3200400" indent="0">
-              <a:buNone/>
-              <a:defRPr sz="1000"/>
-            </a:lvl8pPr>
-            <a:lvl9pPr marL="3657600" indent="0">
-              <a:buNone/>
-              <a:defRPr sz="1000"/>
-            </a:lvl9pPr>
-          </a:lstStyle>
-          <a:p>
-            <a:pPr lvl="0"/>
-            <a:r>
-              <a:rPr lang="en-GB"/>
-              <a:t>Click to edit Master text styles</a:t>
-            </a:r>
+          <a:lstStyle/>
+          <a:p>
+            <a:fld id="{1D8BD707-D9CF-40AE-B4C6-C98DA3205C09}" type="datetimeFigureOut">
+              <a:rPr lang="en-US" smtClean="0"/>
+              <a:pPr/>
+              <a:t>3/12/26</a:t>
+            </a:fld>
+            <a:endParaRPr lang="en-US"/>
           </a:p>
         </p:txBody>
       </p:sp>
       <p:sp>
         <p:nvSpPr>
-          <p:cNvPr id="8" name="Rectangle 7">
+          <p:cNvPr id="5" name="Footer Placeholder 4"/>
+          <p:cNvSpPr>
+            <a:spLocks noGrp="1"/>
+          </p:cNvSpPr>
+          <p:nvPr>
+            <p:ph type="ftr" sz="quarter" idx="11"/>
+          </p:nvPr>
+        </p:nvSpPr>
+        <p:spPr/>
+        <p:txBody>
+          <a:bodyPr/>
+          <a:lstStyle/>
+          <a:p>
+            <a:endParaRPr lang="en-US"/>
+          </a:p>
+        </p:txBody>
+      </p:sp>
+      <p:sp>
+        <p:nvSpPr>
+          <p:cNvPr id="6" name="Slide Number Placeholder 5"/>
+          <p:cNvSpPr>
+            <a:spLocks noGrp="1"/>
+          </p:cNvSpPr>
+          <p:nvPr>
+            <p:ph type="sldNum" sz="quarter" idx="12"/>
+          </p:nvPr>
+        </p:nvSpPr>
+        <p:spPr/>
+        <p:txBody>
+          <a:bodyPr/>
+          <a:lstStyle/>
+          <a:p>
+            <a:endParaRPr lang="en-US" dirty="0"/>
+          </a:p>
+        </p:txBody>
+      </p:sp>
+      <p:cxnSp>
+        <p:nvCxnSpPr>
+          <p:cNvPr id="8" name="Straight Connector 7"/>
+          <p:cNvCxnSpPr/>
+          <p:nvPr/>
+        </p:nvCxnSpPr>
+        <p:spPr>
+          <a:xfrm>
+            <a:off x="609600" y="1447800"/>
+            <a:ext cx="10972800" cy="0"/>
+          </a:xfrm>
+          <a:prstGeom prst="line">
+            <a:avLst/>
+          </a:prstGeom>
+          <a:ln w="6350">
+            <a:solidFill>
+              <a:schemeClr val="tx1">
+                <a:lumMod val="50000"/>
+                <a:lumOff val="50000"/>
+              </a:schemeClr>
+            </a:solidFill>
+          </a:ln>
+        </p:spPr>
+        <p:style>
+          <a:lnRef idx="1">
+            <a:schemeClr val="accent1"/>
+          </a:lnRef>
+          <a:fillRef idx="0">
+            <a:schemeClr val="accent1"/>
+          </a:fillRef>
+          <a:effectRef idx="0">
+            <a:schemeClr val="accent1"/>
+          </a:effectRef>
+          <a:fontRef idx="minor">
+            <a:schemeClr val="tx1"/>
+          </a:fontRef>
+        </p:style>
+      </p:cxnSp>
+      <p:sp>
+        <p:nvSpPr>
+          <p:cNvPr id="7" name="Rectangle 6">
             <a:extLst>
               <a:ext uri="{FF2B5EF4-FFF2-40B4-BE49-F238E27FC236}">
-                <a16:creationId xmlns:a16="http://schemas.microsoft.com/office/drawing/2014/main" id="{50FDDB94-FA60-0120-3E53-AB03CF84BA1E}"/>
+                <a16:creationId xmlns:a16="http://schemas.microsoft.com/office/drawing/2014/main" id="{1D2B9C66-BBA7-7758-385E-9B69979A7106}"/>
               </a:ext>
             </a:extLst>
           </p:cNvPr>
@@ -6505,7 +4143,7 @@
           <p:cNvPr id="9" name="Picture 8" descr="Text&#10;&#10;Description automatically generated">
             <a:extLst>
               <a:ext uri="{FF2B5EF4-FFF2-40B4-BE49-F238E27FC236}">
-                <a16:creationId xmlns:a16="http://schemas.microsoft.com/office/drawing/2014/main" id="{45679F87-5E74-8BA8-0629-1E5B4F4880AD}"/>
+                <a16:creationId xmlns:a16="http://schemas.microsoft.com/office/drawing/2014/main" id="{4A6789EA-D749-97F5-A7B8-3CBBE70E0FF1}"/>
               </a:ext>
             </a:extLst>
           </p:cNvPr>
@@ -6535,7 +4173,7 @@
           <p:cNvPr id="10" name="TextBox 9">
             <a:extLst>
               <a:ext uri="{FF2B5EF4-FFF2-40B4-BE49-F238E27FC236}">
-                <a16:creationId xmlns:a16="http://schemas.microsoft.com/office/drawing/2014/main" id="{49BE86B7-2BF4-10EF-5455-B9887AAB8B50}"/>
+                <a16:creationId xmlns:a16="http://schemas.microsoft.com/office/drawing/2014/main" id="{06544501-28CF-0682-0AEE-7BEA9BCC1C68}"/>
               </a:ext>
             </a:extLst>
           </p:cNvPr>
@@ -6590,55 +4228,12 @@
           </a:p>
         </p:txBody>
       </p:sp>
-      <p:sp>
-        <p:nvSpPr>
-          <p:cNvPr id="11" name="Slide Number Placeholder 4">
+      <p:pic>
+        <p:nvPicPr>
+          <p:cNvPr id="11" name="Graphic 10">
             <a:extLst>
               <a:ext uri="{FF2B5EF4-FFF2-40B4-BE49-F238E27FC236}">
-                <a16:creationId xmlns:a16="http://schemas.microsoft.com/office/drawing/2014/main" id="{6B715A8C-2802-94EC-ED2B-7E87EB769CAE}"/>
-              </a:ext>
-            </a:extLst>
-          </p:cNvPr>
-          <p:cNvSpPr>
-            <a:spLocks noGrp="1"/>
-          </p:cNvSpPr>
-          <p:nvPr>
-            <p:ph type="sldNum" sz="quarter" idx="12"/>
-          </p:nvPr>
-        </p:nvSpPr>
-        <p:spPr>
-          <a:xfrm>
-            <a:off x="4718957" y="6365301"/>
-            <a:ext cx="2743200" cy="365125"/>
-          </a:xfrm>
-          <a:prstGeom prst="rect">
-            <a:avLst/>
-          </a:prstGeom>
-        </p:spPr>
-        <p:txBody>
-          <a:bodyPr/>
-          <a:lstStyle>
-            <a:lvl1pPr algn="ctr">
-              <a:defRPr sz="1400">
-                <a:solidFill>
-                  <a:schemeClr val="bg1"/>
-                </a:solidFill>
-                <a:latin typeface="Inter" panose="02000503000000020004" pitchFamily="2" charset="0"/>
-                <a:ea typeface="Inter" panose="02000503000000020004" pitchFamily="2" charset="0"/>
-              </a:defRPr>
-            </a:lvl1pPr>
-          </a:lstStyle>
-          <a:p>
-            <a:endParaRPr lang="en-US" dirty="0"/>
-          </a:p>
-        </p:txBody>
-      </p:sp>
-      <p:pic>
-        <p:nvPicPr>
-          <p:cNvPr id="5" name="Graphic 4">
-            <a:extLst>
-              <a:ext uri="{FF2B5EF4-FFF2-40B4-BE49-F238E27FC236}">
-                <a16:creationId xmlns:a16="http://schemas.microsoft.com/office/drawing/2014/main" id="{E4062A10-94AD-59F5-B695-6399839DA51D}"/>
+                <a16:creationId xmlns:a16="http://schemas.microsoft.com/office/drawing/2014/main" id="{5AF478BE-7F52-558F-1AAA-95CC8CB58F6A}"/>
               </a:ext>
             </a:extLst>
           </p:cNvPr>
@@ -6648,10 +4243,10 @@
           <p:nvPr userDrawn="1"/>
         </p:nvPicPr>
         <p:blipFill>
-          <a:blip r:embed="rId3">
+          <a:blip>
             <a:extLst>
               <a:ext uri="{96DAC541-7B7A-43D3-8B79-37D633B846F1}">
-                <asvg:svgBlip xmlns:asvg="http://schemas.microsoft.com/office/drawing/2016/SVG/main" r:embed="rId4"/>
+                <asvg:svgBlip xmlns:asvg="http://schemas.microsoft.com/office/drawing/2016/SVG/main" r:embed="rId3"/>
               </a:ext>
             </a:extLst>
           </a:blip>
@@ -6672,7 +4267,2763 @@
     </p:spTree>
     <p:extLst>
       <p:ext uri="{BB962C8B-B14F-4D97-AF65-F5344CB8AC3E}">
-        <p14:creationId xmlns:p14="http://schemas.microsoft.com/office/powerpoint/2010/main" val="246841155"/>
+        <p14:creationId xmlns:p14="http://schemas.microsoft.com/office/powerpoint/2010/main" val="3757737074"/>
+      </p:ext>
+    </p:extLst>
+  </p:cSld>
+  <p:clrMapOvr>
+    <a:masterClrMapping/>
+  </p:clrMapOvr>
+  <p:transition spd="slow">
+    <p:push dir="u"/>
+  </p:transition>
+</p:sldLayout>
+</file>
+
+<file path=ppt/slideLayouts/slideLayout3.xml><?xml version="1.0" encoding="utf-8"?>
+<p:sldLayout xmlns:a="http://schemas.openxmlformats.org/drawingml/2006/main" xmlns:r="http://schemas.openxmlformats.org/officeDocument/2006/relationships" xmlns:p="http://schemas.openxmlformats.org/presentationml/2006/main" type="secHead" preserve="1">
+  <p:cSld name="Section Header">
+    <p:spTree>
+      <p:nvGrpSpPr>
+        <p:cNvPr id="1" name=""/>
+        <p:cNvGrpSpPr/>
+        <p:nvPr/>
+      </p:nvGrpSpPr>
+      <p:grpSpPr>
+        <a:xfrm>
+          <a:off x="0" y="0"/>
+          <a:ext cx="0" cy="0"/>
+          <a:chOff x="0" y="0"/>
+          <a:chExt cx="0" cy="0"/>
+        </a:xfrm>
+      </p:grpSpPr>
+      <p:sp>
+        <p:nvSpPr>
+          <p:cNvPr id="2" name="Title 1"/>
+          <p:cNvSpPr>
+            <a:spLocks noGrp="1"/>
+          </p:cNvSpPr>
+          <p:nvPr>
+            <p:ph type="title"/>
+          </p:nvPr>
+        </p:nvSpPr>
+        <p:spPr>
+          <a:xfrm>
+            <a:off x="963084" y="4406901"/>
+            <a:ext cx="10363200" cy="1362075"/>
+          </a:xfrm>
+        </p:spPr>
+        <p:txBody>
+          <a:bodyPr anchor="t"/>
+          <a:lstStyle>
+            <a:lvl1pPr algn="l">
+              <a:defRPr sz="4000" b="1" cap="all"/>
+            </a:lvl1pPr>
+          </a:lstStyle>
+          <a:p>
+            <a:r>
+              <a:rPr lang="en-GB"/>
+              <a:t>Click to edit Master title style</a:t>
+            </a:r>
+            <a:endParaRPr lang="en-IE"/>
+          </a:p>
+        </p:txBody>
+      </p:sp>
+      <p:sp>
+        <p:nvSpPr>
+          <p:cNvPr id="3" name="Text Placeholder 2"/>
+          <p:cNvSpPr>
+            <a:spLocks noGrp="1"/>
+          </p:cNvSpPr>
+          <p:nvPr>
+            <p:ph type="body" idx="1"/>
+          </p:nvPr>
+        </p:nvSpPr>
+        <p:spPr>
+          <a:xfrm>
+            <a:off x="963084" y="2906713"/>
+            <a:ext cx="10363200" cy="1500187"/>
+          </a:xfrm>
+        </p:spPr>
+        <p:txBody>
+          <a:bodyPr anchor="b"/>
+          <a:lstStyle>
+            <a:lvl1pPr marL="0" indent="0">
+              <a:buNone/>
+              <a:defRPr sz="2000">
+                <a:solidFill>
+                  <a:schemeClr val="tx1">
+                    <a:tint val="75000"/>
+                  </a:schemeClr>
+                </a:solidFill>
+              </a:defRPr>
+            </a:lvl1pPr>
+            <a:lvl2pPr marL="457200" indent="0">
+              <a:buNone/>
+              <a:defRPr sz="1800">
+                <a:solidFill>
+                  <a:schemeClr val="tx1">
+                    <a:tint val="75000"/>
+                  </a:schemeClr>
+                </a:solidFill>
+              </a:defRPr>
+            </a:lvl2pPr>
+            <a:lvl3pPr marL="914400" indent="0">
+              <a:buNone/>
+              <a:defRPr sz="1600">
+                <a:solidFill>
+                  <a:schemeClr val="tx1">
+                    <a:tint val="75000"/>
+                  </a:schemeClr>
+                </a:solidFill>
+              </a:defRPr>
+            </a:lvl3pPr>
+            <a:lvl4pPr marL="1371600" indent="0">
+              <a:buNone/>
+              <a:defRPr sz="1400">
+                <a:solidFill>
+                  <a:schemeClr val="tx1">
+                    <a:tint val="75000"/>
+                  </a:schemeClr>
+                </a:solidFill>
+              </a:defRPr>
+            </a:lvl4pPr>
+            <a:lvl5pPr marL="1828800" indent="0">
+              <a:buNone/>
+              <a:defRPr sz="1400">
+                <a:solidFill>
+                  <a:schemeClr val="tx1">
+                    <a:tint val="75000"/>
+                  </a:schemeClr>
+                </a:solidFill>
+              </a:defRPr>
+            </a:lvl5pPr>
+            <a:lvl6pPr marL="2286000" indent="0">
+              <a:buNone/>
+              <a:defRPr sz="1400">
+                <a:solidFill>
+                  <a:schemeClr val="tx1">
+                    <a:tint val="75000"/>
+                  </a:schemeClr>
+                </a:solidFill>
+              </a:defRPr>
+            </a:lvl6pPr>
+            <a:lvl7pPr marL="2743200" indent="0">
+              <a:buNone/>
+              <a:defRPr sz="1400">
+                <a:solidFill>
+                  <a:schemeClr val="tx1">
+                    <a:tint val="75000"/>
+                  </a:schemeClr>
+                </a:solidFill>
+              </a:defRPr>
+            </a:lvl7pPr>
+            <a:lvl8pPr marL="3200400" indent="0">
+              <a:buNone/>
+              <a:defRPr sz="1400">
+                <a:solidFill>
+                  <a:schemeClr val="tx1">
+                    <a:tint val="75000"/>
+                  </a:schemeClr>
+                </a:solidFill>
+              </a:defRPr>
+            </a:lvl8pPr>
+            <a:lvl9pPr marL="3657600" indent="0">
+              <a:buNone/>
+              <a:defRPr sz="1400">
+                <a:solidFill>
+                  <a:schemeClr val="tx1">
+                    <a:tint val="75000"/>
+                  </a:schemeClr>
+                </a:solidFill>
+              </a:defRPr>
+            </a:lvl9pPr>
+          </a:lstStyle>
+          <a:p>
+            <a:pPr lvl="0"/>
+            <a:r>
+              <a:rPr lang="en-GB"/>
+              <a:t>Click to edit Master text styles</a:t>
+            </a:r>
+          </a:p>
+        </p:txBody>
+      </p:sp>
+      <p:sp>
+        <p:nvSpPr>
+          <p:cNvPr id="4" name="Date Placeholder 3"/>
+          <p:cNvSpPr>
+            <a:spLocks noGrp="1"/>
+          </p:cNvSpPr>
+          <p:nvPr>
+            <p:ph type="dt" sz="half" idx="10"/>
+          </p:nvPr>
+        </p:nvSpPr>
+        <p:spPr/>
+        <p:txBody>
+          <a:bodyPr/>
+          <a:lstStyle/>
+          <a:p>
+            <a:fld id="{1D8BD707-D9CF-40AE-B4C6-C98DA3205C09}" type="datetimeFigureOut">
+              <a:rPr lang="en-US" smtClean="0"/>
+              <a:pPr/>
+              <a:t>3/12/26</a:t>
+            </a:fld>
+            <a:endParaRPr lang="en-US"/>
+          </a:p>
+        </p:txBody>
+      </p:sp>
+      <p:sp>
+        <p:nvSpPr>
+          <p:cNvPr id="5" name="Footer Placeholder 4"/>
+          <p:cNvSpPr>
+            <a:spLocks noGrp="1"/>
+          </p:cNvSpPr>
+          <p:nvPr>
+            <p:ph type="ftr" sz="quarter" idx="11"/>
+          </p:nvPr>
+        </p:nvSpPr>
+        <p:spPr/>
+        <p:txBody>
+          <a:bodyPr/>
+          <a:lstStyle/>
+          <a:p>
+            <a:endParaRPr lang="en-US"/>
+          </a:p>
+        </p:txBody>
+      </p:sp>
+      <p:sp>
+        <p:nvSpPr>
+          <p:cNvPr id="6" name="Slide Number Placeholder 5"/>
+          <p:cNvSpPr>
+            <a:spLocks noGrp="1"/>
+          </p:cNvSpPr>
+          <p:nvPr>
+            <p:ph type="sldNum" sz="quarter" idx="12"/>
+          </p:nvPr>
+        </p:nvSpPr>
+        <p:spPr/>
+        <p:txBody>
+          <a:bodyPr/>
+          <a:lstStyle/>
+          <a:p>
+            <a:endParaRPr lang="en-US" dirty="0"/>
+          </a:p>
+        </p:txBody>
+      </p:sp>
+      <p:sp>
+        <p:nvSpPr>
+          <p:cNvPr id="7" name="Rectangle 6">
+            <a:extLst>
+              <a:ext uri="{FF2B5EF4-FFF2-40B4-BE49-F238E27FC236}">
+                <a16:creationId xmlns:a16="http://schemas.microsoft.com/office/drawing/2014/main" id="{66ADFA68-4D53-076A-7A4B-666064060A12}"/>
+              </a:ext>
+            </a:extLst>
+          </p:cNvPr>
+          <p:cNvSpPr/>
+          <p:nvPr userDrawn="1"/>
+        </p:nvSpPr>
+        <p:spPr>
+          <a:xfrm>
+            <a:off x="-440871" y="6104965"/>
+            <a:ext cx="13062857" cy="885799"/>
+          </a:xfrm>
+          <a:prstGeom prst="rect">
+            <a:avLst/>
+          </a:prstGeom>
+          <a:solidFill>
+            <a:srgbClr val="435765"/>
+          </a:solidFill>
+        </p:spPr>
+        <p:style>
+          <a:lnRef idx="2">
+            <a:schemeClr val="accent1">
+              <a:shade val="50000"/>
+            </a:schemeClr>
+          </a:lnRef>
+          <a:fillRef idx="1">
+            <a:schemeClr val="accent1"/>
+          </a:fillRef>
+          <a:effectRef idx="0">
+            <a:schemeClr val="accent1"/>
+          </a:effectRef>
+          <a:fontRef idx="minor">
+            <a:schemeClr val="lt1"/>
+          </a:fontRef>
+        </p:style>
+        <p:txBody>
+          <a:bodyPr rtlCol="0" anchor="ctr"/>
+          <a:lstStyle/>
+          <a:p>
+            <a:pPr algn="ctr"/>
+            <a:endParaRPr lang="en-US"/>
+          </a:p>
+        </p:txBody>
+      </p:sp>
+      <p:pic>
+        <p:nvPicPr>
+          <p:cNvPr id="8" name="Picture 7" descr="Text&#10;&#10;Description automatically generated">
+            <a:extLst>
+              <a:ext uri="{FF2B5EF4-FFF2-40B4-BE49-F238E27FC236}">
+                <a16:creationId xmlns:a16="http://schemas.microsoft.com/office/drawing/2014/main" id="{BB2F9A7D-DC88-417E-9381-00A553292898}"/>
+              </a:ext>
+            </a:extLst>
+          </p:cNvPr>
+          <p:cNvPicPr>
+            <a:picLocks noChangeAspect="1"/>
+          </p:cNvPicPr>
+          <p:nvPr userDrawn="1"/>
+        </p:nvPicPr>
+        <p:blipFill>
+          <a:blip r:embed="rId2"/>
+          <a:stretch>
+            <a:fillRect/>
+          </a:stretch>
+        </p:blipFill>
+        <p:spPr>
+          <a:xfrm>
+            <a:off x="10467415" y="6013271"/>
+            <a:ext cx="1743635" cy="977493"/>
+          </a:xfrm>
+          <a:prstGeom prst="rect">
+            <a:avLst/>
+          </a:prstGeom>
+        </p:spPr>
+      </p:pic>
+      <p:sp>
+        <p:nvSpPr>
+          <p:cNvPr id="9" name="TextBox 8">
+            <a:extLst>
+              <a:ext uri="{FF2B5EF4-FFF2-40B4-BE49-F238E27FC236}">
+                <a16:creationId xmlns:a16="http://schemas.microsoft.com/office/drawing/2014/main" id="{BFDB2401-9613-5C90-733A-9947C2AF906B}"/>
+              </a:ext>
+            </a:extLst>
+          </p:cNvPr>
+          <p:cNvSpPr txBox="1"/>
+          <p:nvPr userDrawn="1"/>
+        </p:nvSpPr>
+        <p:spPr>
+          <a:xfrm>
+            <a:off x="259216" y="6209629"/>
+            <a:ext cx="2132315" cy="584775"/>
+          </a:xfrm>
+          <a:prstGeom prst="rect">
+            <a:avLst/>
+          </a:prstGeom>
+          <a:noFill/>
+        </p:spPr>
+        <p:txBody>
+          <a:bodyPr wrap="none" rtlCol="0">
+            <a:spAutoFit/>
+          </a:bodyPr>
+          <a:lstStyle/>
+          <a:p>
+            <a:r>
+              <a:rPr lang="en-US" sz="1600" dirty="0">
+                <a:solidFill>
+                  <a:srgbClr val="FCCA3A"/>
+                </a:solidFill>
+                <a:latin typeface="Inter Medium" panose="02000503000000020004" pitchFamily="2" charset="0"/>
+                <a:ea typeface="Inter Medium" panose="02000503000000020004" pitchFamily="2" charset="0"/>
+              </a:rPr>
+              <a:t>Dave Hearne</a:t>
+            </a:r>
+          </a:p>
+          <a:p>
+            <a:r>
+              <a:rPr lang="en-US" sz="1600" dirty="0" err="1">
+                <a:solidFill>
+                  <a:srgbClr val="FCCA3A"/>
+                </a:solidFill>
+                <a:latin typeface="Inter Medium" panose="02000503000000020004" pitchFamily="2" charset="0"/>
+                <a:ea typeface="Inter Medium" panose="02000503000000020004" pitchFamily="2" charset="0"/>
+              </a:rPr>
+              <a:t>dave.hearne@wit.ie</a:t>
+            </a:r>
+            <a:endParaRPr lang="en-US" sz="1600" dirty="0">
+              <a:solidFill>
+                <a:srgbClr val="FCCA3A"/>
+              </a:solidFill>
+              <a:latin typeface="Inter Medium" panose="02000503000000020004" pitchFamily="2" charset="0"/>
+              <a:ea typeface="Inter Medium" panose="02000503000000020004" pitchFamily="2" charset="0"/>
+            </a:endParaRPr>
+          </a:p>
+        </p:txBody>
+      </p:sp>
+      <p:pic>
+        <p:nvPicPr>
+          <p:cNvPr id="10" name="Graphic 9">
+            <a:extLst>
+              <a:ext uri="{FF2B5EF4-FFF2-40B4-BE49-F238E27FC236}">
+                <a16:creationId xmlns:a16="http://schemas.microsoft.com/office/drawing/2014/main" id="{D1B1468B-F705-C43B-D7C3-AB7A8471A852}"/>
+              </a:ext>
+            </a:extLst>
+          </p:cNvPr>
+          <p:cNvPicPr>
+            <a:picLocks noChangeAspect="1"/>
+          </p:cNvPicPr>
+          <p:nvPr userDrawn="1"/>
+        </p:nvPicPr>
+        <p:blipFill>
+          <a:blip>
+            <a:extLst>
+              <a:ext uri="{96DAC541-7B7A-43D3-8B79-37D633B846F1}">
+                <asvg:svgBlip xmlns:asvg="http://schemas.microsoft.com/office/drawing/2016/SVG/main" r:embed="rId3"/>
+              </a:ext>
+            </a:extLst>
+          </a:blip>
+          <a:stretch>
+            <a:fillRect/>
+          </a:stretch>
+        </p:blipFill>
+        <p:spPr>
+          <a:xfrm>
+            <a:off x="9203245" y="6176176"/>
+            <a:ext cx="1120090" cy="603766"/>
+          </a:xfrm>
+          <a:prstGeom prst="rect">
+            <a:avLst/>
+          </a:prstGeom>
+        </p:spPr>
+      </p:pic>
+    </p:spTree>
+    <p:extLst>
+      <p:ext uri="{BB962C8B-B14F-4D97-AF65-F5344CB8AC3E}">
+        <p14:creationId xmlns:p14="http://schemas.microsoft.com/office/powerpoint/2010/main" val="3093658911"/>
+      </p:ext>
+    </p:extLst>
+  </p:cSld>
+  <p:clrMapOvr>
+    <a:masterClrMapping/>
+  </p:clrMapOvr>
+  <p:transition spd="slow">
+    <p:push dir="u"/>
+  </p:transition>
+</p:sldLayout>
+</file>
+
+<file path=ppt/slideLayouts/slideLayout4.xml><?xml version="1.0" encoding="utf-8"?>
+<p:sldLayout xmlns:a="http://schemas.openxmlformats.org/drawingml/2006/main" xmlns:r="http://schemas.openxmlformats.org/officeDocument/2006/relationships" xmlns:p="http://schemas.openxmlformats.org/presentationml/2006/main" type="twoObj" preserve="1">
+  <p:cSld name="Two Content">
+    <p:spTree>
+      <p:nvGrpSpPr>
+        <p:cNvPr id="1" name=""/>
+        <p:cNvGrpSpPr/>
+        <p:nvPr/>
+      </p:nvGrpSpPr>
+      <p:grpSpPr>
+        <a:xfrm>
+          <a:off x="0" y="0"/>
+          <a:ext cx="0" cy="0"/>
+          <a:chOff x="0" y="0"/>
+          <a:chExt cx="0" cy="0"/>
+        </a:xfrm>
+      </p:grpSpPr>
+      <p:sp>
+        <p:nvSpPr>
+          <p:cNvPr id="2" name="Title 1"/>
+          <p:cNvSpPr>
+            <a:spLocks noGrp="1"/>
+          </p:cNvSpPr>
+          <p:nvPr>
+            <p:ph type="title"/>
+          </p:nvPr>
+        </p:nvSpPr>
+        <p:spPr/>
+        <p:txBody>
+          <a:bodyPr/>
+          <a:lstStyle/>
+          <a:p>
+            <a:r>
+              <a:rPr lang="en-GB"/>
+              <a:t>Click to edit Master title style</a:t>
+            </a:r>
+            <a:endParaRPr lang="en-IE"/>
+          </a:p>
+        </p:txBody>
+      </p:sp>
+      <p:sp>
+        <p:nvSpPr>
+          <p:cNvPr id="3" name="Content Placeholder 2"/>
+          <p:cNvSpPr>
+            <a:spLocks noGrp="1"/>
+          </p:cNvSpPr>
+          <p:nvPr>
+            <p:ph sz="half" idx="1"/>
+          </p:nvPr>
+        </p:nvSpPr>
+        <p:spPr>
+          <a:xfrm>
+            <a:off x="609600" y="1600201"/>
+            <a:ext cx="5384800" cy="4525963"/>
+          </a:xfrm>
+        </p:spPr>
+        <p:txBody>
+          <a:bodyPr/>
+          <a:lstStyle>
+            <a:lvl1pPr>
+              <a:defRPr sz="2800"/>
+            </a:lvl1pPr>
+            <a:lvl2pPr>
+              <a:defRPr sz="2400"/>
+            </a:lvl2pPr>
+            <a:lvl3pPr>
+              <a:defRPr sz="2000"/>
+            </a:lvl3pPr>
+            <a:lvl4pPr>
+              <a:defRPr sz="1800"/>
+            </a:lvl4pPr>
+            <a:lvl5pPr>
+              <a:defRPr sz="1800"/>
+            </a:lvl5pPr>
+            <a:lvl6pPr>
+              <a:defRPr sz="1800"/>
+            </a:lvl6pPr>
+            <a:lvl7pPr>
+              <a:defRPr sz="1800"/>
+            </a:lvl7pPr>
+            <a:lvl8pPr>
+              <a:defRPr sz="1800"/>
+            </a:lvl8pPr>
+            <a:lvl9pPr>
+              <a:defRPr sz="1800"/>
+            </a:lvl9pPr>
+          </a:lstStyle>
+          <a:p>
+            <a:pPr lvl="0"/>
+            <a:r>
+              <a:rPr lang="en-GB"/>
+              <a:t>Click to edit Master text styles</a:t>
+            </a:r>
+          </a:p>
+          <a:p>
+            <a:pPr lvl="1"/>
+            <a:r>
+              <a:rPr lang="en-GB"/>
+              <a:t>Second level</a:t>
+            </a:r>
+          </a:p>
+          <a:p>
+            <a:pPr lvl="2"/>
+            <a:r>
+              <a:rPr lang="en-GB"/>
+              <a:t>Third level</a:t>
+            </a:r>
+          </a:p>
+          <a:p>
+            <a:pPr lvl="3"/>
+            <a:r>
+              <a:rPr lang="en-GB"/>
+              <a:t>Fourth level</a:t>
+            </a:r>
+          </a:p>
+          <a:p>
+            <a:pPr lvl="4"/>
+            <a:r>
+              <a:rPr lang="en-GB"/>
+              <a:t>Fifth level</a:t>
+            </a:r>
+            <a:endParaRPr lang="en-IE"/>
+          </a:p>
+        </p:txBody>
+      </p:sp>
+      <p:sp>
+        <p:nvSpPr>
+          <p:cNvPr id="4" name="Content Placeholder 3"/>
+          <p:cNvSpPr>
+            <a:spLocks noGrp="1"/>
+          </p:cNvSpPr>
+          <p:nvPr>
+            <p:ph sz="half" idx="2"/>
+          </p:nvPr>
+        </p:nvSpPr>
+        <p:spPr>
+          <a:xfrm>
+            <a:off x="6197600" y="1600201"/>
+            <a:ext cx="5384800" cy="4525963"/>
+          </a:xfrm>
+        </p:spPr>
+        <p:txBody>
+          <a:bodyPr/>
+          <a:lstStyle>
+            <a:lvl1pPr>
+              <a:defRPr sz="2800"/>
+            </a:lvl1pPr>
+            <a:lvl2pPr>
+              <a:defRPr sz="2400"/>
+            </a:lvl2pPr>
+            <a:lvl3pPr>
+              <a:defRPr sz="2000"/>
+            </a:lvl3pPr>
+            <a:lvl4pPr>
+              <a:defRPr sz="1800"/>
+            </a:lvl4pPr>
+            <a:lvl5pPr>
+              <a:defRPr sz="1800"/>
+            </a:lvl5pPr>
+            <a:lvl6pPr>
+              <a:defRPr sz="1800"/>
+            </a:lvl6pPr>
+            <a:lvl7pPr>
+              <a:defRPr sz="1800"/>
+            </a:lvl7pPr>
+            <a:lvl8pPr>
+              <a:defRPr sz="1800"/>
+            </a:lvl8pPr>
+            <a:lvl9pPr>
+              <a:defRPr sz="1800"/>
+            </a:lvl9pPr>
+          </a:lstStyle>
+          <a:p>
+            <a:pPr lvl="0"/>
+            <a:r>
+              <a:rPr lang="en-GB"/>
+              <a:t>Click to edit Master text styles</a:t>
+            </a:r>
+          </a:p>
+          <a:p>
+            <a:pPr lvl="1"/>
+            <a:r>
+              <a:rPr lang="en-GB"/>
+              <a:t>Second level</a:t>
+            </a:r>
+          </a:p>
+          <a:p>
+            <a:pPr lvl="2"/>
+            <a:r>
+              <a:rPr lang="en-GB"/>
+              <a:t>Third level</a:t>
+            </a:r>
+          </a:p>
+          <a:p>
+            <a:pPr lvl="3"/>
+            <a:r>
+              <a:rPr lang="en-GB"/>
+              <a:t>Fourth level</a:t>
+            </a:r>
+          </a:p>
+          <a:p>
+            <a:pPr lvl="4"/>
+            <a:r>
+              <a:rPr lang="en-GB"/>
+              <a:t>Fifth level</a:t>
+            </a:r>
+            <a:endParaRPr lang="en-IE"/>
+          </a:p>
+        </p:txBody>
+      </p:sp>
+      <p:sp>
+        <p:nvSpPr>
+          <p:cNvPr id="5" name="Date Placeholder 4"/>
+          <p:cNvSpPr>
+            <a:spLocks noGrp="1"/>
+          </p:cNvSpPr>
+          <p:nvPr>
+            <p:ph type="dt" sz="half" idx="10"/>
+          </p:nvPr>
+        </p:nvSpPr>
+        <p:spPr/>
+        <p:txBody>
+          <a:bodyPr/>
+          <a:lstStyle/>
+          <a:p>
+            <a:fld id="{1D8BD707-D9CF-40AE-B4C6-C98DA3205C09}" type="datetimeFigureOut">
+              <a:rPr lang="en-US" smtClean="0"/>
+              <a:pPr/>
+              <a:t>3/12/26</a:t>
+            </a:fld>
+            <a:endParaRPr lang="en-US"/>
+          </a:p>
+        </p:txBody>
+      </p:sp>
+      <p:sp>
+        <p:nvSpPr>
+          <p:cNvPr id="6" name="Footer Placeholder 5"/>
+          <p:cNvSpPr>
+            <a:spLocks noGrp="1"/>
+          </p:cNvSpPr>
+          <p:nvPr>
+            <p:ph type="ftr" sz="quarter" idx="11"/>
+          </p:nvPr>
+        </p:nvSpPr>
+        <p:spPr/>
+        <p:txBody>
+          <a:bodyPr/>
+          <a:lstStyle/>
+          <a:p>
+            <a:endParaRPr lang="en-US"/>
+          </a:p>
+        </p:txBody>
+      </p:sp>
+      <p:sp>
+        <p:nvSpPr>
+          <p:cNvPr id="7" name="Slide Number Placeholder 6"/>
+          <p:cNvSpPr>
+            <a:spLocks noGrp="1"/>
+          </p:cNvSpPr>
+          <p:nvPr>
+            <p:ph type="sldNum" sz="quarter" idx="12"/>
+          </p:nvPr>
+        </p:nvSpPr>
+        <p:spPr/>
+        <p:txBody>
+          <a:bodyPr/>
+          <a:lstStyle/>
+          <a:p>
+            <a:endParaRPr lang="en-US" dirty="0"/>
+          </a:p>
+        </p:txBody>
+      </p:sp>
+      <p:sp>
+        <p:nvSpPr>
+          <p:cNvPr id="8" name="Rectangle 7">
+            <a:extLst>
+              <a:ext uri="{FF2B5EF4-FFF2-40B4-BE49-F238E27FC236}">
+                <a16:creationId xmlns:a16="http://schemas.microsoft.com/office/drawing/2014/main" id="{36202D4B-7A5C-DFCD-4E23-B52BAB386C2B}"/>
+              </a:ext>
+            </a:extLst>
+          </p:cNvPr>
+          <p:cNvSpPr/>
+          <p:nvPr userDrawn="1"/>
+        </p:nvSpPr>
+        <p:spPr>
+          <a:xfrm>
+            <a:off x="-440871" y="6104965"/>
+            <a:ext cx="13062857" cy="885799"/>
+          </a:xfrm>
+          <a:prstGeom prst="rect">
+            <a:avLst/>
+          </a:prstGeom>
+          <a:solidFill>
+            <a:srgbClr val="435765"/>
+          </a:solidFill>
+        </p:spPr>
+        <p:style>
+          <a:lnRef idx="2">
+            <a:schemeClr val="accent1">
+              <a:shade val="50000"/>
+            </a:schemeClr>
+          </a:lnRef>
+          <a:fillRef idx="1">
+            <a:schemeClr val="accent1"/>
+          </a:fillRef>
+          <a:effectRef idx="0">
+            <a:schemeClr val="accent1"/>
+          </a:effectRef>
+          <a:fontRef idx="minor">
+            <a:schemeClr val="lt1"/>
+          </a:fontRef>
+        </p:style>
+        <p:txBody>
+          <a:bodyPr rtlCol="0" anchor="ctr"/>
+          <a:lstStyle/>
+          <a:p>
+            <a:pPr algn="ctr"/>
+            <a:endParaRPr lang="en-US"/>
+          </a:p>
+        </p:txBody>
+      </p:sp>
+      <p:pic>
+        <p:nvPicPr>
+          <p:cNvPr id="9" name="Picture 8" descr="Text&#10;&#10;Description automatically generated">
+            <a:extLst>
+              <a:ext uri="{FF2B5EF4-FFF2-40B4-BE49-F238E27FC236}">
+                <a16:creationId xmlns:a16="http://schemas.microsoft.com/office/drawing/2014/main" id="{CE485345-2769-0E26-38B0-5837FC4611F1}"/>
+              </a:ext>
+            </a:extLst>
+          </p:cNvPr>
+          <p:cNvPicPr>
+            <a:picLocks noChangeAspect="1"/>
+          </p:cNvPicPr>
+          <p:nvPr userDrawn="1"/>
+        </p:nvPicPr>
+        <p:blipFill>
+          <a:blip r:embed="rId2"/>
+          <a:stretch>
+            <a:fillRect/>
+          </a:stretch>
+        </p:blipFill>
+        <p:spPr>
+          <a:xfrm>
+            <a:off x="10467415" y="6013271"/>
+            <a:ext cx="1743635" cy="977493"/>
+          </a:xfrm>
+          <a:prstGeom prst="rect">
+            <a:avLst/>
+          </a:prstGeom>
+        </p:spPr>
+      </p:pic>
+      <p:sp>
+        <p:nvSpPr>
+          <p:cNvPr id="10" name="TextBox 9">
+            <a:extLst>
+              <a:ext uri="{FF2B5EF4-FFF2-40B4-BE49-F238E27FC236}">
+                <a16:creationId xmlns:a16="http://schemas.microsoft.com/office/drawing/2014/main" id="{2103F164-7135-2751-8A01-C2F26DED14E2}"/>
+              </a:ext>
+            </a:extLst>
+          </p:cNvPr>
+          <p:cNvSpPr txBox="1"/>
+          <p:nvPr userDrawn="1"/>
+        </p:nvSpPr>
+        <p:spPr>
+          <a:xfrm>
+            <a:off x="259216" y="6209629"/>
+            <a:ext cx="2132315" cy="584775"/>
+          </a:xfrm>
+          <a:prstGeom prst="rect">
+            <a:avLst/>
+          </a:prstGeom>
+          <a:noFill/>
+        </p:spPr>
+        <p:txBody>
+          <a:bodyPr wrap="none" rtlCol="0">
+            <a:spAutoFit/>
+          </a:bodyPr>
+          <a:lstStyle/>
+          <a:p>
+            <a:r>
+              <a:rPr lang="en-US" sz="1600" dirty="0">
+                <a:solidFill>
+                  <a:srgbClr val="FCCA3A"/>
+                </a:solidFill>
+                <a:latin typeface="Inter Medium" panose="02000503000000020004" pitchFamily="2" charset="0"/>
+                <a:ea typeface="Inter Medium" panose="02000503000000020004" pitchFamily="2" charset="0"/>
+              </a:rPr>
+              <a:t>Dave Hearne</a:t>
+            </a:r>
+          </a:p>
+          <a:p>
+            <a:r>
+              <a:rPr lang="en-US" sz="1600" dirty="0" err="1">
+                <a:solidFill>
+                  <a:srgbClr val="FCCA3A"/>
+                </a:solidFill>
+                <a:latin typeface="Inter Medium" panose="02000503000000020004" pitchFamily="2" charset="0"/>
+                <a:ea typeface="Inter Medium" panose="02000503000000020004" pitchFamily="2" charset="0"/>
+              </a:rPr>
+              <a:t>dave.hearne@wit.ie</a:t>
+            </a:r>
+            <a:endParaRPr lang="en-US" sz="1600" dirty="0">
+              <a:solidFill>
+                <a:srgbClr val="FCCA3A"/>
+              </a:solidFill>
+              <a:latin typeface="Inter Medium" panose="02000503000000020004" pitchFamily="2" charset="0"/>
+              <a:ea typeface="Inter Medium" panose="02000503000000020004" pitchFamily="2" charset="0"/>
+            </a:endParaRPr>
+          </a:p>
+        </p:txBody>
+      </p:sp>
+      <p:pic>
+        <p:nvPicPr>
+          <p:cNvPr id="11" name="Graphic 10">
+            <a:extLst>
+              <a:ext uri="{FF2B5EF4-FFF2-40B4-BE49-F238E27FC236}">
+                <a16:creationId xmlns:a16="http://schemas.microsoft.com/office/drawing/2014/main" id="{EAA99D1C-BE1B-68D4-6382-C3DC54918C6C}"/>
+              </a:ext>
+            </a:extLst>
+          </p:cNvPr>
+          <p:cNvPicPr>
+            <a:picLocks noChangeAspect="1"/>
+          </p:cNvPicPr>
+          <p:nvPr userDrawn="1"/>
+        </p:nvPicPr>
+        <p:blipFill>
+          <a:blip>
+            <a:extLst>
+              <a:ext uri="{96DAC541-7B7A-43D3-8B79-37D633B846F1}">
+                <asvg:svgBlip xmlns:asvg="http://schemas.microsoft.com/office/drawing/2016/SVG/main" r:embed="rId3"/>
+              </a:ext>
+            </a:extLst>
+          </a:blip>
+          <a:stretch>
+            <a:fillRect/>
+          </a:stretch>
+        </p:blipFill>
+        <p:spPr>
+          <a:xfrm>
+            <a:off x="9203245" y="6176176"/>
+            <a:ext cx="1120090" cy="603766"/>
+          </a:xfrm>
+          <a:prstGeom prst="rect">
+            <a:avLst/>
+          </a:prstGeom>
+        </p:spPr>
+      </p:pic>
+    </p:spTree>
+    <p:extLst>
+      <p:ext uri="{BB962C8B-B14F-4D97-AF65-F5344CB8AC3E}">
+        <p14:creationId xmlns:p14="http://schemas.microsoft.com/office/powerpoint/2010/main" val="1548832460"/>
+      </p:ext>
+    </p:extLst>
+  </p:cSld>
+  <p:clrMapOvr>
+    <a:masterClrMapping/>
+  </p:clrMapOvr>
+  <p:transition spd="slow">
+    <p:push dir="u"/>
+  </p:transition>
+</p:sldLayout>
+</file>
+
+<file path=ppt/slideLayouts/slideLayout5.xml><?xml version="1.0" encoding="utf-8"?>
+<p:sldLayout xmlns:a="http://schemas.openxmlformats.org/drawingml/2006/main" xmlns:r="http://schemas.openxmlformats.org/officeDocument/2006/relationships" xmlns:p="http://schemas.openxmlformats.org/presentationml/2006/main" type="twoTxTwoObj" preserve="1">
+  <p:cSld name="Comparison">
+    <p:spTree>
+      <p:nvGrpSpPr>
+        <p:cNvPr id="1" name=""/>
+        <p:cNvGrpSpPr/>
+        <p:nvPr/>
+      </p:nvGrpSpPr>
+      <p:grpSpPr>
+        <a:xfrm>
+          <a:off x="0" y="0"/>
+          <a:ext cx="0" cy="0"/>
+          <a:chOff x="0" y="0"/>
+          <a:chExt cx="0" cy="0"/>
+        </a:xfrm>
+      </p:grpSpPr>
+      <p:sp>
+        <p:nvSpPr>
+          <p:cNvPr id="2" name="Title 1"/>
+          <p:cNvSpPr>
+            <a:spLocks noGrp="1"/>
+          </p:cNvSpPr>
+          <p:nvPr>
+            <p:ph type="title"/>
+          </p:nvPr>
+        </p:nvSpPr>
+        <p:spPr/>
+        <p:txBody>
+          <a:bodyPr/>
+          <a:lstStyle>
+            <a:lvl1pPr>
+              <a:defRPr/>
+            </a:lvl1pPr>
+          </a:lstStyle>
+          <a:p>
+            <a:r>
+              <a:rPr lang="en-GB"/>
+              <a:t>Click to edit Master title style</a:t>
+            </a:r>
+            <a:endParaRPr lang="en-IE"/>
+          </a:p>
+        </p:txBody>
+      </p:sp>
+      <p:sp>
+        <p:nvSpPr>
+          <p:cNvPr id="3" name="Text Placeholder 2"/>
+          <p:cNvSpPr>
+            <a:spLocks noGrp="1"/>
+          </p:cNvSpPr>
+          <p:nvPr>
+            <p:ph type="body" idx="1"/>
+          </p:nvPr>
+        </p:nvSpPr>
+        <p:spPr>
+          <a:xfrm>
+            <a:off x="609600" y="1535113"/>
+            <a:ext cx="5386917" cy="639762"/>
+          </a:xfrm>
+        </p:spPr>
+        <p:txBody>
+          <a:bodyPr anchor="b"/>
+          <a:lstStyle>
+            <a:lvl1pPr marL="0" indent="0">
+              <a:buNone/>
+              <a:defRPr sz="2400" b="1"/>
+            </a:lvl1pPr>
+            <a:lvl2pPr marL="457200" indent="0">
+              <a:buNone/>
+              <a:defRPr sz="2000" b="1"/>
+            </a:lvl2pPr>
+            <a:lvl3pPr marL="914400" indent="0">
+              <a:buNone/>
+              <a:defRPr sz="1800" b="1"/>
+            </a:lvl3pPr>
+            <a:lvl4pPr marL="1371600" indent="0">
+              <a:buNone/>
+              <a:defRPr sz="1600" b="1"/>
+            </a:lvl4pPr>
+            <a:lvl5pPr marL="1828800" indent="0">
+              <a:buNone/>
+              <a:defRPr sz="1600" b="1"/>
+            </a:lvl5pPr>
+            <a:lvl6pPr marL="2286000" indent="0">
+              <a:buNone/>
+              <a:defRPr sz="1600" b="1"/>
+            </a:lvl6pPr>
+            <a:lvl7pPr marL="2743200" indent="0">
+              <a:buNone/>
+              <a:defRPr sz="1600" b="1"/>
+            </a:lvl7pPr>
+            <a:lvl8pPr marL="3200400" indent="0">
+              <a:buNone/>
+              <a:defRPr sz="1600" b="1"/>
+            </a:lvl8pPr>
+            <a:lvl9pPr marL="3657600" indent="0">
+              <a:buNone/>
+              <a:defRPr sz="1600" b="1"/>
+            </a:lvl9pPr>
+          </a:lstStyle>
+          <a:p>
+            <a:pPr lvl="0"/>
+            <a:r>
+              <a:rPr lang="en-GB"/>
+              <a:t>Click to edit Master text styles</a:t>
+            </a:r>
+          </a:p>
+        </p:txBody>
+      </p:sp>
+      <p:sp>
+        <p:nvSpPr>
+          <p:cNvPr id="4" name="Content Placeholder 3"/>
+          <p:cNvSpPr>
+            <a:spLocks noGrp="1"/>
+          </p:cNvSpPr>
+          <p:nvPr>
+            <p:ph sz="half" idx="2"/>
+          </p:nvPr>
+        </p:nvSpPr>
+        <p:spPr>
+          <a:xfrm>
+            <a:off x="609600" y="2174875"/>
+            <a:ext cx="5386917" cy="3951288"/>
+          </a:xfrm>
+        </p:spPr>
+        <p:txBody>
+          <a:bodyPr/>
+          <a:lstStyle>
+            <a:lvl1pPr>
+              <a:defRPr sz="2400"/>
+            </a:lvl1pPr>
+            <a:lvl2pPr>
+              <a:defRPr sz="2000"/>
+            </a:lvl2pPr>
+            <a:lvl3pPr>
+              <a:defRPr sz="1800"/>
+            </a:lvl3pPr>
+            <a:lvl4pPr>
+              <a:defRPr sz="1600"/>
+            </a:lvl4pPr>
+            <a:lvl5pPr>
+              <a:defRPr sz="1600"/>
+            </a:lvl5pPr>
+            <a:lvl6pPr>
+              <a:defRPr sz="1600"/>
+            </a:lvl6pPr>
+            <a:lvl7pPr>
+              <a:defRPr sz="1600"/>
+            </a:lvl7pPr>
+            <a:lvl8pPr>
+              <a:defRPr sz="1600"/>
+            </a:lvl8pPr>
+            <a:lvl9pPr>
+              <a:defRPr sz="1600"/>
+            </a:lvl9pPr>
+          </a:lstStyle>
+          <a:p>
+            <a:pPr lvl="0"/>
+            <a:r>
+              <a:rPr lang="en-GB"/>
+              <a:t>Click to edit Master text styles</a:t>
+            </a:r>
+          </a:p>
+          <a:p>
+            <a:pPr lvl="1"/>
+            <a:r>
+              <a:rPr lang="en-GB"/>
+              <a:t>Second level</a:t>
+            </a:r>
+          </a:p>
+          <a:p>
+            <a:pPr lvl="2"/>
+            <a:r>
+              <a:rPr lang="en-GB"/>
+              <a:t>Third level</a:t>
+            </a:r>
+          </a:p>
+          <a:p>
+            <a:pPr lvl="3"/>
+            <a:r>
+              <a:rPr lang="en-GB"/>
+              <a:t>Fourth level</a:t>
+            </a:r>
+          </a:p>
+          <a:p>
+            <a:pPr lvl="4"/>
+            <a:r>
+              <a:rPr lang="en-GB"/>
+              <a:t>Fifth level</a:t>
+            </a:r>
+            <a:endParaRPr lang="en-IE"/>
+          </a:p>
+        </p:txBody>
+      </p:sp>
+      <p:sp>
+        <p:nvSpPr>
+          <p:cNvPr id="5" name="Text Placeholder 4"/>
+          <p:cNvSpPr>
+            <a:spLocks noGrp="1"/>
+          </p:cNvSpPr>
+          <p:nvPr>
+            <p:ph type="body" sz="quarter" idx="3"/>
+          </p:nvPr>
+        </p:nvSpPr>
+        <p:spPr>
+          <a:xfrm>
+            <a:off x="6193368" y="1535113"/>
+            <a:ext cx="5389033" cy="639762"/>
+          </a:xfrm>
+        </p:spPr>
+        <p:txBody>
+          <a:bodyPr anchor="b"/>
+          <a:lstStyle>
+            <a:lvl1pPr marL="0" indent="0">
+              <a:buNone/>
+              <a:defRPr sz="2400" b="1"/>
+            </a:lvl1pPr>
+            <a:lvl2pPr marL="457200" indent="0">
+              <a:buNone/>
+              <a:defRPr sz="2000" b="1"/>
+            </a:lvl2pPr>
+            <a:lvl3pPr marL="914400" indent="0">
+              <a:buNone/>
+              <a:defRPr sz="1800" b="1"/>
+            </a:lvl3pPr>
+            <a:lvl4pPr marL="1371600" indent="0">
+              <a:buNone/>
+              <a:defRPr sz="1600" b="1"/>
+            </a:lvl4pPr>
+            <a:lvl5pPr marL="1828800" indent="0">
+              <a:buNone/>
+              <a:defRPr sz="1600" b="1"/>
+            </a:lvl5pPr>
+            <a:lvl6pPr marL="2286000" indent="0">
+              <a:buNone/>
+              <a:defRPr sz="1600" b="1"/>
+            </a:lvl6pPr>
+            <a:lvl7pPr marL="2743200" indent="0">
+              <a:buNone/>
+              <a:defRPr sz="1600" b="1"/>
+            </a:lvl7pPr>
+            <a:lvl8pPr marL="3200400" indent="0">
+              <a:buNone/>
+              <a:defRPr sz="1600" b="1"/>
+            </a:lvl8pPr>
+            <a:lvl9pPr marL="3657600" indent="0">
+              <a:buNone/>
+              <a:defRPr sz="1600" b="1"/>
+            </a:lvl9pPr>
+          </a:lstStyle>
+          <a:p>
+            <a:pPr lvl="0"/>
+            <a:r>
+              <a:rPr lang="en-GB"/>
+              <a:t>Click to edit Master text styles</a:t>
+            </a:r>
+          </a:p>
+        </p:txBody>
+      </p:sp>
+      <p:sp>
+        <p:nvSpPr>
+          <p:cNvPr id="6" name="Content Placeholder 5"/>
+          <p:cNvSpPr>
+            <a:spLocks noGrp="1"/>
+          </p:cNvSpPr>
+          <p:nvPr>
+            <p:ph sz="quarter" idx="4"/>
+          </p:nvPr>
+        </p:nvSpPr>
+        <p:spPr>
+          <a:xfrm>
+            <a:off x="6193368" y="2174875"/>
+            <a:ext cx="5389033" cy="3951288"/>
+          </a:xfrm>
+        </p:spPr>
+        <p:txBody>
+          <a:bodyPr/>
+          <a:lstStyle>
+            <a:lvl1pPr>
+              <a:defRPr sz="2400"/>
+            </a:lvl1pPr>
+            <a:lvl2pPr>
+              <a:defRPr sz="2000"/>
+            </a:lvl2pPr>
+            <a:lvl3pPr>
+              <a:defRPr sz="1800"/>
+            </a:lvl3pPr>
+            <a:lvl4pPr>
+              <a:defRPr sz="1600"/>
+            </a:lvl4pPr>
+            <a:lvl5pPr>
+              <a:defRPr sz="1600"/>
+            </a:lvl5pPr>
+            <a:lvl6pPr>
+              <a:defRPr sz="1600"/>
+            </a:lvl6pPr>
+            <a:lvl7pPr>
+              <a:defRPr sz="1600"/>
+            </a:lvl7pPr>
+            <a:lvl8pPr>
+              <a:defRPr sz="1600"/>
+            </a:lvl8pPr>
+            <a:lvl9pPr>
+              <a:defRPr sz="1600"/>
+            </a:lvl9pPr>
+          </a:lstStyle>
+          <a:p>
+            <a:pPr lvl="0"/>
+            <a:r>
+              <a:rPr lang="en-GB"/>
+              <a:t>Click to edit Master text styles</a:t>
+            </a:r>
+          </a:p>
+          <a:p>
+            <a:pPr lvl="1"/>
+            <a:r>
+              <a:rPr lang="en-GB"/>
+              <a:t>Second level</a:t>
+            </a:r>
+          </a:p>
+          <a:p>
+            <a:pPr lvl="2"/>
+            <a:r>
+              <a:rPr lang="en-GB"/>
+              <a:t>Third level</a:t>
+            </a:r>
+          </a:p>
+          <a:p>
+            <a:pPr lvl="3"/>
+            <a:r>
+              <a:rPr lang="en-GB"/>
+              <a:t>Fourth level</a:t>
+            </a:r>
+          </a:p>
+          <a:p>
+            <a:pPr lvl="4"/>
+            <a:r>
+              <a:rPr lang="en-GB"/>
+              <a:t>Fifth level</a:t>
+            </a:r>
+            <a:endParaRPr lang="en-IE"/>
+          </a:p>
+        </p:txBody>
+      </p:sp>
+      <p:sp>
+        <p:nvSpPr>
+          <p:cNvPr id="7" name="Date Placeholder 6"/>
+          <p:cNvSpPr>
+            <a:spLocks noGrp="1"/>
+          </p:cNvSpPr>
+          <p:nvPr>
+            <p:ph type="dt" sz="half" idx="10"/>
+          </p:nvPr>
+        </p:nvSpPr>
+        <p:spPr/>
+        <p:txBody>
+          <a:bodyPr/>
+          <a:lstStyle/>
+          <a:p>
+            <a:fld id="{1D8BD707-D9CF-40AE-B4C6-C98DA3205C09}" type="datetimeFigureOut">
+              <a:rPr lang="en-US" smtClean="0"/>
+              <a:pPr/>
+              <a:t>3/12/26</a:t>
+            </a:fld>
+            <a:endParaRPr lang="en-US"/>
+          </a:p>
+        </p:txBody>
+      </p:sp>
+      <p:sp>
+        <p:nvSpPr>
+          <p:cNvPr id="8" name="Footer Placeholder 7"/>
+          <p:cNvSpPr>
+            <a:spLocks noGrp="1"/>
+          </p:cNvSpPr>
+          <p:nvPr>
+            <p:ph type="ftr" sz="quarter" idx="11"/>
+          </p:nvPr>
+        </p:nvSpPr>
+        <p:spPr/>
+        <p:txBody>
+          <a:bodyPr/>
+          <a:lstStyle/>
+          <a:p>
+            <a:endParaRPr lang="en-US"/>
+          </a:p>
+        </p:txBody>
+      </p:sp>
+      <p:sp>
+        <p:nvSpPr>
+          <p:cNvPr id="9" name="Slide Number Placeholder 8"/>
+          <p:cNvSpPr>
+            <a:spLocks noGrp="1"/>
+          </p:cNvSpPr>
+          <p:nvPr>
+            <p:ph type="sldNum" sz="quarter" idx="12"/>
+          </p:nvPr>
+        </p:nvSpPr>
+        <p:spPr/>
+        <p:txBody>
+          <a:bodyPr/>
+          <a:lstStyle/>
+          <a:p>
+            <a:endParaRPr lang="en-US" dirty="0"/>
+          </a:p>
+        </p:txBody>
+      </p:sp>
+      <p:sp>
+        <p:nvSpPr>
+          <p:cNvPr id="10" name="Rectangle 9">
+            <a:extLst>
+              <a:ext uri="{FF2B5EF4-FFF2-40B4-BE49-F238E27FC236}">
+                <a16:creationId xmlns:a16="http://schemas.microsoft.com/office/drawing/2014/main" id="{21FD9F02-5C57-E6A0-E5CF-7A31EF03B80A}"/>
+              </a:ext>
+            </a:extLst>
+          </p:cNvPr>
+          <p:cNvSpPr/>
+          <p:nvPr userDrawn="1"/>
+        </p:nvSpPr>
+        <p:spPr>
+          <a:xfrm>
+            <a:off x="-440871" y="6104965"/>
+            <a:ext cx="13062857" cy="885799"/>
+          </a:xfrm>
+          <a:prstGeom prst="rect">
+            <a:avLst/>
+          </a:prstGeom>
+          <a:solidFill>
+            <a:srgbClr val="435765"/>
+          </a:solidFill>
+        </p:spPr>
+        <p:style>
+          <a:lnRef idx="2">
+            <a:schemeClr val="accent1">
+              <a:shade val="50000"/>
+            </a:schemeClr>
+          </a:lnRef>
+          <a:fillRef idx="1">
+            <a:schemeClr val="accent1"/>
+          </a:fillRef>
+          <a:effectRef idx="0">
+            <a:schemeClr val="accent1"/>
+          </a:effectRef>
+          <a:fontRef idx="minor">
+            <a:schemeClr val="lt1"/>
+          </a:fontRef>
+        </p:style>
+        <p:txBody>
+          <a:bodyPr rtlCol="0" anchor="ctr"/>
+          <a:lstStyle/>
+          <a:p>
+            <a:pPr algn="ctr"/>
+            <a:endParaRPr lang="en-US"/>
+          </a:p>
+        </p:txBody>
+      </p:sp>
+      <p:pic>
+        <p:nvPicPr>
+          <p:cNvPr id="11" name="Picture 10" descr="Text&#10;&#10;Description automatically generated">
+            <a:extLst>
+              <a:ext uri="{FF2B5EF4-FFF2-40B4-BE49-F238E27FC236}">
+                <a16:creationId xmlns:a16="http://schemas.microsoft.com/office/drawing/2014/main" id="{460FA012-A931-85B6-9090-9C1046C0E2F3}"/>
+              </a:ext>
+            </a:extLst>
+          </p:cNvPr>
+          <p:cNvPicPr>
+            <a:picLocks noChangeAspect="1"/>
+          </p:cNvPicPr>
+          <p:nvPr userDrawn="1"/>
+        </p:nvPicPr>
+        <p:blipFill>
+          <a:blip r:embed="rId2"/>
+          <a:stretch>
+            <a:fillRect/>
+          </a:stretch>
+        </p:blipFill>
+        <p:spPr>
+          <a:xfrm>
+            <a:off x="10467415" y="6013271"/>
+            <a:ext cx="1743635" cy="977493"/>
+          </a:xfrm>
+          <a:prstGeom prst="rect">
+            <a:avLst/>
+          </a:prstGeom>
+        </p:spPr>
+      </p:pic>
+      <p:sp>
+        <p:nvSpPr>
+          <p:cNvPr id="12" name="TextBox 11">
+            <a:extLst>
+              <a:ext uri="{FF2B5EF4-FFF2-40B4-BE49-F238E27FC236}">
+                <a16:creationId xmlns:a16="http://schemas.microsoft.com/office/drawing/2014/main" id="{2040A62C-85DB-7BD4-908F-A84D91C27FCE}"/>
+              </a:ext>
+            </a:extLst>
+          </p:cNvPr>
+          <p:cNvSpPr txBox="1"/>
+          <p:nvPr userDrawn="1"/>
+        </p:nvSpPr>
+        <p:spPr>
+          <a:xfrm>
+            <a:off x="259216" y="6209629"/>
+            <a:ext cx="2132315" cy="584775"/>
+          </a:xfrm>
+          <a:prstGeom prst="rect">
+            <a:avLst/>
+          </a:prstGeom>
+          <a:noFill/>
+        </p:spPr>
+        <p:txBody>
+          <a:bodyPr wrap="none" rtlCol="0">
+            <a:spAutoFit/>
+          </a:bodyPr>
+          <a:lstStyle/>
+          <a:p>
+            <a:r>
+              <a:rPr lang="en-US" sz="1600" dirty="0">
+                <a:solidFill>
+                  <a:srgbClr val="FCCA3A"/>
+                </a:solidFill>
+                <a:latin typeface="Inter Medium" panose="02000503000000020004" pitchFamily="2" charset="0"/>
+                <a:ea typeface="Inter Medium" panose="02000503000000020004" pitchFamily="2" charset="0"/>
+              </a:rPr>
+              <a:t>Dave Hearne</a:t>
+            </a:r>
+          </a:p>
+          <a:p>
+            <a:r>
+              <a:rPr lang="en-US" sz="1600" dirty="0" err="1">
+                <a:solidFill>
+                  <a:srgbClr val="FCCA3A"/>
+                </a:solidFill>
+                <a:latin typeface="Inter Medium" panose="02000503000000020004" pitchFamily="2" charset="0"/>
+                <a:ea typeface="Inter Medium" panose="02000503000000020004" pitchFamily="2" charset="0"/>
+              </a:rPr>
+              <a:t>dave.hearne@wit.ie</a:t>
+            </a:r>
+            <a:endParaRPr lang="en-US" sz="1600" dirty="0">
+              <a:solidFill>
+                <a:srgbClr val="FCCA3A"/>
+              </a:solidFill>
+              <a:latin typeface="Inter Medium" panose="02000503000000020004" pitchFamily="2" charset="0"/>
+              <a:ea typeface="Inter Medium" panose="02000503000000020004" pitchFamily="2" charset="0"/>
+            </a:endParaRPr>
+          </a:p>
+        </p:txBody>
+      </p:sp>
+      <p:pic>
+        <p:nvPicPr>
+          <p:cNvPr id="13" name="Graphic 12">
+            <a:extLst>
+              <a:ext uri="{FF2B5EF4-FFF2-40B4-BE49-F238E27FC236}">
+                <a16:creationId xmlns:a16="http://schemas.microsoft.com/office/drawing/2014/main" id="{CD3594CD-5D35-D344-EFD1-FF0FCFAD203F}"/>
+              </a:ext>
+            </a:extLst>
+          </p:cNvPr>
+          <p:cNvPicPr>
+            <a:picLocks noChangeAspect="1"/>
+          </p:cNvPicPr>
+          <p:nvPr userDrawn="1"/>
+        </p:nvPicPr>
+        <p:blipFill>
+          <a:blip>
+            <a:extLst>
+              <a:ext uri="{96DAC541-7B7A-43D3-8B79-37D633B846F1}">
+                <asvg:svgBlip xmlns:asvg="http://schemas.microsoft.com/office/drawing/2016/SVG/main" r:embed="rId3"/>
+              </a:ext>
+            </a:extLst>
+          </a:blip>
+          <a:stretch>
+            <a:fillRect/>
+          </a:stretch>
+        </p:blipFill>
+        <p:spPr>
+          <a:xfrm>
+            <a:off x="9203245" y="6176176"/>
+            <a:ext cx="1120090" cy="603766"/>
+          </a:xfrm>
+          <a:prstGeom prst="rect">
+            <a:avLst/>
+          </a:prstGeom>
+        </p:spPr>
+      </p:pic>
+    </p:spTree>
+    <p:extLst>
+      <p:ext uri="{BB962C8B-B14F-4D97-AF65-F5344CB8AC3E}">
+        <p14:creationId xmlns:p14="http://schemas.microsoft.com/office/powerpoint/2010/main" val="271303830"/>
+      </p:ext>
+    </p:extLst>
+  </p:cSld>
+  <p:clrMapOvr>
+    <a:masterClrMapping/>
+  </p:clrMapOvr>
+  <p:transition spd="slow">
+    <p:push dir="u"/>
+  </p:transition>
+</p:sldLayout>
+</file>
+
+<file path=ppt/slideLayouts/slideLayout6.xml><?xml version="1.0" encoding="utf-8"?>
+<p:sldLayout xmlns:a="http://schemas.openxmlformats.org/drawingml/2006/main" xmlns:r="http://schemas.openxmlformats.org/officeDocument/2006/relationships" xmlns:p="http://schemas.openxmlformats.org/presentationml/2006/main" type="titleOnly" preserve="1">
+  <p:cSld name="Title Only">
+    <p:spTree>
+      <p:nvGrpSpPr>
+        <p:cNvPr id="1" name=""/>
+        <p:cNvGrpSpPr/>
+        <p:nvPr/>
+      </p:nvGrpSpPr>
+      <p:grpSpPr>
+        <a:xfrm>
+          <a:off x="0" y="0"/>
+          <a:ext cx="0" cy="0"/>
+          <a:chOff x="0" y="0"/>
+          <a:chExt cx="0" cy="0"/>
+        </a:xfrm>
+      </p:grpSpPr>
+      <p:sp>
+        <p:nvSpPr>
+          <p:cNvPr id="2" name="Title 1"/>
+          <p:cNvSpPr>
+            <a:spLocks noGrp="1"/>
+          </p:cNvSpPr>
+          <p:nvPr>
+            <p:ph type="title"/>
+          </p:nvPr>
+        </p:nvSpPr>
+        <p:spPr/>
+        <p:txBody>
+          <a:bodyPr/>
+          <a:lstStyle/>
+          <a:p>
+            <a:r>
+              <a:rPr lang="en-GB"/>
+              <a:t>Click to edit Master title style</a:t>
+            </a:r>
+            <a:endParaRPr lang="en-IE"/>
+          </a:p>
+        </p:txBody>
+      </p:sp>
+      <p:sp>
+        <p:nvSpPr>
+          <p:cNvPr id="3" name="Date Placeholder 2"/>
+          <p:cNvSpPr>
+            <a:spLocks noGrp="1"/>
+          </p:cNvSpPr>
+          <p:nvPr>
+            <p:ph type="dt" sz="half" idx="10"/>
+          </p:nvPr>
+        </p:nvSpPr>
+        <p:spPr/>
+        <p:txBody>
+          <a:bodyPr/>
+          <a:lstStyle/>
+          <a:p>
+            <a:fld id="{1D8BD707-D9CF-40AE-B4C6-C98DA3205C09}" type="datetimeFigureOut">
+              <a:rPr lang="en-US" smtClean="0"/>
+              <a:pPr/>
+              <a:t>3/12/26</a:t>
+            </a:fld>
+            <a:endParaRPr lang="en-US"/>
+          </a:p>
+        </p:txBody>
+      </p:sp>
+      <p:sp>
+        <p:nvSpPr>
+          <p:cNvPr id="4" name="Footer Placeholder 3"/>
+          <p:cNvSpPr>
+            <a:spLocks noGrp="1"/>
+          </p:cNvSpPr>
+          <p:nvPr>
+            <p:ph type="ftr" sz="quarter" idx="11"/>
+          </p:nvPr>
+        </p:nvSpPr>
+        <p:spPr/>
+        <p:txBody>
+          <a:bodyPr/>
+          <a:lstStyle/>
+          <a:p>
+            <a:endParaRPr lang="en-US"/>
+          </a:p>
+        </p:txBody>
+      </p:sp>
+      <p:sp>
+        <p:nvSpPr>
+          <p:cNvPr id="5" name="Slide Number Placeholder 4"/>
+          <p:cNvSpPr>
+            <a:spLocks noGrp="1"/>
+          </p:cNvSpPr>
+          <p:nvPr>
+            <p:ph type="sldNum" sz="quarter" idx="12"/>
+          </p:nvPr>
+        </p:nvSpPr>
+        <p:spPr/>
+        <p:txBody>
+          <a:bodyPr/>
+          <a:lstStyle/>
+          <a:p>
+            <a:endParaRPr lang="en-US" dirty="0"/>
+          </a:p>
+        </p:txBody>
+      </p:sp>
+      <p:sp>
+        <p:nvSpPr>
+          <p:cNvPr id="6" name="Rectangle 5">
+            <a:extLst>
+              <a:ext uri="{FF2B5EF4-FFF2-40B4-BE49-F238E27FC236}">
+                <a16:creationId xmlns:a16="http://schemas.microsoft.com/office/drawing/2014/main" id="{5731B68E-C22C-5F83-8572-DCC164821CC8}"/>
+              </a:ext>
+            </a:extLst>
+          </p:cNvPr>
+          <p:cNvSpPr/>
+          <p:nvPr userDrawn="1"/>
+        </p:nvSpPr>
+        <p:spPr>
+          <a:xfrm>
+            <a:off x="-440871" y="6104965"/>
+            <a:ext cx="13062857" cy="885799"/>
+          </a:xfrm>
+          <a:prstGeom prst="rect">
+            <a:avLst/>
+          </a:prstGeom>
+          <a:solidFill>
+            <a:srgbClr val="435765"/>
+          </a:solidFill>
+        </p:spPr>
+        <p:style>
+          <a:lnRef idx="2">
+            <a:schemeClr val="accent1">
+              <a:shade val="50000"/>
+            </a:schemeClr>
+          </a:lnRef>
+          <a:fillRef idx="1">
+            <a:schemeClr val="accent1"/>
+          </a:fillRef>
+          <a:effectRef idx="0">
+            <a:schemeClr val="accent1"/>
+          </a:effectRef>
+          <a:fontRef idx="minor">
+            <a:schemeClr val="lt1"/>
+          </a:fontRef>
+        </p:style>
+        <p:txBody>
+          <a:bodyPr rtlCol="0" anchor="ctr"/>
+          <a:lstStyle/>
+          <a:p>
+            <a:pPr algn="ctr"/>
+            <a:endParaRPr lang="en-US"/>
+          </a:p>
+        </p:txBody>
+      </p:sp>
+      <p:pic>
+        <p:nvPicPr>
+          <p:cNvPr id="7" name="Picture 6" descr="Text&#10;&#10;Description automatically generated">
+            <a:extLst>
+              <a:ext uri="{FF2B5EF4-FFF2-40B4-BE49-F238E27FC236}">
+                <a16:creationId xmlns:a16="http://schemas.microsoft.com/office/drawing/2014/main" id="{E89C3015-3022-CE61-4F57-D9DF7F0A2A5D}"/>
+              </a:ext>
+            </a:extLst>
+          </p:cNvPr>
+          <p:cNvPicPr>
+            <a:picLocks noChangeAspect="1"/>
+          </p:cNvPicPr>
+          <p:nvPr userDrawn="1"/>
+        </p:nvPicPr>
+        <p:blipFill>
+          <a:blip r:embed="rId2"/>
+          <a:stretch>
+            <a:fillRect/>
+          </a:stretch>
+        </p:blipFill>
+        <p:spPr>
+          <a:xfrm>
+            <a:off x="10467415" y="6013271"/>
+            <a:ext cx="1743635" cy="977493"/>
+          </a:xfrm>
+          <a:prstGeom prst="rect">
+            <a:avLst/>
+          </a:prstGeom>
+        </p:spPr>
+      </p:pic>
+      <p:sp>
+        <p:nvSpPr>
+          <p:cNvPr id="8" name="TextBox 7">
+            <a:extLst>
+              <a:ext uri="{FF2B5EF4-FFF2-40B4-BE49-F238E27FC236}">
+                <a16:creationId xmlns:a16="http://schemas.microsoft.com/office/drawing/2014/main" id="{19CDD9F3-7312-AB68-2778-B8D9F4F95B59}"/>
+              </a:ext>
+            </a:extLst>
+          </p:cNvPr>
+          <p:cNvSpPr txBox="1"/>
+          <p:nvPr userDrawn="1"/>
+        </p:nvSpPr>
+        <p:spPr>
+          <a:xfrm>
+            <a:off x="259216" y="6209629"/>
+            <a:ext cx="2132315" cy="584775"/>
+          </a:xfrm>
+          <a:prstGeom prst="rect">
+            <a:avLst/>
+          </a:prstGeom>
+          <a:noFill/>
+        </p:spPr>
+        <p:txBody>
+          <a:bodyPr wrap="none" rtlCol="0">
+            <a:spAutoFit/>
+          </a:bodyPr>
+          <a:lstStyle/>
+          <a:p>
+            <a:r>
+              <a:rPr lang="en-US" sz="1600" dirty="0">
+                <a:solidFill>
+                  <a:srgbClr val="FCCA3A"/>
+                </a:solidFill>
+                <a:latin typeface="Inter Medium" panose="02000503000000020004" pitchFamily="2" charset="0"/>
+                <a:ea typeface="Inter Medium" panose="02000503000000020004" pitchFamily="2" charset="0"/>
+              </a:rPr>
+              <a:t>Dave Hearne</a:t>
+            </a:r>
+          </a:p>
+          <a:p>
+            <a:r>
+              <a:rPr lang="en-US" sz="1600" dirty="0" err="1">
+                <a:solidFill>
+                  <a:srgbClr val="FCCA3A"/>
+                </a:solidFill>
+                <a:latin typeface="Inter Medium" panose="02000503000000020004" pitchFamily="2" charset="0"/>
+                <a:ea typeface="Inter Medium" panose="02000503000000020004" pitchFamily="2" charset="0"/>
+              </a:rPr>
+              <a:t>dave.hearne@wit.ie</a:t>
+            </a:r>
+            <a:endParaRPr lang="en-US" sz="1600" dirty="0">
+              <a:solidFill>
+                <a:srgbClr val="FCCA3A"/>
+              </a:solidFill>
+              <a:latin typeface="Inter Medium" panose="02000503000000020004" pitchFamily="2" charset="0"/>
+              <a:ea typeface="Inter Medium" panose="02000503000000020004" pitchFamily="2" charset="0"/>
+            </a:endParaRPr>
+          </a:p>
+        </p:txBody>
+      </p:sp>
+      <p:pic>
+        <p:nvPicPr>
+          <p:cNvPr id="9" name="Graphic 8">
+            <a:extLst>
+              <a:ext uri="{FF2B5EF4-FFF2-40B4-BE49-F238E27FC236}">
+                <a16:creationId xmlns:a16="http://schemas.microsoft.com/office/drawing/2014/main" id="{567EB333-0E1F-591D-FE8A-35E076FC91DC}"/>
+              </a:ext>
+            </a:extLst>
+          </p:cNvPr>
+          <p:cNvPicPr>
+            <a:picLocks noChangeAspect="1"/>
+          </p:cNvPicPr>
+          <p:nvPr userDrawn="1"/>
+        </p:nvPicPr>
+        <p:blipFill>
+          <a:blip>
+            <a:extLst>
+              <a:ext uri="{96DAC541-7B7A-43D3-8B79-37D633B846F1}">
+                <asvg:svgBlip xmlns:asvg="http://schemas.microsoft.com/office/drawing/2016/SVG/main" r:embed="rId3"/>
+              </a:ext>
+            </a:extLst>
+          </a:blip>
+          <a:stretch>
+            <a:fillRect/>
+          </a:stretch>
+        </p:blipFill>
+        <p:spPr>
+          <a:xfrm>
+            <a:off x="9203245" y="6153874"/>
+            <a:ext cx="1120090" cy="603766"/>
+          </a:xfrm>
+          <a:prstGeom prst="rect">
+            <a:avLst/>
+          </a:prstGeom>
+        </p:spPr>
+      </p:pic>
+    </p:spTree>
+    <p:extLst>
+      <p:ext uri="{BB962C8B-B14F-4D97-AF65-F5344CB8AC3E}">
+        <p14:creationId xmlns:p14="http://schemas.microsoft.com/office/powerpoint/2010/main" val="2830143538"/>
+      </p:ext>
+    </p:extLst>
+  </p:cSld>
+  <p:clrMapOvr>
+    <a:masterClrMapping/>
+  </p:clrMapOvr>
+  <p:transition spd="slow">
+    <p:push dir="u"/>
+  </p:transition>
+</p:sldLayout>
+</file>
+
+<file path=ppt/slideLayouts/slideLayout7.xml><?xml version="1.0" encoding="utf-8"?>
+<p:sldLayout xmlns:a="http://schemas.openxmlformats.org/drawingml/2006/main" xmlns:r="http://schemas.openxmlformats.org/officeDocument/2006/relationships" xmlns:p="http://schemas.openxmlformats.org/presentationml/2006/main" type="blank" preserve="1">
+  <p:cSld name="Blank">
+    <p:spTree>
+      <p:nvGrpSpPr>
+        <p:cNvPr id="1" name=""/>
+        <p:cNvGrpSpPr/>
+        <p:nvPr/>
+      </p:nvGrpSpPr>
+      <p:grpSpPr>
+        <a:xfrm>
+          <a:off x="0" y="0"/>
+          <a:ext cx="0" cy="0"/>
+          <a:chOff x="0" y="0"/>
+          <a:chExt cx="0" cy="0"/>
+        </a:xfrm>
+      </p:grpSpPr>
+      <p:sp>
+        <p:nvSpPr>
+          <p:cNvPr id="2" name="Date Placeholder 1"/>
+          <p:cNvSpPr>
+            <a:spLocks noGrp="1"/>
+          </p:cNvSpPr>
+          <p:nvPr>
+            <p:ph type="dt" sz="half" idx="10"/>
+          </p:nvPr>
+        </p:nvSpPr>
+        <p:spPr/>
+        <p:txBody>
+          <a:bodyPr/>
+          <a:lstStyle/>
+          <a:p>
+            <a:fld id="{1D8BD707-D9CF-40AE-B4C6-C98DA3205C09}" type="datetimeFigureOut">
+              <a:rPr lang="en-US" smtClean="0"/>
+              <a:pPr/>
+              <a:t>3/12/26</a:t>
+            </a:fld>
+            <a:endParaRPr lang="en-US"/>
+          </a:p>
+        </p:txBody>
+      </p:sp>
+      <p:sp>
+        <p:nvSpPr>
+          <p:cNvPr id="3" name="Footer Placeholder 2"/>
+          <p:cNvSpPr>
+            <a:spLocks noGrp="1"/>
+          </p:cNvSpPr>
+          <p:nvPr>
+            <p:ph type="ftr" sz="quarter" idx="11"/>
+          </p:nvPr>
+        </p:nvSpPr>
+        <p:spPr/>
+        <p:txBody>
+          <a:bodyPr/>
+          <a:lstStyle/>
+          <a:p>
+            <a:endParaRPr lang="en-US"/>
+          </a:p>
+        </p:txBody>
+      </p:sp>
+      <p:sp>
+        <p:nvSpPr>
+          <p:cNvPr id="4" name="Slide Number Placeholder 3"/>
+          <p:cNvSpPr>
+            <a:spLocks noGrp="1"/>
+          </p:cNvSpPr>
+          <p:nvPr>
+            <p:ph type="sldNum" sz="quarter" idx="12"/>
+          </p:nvPr>
+        </p:nvSpPr>
+        <p:spPr/>
+        <p:txBody>
+          <a:bodyPr/>
+          <a:lstStyle/>
+          <a:p>
+            <a:fld id="{B6F15528-21DE-4FAA-801E-634DDDAF4B2B}" type="slidenum">
+              <a:rPr lang="en-US" smtClean="0"/>
+              <a:pPr/>
+              <a:t>‹#›</a:t>
+            </a:fld>
+            <a:endParaRPr lang="en-US"/>
+          </a:p>
+        </p:txBody>
+      </p:sp>
+    </p:spTree>
+    <p:extLst>
+      <p:ext uri="{BB962C8B-B14F-4D97-AF65-F5344CB8AC3E}">
+        <p14:creationId xmlns:p14="http://schemas.microsoft.com/office/powerpoint/2010/main" val="3689712921"/>
+      </p:ext>
+    </p:extLst>
+  </p:cSld>
+  <p:clrMapOvr>
+    <a:masterClrMapping/>
+  </p:clrMapOvr>
+  <p:hf sldNum="0" hdr="0" ftr="0" dt="0"/>
+</p:sldLayout>
+</file>
+
+<file path=ppt/slideLayouts/slideLayout8.xml><?xml version="1.0" encoding="utf-8"?>
+<p:sldLayout xmlns:a="http://schemas.openxmlformats.org/drawingml/2006/main" xmlns:r="http://schemas.openxmlformats.org/officeDocument/2006/relationships" xmlns:p="http://schemas.openxmlformats.org/presentationml/2006/main" type="objTx" preserve="1">
+  <p:cSld name="Content with Caption">
+    <p:spTree>
+      <p:nvGrpSpPr>
+        <p:cNvPr id="1" name=""/>
+        <p:cNvGrpSpPr/>
+        <p:nvPr/>
+      </p:nvGrpSpPr>
+      <p:grpSpPr>
+        <a:xfrm>
+          <a:off x="0" y="0"/>
+          <a:ext cx="0" cy="0"/>
+          <a:chOff x="0" y="0"/>
+          <a:chExt cx="0" cy="0"/>
+        </a:xfrm>
+      </p:grpSpPr>
+      <p:sp>
+        <p:nvSpPr>
+          <p:cNvPr id="2" name="Title 1"/>
+          <p:cNvSpPr>
+            <a:spLocks noGrp="1"/>
+          </p:cNvSpPr>
+          <p:nvPr>
+            <p:ph type="title"/>
+          </p:nvPr>
+        </p:nvSpPr>
+        <p:spPr>
+          <a:xfrm>
+            <a:off x="609601" y="273050"/>
+            <a:ext cx="4011084" cy="1162050"/>
+          </a:xfrm>
+        </p:spPr>
+        <p:txBody>
+          <a:bodyPr anchor="b"/>
+          <a:lstStyle>
+            <a:lvl1pPr algn="l">
+              <a:defRPr sz="2000" b="1"/>
+            </a:lvl1pPr>
+          </a:lstStyle>
+          <a:p>
+            <a:r>
+              <a:rPr lang="en-GB"/>
+              <a:t>Click to edit Master title style</a:t>
+            </a:r>
+            <a:endParaRPr lang="en-IE"/>
+          </a:p>
+        </p:txBody>
+      </p:sp>
+      <p:sp>
+        <p:nvSpPr>
+          <p:cNvPr id="3" name="Content Placeholder 2"/>
+          <p:cNvSpPr>
+            <a:spLocks noGrp="1"/>
+          </p:cNvSpPr>
+          <p:nvPr>
+            <p:ph idx="1"/>
+          </p:nvPr>
+        </p:nvSpPr>
+        <p:spPr>
+          <a:xfrm>
+            <a:off x="4766733" y="273051"/>
+            <a:ext cx="6815667" cy="5853113"/>
+          </a:xfrm>
+        </p:spPr>
+        <p:txBody>
+          <a:bodyPr/>
+          <a:lstStyle>
+            <a:lvl1pPr>
+              <a:defRPr sz="3200"/>
+            </a:lvl1pPr>
+            <a:lvl2pPr>
+              <a:defRPr sz="2800"/>
+            </a:lvl2pPr>
+            <a:lvl3pPr>
+              <a:defRPr sz="2400"/>
+            </a:lvl3pPr>
+            <a:lvl4pPr>
+              <a:defRPr sz="2000"/>
+            </a:lvl4pPr>
+            <a:lvl5pPr>
+              <a:defRPr sz="2000"/>
+            </a:lvl5pPr>
+            <a:lvl6pPr>
+              <a:defRPr sz="2000"/>
+            </a:lvl6pPr>
+            <a:lvl7pPr>
+              <a:defRPr sz="2000"/>
+            </a:lvl7pPr>
+            <a:lvl8pPr>
+              <a:defRPr sz="2000"/>
+            </a:lvl8pPr>
+            <a:lvl9pPr>
+              <a:defRPr sz="2000"/>
+            </a:lvl9pPr>
+          </a:lstStyle>
+          <a:p>
+            <a:pPr lvl="0"/>
+            <a:r>
+              <a:rPr lang="en-GB"/>
+              <a:t>Click to edit Master text styles</a:t>
+            </a:r>
+          </a:p>
+          <a:p>
+            <a:pPr lvl="1"/>
+            <a:r>
+              <a:rPr lang="en-GB"/>
+              <a:t>Second level</a:t>
+            </a:r>
+          </a:p>
+          <a:p>
+            <a:pPr lvl="2"/>
+            <a:r>
+              <a:rPr lang="en-GB"/>
+              <a:t>Third level</a:t>
+            </a:r>
+          </a:p>
+          <a:p>
+            <a:pPr lvl="3"/>
+            <a:r>
+              <a:rPr lang="en-GB"/>
+              <a:t>Fourth level</a:t>
+            </a:r>
+          </a:p>
+          <a:p>
+            <a:pPr lvl="4"/>
+            <a:r>
+              <a:rPr lang="en-GB"/>
+              <a:t>Fifth level</a:t>
+            </a:r>
+            <a:endParaRPr lang="en-IE"/>
+          </a:p>
+        </p:txBody>
+      </p:sp>
+      <p:sp>
+        <p:nvSpPr>
+          <p:cNvPr id="4" name="Text Placeholder 3"/>
+          <p:cNvSpPr>
+            <a:spLocks noGrp="1"/>
+          </p:cNvSpPr>
+          <p:nvPr>
+            <p:ph type="body" sz="half" idx="2"/>
+          </p:nvPr>
+        </p:nvSpPr>
+        <p:spPr>
+          <a:xfrm>
+            <a:off x="609601" y="1435101"/>
+            <a:ext cx="4011084" cy="4691063"/>
+          </a:xfrm>
+        </p:spPr>
+        <p:txBody>
+          <a:bodyPr/>
+          <a:lstStyle>
+            <a:lvl1pPr marL="0" indent="0">
+              <a:buNone/>
+              <a:defRPr sz="1400"/>
+            </a:lvl1pPr>
+            <a:lvl2pPr marL="457200" indent="0">
+              <a:buNone/>
+              <a:defRPr sz="1200"/>
+            </a:lvl2pPr>
+            <a:lvl3pPr marL="914400" indent="0">
+              <a:buNone/>
+              <a:defRPr sz="1000"/>
+            </a:lvl3pPr>
+            <a:lvl4pPr marL="1371600" indent="0">
+              <a:buNone/>
+              <a:defRPr sz="900"/>
+            </a:lvl4pPr>
+            <a:lvl5pPr marL="1828800" indent="0">
+              <a:buNone/>
+              <a:defRPr sz="900"/>
+            </a:lvl5pPr>
+            <a:lvl6pPr marL="2286000" indent="0">
+              <a:buNone/>
+              <a:defRPr sz="900"/>
+            </a:lvl6pPr>
+            <a:lvl7pPr marL="2743200" indent="0">
+              <a:buNone/>
+              <a:defRPr sz="900"/>
+            </a:lvl7pPr>
+            <a:lvl8pPr marL="3200400" indent="0">
+              <a:buNone/>
+              <a:defRPr sz="900"/>
+            </a:lvl8pPr>
+            <a:lvl9pPr marL="3657600" indent="0">
+              <a:buNone/>
+              <a:defRPr sz="900"/>
+            </a:lvl9pPr>
+          </a:lstStyle>
+          <a:p>
+            <a:pPr lvl="0"/>
+            <a:r>
+              <a:rPr lang="en-GB"/>
+              <a:t>Click to edit Master text styles</a:t>
+            </a:r>
+          </a:p>
+        </p:txBody>
+      </p:sp>
+      <p:sp>
+        <p:nvSpPr>
+          <p:cNvPr id="5" name="Date Placeholder 4"/>
+          <p:cNvSpPr>
+            <a:spLocks noGrp="1"/>
+          </p:cNvSpPr>
+          <p:nvPr>
+            <p:ph type="dt" sz="half" idx="10"/>
+          </p:nvPr>
+        </p:nvSpPr>
+        <p:spPr/>
+        <p:txBody>
+          <a:bodyPr/>
+          <a:lstStyle/>
+          <a:p>
+            <a:fld id="{1D8BD707-D9CF-40AE-B4C6-C98DA3205C09}" type="datetimeFigureOut">
+              <a:rPr lang="en-US" smtClean="0"/>
+              <a:pPr/>
+              <a:t>3/12/26</a:t>
+            </a:fld>
+            <a:endParaRPr lang="en-US"/>
+          </a:p>
+        </p:txBody>
+      </p:sp>
+      <p:sp>
+        <p:nvSpPr>
+          <p:cNvPr id="6" name="Footer Placeholder 5"/>
+          <p:cNvSpPr>
+            <a:spLocks noGrp="1"/>
+          </p:cNvSpPr>
+          <p:nvPr>
+            <p:ph type="ftr" sz="quarter" idx="11"/>
+          </p:nvPr>
+        </p:nvSpPr>
+        <p:spPr/>
+        <p:txBody>
+          <a:bodyPr/>
+          <a:lstStyle/>
+          <a:p>
+            <a:endParaRPr lang="en-US"/>
+          </a:p>
+        </p:txBody>
+      </p:sp>
+      <p:sp>
+        <p:nvSpPr>
+          <p:cNvPr id="7" name="Slide Number Placeholder 6"/>
+          <p:cNvSpPr>
+            <a:spLocks noGrp="1"/>
+          </p:cNvSpPr>
+          <p:nvPr>
+            <p:ph type="sldNum" sz="quarter" idx="12"/>
+          </p:nvPr>
+        </p:nvSpPr>
+        <p:spPr/>
+        <p:txBody>
+          <a:bodyPr/>
+          <a:lstStyle/>
+          <a:p>
+            <a:endParaRPr lang="en-US" dirty="0"/>
+          </a:p>
+        </p:txBody>
+      </p:sp>
+      <p:sp>
+        <p:nvSpPr>
+          <p:cNvPr id="8" name="Rectangle 7">
+            <a:extLst>
+              <a:ext uri="{FF2B5EF4-FFF2-40B4-BE49-F238E27FC236}">
+                <a16:creationId xmlns:a16="http://schemas.microsoft.com/office/drawing/2014/main" id="{02FB14DA-ABED-436F-CF89-3885DA0BD59C}"/>
+              </a:ext>
+            </a:extLst>
+          </p:cNvPr>
+          <p:cNvSpPr/>
+          <p:nvPr userDrawn="1"/>
+        </p:nvSpPr>
+        <p:spPr>
+          <a:xfrm>
+            <a:off x="-440871" y="6104965"/>
+            <a:ext cx="13062857" cy="885799"/>
+          </a:xfrm>
+          <a:prstGeom prst="rect">
+            <a:avLst/>
+          </a:prstGeom>
+          <a:solidFill>
+            <a:srgbClr val="435765"/>
+          </a:solidFill>
+        </p:spPr>
+        <p:style>
+          <a:lnRef idx="2">
+            <a:schemeClr val="accent1">
+              <a:shade val="50000"/>
+            </a:schemeClr>
+          </a:lnRef>
+          <a:fillRef idx="1">
+            <a:schemeClr val="accent1"/>
+          </a:fillRef>
+          <a:effectRef idx="0">
+            <a:schemeClr val="accent1"/>
+          </a:effectRef>
+          <a:fontRef idx="minor">
+            <a:schemeClr val="lt1"/>
+          </a:fontRef>
+        </p:style>
+        <p:txBody>
+          <a:bodyPr rtlCol="0" anchor="ctr"/>
+          <a:lstStyle/>
+          <a:p>
+            <a:pPr algn="ctr"/>
+            <a:endParaRPr lang="en-US"/>
+          </a:p>
+        </p:txBody>
+      </p:sp>
+      <p:pic>
+        <p:nvPicPr>
+          <p:cNvPr id="9" name="Picture 8" descr="Text&#10;&#10;Description automatically generated">
+            <a:extLst>
+              <a:ext uri="{FF2B5EF4-FFF2-40B4-BE49-F238E27FC236}">
+                <a16:creationId xmlns:a16="http://schemas.microsoft.com/office/drawing/2014/main" id="{FFD60E0C-C41C-5241-890B-8ACA4B8B6832}"/>
+              </a:ext>
+            </a:extLst>
+          </p:cNvPr>
+          <p:cNvPicPr>
+            <a:picLocks noChangeAspect="1"/>
+          </p:cNvPicPr>
+          <p:nvPr userDrawn="1"/>
+        </p:nvPicPr>
+        <p:blipFill>
+          <a:blip r:embed="rId2"/>
+          <a:stretch>
+            <a:fillRect/>
+          </a:stretch>
+        </p:blipFill>
+        <p:spPr>
+          <a:xfrm>
+            <a:off x="10467415" y="6013271"/>
+            <a:ext cx="1743635" cy="977493"/>
+          </a:xfrm>
+          <a:prstGeom prst="rect">
+            <a:avLst/>
+          </a:prstGeom>
+        </p:spPr>
+      </p:pic>
+      <p:sp>
+        <p:nvSpPr>
+          <p:cNvPr id="10" name="TextBox 9">
+            <a:extLst>
+              <a:ext uri="{FF2B5EF4-FFF2-40B4-BE49-F238E27FC236}">
+                <a16:creationId xmlns:a16="http://schemas.microsoft.com/office/drawing/2014/main" id="{F7BDD665-175E-EAEB-6E64-4430067EFD0F}"/>
+              </a:ext>
+            </a:extLst>
+          </p:cNvPr>
+          <p:cNvSpPr txBox="1"/>
+          <p:nvPr userDrawn="1"/>
+        </p:nvSpPr>
+        <p:spPr>
+          <a:xfrm>
+            <a:off x="259216" y="6209629"/>
+            <a:ext cx="2132315" cy="584775"/>
+          </a:xfrm>
+          <a:prstGeom prst="rect">
+            <a:avLst/>
+          </a:prstGeom>
+          <a:noFill/>
+        </p:spPr>
+        <p:txBody>
+          <a:bodyPr wrap="none" rtlCol="0">
+            <a:spAutoFit/>
+          </a:bodyPr>
+          <a:lstStyle/>
+          <a:p>
+            <a:r>
+              <a:rPr lang="en-US" sz="1600" dirty="0">
+                <a:solidFill>
+                  <a:srgbClr val="FCCA3A"/>
+                </a:solidFill>
+                <a:latin typeface="Inter Medium" panose="02000503000000020004" pitchFamily="2" charset="0"/>
+                <a:ea typeface="Inter Medium" panose="02000503000000020004" pitchFamily="2" charset="0"/>
+              </a:rPr>
+              <a:t>Dave Hearne</a:t>
+            </a:r>
+          </a:p>
+          <a:p>
+            <a:r>
+              <a:rPr lang="en-US" sz="1600" dirty="0" err="1">
+                <a:solidFill>
+                  <a:srgbClr val="FCCA3A"/>
+                </a:solidFill>
+                <a:latin typeface="Inter Medium" panose="02000503000000020004" pitchFamily="2" charset="0"/>
+                <a:ea typeface="Inter Medium" panose="02000503000000020004" pitchFamily="2" charset="0"/>
+              </a:rPr>
+              <a:t>dave.hearne@wit.ie</a:t>
+            </a:r>
+            <a:endParaRPr lang="en-US" sz="1600" dirty="0">
+              <a:solidFill>
+                <a:srgbClr val="FCCA3A"/>
+              </a:solidFill>
+              <a:latin typeface="Inter Medium" panose="02000503000000020004" pitchFamily="2" charset="0"/>
+              <a:ea typeface="Inter Medium" panose="02000503000000020004" pitchFamily="2" charset="0"/>
+            </a:endParaRPr>
+          </a:p>
+        </p:txBody>
+      </p:sp>
+      <p:pic>
+        <p:nvPicPr>
+          <p:cNvPr id="11" name="Graphic 10">
+            <a:extLst>
+              <a:ext uri="{FF2B5EF4-FFF2-40B4-BE49-F238E27FC236}">
+                <a16:creationId xmlns:a16="http://schemas.microsoft.com/office/drawing/2014/main" id="{EBD0E256-8149-C647-97BF-0F74EF72C378}"/>
+              </a:ext>
+            </a:extLst>
+          </p:cNvPr>
+          <p:cNvPicPr>
+            <a:picLocks noChangeAspect="1"/>
+          </p:cNvPicPr>
+          <p:nvPr userDrawn="1"/>
+        </p:nvPicPr>
+        <p:blipFill>
+          <a:blip>
+            <a:extLst>
+              <a:ext uri="{96DAC541-7B7A-43D3-8B79-37D633B846F1}">
+                <asvg:svgBlip xmlns:asvg="http://schemas.microsoft.com/office/drawing/2016/SVG/main" r:embed="rId3"/>
+              </a:ext>
+            </a:extLst>
+          </a:blip>
+          <a:stretch>
+            <a:fillRect/>
+          </a:stretch>
+        </p:blipFill>
+        <p:spPr>
+          <a:xfrm>
+            <a:off x="9203245" y="6176176"/>
+            <a:ext cx="1120090" cy="603766"/>
+          </a:xfrm>
+          <a:prstGeom prst="rect">
+            <a:avLst/>
+          </a:prstGeom>
+        </p:spPr>
+      </p:pic>
+    </p:spTree>
+    <p:extLst>
+      <p:ext uri="{BB962C8B-B14F-4D97-AF65-F5344CB8AC3E}">
+        <p14:creationId xmlns:p14="http://schemas.microsoft.com/office/powerpoint/2010/main" val="1791456694"/>
+      </p:ext>
+    </p:extLst>
+  </p:cSld>
+  <p:clrMapOvr>
+    <a:masterClrMapping/>
+  </p:clrMapOvr>
+  <p:transition spd="slow">
+    <p:push dir="u"/>
+  </p:transition>
+</p:sldLayout>
+</file>
+
+<file path=ppt/slideLayouts/slideLayout9.xml><?xml version="1.0" encoding="utf-8"?>
+<p:sldLayout xmlns:a="http://schemas.openxmlformats.org/drawingml/2006/main" xmlns:r="http://schemas.openxmlformats.org/officeDocument/2006/relationships" xmlns:p="http://schemas.openxmlformats.org/presentationml/2006/main" type="picTx" preserve="1">
+  <p:cSld name="Picture with Caption">
+    <p:spTree>
+      <p:nvGrpSpPr>
+        <p:cNvPr id="1" name=""/>
+        <p:cNvGrpSpPr/>
+        <p:nvPr/>
+      </p:nvGrpSpPr>
+      <p:grpSpPr>
+        <a:xfrm>
+          <a:off x="0" y="0"/>
+          <a:ext cx="0" cy="0"/>
+          <a:chOff x="0" y="0"/>
+          <a:chExt cx="0" cy="0"/>
+        </a:xfrm>
+      </p:grpSpPr>
+      <p:sp>
+        <p:nvSpPr>
+          <p:cNvPr id="2" name="Title 1"/>
+          <p:cNvSpPr>
+            <a:spLocks noGrp="1"/>
+          </p:cNvSpPr>
+          <p:nvPr>
+            <p:ph type="title"/>
+          </p:nvPr>
+        </p:nvSpPr>
+        <p:spPr>
+          <a:xfrm>
+            <a:off x="2389717" y="4800600"/>
+            <a:ext cx="7315200" cy="566738"/>
+          </a:xfrm>
+        </p:spPr>
+        <p:txBody>
+          <a:bodyPr anchor="b"/>
+          <a:lstStyle>
+            <a:lvl1pPr algn="l">
+              <a:defRPr sz="2000" b="1"/>
+            </a:lvl1pPr>
+          </a:lstStyle>
+          <a:p>
+            <a:r>
+              <a:rPr lang="en-GB"/>
+              <a:t>Click to edit Master title style</a:t>
+            </a:r>
+            <a:endParaRPr lang="en-IE"/>
+          </a:p>
+        </p:txBody>
+      </p:sp>
+      <p:sp>
+        <p:nvSpPr>
+          <p:cNvPr id="3" name="Picture Placeholder 2"/>
+          <p:cNvSpPr>
+            <a:spLocks noGrp="1"/>
+          </p:cNvSpPr>
+          <p:nvPr>
+            <p:ph type="pic" idx="1"/>
+          </p:nvPr>
+        </p:nvSpPr>
+        <p:spPr>
+          <a:xfrm>
+            <a:off x="2389717" y="612775"/>
+            <a:ext cx="7315200" cy="4114800"/>
+          </a:xfrm>
+        </p:spPr>
+        <p:txBody>
+          <a:bodyPr/>
+          <a:lstStyle>
+            <a:lvl1pPr marL="0" indent="0">
+              <a:buNone/>
+              <a:defRPr sz="3200"/>
+            </a:lvl1pPr>
+            <a:lvl2pPr marL="457200" indent="0">
+              <a:buNone/>
+              <a:defRPr sz="2800"/>
+            </a:lvl2pPr>
+            <a:lvl3pPr marL="914400" indent="0">
+              <a:buNone/>
+              <a:defRPr sz="2400"/>
+            </a:lvl3pPr>
+            <a:lvl4pPr marL="1371600" indent="0">
+              <a:buNone/>
+              <a:defRPr sz="2000"/>
+            </a:lvl4pPr>
+            <a:lvl5pPr marL="1828800" indent="0">
+              <a:buNone/>
+              <a:defRPr sz="2000"/>
+            </a:lvl5pPr>
+            <a:lvl6pPr marL="2286000" indent="0">
+              <a:buNone/>
+              <a:defRPr sz="2000"/>
+            </a:lvl6pPr>
+            <a:lvl7pPr marL="2743200" indent="0">
+              <a:buNone/>
+              <a:defRPr sz="2000"/>
+            </a:lvl7pPr>
+            <a:lvl8pPr marL="3200400" indent="0">
+              <a:buNone/>
+              <a:defRPr sz="2000"/>
+            </a:lvl8pPr>
+            <a:lvl9pPr marL="3657600" indent="0">
+              <a:buNone/>
+              <a:defRPr sz="2000"/>
+            </a:lvl9pPr>
+          </a:lstStyle>
+          <a:p>
+            <a:r>
+              <a:rPr lang="en-GB"/>
+              <a:t>Click icon to add picture</a:t>
+            </a:r>
+            <a:endParaRPr lang="en-IE"/>
+          </a:p>
+        </p:txBody>
+      </p:sp>
+      <p:sp>
+        <p:nvSpPr>
+          <p:cNvPr id="4" name="Text Placeholder 3"/>
+          <p:cNvSpPr>
+            <a:spLocks noGrp="1"/>
+          </p:cNvSpPr>
+          <p:nvPr>
+            <p:ph type="body" sz="half" idx="2"/>
+          </p:nvPr>
+        </p:nvSpPr>
+        <p:spPr>
+          <a:xfrm>
+            <a:off x="2389717" y="5367338"/>
+            <a:ext cx="7315200" cy="804862"/>
+          </a:xfrm>
+        </p:spPr>
+        <p:txBody>
+          <a:bodyPr/>
+          <a:lstStyle>
+            <a:lvl1pPr marL="0" indent="0">
+              <a:buNone/>
+              <a:defRPr sz="1400"/>
+            </a:lvl1pPr>
+            <a:lvl2pPr marL="457200" indent="0">
+              <a:buNone/>
+              <a:defRPr sz="1200"/>
+            </a:lvl2pPr>
+            <a:lvl3pPr marL="914400" indent="0">
+              <a:buNone/>
+              <a:defRPr sz="1000"/>
+            </a:lvl3pPr>
+            <a:lvl4pPr marL="1371600" indent="0">
+              <a:buNone/>
+              <a:defRPr sz="900"/>
+            </a:lvl4pPr>
+            <a:lvl5pPr marL="1828800" indent="0">
+              <a:buNone/>
+              <a:defRPr sz="900"/>
+            </a:lvl5pPr>
+            <a:lvl6pPr marL="2286000" indent="0">
+              <a:buNone/>
+              <a:defRPr sz="900"/>
+            </a:lvl6pPr>
+            <a:lvl7pPr marL="2743200" indent="0">
+              <a:buNone/>
+              <a:defRPr sz="900"/>
+            </a:lvl7pPr>
+            <a:lvl8pPr marL="3200400" indent="0">
+              <a:buNone/>
+              <a:defRPr sz="900"/>
+            </a:lvl8pPr>
+            <a:lvl9pPr marL="3657600" indent="0">
+              <a:buNone/>
+              <a:defRPr sz="900"/>
+            </a:lvl9pPr>
+          </a:lstStyle>
+          <a:p>
+            <a:pPr lvl="0"/>
+            <a:r>
+              <a:rPr lang="en-GB"/>
+              <a:t>Click to edit Master text styles</a:t>
+            </a:r>
+          </a:p>
+        </p:txBody>
+      </p:sp>
+      <p:sp>
+        <p:nvSpPr>
+          <p:cNvPr id="5" name="Date Placeholder 4"/>
+          <p:cNvSpPr>
+            <a:spLocks noGrp="1"/>
+          </p:cNvSpPr>
+          <p:nvPr>
+            <p:ph type="dt" sz="half" idx="10"/>
+          </p:nvPr>
+        </p:nvSpPr>
+        <p:spPr/>
+        <p:txBody>
+          <a:bodyPr/>
+          <a:lstStyle/>
+          <a:p>
+            <a:fld id="{1D8BD707-D9CF-40AE-B4C6-C98DA3205C09}" type="datetimeFigureOut">
+              <a:rPr lang="en-US" smtClean="0"/>
+              <a:pPr/>
+              <a:t>3/12/26</a:t>
+            </a:fld>
+            <a:endParaRPr lang="en-US"/>
+          </a:p>
+        </p:txBody>
+      </p:sp>
+      <p:sp>
+        <p:nvSpPr>
+          <p:cNvPr id="6" name="Footer Placeholder 5"/>
+          <p:cNvSpPr>
+            <a:spLocks noGrp="1"/>
+          </p:cNvSpPr>
+          <p:nvPr>
+            <p:ph type="ftr" sz="quarter" idx="11"/>
+          </p:nvPr>
+        </p:nvSpPr>
+        <p:spPr/>
+        <p:txBody>
+          <a:bodyPr/>
+          <a:lstStyle/>
+          <a:p>
+            <a:endParaRPr lang="en-US"/>
+          </a:p>
+        </p:txBody>
+      </p:sp>
+      <p:sp>
+        <p:nvSpPr>
+          <p:cNvPr id="7" name="Slide Number Placeholder 6"/>
+          <p:cNvSpPr>
+            <a:spLocks noGrp="1"/>
+          </p:cNvSpPr>
+          <p:nvPr>
+            <p:ph type="sldNum" sz="quarter" idx="12"/>
+          </p:nvPr>
+        </p:nvSpPr>
+        <p:spPr/>
+        <p:txBody>
+          <a:bodyPr/>
+          <a:lstStyle/>
+          <a:p>
+            <a:endParaRPr lang="en-US" dirty="0"/>
+          </a:p>
+        </p:txBody>
+      </p:sp>
+      <p:sp>
+        <p:nvSpPr>
+          <p:cNvPr id="8" name="Rectangle 7">
+            <a:extLst>
+              <a:ext uri="{FF2B5EF4-FFF2-40B4-BE49-F238E27FC236}">
+                <a16:creationId xmlns:a16="http://schemas.microsoft.com/office/drawing/2014/main" id="{E56206A1-BF55-8EB0-5D93-028BA5A07708}"/>
+              </a:ext>
+            </a:extLst>
+          </p:cNvPr>
+          <p:cNvSpPr/>
+          <p:nvPr userDrawn="1"/>
+        </p:nvSpPr>
+        <p:spPr>
+          <a:xfrm>
+            <a:off x="-440871" y="6104965"/>
+            <a:ext cx="13062857" cy="885799"/>
+          </a:xfrm>
+          <a:prstGeom prst="rect">
+            <a:avLst/>
+          </a:prstGeom>
+          <a:solidFill>
+            <a:srgbClr val="435765"/>
+          </a:solidFill>
+        </p:spPr>
+        <p:style>
+          <a:lnRef idx="2">
+            <a:schemeClr val="accent1">
+              <a:shade val="50000"/>
+            </a:schemeClr>
+          </a:lnRef>
+          <a:fillRef idx="1">
+            <a:schemeClr val="accent1"/>
+          </a:fillRef>
+          <a:effectRef idx="0">
+            <a:schemeClr val="accent1"/>
+          </a:effectRef>
+          <a:fontRef idx="minor">
+            <a:schemeClr val="lt1"/>
+          </a:fontRef>
+        </p:style>
+        <p:txBody>
+          <a:bodyPr rtlCol="0" anchor="ctr"/>
+          <a:lstStyle/>
+          <a:p>
+            <a:pPr algn="ctr"/>
+            <a:endParaRPr lang="en-US"/>
+          </a:p>
+        </p:txBody>
+      </p:sp>
+      <p:pic>
+        <p:nvPicPr>
+          <p:cNvPr id="9" name="Picture 8" descr="Text&#10;&#10;Description automatically generated">
+            <a:extLst>
+              <a:ext uri="{FF2B5EF4-FFF2-40B4-BE49-F238E27FC236}">
+                <a16:creationId xmlns:a16="http://schemas.microsoft.com/office/drawing/2014/main" id="{F1DCCA6B-D204-BD46-4FCB-7D4883503385}"/>
+              </a:ext>
+            </a:extLst>
+          </p:cNvPr>
+          <p:cNvPicPr>
+            <a:picLocks noChangeAspect="1"/>
+          </p:cNvPicPr>
+          <p:nvPr userDrawn="1"/>
+        </p:nvPicPr>
+        <p:blipFill>
+          <a:blip r:embed="rId2"/>
+          <a:stretch>
+            <a:fillRect/>
+          </a:stretch>
+        </p:blipFill>
+        <p:spPr>
+          <a:xfrm>
+            <a:off x="10467415" y="6013271"/>
+            <a:ext cx="1743635" cy="977493"/>
+          </a:xfrm>
+          <a:prstGeom prst="rect">
+            <a:avLst/>
+          </a:prstGeom>
+        </p:spPr>
+      </p:pic>
+      <p:sp>
+        <p:nvSpPr>
+          <p:cNvPr id="10" name="TextBox 9">
+            <a:extLst>
+              <a:ext uri="{FF2B5EF4-FFF2-40B4-BE49-F238E27FC236}">
+                <a16:creationId xmlns:a16="http://schemas.microsoft.com/office/drawing/2014/main" id="{37278D8C-3BE7-512E-E379-E864140DA06B}"/>
+              </a:ext>
+            </a:extLst>
+          </p:cNvPr>
+          <p:cNvSpPr txBox="1"/>
+          <p:nvPr userDrawn="1"/>
+        </p:nvSpPr>
+        <p:spPr>
+          <a:xfrm>
+            <a:off x="259216" y="6209629"/>
+            <a:ext cx="2132315" cy="584775"/>
+          </a:xfrm>
+          <a:prstGeom prst="rect">
+            <a:avLst/>
+          </a:prstGeom>
+          <a:noFill/>
+        </p:spPr>
+        <p:txBody>
+          <a:bodyPr wrap="none" rtlCol="0">
+            <a:spAutoFit/>
+          </a:bodyPr>
+          <a:lstStyle/>
+          <a:p>
+            <a:r>
+              <a:rPr lang="en-US" sz="1600" dirty="0">
+                <a:solidFill>
+                  <a:srgbClr val="FCCA3A"/>
+                </a:solidFill>
+                <a:latin typeface="Inter Medium" panose="02000503000000020004" pitchFamily="2" charset="0"/>
+                <a:ea typeface="Inter Medium" panose="02000503000000020004" pitchFamily="2" charset="0"/>
+              </a:rPr>
+              <a:t>Dave Hearne</a:t>
+            </a:r>
+          </a:p>
+          <a:p>
+            <a:r>
+              <a:rPr lang="en-US" sz="1600" dirty="0" err="1">
+                <a:solidFill>
+                  <a:srgbClr val="FCCA3A"/>
+                </a:solidFill>
+                <a:latin typeface="Inter Medium" panose="02000503000000020004" pitchFamily="2" charset="0"/>
+                <a:ea typeface="Inter Medium" panose="02000503000000020004" pitchFamily="2" charset="0"/>
+              </a:rPr>
+              <a:t>dave.hearne@wit.ie</a:t>
+            </a:r>
+            <a:endParaRPr lang="en-US" sz="1600" dirty="0">
+              <a:solidFill>
+                <a:srgbClr val="FCCA3A"/>
+              </a:solidFill>
+              <a:latin typeface="Inter Medium" panose="02000503000000020004" pitchFamily="2" charset="0"/>
+              <a:ea typeface="Inter Medium" panose="02000503000000020004" pitchFamily="2" charset="0"/>
+            </a:endParaRPr>
+          </a:p>
+        </p:txBody>
+      </p:sp>
+      <p:pic>
+        <p:nvPicPr>
+          <p:cNvPr id="11" name="Graphic 10">
+            <a:extLst>
+              <a:ext uri="{FF2B5EF4-FFF2-40B4-BE49-F238E27FC236}">
+                <a16:creationId xmlns:a16="http://schemas.microsoft.com/office/drawing/2014/main" id="{0ADE644D-653A-CB78-2F67-D13C281E1426}"/>
+              </a:ext>
+            </a:extLst>
+          </p:cNvPr>
+          <p:cNvPicPr>
+            <a:picLocks noChangeAspect="1"/>
+          </p:cNvPicPr>
+          <p:nvPr userDrawn="1"/>
+        </p:nvPicPr>
+        <p:blipFill>
+          <a:blip>
+            <a:extLst>
+              <a:ext uri="{96DAC541-7B7A-43D3-8B79-37D633B846F1}">
+                <asvg:svgBlip xmlns:asvg="http://schemas.microsoft.com/office/drawing/2016/SVG/main" r:embed="rId3"/>
+              </a:ext>
+            </a:extLst>
+          </a:blip>
+          <a:stretch>
+            <a:fillRect/>
+          </a:stretch>
+        </p:blipFill>
+        <p:spPr>
+          <a:xfrm>
+            <a:off x="9203245" y="6176176"/>
+            <a:ext cx="1120090" cy="603766"/>
+          </a:xfrm>
+          <a:prstGeom prst="rect">
+            <a:avLst/>
+          </a:prstGeom>
+        </p:spPr>
+      </p:pic>
+    </p:spTree>
+    <p:extLst>
+      <p:ext uri="{BB962C8B-B14F-4D97-AF65-F5344CB8AC3E}">
+        <p14:creationId xmlns:p14="http://schemas.microsoft.com/office/powerpoint/2010/main" val="2037426617"/>
       </p:ext>
     </p:extLst>
   </p:cSld>
@@ -6709,13 +7060,7 @@
       </p:grpSpPr>
       <p:sp>
         <p:nvSpPr>
-          <p:cNvPr id="2" name="Title Placeholder 1">
-            <a:extLst>
-              <a:ext uri="{FF2B5EF4-FFF2-40B4-BE49-F238E27FC236}">
-                <a16:creationId xmlns:a16="http://schemas.microsoft.com/office/drawing/2014/main" id="{1527A6AA-9A3D-B214-D69B-E407A667BC43}"/>
-              </a:ext>
-            </a:extLst>
-          </p:cNvPr>
+          <p:cNvPr id="2" name="Title Placeholder 1"/>
           <p:cNvSpPr>
             <a:spLocks noGrp="1"/>
           </p:cNvSpPr>
@@ -6725,8 +7070,8 @@
         </p:nvSpPr>
         <p:spPr>
           <a:xfrm>
-            <a:off x="838200" y="365125"/>
-            <a:ext cx="10515600" cy="1325563"/>
+            <a:off x="609600" y="274638"/>
+            <a:ext cx="10972800" cy="1143000"/>
           </a:xfrm>
           <a:prstGeom prst="rect">
             <a:avLst/>
@@ -6739,22 +7084,16 @@
           <a:lstStyle/>
           <a:p>
             <a:r>
-              <a:rPr lang="en-GB" dirty="0"/>
+              <a:rPr lang="en-GB"/>
               <a:t>Click to edit Master title style</a:t>
             </a:r>
-            <a:endParaRPr lang="en-US" dirty="0"/>
+            <a:endParaRPr lang="en-IE"/>
           </a:p>
         </p:txBody>
       </p:sp>
       <p:sp>
         <p:nvSpPr>
-          <p:cNvPr id="3" name="Text Placeholder 2">
-            <a:extLst>
-              <a:ext uri="{FF2B5EF4-FFF2-40B4-BE49-F238E27FC236}">
-                <a16:creationId xmlns:a16="http://schemas.microsoft.com/office/drawing/2014/main" id="{8645717F-6026-BB96-5E0E-E0C78D960883}"/>
-              </a:ext>
-            </a:extLst>
-          </p:cNvPr>
+          <p:cNvPr id="3" name="Text Placeholder 2"/>
           <p:cNvSpPr>
             <a:spLocks noGrp="1"/>
           </p:cNvSpPr>
@@ -6764,8 +7103,8 @@
         </p:nvSpPr>
         <p:spPr>
           <a:xfrm>
-            <a:off x="838200" y="1825625"/>
-            <a:ext cx="10515600" cy="2681061"/>
+            <a:off x="609600" y="1600201"/>
+            <a:ext cx="10972800" cy="4525963"/>
           </a:xfrm>
           <a:prstGeom prst="rect">
             <a:avLst/>
@@ -6779,47 +7118,168 @@
           <a:p>
             <a:pPr lvl="0"/>
             <a:r>
-              <a:rPr lang="en-GB" dirty="0"/>
+              <a:rPr lang="en-GB"/>
               <a:t>Click to edit Master text styles</a:t>
             </a:r>
           </a:p>
           <a:p>
             <a:pPr lvl="1"/>
             <a:r>
-              <a:rPr lang="en-GB" dirty="0"/>
+              <a:rPr lang="en-GB"/>
               <a:t>Second level</a:t>
             </a:r>
           </a:p>
           <a:p>
             <a:pPr lvl="2"/>
             <a:r>
-              <a:rPr lang="en-GB" dirty="0"/>
+              <a:rPr lang="en-GB"/>
               <a:t>Third level</a:t>
             </a:r>
           </a:p>
           <a:p>
             <a:pPr lvl="3"/>
             <a:r>
-              <a:rPr lang="en-GB" dirty="0"/>
+              <a:rPr lang="en-GB"/>
               <a:t>Fourth level</a:t>
             </a:r>
           </a:p>
           <a:p>
             <a:pPr lvl="4"/>
             <a:r>
-              <a:rPr lang="en-GB" dirty="0"/>
+              <a:rPr lang="en-GB"/>
               <a:t>Fifth level</a:t>
             </a:r>
-            <a:endParaRPr lang="en-US" dirty="0"/>
+            <a:endParaRPr lang="en-IE"/>
+          </a:p>
+        </p:txBody>
+      </p:sp>
+      <p:sp>
+        <p:nvSpPr>
+          <p:cNvPr id="4" name="Date Placeholder 3"/>
+          <p:cNvSpPr>
+            <a:spLocks noGrp="1"/>
+          </p:cNvSpPr>
+          <p:nvPr>
+            <p:ph type="dt" sz="half" idx="2"/>
+          </p:nvPr>
+        </p:nvSpPr>
+        <p:spPr>
+          <a:xfrm>
+            <a:off x="609600" y="6356351"/>
+            <a:ext cx="2844800" cy="365125"/>
+          </a:xfrm>
+          <a:prstGeom prst="rect">
+            <a:avLst/>
+          </a:prstGeom>
+        </p:spPr>
+        <p:txBody>
+          <a:bodyPr vert="horz" lIns="91440" tIns="45720" rIns="91440" bIns="45720" rtlCol="0" anchor="ctr"/>
+          <a:lstStyle>
+            <a:lvl1pPr algn="l">
+              <a:defRPr sz="1200">
+                <a:solidFill>
+                  <a:schemeClr val="tx1">
+                    <a:tint val="75000"/>
+                  </a:schemeClr>
+                </a:solidFill>
+              </a:defRPr>
+            </a:lvl1pPr>
+          </a:lstStyle>
+          <a:p>
+            <a:fld id="{1D8BD707-D9CF-40AE-B4C6-C98DA3205C09}" type="datetimeFigureOut">
+              <a:rPr lang="en-US" smtClean="0"/>
+              <a:pPr/>
+              <a:t>3/12/26</a:t>
+            </a:fld>
+            <a:endParaRPr lang="en-US"/>
+          </a:p>
+        </p:txBody>
+      </p:sp>
+      <p:sp>
+        <p:nvSpPr>
+          <p:cNvPr id="5" name="Footer Placeholder 4"/>
+          <p:cNvSpPr>
+            <a:spLocks noGrp="1"/>
+          </p:cNvSpPr>
+          <p:nvPr>
+            <p:ph type="ftr" sz="quarter" idx="3"/>
+          </p:nvPr>
+        </p:nvSpPr>
+        <p:spPr>
+          <a:xfrm>
+            <a:off x="4165600" y="6356351"/>
+            <a:ext cx="3860800" cy="365125"/>
+          </a:xfrm>
+          <a:prstGeom prst="rect">
+            <a:avLst/>
+          </a:prstGeom>
+        </p:spPr>
+        <p:txBody>
+          <a:bodyPr vert="horz" lIns="91440" tIns="45720" rIns="91440" bIns="45720" rtlCol="0" anchor="ctr"/>
+          <a:lstStyle>
+            <a:lvl1pPr algn="ctr">
+              <a:defRPr sz="1200">
+                <a:solidFill>
+                  <a:schemeClr val="tx1">
+                    <a:tint val="75000"/>
+                  </a:schemeClr>
+                </a:solidFill>
+              </a:defRPr>
+            </a:lvl1pPr>
+          </a:lstStyle>
+          <a:p>
+            <a:endParaRPr lang="en-US"/>
+          </a:p>
+        </p:txBody>
+      </p:sp>
+      <p:sp>
+        <p:nvSpPr>
+          <p:cNvPr id="6" name="Slide Number Placeholder 5"/>
+          <p:cNvSpPr>
+            <a:spLocks noGrp="1"/>
+          </p:cNvSpPr>
+          <p:nvPr>
+            <p:ph type="sldNum" sz="quarter" idx="4"/>
+          </p:nvPr>
+        </p:nvSpPr>
+        <p:spPr>
+          <a:xfrm>
+            <a:off x="8737600" y="6356351"/>
+            <a:ext cx="2844800" cy="365125"/>
+          </a:xfrm>
+          <a:prstGeom prst="rect">
+            <a:avLst/>
+          </a:prstGeom>
+        </p:spPr>
+        <p:txBody>
+          <a:bodyPr vert="horz" lIns="91440" tIns="45720" rIns="91440" bIns="45720" rtlCol="0" anchor="ctr"/>
+          <a:lstStyle>
+            <a:lvl1pPr algn="r">
+              <a:defRPr sz="1200">
+                <a:solidFill>
+                  <a:schemeClr val="tx1">
+                    <a:tint val="75000"/>
+                  </a:schemeClr>
+                </a:solidFill>
+              </a:defRPr>
+            </a:lvl1pPr>
+          </a:lstStyle>
+          <a:p>
+            <a:fld id="{B6F15528-21DE-4FAA-801E-634DDDAF4B2B}" type="slidenum">
+              <a:rPr lang="en-US" smtClean="0"/>
+              <a:pPr/>
+              <a:t>‹#›</a:t>
+            </a:fld>
+            <a:endParaRPr lang="en-US"/>
           </a:p>
         </p:txBody>
       </p:sp>
       <p:pic>
         <p:nvPicPr>
-          <p:cNvPr id="8" name="Picture 7" descr="Text&#10;&#10;Description automatically generated">
+          <p:cNvPr id="7" name="Picture 6" descr="Text&#10;&#10;Description automatically generated">
             <a:extLst>
               <a:ext uri="{FF2B5EF4-FFF2-40B4-BE49-F238E27FC236}">
-                <a16:creationId xmlns:a16="http://schemas.microsoft.com/office/drawing/2014/main" id="{6C6F1F5D-051A-FB61-9D09-9FDA371C1473}"/>
+                <a16:creationId xmlns:a16="http://schemas.microsoft.com/office/drawing/2014/main" id="{E4E7A57C-D140-9485-AA6E-7E6603AA4931}"/>
               </a:ext>
             </a:extLst>
           </p:cNvPr>
@@ -6829,7 +7289,7 @@
           <p:nvPr userDrawn="1"/>
         </p:nvPicPr>
         <p:blipFill>
-          <a:blip r:embed="rId14"/>
+          <a:blip r:embed="rId15"/>
           <a:stretch>
             <a:fillRect/>
           </a:stretch>
@@ -6847,24 +7307,25 @@
     </p:spTree>
     <p:extLst>
       <p:ext uri="{BB962C8B-B14F-4D97-AF65-F5344CB8AC3E}">
-        <p14:creationId xmlns:p14="http://schemas.microsoft.com/office/powerpoint/2010/main" val="4149402247"/>
+        <p14:creationId xmlns:p14="http://schemas.microsoft.com/office/powerpoint/2010/main" val="864418588"/>
       </p:ext>
     </p:extLst>
   </p:cSld>
   <p:clrMap bg1="lt1" tx1="dk1" bg2="lt2" tx2="dk2" accent1="accent1" accent2="accent2" accent3="accent3" accent4="accent4" accent5="accent5" accent6="accent6" hlink="hlink" folHlink="folHlink"/>
   <p:sldLayoutIdLst>
-    <p:sldLayoutId id="2147483649" r:id="rId1"/>
-    <p:sldLayoutId id="2147483650" r:id="rId2"/>
-    <p:sldLayoutId id="2147483651" r:id="rId3"/>
-    <p:sldLayoutId id="2147483652" r:id="rId4"/>
-    <p:sldLayoutId id="2147483653" r:id="rId5"/>
-    <p:sldLayoutId id="2147483654" r:id="rId6"/>
-    <p:sldLayoutId id="2147483655" r:id="rId7"/>
-    <p:sldLayoutId id="2147483660" r:id="rId8"/>
-    <p:sldLayoutId id="2147483656" r:id="rId9"/>
-    <p:sldLayoutId id="2147483657" r:id="rId10"/>
-    <p:sldLayoutId id="2147483658" r:id="rId11"/>
-    <p:sldLayoutId id="2147483659" r:id="rId12"/>
+    <p:sldLayoutId id="2147483662" r:id="rId1"/>
+    <p:sldLayoutId id="2147483663" r:id="rId2"/>
+    <p:sldLayoutId id="2147483664" r:id="rId3"/>
+    <p:sldLayoutId id="2147483665" r:id="rId4"/>
+    <p:sldLayoutId id="2147483666" r:id="rId5"/>
+    <p:sldLayoutId id="2147483667" r:id="rId6"/>
+    <p:sldLayoutId id="2147483668" r:id="rId7"/>
+    <p:sldLayoutId id="2147483669" r:id="rId8"/>
+    <p:sldLayoutId id="2147483670" r:id="rId9"/>
+    <p:sldLayoutId id="2147483671" r:id="rId10"/>
+    <p:sldLayoutId id="2147483672" r:id="rId11"/>
+    <p:sldLayoutId id="2147483673" r:id="rId12"/>
+    <p:sldLayoutId id="2147483674" r:id="rId13"/>
   </p:sldLayoutIdLst>
   <p:transition spd="slow">
     <p:push dir="u"/>
@@ -6872,140 +7333,104 @@
   <p:hf sldNum="0" hdr="0" ftr="0" dt="0"/>
   <p:txStyles>
     <p:titleStyle>
-      <a:lvl1pPr algn="l" defTabSz="914400" rtl="0" eaLnBrk="1" latinLnBrk="0" hangingPunct="1">
-        <a:lnSpc>
-          <a:spcPct val="90000"/>
-        </a:lnSpc>
+      <a:lvl1pPr algn="ctr" defTabSz="914400" rtl="0" eaLnBrk="1" latinLnBrk="0" hangingPunct="1">
         <a:spcBef>
           <a:spcPct val="0"/>
         </a:spcBef>
         <a:buNone/>
-        <a:defRPr sz="4400" b="1" kern="1200">
+        <a:defRPr sz="4400" kern="1200">
           <a:solidFill>
-            <a:srgbClr val="435765"/>
+            <a:schemeClr val="tx1"/>
           </a:solidFill>
-          <a:latin typeface="DM Sans" pitchFamily="2" charset="77"/>
+          <a:latin typeface="+mj-lt"/>
           <a:ea typeface="+mj-ea"/>
           <a:cs typeface="+mj-cs"/>
         </a:defRPr>
       </a:lvl1pPr>
     </p:titleStyle>
     <p:bodyStyle>
-      <a:lvl1pPr marL="228600" indent="-228600" algn="l" defTabSz="914400" rtl="0" eaLnBrk="1" latinLnBrk="0" hangingPunct="1">
-        <a:lnSpc>
-          <a:spcPct val="150000"/>
-        </a:lnSpc>
+      <a:lvl1pPr marL="342900" indent="-342900" algn="l" defTabSz="914400" rtl="0" eaLnBrk="1" latinLnBrk="0" hangingPunct="1">
         <a:spcBef>
-          <a:spcPts val="1000"/>
+          <a:spcPct val="20000"/>
         </a:spcBef>
-        <a:buClr>
-          <a:srgbClr val="435765"/>
-        </a:buClr>
         <a:buFont typeface="Arial" panose="020B0604020202020204" pitchFamily="34" charset="0"/>
         <a:buChar char="•"/>
-        <a:defRPr sz="2800" kern="1200">
+        <a:defRPr sz="3200" kern="1200">
           <a:solidFill>
-            <a:srgbClr val="435765"/>
+            <a:schemeClr val="tx1"/>
           </a:solidFill>
-          <a:latin typeface="Inter" panose="02000503000000020004" pitchFamily="2" charset="0"/>
-          <a:ea typeface="Inter" panose="02000503000000020004" pitchFamily="2" charset="0"/>
+          <a:latin typeface="+mn-lt"/>
+          <a:ea typeface="+mn-ea"/>
           <a:cs typeface="+mn-cs"/>
         </a:defRPr>
       </a:lvl1pPr>
-      <a:lvl2pPr marL="685800" indent="-228600" algn="l" defTabSz="914400" rtl="0" eaLnBrk="1" latinLnBrk="0" hangingPunct="1">
-        <a:lnSpc>
-          <a:spcPct val="150000"/>
-        </a:lnSpc>
+      <a:lvl2pPr marL="742950" indent="-285750" algn="l" defTabSz="914400" rtl="0" eaLnBrk="1" latinLnBrk="0" hangingPunct="1">
         <a:spcBef>
-          <a:spcPts val="500"/>
+          <a:spcPct val="20000"/>
         </a:spcBef>
-        <a:buClr>
-          <a:srgbClr val="435765"/>
-        </a:buClr>
+        <a:buFont typeface="Arial" panose="020B0604020202020204" pitchFamily="34" charset="0"/>
+        <a:buChar char="–"/>
+        <a:defRPr sz="2800" kern="1200">
+          <a:solidFill>
+            <a:schemeClr val="tx1"/>
+          </a:solidFill>
+          <a:latin typeface="+mn-lt"/>
+          <a:ea typeface="+mn-ea"/>
+          <a:cs typeface="+mn-cs"/>
+        </a:defRPr>
+      </a:lvl2pPr>
+      <a:lvl3pPr marL="1143000" indent="-228600" algn="l" defTabSz="914400" rtl="0" eaLnBrk="1" latinLnBrk="0" hangingPunct="1">
+        <a:spcBef>
+          <a:spcPct val="20000"/>
+        </a:spcBef>
         <a:buFont typeface="Arial" panose="020B0604020202020204" pitchFamily="34" charset="0"/>
         <a:buChar char="•"/>
         <a:defRPr sz="2400" kern="1200">
           <a:solidFill>
-            <a:srgbClr val="435765"/>
+            <a:schemeClr val="tx1"/>
           </a:solidFill>
-          <a:latin typeface="Inter" panose="02000503000000020004" pitchFamily="2" charset="0"/>
-          <a:ea typeface="Inter" panose="02000503000000020004" pitchFamily="2" charset="0"/>
-          <a:cs typeface="+mn-cs"/>
-        </a:defRPr>
-      </a:lvl2pPr>
-      <a:lvl3pPr marL="1143000" indent="-228600" algn="l" defTabSz="914400" rtl="0" eaLnBrk="1" latinLnBrk="0" hangingPunct="1">
-        <a:lnSpc>
-          <a:spcPct val="150000"/>
-        </a:lnSpc>
-        <a:spcBef>
-          <a:spcPts val="500"/>
-        </a:spcBef>
-        <a:buClr>
-          <a:srgbClr val="435765"/>
-        </a:buClr>
-        <a:buFont typeface="Arial" panose="020B0604020202020204" pitchFamily="34" charset="0"/>
-        <a:buChar char="•"/>
-        <a:defRPr sz="2000" kern="1200">
-          <a:solidFill>
-            <a:srgbClr val="435765"/>
-          </a:solidFill>
-          <a:latin typeface="Inter" panose="02000503000000020004" pitchFamily="2" charset="0"/>
-          <a:ea typeface="Inter" panose="02000503000000020004" pitchFamily="2" charset="0"/>
+          <a:latin typeface="+mn-lt"/>
+          <a:ea typeface="+mn-ea"/>
           <a:cs typeface="+mn-cs"/>
         </a:defRPr>
       </a:lvl3pPr>
       <a:lvl4pPr marL="1600200" indent="-228600" algn="l" defTabSz="914400" rtl="0" eaLnBrk="1" latinLnBrk="0" hangingPunct="1">
-        <a:lnSpc>
-          <a:spcPct val="150000"/>
-        </a:lnSpc>
         <a:spcBef>
-          <a:spcPts val="500"/>
+          <a:spcPct val="20000"/>
         </a:spcBef>
-        <a:buClr>
-          <a:srgbClr val="435765"/>
-        </a:buClr>
         <a:buFont typeface="Arial" panose="020B0604020202020204" pitchFamily="34" charset="0"/>
-        <a:buChar char="•"/>
-        <a:defRPr sz="1800" kern="1200">
+        <a:buChar char="–"/>
+        <a:defRPr sz="2000" kern="1200">
           <a:solidFill>
-            <a:srgbClr val="435765"/>
+            <a:schemeClr val="tx1"/>
           </a:solidFill>
-          <a:latin typeface="Inter" panose="02000503000000020004" pitchFamily="2" charset="0"/>
-          <a:ea typeface="Inter" panose="02000503000000020004" pitchFamily="2" charset="0"/>
+          <a:latin typeface="+mn-lt"/>
+          <a:ea typeface="+mn-ea"/>
           <a:cs typeface="+mn-cs"/>
         </a:defRPr>
       </a:lvl4pPr>
       <a:lvl5pPr marL="2057400" indent="-228600" algn="l" defTabSz="914400" rtl="0" eaLnBrk="1" latinLnBrk="0" hangingPunct="1">
-        <a:lnSpc>
-          <a:spcPct val="150000"/>
-        </a:lnSpc>
         <a:spcBef>
-          <a:spcPts val="500"/>
+          <a:spcPct val="20000"/>
         </a:spcBef>
-        <a:buClr>
-          <a:srgbClr val="435765"/>
-        </a:buClr>
         <a:buFont typeface="Arial" panose="020B0604020202020204" pitchFamily="34" charset="0"/>
-        <a:buChar char="•"/>
-        <a:defRPr sz="1800" kern="1200">
+        <a:buChar char="»"/>
+        <a:defRPr sz="2000" kern="1200">
           <a:solidFill>
-            <a:srgbClr val="435765"/>
+            <a:schemeClr val="tx1"/>
           </a:solidFill>
-          <a:latin typeface="Inter" panose="02000503000000020004" pitchFamily="2" charset="0"/>
-          <a:ea typeface="Inter" panose="02000503000000020004" pitchFamily="2" charset="0"/>
+          <a:latin typeface="+mn-lt"/>
+          <a:ea typeface="+mn-ea"/>
           <a:cs typeface="+mn-cs"/>
         </a:defRPr>
       </a:lvl5pPr>
       <a:lvl6pPr marL="2514600" indent="-228600" algn="l" defTabSz="914400" rtl="0" eaLnBrk="1" latinLnBrk="0" hangingPunct="1">
-        <a:lnSpc>
-          <a:spcPct val="90000"/>
-        </a:lnSpc>
         <a:spcBef>
-          <a:spcPts val="500"/>
+          <a:spcPct val="20000"/>
         </a:spcBef>
         <a:buFont typeface="Arial" panose="020B0604020202020204" pitchFamily="34" charset="0"/>
         <a:buChar char="•"/>
-        <a:defRPr sz="1800" kern="1200">
+        <a:defRPr sz="2000" kern="1200">
           <a:solidFill>
             <a:schemeClr val="tx1"/>
           </a:solidFill>
@@ -7015,15 +7440,12 @@
         </a:defRPr>
       </a:lvl6pPr>
       <a:lvl7pPr marL="2971800" indent="-228600" algn="l" defTabSz="914400" rtl="0" eaLnBrk="1" latinLnBrk="0" hangingPunct="1">
-        <a:lnSpc>
-          <a:spcPct val="90000"/>
-        </a:lnSpc>
         <a:spcBef>
-          <a:spcPts val="500"/>
+          <a:spcPct val="20000"/>
         </a:spcBef>
         <a:buFont typeface="Arial" panose="020B0604020202020204" pitchFamily="34" charset="0"/>
         <a:buChar char="•"/>
-        <a:defRPr sz="1800" kern="1200">
+        <a:defRPr sz="2000" kern="1200">
           <a:solidFill>
             <a:schemeClr val="tx1"/>
           </a:solidFill>
@@ -7033,15 +7455,12 @@
         </a:defRPr>
       </a:lvl7pPr>
       <a:lvl8pPr marL="3429000" indent="-228600" algn="l" defTabSz="914400" rtl="0" eaLnBrk="1" latinLnBrk="0" hangingPunct="1">
-        <a:lnSpc>
-          <a:spcPct val="90000"/>
-        </a:lnSpc>
         <a:spcBef>
-          <a:spcPts val="500"/>
+          <a:spcPct val="20000"/>
         </a:spcBef>
         <a:buFont typeface="Arial" panose="020B0604020202020204" pitchFamily="34" charset="0"/>
         <a:buChar char="•"/>
-        <a:defRPr sz="1800" kern="1200">
+        <a:defRPr sz="2000" kern="1200">
           <a:solidFill>
             <a:schemeClr val="tx1"/>
           </a:solidFill>
@@ -7051,15 +7470,12 @@
         </a:defRPr>
       </a:lvl8pPr>
       <a:lvl9pPr marL="3886200" indent="-228600" algn="l" defTabSz="914400" rtl="0" eaLnBrk="1" latinLnBrk="0" hangingPunct="1">
-        <a:lnSpc>
-          <a:spcPct val="90000"/>
-        </a:lnSpc>
         <a:spcBef>
-          <a:spcPts val="500"/>
+          <a:spcPct val="20000"/>
         </a:spcBef>
         <a:buFont typeface="Arial" panose="020B0604020202020204" pitchFamily="34" charset="0"/>
         <a:buChar char="•"/>
-        <a:defRPr sz="1800" kern="1200">
+        <a:defRPr sz="2000" kern="1200">
           <a:solidFill>
             <a:schemeClr val="tx1"/>
           </a:solidFill>
@@ -7233,12 +7649,7 @@
             <p:ph type="ctrTitle"/>
           </p:nvPr>
         </p:nvSpPr>
-        <p:spPr>
-          <a:xfrm>
-            <a:off x="1524000" y="1122363"/>
-            <a:ext cx="9144000" cy="2387600"/>
-          </a:xfrm>
-        </p:spPr>
+        <p:spPr/>
         <p:txBody>
           <a:bodyPr/>
           <a:lstStyle/>
@@ -8274,7 +8685,12 @@
             <p:ph type="title"/>
           </p:nvPr>
         </p:nvSpPr>
-        <p:spPr/>
+        <p:spPr>
+          <a:xfrm>
+            <a:off x="781778" y="211242"/>
+            <a:ext cx="10363200" cy="938283"/>
+          </a:xfrm>
+        </p:spPr>
         <p:txBody>
           <a:bodyPr/>
           <a:lstStyle/>
@@ -9439,7 +9855,12 @@
             <p:ph type="title"/>
           </p:nvPr>
         </p:nvSpPr>
-        <p:spPr/>
+        <p:spPr>
+          <a:xfrm>
+            <a:off x="811098" y="173090"/>
+            <a:ext cx="10363200" cy="1362075"/>
+          </a:xfrm>
+        </p:spPr>
         <p:txBody>
           <a:bodyPr/>
           <a:lstStyle/>
@@ -11506,10 +11927,15 @@
             <p:ph type="title"/>
           </p:nvPr>
         </p:nvSpPr>
-        <p:spPr/>
+        <p:spPr>
+          <a:xfrm>
+            <a:off x="963084" y="242864"/>
+            <a:ext cx="10363200" cy="1362075"/>
+          </a:xfrm>
+        </p:spPr>
         <p:txBody>
           <a:bodyPr>
-            <a:normAutofit fontScale="90000"/>
+            <a:normAutofit/>
           </a:bodyPr>
           <a:lstStyle/>
           <a:p>
@@ -11539,7 +11965,7 @@
         <p:spPr/>
         <p:txBody>
           <a:bodyPr>
-            <a:normAutofit fontScale="77500" lnSpcReduction="20000"/>
+            <a:normAutofit fontScale="25000" lnSpcReduction="20000"/>
           </a:bodyPr>
           <a:lstStyle/>
           <a:p>
@@ -12248,7 +12674,12 @@
             <p:ph type="title"/>
           </p:nvPr>
         </p:nvSpPr>
-        <p:spPr/>
+        <p:spPr>
+          <a:xfrm>
+            <a:off x="551696" y="199887"/>
+            <a:ext cx="10363200" cy="1362075"/>
+          </a:xfrm>
+        </p:spPr>
         <p:txBody>
           <a:bodyPr/>
           <a:lstStyle/>
@@ -13513,7 +13944,12 @@
             <p:ph type="title"/>
           </p:nvPr>
         </p:nvSpPr>
-        <p:spPr/>
+        <p:spPr>
+          <a:xfrm>
+            <a:off x="598418" y="123815"/>
+            <a:ext cx="10363200" cy="1362075"/>
+          </a:xfrm>
+        </p:spPr>
         <p:txBody>
           <a:bodyPr/>
           <a:lstStyle/>
@@ -13924,7 +14360,12 @@
             <p:ph type="title"/>
           </p:nvPr>
         </p:nvSpPr>
-        <p:spPr/>
+        <p:spPr>
+          <a:xfrm>
+            <a:off x="649899" y="173323"/>
+            <a:ext cx="10363200" cy="1362075"/>
+          </a:xfrm>
+        </p:spPr>
         <p:txBody>
           <a:bodyPr/>
           <a:lstStyle/>
@@ -15147,10 +15588,10 @@
           <p:nvPr/>
         </p:nvPicPr>
         <p:blipFill>
-          <a:blip r:embed="rId5">
+          <a:blip>
             <a:extLst>
               <a:ext uri="{96DAC541-7B7A-43D3-8B79-37D633B846F1}">
-                <asvg:svgBlip xmlns:asvg="http://schemas.microsoft.com/office/drawing/2016/SVG/main" r:embed="rId6"/>
+                <asvg:svgBlip xmlns:asvg="http://schemas.microsoft.com/office/drawing/2016/SVG/main" r:embed="rId5"/>
               </a:ext>
             </a:extLst>
           </a:blip>
@@ -15452,7 +15893,12 @@
             <p:ph type="title"/>
           </p:nvPr>
         </p:nvSpPr>
-        <p:spPr/>
+        <p:spPr>
+          <a:xfrm>
+            <a:off x="914400" y="242864"/>
+            <a:ext cx="10363200" cy="1362075"/>
+          </a:xfrm>
+        </p:spPr>
         <p:txBody>
           <a:bodyPr>
             <a:normAutofit/>
@@ -15489,7 +15935,7 @@
         <p:spPr/>
         <p:txBody>
           <a:bodyPr>
-            <a:normAutofit/>
+            <a:normAutofit fontScale="85000" lnSpcReduction="20000"/>
           </a:bodyPr>
           <a:lstStyle/>
           <a:p>
@@ -15853,10 +16299,10 @@
           <p:nvPr/>
         </p:nvPicPr>
         <p:blipFill>
-          <a:blip r:embed="rId4">
+          <a:blip>
             <a:extLst>
               <a:ext uri="{96DAC541-7B7A-43D3-8B79-37D633B846F1}">
-                <asvg:svgBlip xmlns:asvg="http://schemas.microsoft.com/office/drawing/2016/SVG/main" r:embed="rId5"/>
+                <asvg:svgBlip xmlns:asvg="http://schemas.microsoft.com/office/drawing/2016/SVG/main" r:embed="rId4"/>
               </a:ext>
             </a:extLst>
           </a:blip>
@@ -16141,14 +16587,14 @@
           <p:nvPr/>
         </p:nvPicPr>
         <p:blipFill>
-          <a:blip r:embed="rId6"/>
+          <a:blip r:embed="rId5"/>
           <a:stretch>
             <a:fillRect/>
           </a:stretch>
         </p:blipFill>
         <p:spPr>
           <a:xfrm>
-            <a:off x="7287491" y="651164"/>
+            <a:off x="7732405" y="1151308"/>
             <a:ext cx="4061769" cy="5026941"/>
           </a:xfrm>
           <a:prstGeom prst="rect">
@@ -16496,7 +16942,12 @@
             <p:ph type="title"/>
           </p:nvPr>
         </p:nvSpPr>
-        <p:spPr/>
+        <p:spPr>
+          <a:xfrm>
+            <a:off x="759254" y="76331"/>
+            <a:ext cx="10363200" cy="773453"/>
+          </a:xfrm>
+        </p:spPr>
         <p:txBody>
           <a:bodyPr/>
           <a:lstStyle/>
@@ -17878,7 +18329,12 @@
             <p:ph type="title"/>
           </p:nvPr>
         </p:nvSpPr>
-        <p:spPr/>
+        <p:spPr>
+          <a:xfrm>
+            <a:off x="619932" y="33046"/>
+            <a:ext cx="10363200" cy="867963"/>
+          </a:xfrm>
+        </p:spPr>
         <p:txBody>
           <a:bodyPr/>
           <a:lstStyle/>
@@ -22200,7 +22656,12 @@
             <p:ph type="title"/>
           </p:nvPr>
         </p:nvSpPr>
-        <p:spPr/>
+        <p:spPr>
+          <a:xfrm>
+            <a:off x="653595" y="242864"/>
+            <a:ext cx="10363200" cy="1362075"/>
+          </a:xfrm>
+        </p:spPr>
         <p:txBody>
           <a:bodyPr/>
           <a:lstStyle/>
@@ -22231,7 +22692,7 @@
         <p:spPr/>
         <p:txBody>
           <a:bodyPr>
-            <a:normAutofit/>
+            <a:normAutofit fontScale="77500" lnSpcReduction="20000"/>
           </a:bodyPr>
           <a:lstStyle/>
           <a:p>
@@ -22442,7 +22903,7 @@
 </file>
 
 <file path=ppt/theme/theme1.xml><?xml version="1.0" encoding="utf-8"?>
-<a:theme xmlns:a="http://schemas.openxmlformats.org/drawingml/2006/main" name="Office Theme 2013 - 2022">
+<a:theme xmlns:a="http://schemas.openxmlformats.org/drawingml/2006/main" name="b-intro-to-arraylists">
   <a:themeElements>
     <a:clrScheme name="Office">
       <a:dk1>
@@ -22452,44 +22913,44 @@
         <a:sysClr val="window" lastClr="FFFFFF"/>
       </a:lt1>
       <a:dk2>
-        <a:srgbClr val="44546A"/>
+        <a:srgbClr val="1F497D"/>
       </a:dk2>
       <a:lt2>
-        <a:srgbClr val="E7E6E6"/>
+        <a:srgbClr val="EEECE1"/>
       </a:lt2>
       <a:accent1>
-        <a:srgbClr val="4472C4"/>
+        <a:srgbClr val="4F81BD"/>
       </a:accent1>
       <a:accent2>
-        <a:srgbClr val="ED7D31"/>
+        <a:srgbClr val="C0504D"/>
       </a:accent2>
       <a:accent3>
-        <a:srgbClr val="A5A5A5"/>
+        <a:srgbClr val="9BBB59"/>
       </a:accent3>
       <a:accent4>
-        <a:srgbClr val="FFC000"/>
+        <a:srgbClr val="8064A2"/>
       </a:accent4>
       <a:accent5>
-        <a:srgbClr val="5B9BD5"/>
+        <a:srgbClr val="4BACC6"/>
       </a:accent5>
       <a:accent6>
-        <a:srgbClr val="70AD47"/>
+        <a:srgbClr val="F79646"/>
       </a:accent6>
       <a:hlink>
-        <a:srgbClr val="0563C1"/>
+        <a:srgbClr val="0000FF"/>
       </a:hlink>
       <a:folHlink>
-        <a:srgbClr val="954F72"/>
+        <a:srgbClr val="800080"/>
       </a:folHlink>
     </a:clrScheme>
     <a:fontScheme name="Office">
       <a:majorFont>
-        <a:latin typeface="Calibri Light" panose="020F0302020204030204"/>
+        <a:latin typeface="Calibri"/>
         <a:ea typeface=""/>
         <a:cs typeface=""/>
-        <a:font script="Jpan" typeface="游ゴシック Light"/>
+        <a:font script="Jpan" typeface="ＭＳ Ｐゴシック"/>
         <a:font script="Hang" typeface="맑은 고딕"/>
-        <a:font script="Hans" typeface="等线 Light"/>
+        <a:font script="Hans" typeface="宋体"/>
         <a:font script="Hant" typeface="新細明體"/>
         <a:font script="Arab" typeface="Times New Roman"/>
         <a:font script="Hebr" typeface="Times New Roman"/>
@@ -22517,31 +22978,14 @@
         <a:font script="Viet" typeface="Times New Roman"/>
         <a:font script="Uigh" typeface="Microsoft Uighur"/>
         <a:font script="Geor" typeface="Sylfaen"/>
-        <a:font script="Armn" typeface="Arial"/>
-        <a:font script="Bugi" typeface="Leelawadee UI"/>
-        <a:font script="Bopo" typeface="Microsoft JhengHei"/>
-        <a:font script="Java" typeface="Javanese Text"/>
-        <a:font script="Lisu" typeface="Segoe UI"/>
-        <a:font script="Mymr" typeface="Myanmar Text"/>
-        <a:font script="Nkoo" typeface="Ebrima"/>
-        <a:font script="Olck" typeface="Nirmala UI"/>
-        <a:font script="Osma" typeface="Ebrima"/>
-        <a:font script="Phag" typeface="Phagspa"/>
-        <a:font script="Syrn" typeface="Estrangelo Edessa"/>
-        <a:font script="Syrj" typeface="Estrangelo Edessa"/>
-        <a:font script="Syre" typeface="Estrangelo Edessa"/>
-        <a:font script="Sora" typeface="Nirmala UI"/>
-        <a:font script="Tale" typeface="Microsoft Tai Le"/>
-        <a:font script="Talu" typeface="Microsoft New Tai Lue"/>
-        <a:font script="Tfng" typeface="Ebrima"/>
       </a:majorFont>
       <a:minorFont>
-        <a:latin typeface="Calibri" panose="020F0502020204030204"/>
+        <a:latin typeface="Calibri"/>
         <a:ea typeface=""/>
         <a:cs typeface=""/>
-        <a:font script="Jpan" typeface="游ゴシック"/>
+        <a:font script="Jpan" typeface="ＭＳ Ｐゴシック"/>
         <a:font script="Hang" typeface="맑은 고딕"/>
-        <a:font script="Hans" typeface="等线"/>
+        <a:font script="Hans" typeface="宋体"/>
         <a:font script="Hant" typeface="新細明體"/>
         <a:font script="Arab" typeface="Arial"/>
         <a:font script="Hebr" typeface="Arial"/>
@@ -22569,23 +23013,6 @@
         <a:font script="Viet" typeface="Arial"/>
         <a:font script="Uigh" typeface="Microsoft Uighur"/>
         <a:font script="Geor" typeface="Sylfaen"/>
-        <a:font script="Armn" typeface="Arial"/>
-        <a:font script="Bugi" typeface="Leelawadee UI"/>
-        <a:font script="Bopo" typeface="Microsoft JhengHei"/>
-        <a:font script="Java" typeface="Javanese Text"/>
-        <a:font script="Lisu" typeface="Segoe UI"/>
-        <a:font script="Mymr" typeface="Myanmar Text"/>
-        <a:font script="Nkoo" typeface="Ebrima"/>
-        <a:font script="Olck" typeface="Nirmala UI"/>
-        <a:font script="Osma" typeface="Ebrima"/>
-        <a:font script="Phag" typeface="Phagspa"/>
-        <a:font script="Syrn" typeface="Estrangelo Edessa"/>
-        <a:font script="Syrj" typeface="Estrangelo Edessa"/>
-        <a:font script="Syre" typeface="Estrangelo Edessa"/>
-        <a:font script="Sora" typeface="Nirmala UI"/>
-        <a:font script="Tale" typeface="Microsoft Tai Le"/>
-        <a:font script="Talu" typeface="Microsoft New Tai Lue"/>
-        <a:font script="Tfng" typeface="Ebrima"/>
       </a:minorFont>
     </a:fontScheme>
     <a:fmtScheme name="Office">
@@ -22597,172 +23024,166 @@
           <a:gsLst>
             <a:gs pos="0">
               <a:schemeClr val="phClr">
-                <a:lumMod val="110000"/>
-                <a:satMod val="105000"/>
-                <a:tint val="67000"/>
+                <a:tint val="50000"/>
+                <a:satMod val="300000"/>
               </a:schemeClr>
             </a:gs>
-            <a:gs pos="50000">
+            <a:gs pos="35000">
               <a:schemeClr val="phClr">
-                <a:lumMod val="105000"/>
-                <a:satMod val="103000"/>
-                <a:tint val="73000"/>
+                <a:tint val="37000"/>
+                <a:satMod val="300000"/>
               </a:schemeClr>
             </a:gs>
             <a:gs pos="100000">
               <a:schemeClr val="phClr">
-                <a:lumMod val="105000"/>
-                <a:satMod val="109000"/>
-                <a:tint val="81000"/>
+                <a:tint val="15000"/>
+                <a:satMod val="350000"/>
               </a:schemeClr>
             </a:gs>
           </a:gsLst>
-          <a:lin ang="5400000" scaled="0"/>
+          <a:lin ang="16200000" scaled="1"/>
         </a:gradFill>
         <a:gradFill rotWithShape="1">
           <a:gsLst>
             <a:gs pos="0">
               <a:schemeClr val="phClr">
-                <a:satMod val="103000"/>
-                <a:lumMod val="102000"/>
-                <a:tint val="94000"/>
+                <a:shade val="51000"/>
+                <a:satMod val="130000"/>
               </a:schemeClr>
             </a:gs>
-            <a:gs pos="50000">
+            <a:gs pos="80000">
               <a:schemeClr val="phClr">
-                <a:satMod val="110000"/>
-                <a:lumMod val="100000"/>
-                <a:shade val="100000"/>
+                <a:shade val="93000"/>
+                <a:satMod val="130000"/>
               </a:schemeClr>
             </a:gs>
             <a:gs pos="100000">
               <a:schemeClr val="phClr">
-                <a:lumMod val="99000"/>
-                <a:satMod val="120000"/>
-                <a:shade val="78000"/>
+                <a:shade val="94000"/>
+                <a:satMod val="135000"/>
               </a:schemeClr>
             </a:gs>
           </a:gsLst>
-          <a:lin ang="5400000" scaled="0"/>
+          <a:lin ang="16200000" scaled="0"/>
         </a:gradFill>
       </a:fillStyleLst>
       <a:lnStyleLst>
-        <a:ln w="6350" cap="flat" cmpd="sng" algn="ctr">
+        <a:ln w="9525" cap="flat" cmpd="sng" algn="ctr">
+          <a:solidFill>
+            <a:schemeClr val="phClr">
+              <a:shade val="95000"/>
+              <a:satMod val="105000"/>
+            </a:schemeClr>
+          </a:solidFill>
+          <a:prstDash val="solid"/>
+        </a:ln>
+        <a:ln w="25400" cap="flat" cmpd="sng" algn="ctr">
           <a:solidFill>
             <a:schemeClr val="phClr"/>
           </a:solidFill>
           <a:prstDash val="solid"/>
-          <a:miter lim="800000"/>
         </a:ln>
-        <a:ln w="12700" cap="flat" cmpd="sng" algn="ctr">
+        <a:ln w="38100" cap="flat" cmpd="sng" algn="ctr">
           <a:solidFill>
             <a:schemeClr val="phClr"/>
           </a:solidFill>
           <a:prstDash val="solid"/>
-          <a:miter lim="800000"/>
-        </a:ln>
-        <a:ln w="19050" cap="flat" cmpd="sng" algn="ctr">
-          <a:solidFill>
-            <a:schemeClr val="phClr"/>
-          </a:solidFill>
-          <a:prstDash val="solid"/>
-          <a:miter lim="800000"/>
         </a:ln>
       </a:lnStyleLst>
       <a:effectStyleLst>
         <a:effectStyle>
-          <a:effectLst/>
-        </a:effectStyle>
-        <a:effectStyle>
-          <a:effectLst/>
+          <a:effectLst>
+            <a:outerShdw blurRad="40000" dist="20000" dir="5400000" rotWithShape="0">
+              <a:srgbClr val="000000">
+                <a:alpha val="38000"/>
+              </a:srgbClr>
+            </a:outerShdw>
+          </a:effectLst>
         </a:effectStyle>
         <a:effectStyle>
           <a:effectLst>
-            <a:outerShdw blurRad="57150" dist="19050" dir="5400000" algn="ctr" rotWithShape="0">
+            <a:outerShdw blurRad="40000" dist="23000" dir="5400000" rotWithShape="0">
               <a:srgbClr val="000000">
-                <a:alpha val="63000"/>
+                <a:alpha val="35000"/>
               </a:srgbClr>
             </a:outerShdw>
           </a:effectLst>
+        </a:effectStyle>
+        <a:effectStyle>
+          <a:effectLst>
+            <a:outerShdw blurRad="40000" dist="23000" dir="5400000" rotWithShape="0">
+              <a:srgbClr val="000000">
+                <a:alpha val="35000"/>
+              </a:srgbClr>
+            </a:outerShdw>
+          </a:effectLst>
+          <a:scene3d>
+            <a:camera prst="orthographicFront">
+              <a:rot lat="0" lon="0" rev="0"/>
+            </a:camera>
+            <a:lightRig rig="threePt" dir="t">
+              <a:rot lat="0" lon="0" rev="1200000"/>
+            </a:lightRig>
+          </a:scene3d>
+          <a:sp3d>
+            <a:bevelT w="63500" h="25400"/>
+          </a:sp3d>
         </a:effectStyle>
       </a:effectStyleLst>
       <a:bgFillStyleLst>
         <a:solidFill>
           <a:schemeClr val="phClr"/>
         </a:solidFill>
-        <a:solidFill>
-          <a:schemeClr val="phClr">
-            <a:tint val="95000"/>
-            <a:satMod val="170000"/>
-          </a:schemeClr>
-        </a:solidFill>
         <a:gradFill rotWithShape="1">
           <a:gsLst>
             <a:gs pos="0">
               <a:schemeClr val="phClr">
-                <a:tint val="93000"/>
-                <a:satMod val="150000"/>
-                <a:shade val="98000"/>
-                <a:lumMod val="102000"/>
+                <a:tint val="40000"/>
+                <a:satMod val="350000"/>
               </a:schemeClr>
             </a:gs>
-            <a:gs pos="50000">
+            <a:gs pos="40000">
               <a:schemeClr val="phClr">
-                <a:tint val="98000"/>
-                <a:satMod val="130000"/>
-                <a:shade val="90000"/>
-                <a:lumMod val="103000"/>
+                <a:tint val="45000"/>
+                <a:shade val="99000"/>
+                <a:satMod val="350000"/>
               </a:schemeClr>
             </a:gs>
             <a:gs pos="100000">
               <a:schemeClr val="phClr">
-                <a:shade val="63000"/>
-                <a:satMod val="120000"/>
+                <a:shade val="20000"/>
+                <a:satMod val="255000"/>
               </a:schemeClr>
             </a:gs>
           </a:gsLst>
-          <a:lin ang="5400000" scaled="0"/>
+          <a:path path="circle">
+            <a:fillToRect l="50000" t="-80000" r="50000" b="180000"/>
+          </a:path>
+        </a:gradFill>
+        <a:gradFill rotWithShape="1">
+          <a:gsLst>
+            <a:gs pos="0">
+              <a:schemeClr val="phClr">
+                <a:tint val="80000"/>
+                <a:satMod val="300000"/>
+              </a:schemeClr>
+            </a:gs>
+            <a:gs pos="100000">
+              <a:schemeClr val="phClr">
+                <a:shade val="30000"/>
+                <a:satMod val="200000"/>
+              </a:schemeClr>
+            </a:gs>
+          </a:gsLst>
+          <a:path path="circle">
+            <a:fillToRect l="50000" t="50000" r="50000" b="50000"/>
+          </a:path>
         </a:gradFill>
       </a:bgFillStyleLst>
     </a:fmtScheme>
   </a:themeElements>
-  <a:objectDefaults>
-    <a:spDef>
-      <a:spPr>
-        <a:solidFill>
-          <a:srgbClr val="435765"/>
-        </a:solidFill>
-      </a:spPr>
-      <a:bodyPr rtlCol="0" anchor="ctr"/>
-      <a:lstStyle>
-        <a:defPPr algn="ctr">
-          <a:defRPr/>
-        </a:defPPr>
-      </a:lstStyle>
-      <a:style>
-        <a:lnRef idx="2">
-          <a:schemeClr val="accent1">
-            <a:shade val="50000"/>
-          </a:schemeClr>
-        </a:lnRef>
-        <a:fillRef idx="1">
-          <a:schemeClr val="accent1"/>
-        </a:fillRef>
-        <a:effectRef idx="0">
-          <a:schemeClr val="accent1"/>
-        </a:effectRef>
-        <a:fontRef idx="minor">
-          <a:schemeClr val="lt1"/>
-        </a:fontRef>
-      </a:style>
-    </a:spDef>
-  </a:objectDefaults>
+  <a:objectDefaults/>
   <a:extraClrSchemeLst/>
-  <a:extLst>
-    <a:ext uri="{05A4C25C-085E-4340-85A3-A5531E510DB2}">
-      <thm15:themeFamily xmlns:thm15="http://schemas.microsoft.com/office/thememl/2012/main" name="Office Theme 2013 - 2022" id="{62F939B6-93AF-4DB8-9C6B-D6C7DFDC589F}" vid="{4A3C46E8-61CC-4603-A589-7422A47A8E4A}"/>
-    </a:ext>
-  </a:extLst>
 </a:theme>
 </file>
 
@@ -23062,6 +23483,14 @@
 </file>
 
 <file path=customXml/item1.xml><?xml version="1.0" encoding="utf-8"?>
+<p:properties xmlns:p="http://schemas.microsoft.com/office/2006/metadata/properties" xmlns:xsi="http://www.w3.org/2001/XMLSchema-instance" xmlns:pc="http://schemas.microsoft.com/office/infopath/2007/PartnerControls">
+  <documentManagement>
+    <_activity xmlns="2e073d95-02bc-4c31-9707-1f7b5f2564cb" xsi:nil="true"/>
+  </documentManagement>
+</p:properties>
+</file>
+
+<file path=customXml/item2.xml><?xml version="1.0" encoding="utf-8"?>
 <ct:contentTypeSchema xmlns:ct="http://schemas.microsoft.com/office/2006/metadata/contentType" xmlns:ma="http://schemas.microsoft.com/office/2006/metadata/properties/metaAttributes" ct:_="" ma:_="" ma:contentTypeName="Document" ma:contentTypeID="0x01010074A7B4F4F87092419B4836663A979F72" ma:contentTypeVersion="12" ma:contentTypeDescription="Create a new document." ma:contentTypeScope="" ma:versionID="1705185788f4f7b8606867508f74a2eb">
   <xsd:schema xmlns:xsd="http://www.w3.org/2001/XMLSchema" xmlns:xs="http://www.w3.org/2001/XMLSchema" xmlns:p="http://schemas.microsoft.com/office/2006/metadata/properties" xmlns:ns3="2e073d95-02bc-4c31-9707-1f7b5f2564cb" xmlns:ns4="ecd595b7-854d-4129-8908-394d58e21de0" targetNamespace="http://schemas.microsoft.com/office/2006/metadata/properties" ma:root="true" ma:fieldsID="784458e58d0eaf4d4fb689770e9f109b" ns3:_="" ns4:_="">
     <xsd:import namespace="2e073d95-02bc-4c31-9707-1f7b5f2564cb"/>
@@ -23276,14 +23705,6 @@
 </ct:contentTypeSchema>
 </file>
 
-<file path=customXml/item2.xml><?xml version="1.0" encoding="utf-8"?>
-<p:properties xmlns:p="http://schemas.microsoft.com/office/2006/metadata/properties" xmlns:xsi="http://www.w3.org/2001/XMLSchema-instance" xmlns:pc="http://schemas.microsoft.com/office/infopath/2007/PartnerControls">
-  <documentManagement>
-    <_activity xmlns="2e073d95-02bc-4c31-9707-1f7b5f2564cb" xsi:nil="true"/>
-  </documentManagement>
-</p:properties>
-</file>
-
 <file path=customXml/item3.xml><?xml version="1.0" encoding="utf-8"?>
 <?mso-contentType ?>
 <FormTemplates xmlns="http://schemas.microsoft.com/sharepoint/v3/contenttype/forms">
@@ -23294,6 +23715,23 @@
 </file>
 
 <file path=customXml/itemProps1.xml><?xml version="1.0" encoding="utf-8"?>
+<ds:datastoreItem xmlns:ds="http://schemas.openxmlformats.org/officeDocument/2006/customXml" ds:itemID="{7B7BD72B-E314-4A2C-A344-AF1319C38FF7}">
+  <ds:schemaRefs>
+    <ds:schemaRef ds:uri="http://schemas.microsoft.com/office/infopath/2007/PartnerControls"/>
+    <ds:schemaRef ds:uri="http://purl.org/dc/dcmitype/"/>
+    <ds:schemaRef ds:uri="http://schemas.microsoft.com/office/2006/metadata/properties"/>
+    <ds:schemaRef ds:uri="http://schemas.openxmlformats.org/package/2006/metadata/core-properties"/>
+    <ds:schemaRef ds:uri="http://purl.org/dc/terms/"/>
+    <ds:schemaRef ds:uri="http://schemas.microsoft.com/office/2006/documentManagement/types"/>
+    <ds:schemaRef ds:uri="http://purl.org/dc/elements/1.1/"/>
+    <ds:schemaRef ds:uri="ecd595b7-854d-4129-8908-394d58e21de0"/>
+    <ds:schemaRef ds:uri="2e073d95-02bc-4c31-9707-1f7b5f2564cb"/>
+    <ds:schemaRef ds:uri="http://www.w3.org/XML/1998/namespace"/>
+  </ds:schemaRefs>
+</ds:datastoreItem>
+</file>
+
+<file path=customXml/itemProps2.xml><?xml version="1.0" encoding="utf-8"?>
 <ds:datastoreItem xmlns:ds="http://schemas.openxmlformats.org/officeDocument/2006/customXml" ds:itemID="{5A847694-5366-4F35-BB14-1B44805440D6}">
   <ds:schemaRefs>
     <ds:schemaRef ds:uri="http://schemas.microsoft.com/office/2006/metadata/contentType"/>
@@ -23312,23 +23750,6 @@
 </ds:datastoreItem>
 </file>
 
-<file path=customXml/itemProps2.xml><?xml version="1.0" encoding="utf-8"?>
-<ds:datastoreItem xmlns:ds="http://schemas.openxmlformats.org/officeDocument/2006/customXml" ds:itemID="{7B7BD72B-E314-4A2C-A344-AF1319C38FF7}">
-  <ds:schemaRefs>
-    <ds:schemaRef ds:uri="http://schemas.microsoft.com/office/infopath/2007/PartnerControls"/>
-    <ds:schemaRef ds:uri="http://purl.org/dc/dcmitype/"/>
-    <ds:schemaRef ds:uri="http://schemas.microsoft.com/office/2006/metadata/properties"/>
-    <ds:schemaRef ds:uri="http://schemas.openxmlformats.org/package/2006/metadata/core-properties"/>
-    <ds:schemaRef ds:uri="http://purl.org/dc/terms/"/>
-    <ds:schemaRef ds:uri="http://schemas.microsoft.com/office/2006/documentManagement/types"/>
-    <ds:schemaRef ds:uri="http://purl.org/dc/elements/1.1/"/>
-    <ds:schemaRef ds:uri="ecd595b7-854d-4129-8908-394d58e21de0"/>
-    <ds:schemaRef ds:uri="2e073d95-02bc-4c31-9707-1f7b5f2564cb"/>
-    <ds:schemaRef ds:uri="http://www.w3.org/XML/1998/namespace"/>
-  </ds:schemaRefs>
-</ds:datastoreItem>
-</file>
-
 <file path=customXml/itemProps3.xml><?xml version="1.0" encoding="utf-8"?>
 <ds:datastoreItem xmlns:ds="http://schemas.openxmlformats.org/officeDocument/2006/customXml" ds:itemID="{9F0734DE-2FC5-4E40-8FD1-4F58D8D2451F}">
   <ds:schemaRefs>

--- a/topic08-inheritance/unit-08a-lectures/talk-3-inheritance-v2/a-inheritance-v2.pptx
+++ b/topic08-inheritance/unit-08a-lectures/talk-3-inheritance-v2/a-inheritance-v2.pptx
@@ -2,7 +2,7 @@
 <file path=ppt/presentation.xml><?xml version="1.0" encoding="utf-8"?>
 <p:presentation xmlns:a="http://schemas.openxmlformats.org/drawingml/2006/main" xmlns:r="http://schemas.openxmlformats.org/officeDocument/2006/relationships" xmlns:p="http://schemas.openxmlformats.org/presentationml/2006/main" saveSubsetFonts="1" autoCompressPictures="0">
   <p:sldMasterIdLst>
-    <p:sldMasterId id="2147483661" r:id="rId4"/>
+    <p:sldMasterId id="2147483675" r:id="rId4"/>
   </p:sldMasterIdLst>
   <p:notesMasterIdLst>
     <p:notesMasterId r:id="rId26"/>
@@ -270,7 +270,7 @@
           <a:p>
             <a:fld id="{73FB268A-CA3A-0048-9013-6E7C8FF5127F}" type="datetimeFigureOut">
               <a:rPr lang="en-US" smtClean="0"/>
-              <a:t>3/12/26</a:t>
+              <a:t>3/13/26</a:t>
             </a:fld>
             <a:endParaRPr lang="en-US"/>
           </a:p>
@@ -2345,7 +2345,7 @@
               <a:rPr lang="en-GB"/>
               <a:t>Click to edit Master title style</a:t>
             </a:r>
-            <a:endParaRPr lang="en-IE"/>
+            <a:endParaRPr lang="en-US" dirty="0"/>
           </a:p>
         </p:txBody>
       </p:sp>
@@ -2464,7 +2464,7 @@
               <a:rPr lang="en-GB"/>
               <a:t>Click to edit Master subtitle style</a:t>
             </a:r>
-            <a:endParaRPr lang="en-IE"/>
+            <a:endParaRPr lang="en-US" dirty="0"/>
           </a:p>
         </p:txBody>
       </p:sp>
@@ -2486,7 +2486,7 @@
             <a:fld id="{1D8BD707-D9CF-40AE-B4C6-C98DA3205C09}" type="datetimeFigureOut">
               <a:rPr lang="en-US" smtClean="0"/>
               <a:pPr/>
-              <a:t>3/12/26</a:t>
+              <a:t>3/13/26</a:t>
             </a:fld>
             <a:endParaRPr lang="en-US"/>
           </a:p>
@@ -2540,7 +2540,37 @@
           <p:cNvPr id="7" name="Picture 6" descr="Text&#10;&#10;Description automatically generated">
             <a:extLst>
               <a:ext uri="{FF2B5EF4-FFF2-40B4-BE49-F238E27FC236}">
-                <a16:creationId xmlns:a16="http://schemas.microsoft.com/office/drawing/2014/main" id="{998FED43-5408-87D4-C6B6-D65F6384E528}"/>
+                <a16:creationId xmlns:a16="http://schemas.microsoft.com/office/drawing/2014/main" id="{483960A5-1800-CCD1-18D9-96C2C3AE1A06}"/>
+              </a:ext>
+            </a:extLst>
+          </p:cNvPr>
+          <p:cNvPicPr>
+            <a:picLocks noChangeAspect="1"/>
+          </p:cNvPicPr>
+          <p:nvPr/>
+        </p:nvPicPr>
+        <p:blipFill>
+          <a:blip r:embed="rId2"/>
+          <a:stretch>
+            <a:fillRect/>
+          </a:stretch>
+        </p:blipFill>
+        <p:spPr>
+          <a:xfrm>
+            <a:off x="10467415" y="6013271"/>
+            <a:ext cx="1743635" cy="977493"/>
+          </a:xfrm>
+          <a:prstGeom prst="rect">
+            <a:avLst/>
+          </a:prstGeom>
+        </p:spPr>
+      </p:pic>
+      <p:pic>
+        <p:nvPicPr>
+          <p:cNvPr id="8" name="Picture 7" descr="Text&#10;&#10;Description automatically generated">
+            <a:extLst>
+              <a:ext uri="{FF2B5EF4-FFF2-40B4-BE49-F238E27FC236}">
+                <a16:creationId xmlns:a16="http://schemas.microsoft.com/office/drawing/2014/main" id="{4910B066-0AE5-B659-58BA-EF8C2E54C885}"/>
               </a:ext>
             </a:extLst>
           </p:cNvPr>
@@ -2568,7 +2598,7 @@
     </p:spTree>
     <p:extLst>
       <p:ext uri="{BB962C8B-B14F-4D97-AF65-F5344CB8AC3E}">
-        <p14:creationId xmlns:p14="http://schemas.microsoft.com/office/powerpoint/2010/main" val="654489662"/>
+        <p14:creationId xmlns:p14="http://schemas.microsoft.com/office/powerpoint/2010/main" val="3076026171"/>
       </p:ext>
     </p:extLst>
   </p:cSld>
@@ -2617,7 +2647,7 @@
               <a:rPr lang="en-GB"/>
               <a:t>Click to edit Master title style</a:t>
             </a:r>
-            <a:endParaRPr lang="en-IE"/>
+            <a:endParaRPr lang="en-US"/>
           </a:p>
         </p:txBody>
       </p:sp>
@@ -2669,7 +2699,7 @@
               <a:rPr lang="en-GB"/>
               <a:t>Fifth level</a:t>
             </a:r>
-            <a:endParaRPr lang="en-IE"/>
+            <a:endParaRPr lang="en-US"/>
           </a:p>
         </p:txBody>
       </p:sp>
@@ -2691,7 +2721,7 @@
             <a:fld id="{1D8BD707-D9CF-40AE-B4C6-C98DA3205C09}" type="datetimeFigureOut">
               <a:rPr lang="en-US" smtClean="0"/>
               <a:pPr/>
-              <a:t>3/12/26</a:t>
+              <a:t>3/13/26</a:t>
             </a:fld>
             <a:endParaRPr lang="en-US"/>
           </a:p>
@@ -2740,12 +2770,12 @@
           <p:cNvPr id="7" name="Rectangle 6">
             <a:extLst>
               <a:ext uri="{FF2B5EF4-FFF2-40B4-BE49-F238E27FC236}">
-                <a16:creationId xmlns:a16="http://schemas.microsoft.com/office/drawing/2014/main" id="{B2D8A923-EFCA-6EAE-9B2C-39D178828204}"/>
+                <a16:creationId xmlns:a16="http://schemas.microsoft.com/office/drawing/2014/main" id="{1182249C-CDAD-92F8-6452-58C4C111C858}"/>
               </a:ext>
             </a:extLst>
           </p:cNvPr>
           <p:cNvSpPr/>
-          <p:nvPr userDrawn="1"/>
+          <p:nvPr/>
         </p:nvSpPr>
         <p:spPr>
           <a:xfrm>
@@ -2789,7 +2819,182 @@
           <p:cNvPr id="8" name="Picture 7" descr="Text&#10;&#10;Description automatically generated">
             <a:extLst>
               <a:ext uri="{FF2B5EF4-FFF2-40B4-BE49-F238E27FC236}">
-                <a16:creationId xmlns:a16="http://schemas.microsoft.com/office/drawing/2014/main" id="{F01AB359-6666-5050-F710-2AA5C4959DD3}"/>
+                <a16:creationId xmlns:a16="http://schemas.microsoft.com/office/drawing/2014/main" id="{94380F71-8912-F401-E063-12338E622826}"/>
+              </a:ext>
+            </a:extLst>
+          </p:cNvPr>
+          <p:cNvPicPr>
+            <a:picLocks noChangeAspect="1"/>
+          </p:cNvPicPr>
+          <p:nvPr/>
+        </p:nvPicPr>
+        <p:blipFill>
+          <a:blip r:embed="rId2"/>
+          <a:stretch>
+            <a:fillRect/>
+          </a:stretch>
+        </p:blipFill>
+        <p:spPr>
+          <a:xfrm>
+            <a:off x="10467415" y="6013271"/>
+            <a:ext cx="1743635" cy="977493"/>
+          </a:xfrm>
+          <a:prstGeom prst="rect">
+            <a:avLst/>
+          </a:prstGeom>
+        </p:spPr>
+      </p:pic>
+      <p:sp>
+        <p:nvSpPr>
+          <p:cNvPr id="9" name="TextBox 8">
+            <a:extLst>
+              <a:ext uri="{FF2B5EF4-FFF2-40B4-BE49-F238E27FC236}">
+                <a16:creationId xmlns:a16="http://schemas.microsoft.com/office/drawing/2014/main" id="{F58CB74F-BC07-1374-4B08-077531BA864A}"/>
+              </a:ext>
+            </a:extLst>
+          </p:cNvPr>
+          <p:cNvSpPr txBox="1"/>
+          <p:nvPr/>
+        </p:nvSpPr>
+        <p:spPr>
+          <a:xfrm>
+            <a:off x="259216" y="6209629"/>
+            <a:ext cx="2132315" cy="584775"/>
+          </a:xfrm>
+          <a:prstGeom prst="rect">
+            <a:avLst/>
+          </a:prstGeom>
+          <a:noFill/>
+        </p:spPr>
+        <p:txBody>
+          <a:bodyPr wrap="none" rtlCol="0">
+            <a:spAutoFit/>
+          </a:bodyPr>
+          <a:lstStyle/>
+          <a:p>
+            <a:r>
+              <a:rPr lang="en-US" sz="1600" dirty="0">
+                <a:solidFill>
+                  <a:srgbClr val="FCCA3A"/>
+                </a:solidFill>
+                <a:latin typeface="Inter Medium" panose="02000503000000020004" pitchFamily="2" charset="0"/>
+                <a:ea typeface="Inter Medium" panose="02000503000000020004" pitchFamily="2" charset="0"/>
+              </a:rPr>
+              <a:t>Dave Hearne</a:t>
+            </a:r>
+          </a:p>
+          <a:p>
+            <a:r>
+              <a:rPr lang="en-US" sz="1600" dirty="0" err="1">
+                <a:solidFill>
+                  <a:srgbClr val="FCCA3A"/>
+                </a:solidFill>
+                <a:latin typeface="Inter Medium" panose="02000503000000020004" pitchFamily="2" charset="0"/>
+                <a:ea typeface="Inter Medium" panose="02000503000000020004" pitchFamily="2" charset="0"/>
+              </a:rPr>
+              <a:t>dave.hearne@wit.ie</a:t>
+            </a:r>
+            <a:endParaRPr lang="en-US" sz="1600" dirty="0">
+              <a:solidFill>
+                <a:srgbClr val="FCCA3A"/>
+              </a:solidFill>
+              <a:latin typeface="Inter Medium" panose="02000503000000020004" pitchFamily="2" charset="0"/>
+              <a:ea typeface="Inter Medium" panose="02000503000000020004" pitchFamily="2" charset="0"/>
+            </a:endParaRPr>
+          </a:p>
+        </p:txBody>
+      </p:sp>
+      <p:pic>
+        <p:nvPicPr>
+          <p:cNvPr id="10" name="Graphic 9">
+            <a:extLst>
+              <a:ext uri="{FF2B5EF4-FFF2-40B4-BE49-F238E27FC236}">
+                <a16:creationId xmlns:a16="http://schemas.microsoft.com/office/drawing/2014/main" id="{6BF4C5FE-6FC7-2EB5-C946-28666A3B7CEC}"/>
+              </a:ext>
+            </a:extLst>
+          </p:cNvPr>
+          <p:cNvPicPr>
+            <a:picLocks noChangeAspect="1"/>
+          </p:cNvPicPr>
+          <p:nvPr/>
+        </p:nvPicPr>
+        <p:blipFill>
+          <a:blip>
+            <a:extLst>
+              <a:ext uri="{96DAC541-7B7A-43D3-8B79-37D633B846F1}">
+                <asvg:svgBlip xmlns:asvg="http://schemas.microsoft.com/office/drawing/2016/SVG/main" r:embed="rId3"/>
+              </a:ext>
+            </a:extLst>
+          </a:blip>
+          <a:stretch>
+            <a:fillRect/>
+          </a:stretch>
+        </p:blipFill>
+        <p:spPr>
+          <a:xfrm>
+            <a:off x="9203245" y="6176176"/>
+            <a:ext cx="1120090" cy="603766"/>
+          </a:xfrm>
+          <a:prstGeom prst="rect">
+            <a:avLst/>
+          </a:prstGeom>
+        </p:spPr>
+      </p:pic>
+      <p:sp>
+        <p:nvSpPr>
+          <p:cNvPr id="11" name="Rectangle 10">
+            <a:extLst>
+              <a:ext uri="{FF2B5EF4-FFF2-40B4-BE49-F238E27FC236}">
+                <a16:creationId xmlns:a16="http://schemas.microsoft.com/office/drawing/2014/main" id="{AC743A97-DA0A-EDE2-225F-A04A445905F8}"/>
+              </a:ext>
+            </a:extLst>
+          </p:cNvPr>
+          <p:cNvSpPr/>
+          <p:nvPr userDrawn="1"/>
+        </p:nvSpPr>
+        <p:spPr>
+          <a:xfrm>
+            <a:off x="-440871" y="6104965"/>
+            <a:ext cx="13062857" cy="885799"/>
+          </a:xfrm>
+          <a:prstGeom prst="rect">
+            <a:avLst/>
+          </a:prstGeom>
+          <a:solidFill>
+            <a:srgbClr val="435765"/>
+          </a:solidFill>
+        </p:spPr>
+        <p:style>
+          <a:lnRef idx="2">
+            <a:schemeClr val="accent1">
+              <a:shade val="50000"/>
+            </a:schemeClr>
+          </a:lnRef>
+          <a:fillRef idx="1">
+            <a:schemeClr val="accent1"/>
+          </a:fillRef>
+          <a:effectRef idx="0">
+            <a:schemeClr val="accent1"/>
+          </a:effectRef>
+          <a:fontRef idx="minor">
+            <a:schemeClr val="lt1"/>
+          </a:fontRef>
+        </p:style>
+        <p:txBody>
+          <a:bodyPr rtlCol="0" anchor="ctr"/>
+          <a:lstStyle/>
+          <a:p>
+            <a:pPr algn="ctr"/>
+            <a:endParaRPr lang="en-US"/>
+          </a:p>
+        </p:txBody>
+      </p:sp>
+      <p:pic>
+        <p:nvPicPr>
+          <p:cNvPr id="12" name="Picture 11" descr="Text&#10;&#10;Description automatically generated">
+            <a:extLst>
+              <a:ext uri="{FF2B5EF4-FFF2-40B4-BE49-F238E27FC236}">
+                <a16:creationId xmlns:a16="http://schemas.microsoft.com/office/drawing/2014/main" id="{869D0FC0-C6D8-D51A-ECB2-CAF8BB8A8C68}"/>
               </a:ext>
             </a:extLst>
           </p:cNvPr>
@@ -2816,10 +3021,10 @@
       </p:pic>
       <p:sp>
         <p:nvSpPr>
-          <p:cNvPr id="9" name="TextBox 8">
+          <p:cNvPr id="13" name="TextBox 12">
             <a:extLst>
               <a:ext uri="{FF2B5EF4-FFF2-40B4-BE49-F238E27FC236}">
-                <a16:creationId xmlns:a16="http://schemas.microsoft.com/office/drawing/2014/main" id="{DED48E06-A1DF-912E-0082-4ACF52E6D028}"/>
+                <a16:creationId xmlns:a16="http://schemas.microsoft.com/office/drawing/2014/main" id="{2569FC6D-252A-3E5A-682C-56EB61CD769D}"/>
               </a:ext>
             </a:extLst>
           </p:cNvPr>
@@ -2876,10 +3081,10 @@
       </p:sp>
       <p:pic>
         <p:nvPicPr>
-          <p:cNvPr id="10" name="Graphic 9">
+          <p:cNvPr id="14" name="Graphic 13">
             <a:extLst>
               <a:ext uri="{FF2B5EF4-FFF2-40B4-BE49-F238E27FC236}">
-                <a16:creationId xmlns:a16="http://schemas.microsoft.com/office/drawing/2014/main" id="{9F4C9ECA-345B-E887-5184-07DBFF32F956}"/>
+                <a16:creationId xmlns:a16="http://schemas.microsoft.com/office/drawing/2014/main" id="{E0856161-3623-808D-2840-95C33E9A7689}"/>
               </a:ext>
             </a:extLst>
           </p:cNvPr>
@@ -2913,7 +3118,7 @@
     </p:spTree>
     <p:extLst>
       <p:ext uri="{BB962C8B-B14F-4D97-AF65-F5344CB8AC3E}">
-        <p14:creationId xmlns:p14="http://schemas.microsoft.com/office/powerpoint/2010/main" val="94789847"/>
+        <p14:creationId xmlns:p14="http://schemas.microsoft.com/office/powerpoint/2010/main" val="1226287601"/>
       </p:ext>
     </p:extLst>
   </p:cSld>
@@ -2967,7 +3172,7 @@
               <a:rPr lang="en-GB"/>
               <a:t>Click to edit Master title style</a:t>
             </a:r>
-            <a:endParaRPr lang="en-IE"/>
+            <a:endParaRPr lang="en-US"/>
           </a:p>
         </p:txBody>
       </p:sp>
@@ -3024,7 +3229,7 @@
               <a:rPr lang="en-GB"/>
               <a:t>Fifth level</a:t>
             </a:r>
-            <a:endParaRPr lang="en-IE"/>
+            <a:endParaRPr lang="en-US"/>
           </a:p>
         </p:txBody>
       </p:sp>
@@ -3046,7 +3251,7 @@
             <a:fld id="{1D8BD707-D9CF-40AE-B4C6-C98DA3205C09}" type="datetimeFigureOut">
               <a:rPr lang="en-US" smtClean="0"/>
               <a:pPr/>
-              <a:t>3/12/26</a:t>
+              <a:t>3/13/26</a:t>
             </a:fld>
             <a:endParaRPr lang="en-US"/>
           </a:p>
@@ -3095,12 +3300,12 @@
           <p:cNvPr id="7" name="Rectangle 6">
             <a:extLst>
               <a:ext uri="{FF2B5EF4-FFF2-40B4-BE49-F238E27FC236}">
-                <a16:creationId xmlns:a16="http://schemas.microsoft.com/office/drawing/2014/main" id="{69D308D4-6ED0-088E-FA06-7B24935BBE1E}"/>
+                <a16:creationId xmlns:a16="http://schemas.microsoft.com/office/drawing/2014/main" id="{6A8C268C-7F21-76CE-043B-8BA65102E9F5}"/>
               </a:ext>
             </a:extLst>
           </p:cNvPr>
           <p:cNvSpPr/>
-          <p:nvPr userDrawn="1"/>
+          <p:nvPr/>
         </p:nvSpPr>
         <p:spPr>
           <a:xfrm>
@@ -3144,7 +3349,182 @@
           <p:cNvPr id="8" name="Picture 7" descr="Text&#10;&#10;Description automatically generated">
             <a:extLst>
               <a:ext uri="{FF2B5EF4-FFF2-40B4-BE49-F238E27FC236}">
-                <a16:creationId xmlns:a16="http://schemas.microsoft.com/office/drawing/2014/main" id="{51A4228B-708D-E9D1-4FF2-B6F5FFD3E39B}"/>
+                <a16:creationId xmlns:a16="http://schemas.microsoft.com/office/drawing/2014/main" id="{22A91C6D-4E2E-CB53-6278-FA2A8E7EC0D8}"/>
+              </a:ext>
+            </a:extLst>
+          </p:cNvPr>
+          <p:cNvPicPr>
+            <a:picLocks noChangeAspect="1"/>
+          </p:cNvPicPr>
+          <p:nvPr/>
+        </p:nvPicPr>
+        <p:blipFill>
+          <a:blip r:embed="rId2"/>
+          <a:stretch>
+            <a:fillRect/>
+          </a:stretch>
+        </p:blipFill>
+        <p:spPr>
+          <a:xfrm>
+            <a:off x="10467415" y="6013271"/>
+            <a:ext cx="1743635" cy="977493"/>
+          </a:xfrm>
+          <a:prstGeom prst="rect">
+            <a:avLst/>
+          </a:prstGeom>
+        </p:spPr>
+      </p:pic>
+      <p:sp>
+        <p:nvSpPr>
+          <p:cNvPr id="9" name="TextBox 8">
+            <a:extLst>
+              <a:ext uri="{FF2B5EF4-FFF2-40B4-BE49-F238E27FC236}">
+                <a16:creationId xmlns:a16="http://schemas.microsoft.com/office/drawing/2014/main" id="{ED17733A-7810-3C7A-DF42-8080C142CBA4}"/>
+              </a:ext>
+            </a:extLst>
+          </p:cNvPr>
+          <p:cNvSpPr txBox="1"/>
+          <p:nvPr/>
+        </p:nvSpPr>
+        <p:spPr>
+          <a:xfrm>
+            <a:off x="259216" y="6209629"/>
+            <a:ext cx="2132315" cy="584775"/>
+          </a:xfrm>
+          <a:prstGeom prst="rect">
+            <a:avLst/>
+          </a:prstGeom>
+          <a:noFill/>
+        </p:spPr>
+        <p:txBody>
+          <a:bodyPr wrap="none" rtlCol="0">
+            <a:spAutoFit/>
+          </a:bodyPr>
+          <a:lstStyle/>
+          <a:p>
+            <a:r>
+              <a:rPr lang="en-US" sz="1600" dirty="0">
+                <a:solidFill>
+                  <a:srgbClr val="FCCA3A"/>
+                </a:solidFill>
+                <a:latin typeface="Inter Medium" panose="02000503000000020004" pitchFamily="2" charset="0"/>
+                <a:ea typeface="Inter Medium" panose="02000503000000020004" pitchFamily="2" charset="0"/>
+              </a:rPr>
+              <a:t>Dave Hearne</a:t>
+            </a:r>
+          </a:p>
+          <a:p>
+            <a:r>
+              <a:rPr lang="en-US" sz="1600" dirty="0" err="1">
+                <a:solidFill>
+                  <a:srgbClr val="FCCA3A"/>
+                </a:solidFill>
+                <a:latin typeface="Inter Medium" panose="02000503000000020004" pitchFamily="2" charset="0"/>
+                <a:ea typeface="Inter Medium" panose="02000503000000020004" pitchFamily="2" charset="0"/>
+              </a:rPr>
+              <a:t>dave.hearne@wit.ie</a:t>
+            </a:r>
+            <a:endParaRPr lang="en-US" sz="1600" dirty="0">
+              <a:solidFill>
+                <a:srgbClr val="FCCA3A"/>
+              </a:solidFill>
+              <a:latin typeface="Inter Medium" panose="02000503000000020004" pitchFamily="2" charset="0"/>
+              <a:ea typeface="Inter Medium" panose="02000503000000020004" pitchFamily="2" charset="0"/>
+            </a:endParaRPr>
+          </a:p>
+        </p:txBody>
+      </p:sp>
+      <p:pic>
+        <p:nvPicPr>
+          <p:cNvPr id="10" name="Graphic 9">
+            <a:extLst>
+              <a:ext uri="{FF2B5EF4-FFF2-40B4-BE49-F238E27FC236}">
+                <a16:creationId xmlns:a16="http://schemas.microsoft.com/office/drawing/2014/main" id="{68DDAA24-6E81-98DE-4FF2-40081955EA22}"/>
+              </a:ext>
+            </a:extLst>
+          </p:cNvPr>
+          <p:cNvPicPr>
+            <a:picLocks noChangeAspect="1"/>
+          </p:cNvPicPr>
+          <p:nvPr/>
+        </p:nvPicPr>
+        <p:blipFill>
+          <a:blip>
+            <a:extLst>
+              <a:ext uri="{96DAC541-7B7A-43D3-8B79-37D633B846F1}">
+                <asvg:svgBlip xmlns:asvg="http://schemas.microsoft.com/office/drawing/2016/SVG/main" r:embed="rId3"/>
+              </a:ext>
+            </a:extLst>
+          </a:blip>
+          <a:stretch>
+            <a:fillRect/>
+          </a:stretch>
+        </p:blipFill>
+        <p:spPr>
+          <a:xfrm>
+            <a:off x="9203245" y="6187327"/>
+            <a:ext cx="1120090" cy="603766"/>
+          </a:xfrm>
+          <a:prstGeom prst="rect">
+            <a:avLst/>
+          </a:prstGeom>
+        </p:spPr>
+      </p:pic>
+      <p:sp>
+        <p:nvSpPr>
+          <p:cNvPr id="11" name="Rectangle 10">
+            <a:extLst>
+              <a:ext uri="{FF2B5EF4-FFF2-40B4-BE49-F238E27FC236}">
+                <a16:creationId xmlns:a16="http://schemas.microsoft.com/office/drawing/2014/main" id="{76CEF344-07C7-C01A-1EA7-8B95FE5A9F4B}"/>
+              </a:ext>
+            </a:extLst>
+          </p:cNvPr>
+          <p:cNvSpPr/>
+          <p:nvPr userDrawn="1"/>
+        </p:nvSpPr>
+        <p:spPr>
+          <a:xfrm>
+            <a:off x="-440871" y="6104965"/>
+            <a:ext cx="13062857" cy="885799"/>
+          </a:xfrm>
+          <a:prstGeom prst="rect">
+            <a:avLst/>
+          </a:prstGeom>
+          <a:solidFill>
+            <a:srgbClr val="435765"/>
+          </a:solidFill>
+        </p:spPr>
+        <p:style>
+          <a:lnRef idx="2">
+            <a:schemeClr val="accent1">
+              <a:shade val="50000"/>
+            </a:schemeClr>
+          </a:lnRef>
+          <a:fillRef idx="1">
+            <a:schemeClr val="accent1"/>
+          </a:fillRef>
+          <a:effectRef idx="0">
+            <a:schemeClr val="accent1"/>
+          </a:effectRef>
+          <a:fontRef idx="minor">
+            <a:schemeClr val="lt1"/>
+          </a:fontRef>
+        </p:style>
+        <p:txBody>
+          <a:bodyPr rtlCol="0" anchor="ctr"/>
+          <a:lstStyle/>
+          <a:p>
+            <a:pPr algn="ctr"/>
+            <a:endParaRPr lang="en-US"/>
+          </a:p>
+        </p:txBody>
+      </p:sp>
+      <p:pic>
+        <p:nvPicPr>
+          <p:cNvPr id="12" name="Picture 11" descr="Text&#10;&#10;Description automatically generated">
+            <a:extLst>
+              <a:ext uri="{FF2B5EF4-FFF2-40B4-BE49-F238E27FC236}">
+                <a16:creationId xmlns:a16="http://schemas.microsoft.com/office/drawing/2014/main" id="{F30BEAD0-7B15-7C19-28F9-0FDDC47526EC}"/>
               </a:ext>
             </a:extLst>
           </p:cNvPr>
@@ -3171,10 +3551,10 @@
       </p:pic>
       <p:sp>
         <p:nvSpPr>
-          <p:cNvPr id="9" name="TextBox 8">
+          <p:cNvPr id="13" name="TextBox 12">
             <a:extLst>
               <a:ext uri="{FF2B5EF4-FFF2-40B4-BE49-F238E27FC236}">
-                <a16:creationId xmlns:a16="http://schemas.microsoft.com/office/drawing/2014/main" id="{6AAAEFEA-CF5E-B8F1-89E0-3CA496AC081E}"/>
+                <a16:creationId xmlns:a16="http://schemas.microsoft.com/office/drawing/2014/main" id="{38396B45-1C25-78C3-346C-3DD468693DED}"/>
               </a:ext>
             </a:extLst>
           </p:cNvPr>
@@ -3231,10 +3611,10 @@
       </p:sp>
       <p:pic>
         <p:nvPicPr>
-          <p:cNvPr id="10" name="Graphic 9">
+          <p:cNvPr id="14" name="Graphic 13">
             <a:extLst>
               <a:ext uri="{FF2B5EF4-FFF2-40B4-BE49-F238E27FC236}">
-                <a16:creationId xmlns:a16="http://schemas.microsoft.com/office/drawing/2014/main" id="{91A84C97-6604-F6EC-9E09-42DE163CD37F}"/>
+                <a16:creationId xmlns:a16="http://schemas.microsoft.com/office/drawing/2014/main" id="{5B8C1124-4541-342D-5759-4186757E2180}"/>
               </a:ext>
             </a:extLst>
           </p:cNvPr>
@@ -3268,7 +3648,7 @@
     </p:spTree>
     <p:extLst>
       <p:ext uri="{BB962C8B-B14F-4D97-AF65-F5344CB8AC3E}">
-        <p14:creationId xmlns:p14="http://schemas.microsoft.com/office/powerpoint/2010/main" val="3282572487"/>
+        <p14:creationId xmlns:p14="http://schemas.microsoft.com/office/powerpoint/2010/main" val="2446270753"/>
       </p:ext>
     </p:extLst>
   </p:cSld>
@@ -3282,8 +3662,1254 @@
 </file>
 
 <file path=ppt/slideLayouts/slideLayout12.xml><?xml version="1.0" encoding="utf-8"?>
+<p:sldLayout xmlns:a="http://schemas.openxmlformats.org/drawingml/2006/main" xmlns:r="http://schemas.openxmlformats.org/officeDocument/2006/relationships" xmlns:p="http://schemas.openxmlformats.org/presentationml/2006/main" showMasterSp="0" type="tx">
+  <p:cSld name="1_Lab Title">
+    <p:spTree>
+      <p:nvGrpSpPr>
+        <p:cNvPr id="1" name=""/>
+        <p:cNvGrpSpPr/>
+        <p:nvPr/>
+      </p:nvGrpSpPr>
+      <p:grpSpPr>
+        <a:xfrm>
+          <a:off x="0" y="0"/>
+          <a:ext cx="0" cy="0"/>
+          <a:chOff x="0" y="0"/>
+          <a:chExt cx="0" cy="0"/>
+        </a:xfrm>
+      </p:grpSpPr>
+      <p:sp>
+        <p:nvSpPr>
+          <p:cNvPr id="206" name="Shape 206"/>
+          <p:cNvSpPr/>
+          <p:nvPr/>
+        </p:nvSpPr>
+        <p:spPr>
+          <a:xfrm flipV="1">
+            <a:off x="851522" y="3070411"/>
+            <a:ext cx="10519439" cy="47"/>
+          </a:xfrm>
+          <a:prstGeom prst="line">
+            <a:avLst/>
+          </a:prstGeom>
+          <a:ln w="12700">
+            <a:solidFill>
+              <a:srgbClr val="919191"/>
+            </a:solidFill>
+            <a:miter lim="400000"/>
+          </a:ln>
+        </p:spPr>
+        <p:txBody>
+          <a:bodyPr lIns="35717" tIns="35717" rIns="35717" bIns="35717" anchor="ctr"/>
+          <a:lstStyle/>
+          <a:p>
+            <a:endParaRPr sz="1800"/>
+          </a:p>
+        </p:txBody>
+      </p:sp>
+      <p:pic>
+        <p:nvPicPr>
+          <p:cNvPr id="207" name="WIT_logo.png"/>
+          <p:cNvPicPr>
+            <a:picLocks noChangeAspect="1"/>
+          </p:cNvPicPr>
+          <p:nvPr/>
+        </p:nvPicPr>
+        <p:blipFill>
+          <a:blip r:embed="rId2"/>
+          <a:stretch>
+            <a:fillRect/>
+          </a:stretch>
+        </p:blipFill>
+        <p:spPr>
+          <a:xfrm>
+            <a:off x="869157" y="6134697"/>
+            <a:ext cx="3033804" cy="473273"/>
+          </a:xfrm>
+          <a:prstGeom prst="rect">
+            <a:avLst/>
+          </a:prstGeom>
+          <a:ln w="12700">
+            <a:miter lim="400000"/>
+          </a:ln>
+        </p:spPr>
+      </p:pic>
+      <p:pic>
+        <p:nvPicPr>
+          <p:cNvPr id="208" name="esu-logo.png"/>
+          <p:cNvPicPr>
+            <a:picLocks noChangeAspect="1"/>
+          </p:cNvPicPr>
+          <p:nvPr/>
+        </p:nvPicPr>
+        <p:blipFill>
+          <a:blip r:embed="rId3"/>
+          <a:stretch>
+            <a:fillRect/>
+          </a:stretch>
+        </p:blipFill>
+        <p:spPr>
+          <a:xfrm>
+            <a:off x="9572625" y="6206134"/>
+            <a:ext cx="1812472" cy="321469"/>
+          </a:xfrm>
+          <a:prstGeom prst="rect">
+            <a:avLst/>
+          </a:prstGeom>
+          <a:ln w="12700">
+            <a:miter lim="400000"/>
+          </a:ln>
+        </p:spPr>
+      </p:pic>
+      <p:sp>
+        <p:nvSpPr>
+          <p:cNvPr id="209" name="Shape 209"/>
+          <p:cNvSpPr/>
+          <p:nvPr/>
+        </p:nvSpPr>
+        <p:spPr>
+          <a:xfrm>
+            <a:off x="497421" y="3128069"/>
+            <a:ext cx="2646554" cy="1155505"/>
+          </a:xfrm>
+          <a:prstGeom prst="rect">
+            <a:avLst/>
+          </a:prstGeom>
+          <a:ln w="12700">
+            <a:miter lim="400000"/>
+          </a:ln>
+          <a:extLst>
+            <a:ext uri="{C572A759-6A51-4108-AA02-DFA0A04FC94B}">
+              <ma14:wrappingTextBoxFlag xmlns="" xmlns:ma14="http://schemas.microsoft.com/office/mac/drawingml/2011/main" val="1"/>
+            </a:ext>
+          </a:extLst>
+        </p:spPr>
+        <p:txBody>
+          <a:bodyPr wrap="none" lIns="35717" tIns="35717" rIns="35717" bIns="35717" anchor="ctr">
+            <a:spAutoFit/>
+          </a:bodyPr>
+          <a:lstStyle/>
+          <a:p>
+            <a:pPr algn="r" defTabSz="410751">
+              <a:lnSpc>
+                <a:spcPct val="80000"/>
+              </a:lnSpc>
+              <a:defRPr sz="4400">
+                <a:solidFill>
+                  <a:srgbClr val="AAAAAA"/>
+                </a:solidFill>
+                <a:latin typeface="Helvetica Neue UltraLight"/>
+                <a:ea typeface="Helvetica Neue UltraLight"/>
+                <a:cs typeface="Helvetica Neue UltraLight"/>
+                <a:sym typeface="Helvetica Neue UltraLight"/>
+              </a:defRPr>
+            </a:pPr>
+            <a:r>
+              <a:rPr sz="4400"/>
+              <a:t>Produced </a:t>
+            </a:r>
+          </a:p>
+          <a:p>
+            <a:pPr algn="r" defTabSz="410751">
+              <a:lnSpc>
+                <a:spcPct val="80000"/>
+              </a:lnSpc>
+              <a:defRPr sz="4400">
+                <a:solidFill>
+                  <a:srgbClr val="AAAAAA"/>
+                </a:solidFill>
+                <a:latin typeface="Helvetica Neue UltraLight"/>
+                <a:ea typeface="Helvetica Neue UltraLight"/>
+                <a:cs typeface="Helvetica Neue UltraLight"/>
+                <a:sym typeface="Helvetica Neue UltraLight"/>
+              </a:defRPr>
+            </a:pPr>
+            <a:r>
+              <a:rPr sz="4400"/>
+              <a:t>by</a:t>
+            </a:r>
+          </a:p>
+        </p:txBody>
+      </p:sp>
+      <p:grpSp>
+        <p:nvGrpSpPr>
+          <p:cNvPr id="213" name="Group 213"/>
+          <p:cNvGrpSpPr/>
+          <p:nvPr/>
+        </p:nvGrpSpPr>
+        <p:grpSpPr>
+          <a:xfrm>
+            <a:off x="3476624" y="4561048"/>
+            <a:ext cx="3751796" cy="1110389"/>
+            <a:chOff x="0" y="-174328"/>
+            <a:chExt cx="4001913" cy="1579217"/>
+          </a:xfrm>
+        </p:grpSpPr>
+        <p:sp>
+          <p:nvSpPr>
+            <p:cNvPr id="210" name="Shape 210"/>
+            <p:cNvSpPr/>
+            <p:nvPr/>
+          </p:nvSpPr>
+          <p:spPr>
+            <a:xfrm>
+              <a:off x="0" y="-174328"/>
+              <a:ext cx="4001913" cy="958255"/>
+            </a:xfrm>
+            <a:prstGeom prst="rect">
+              <a:avLst/>
+            </a:prstGeom>
+            <a:noFill/>
+            <a:ln w="12700" cap="flat">
+              <a:noFill/>
+              <a:miter lim="400000"/>
+            </a:ln>
+            <a:effectLst/>
+            <a:extLst>
+              <a:ext uri="{C572A759-6A51-4108-AA02-DFA0A04FC94B}">
+                <ma14:wrappingTextBoxFlag xmlns="" xmlns:ma14="http://schemas.microsoft.com/office/mac/drawingml/2011/main" val="1"/>
+              </a:ext>
+            </a:extLst>
+          </p:spPr>
+          <p:txBody>
+            <a:bodyPr wrap="none" lIns="50800" tIns="50800" rIns="50800" bIns="50800" numCol="1" anchor="ctr">
+              <a:spAutoFit/>
+            </a:bodyPr>
+            <a:lstStyle/>
+            <a:p>
+              <a:pPr defTabSz="410751">
+                <a:lnSpc>
+                  <a:spcPct val="120000"/>
+                </a:lnSpc>
+                <a:defRPr sz="1600">
+                  <a:solidFill>
+                    <a:srgbClr val="133455"/>
+                  </a:solidFill>
+                  <a:latin typeface="+mj-lt"/>
+                  <a:ea typeface="+mj-ea"/>
+                  <a:cs typeface="+mj-cs"/>
+                  <a:sym typeface="Helvetica Neue"/>
+                </a:defRPr>
+              </a:pPr>
+              <a:r>
+                <a:rPr sz="1600"/>
+                <a:t>Department of Computing, Maths &amp; Physics</a:t>
+              </a:r>
+            </a:p>
+            <a:p>
+              <a:pPr defTabSz="410751">
+                <a:lnSpc>
+                  <a:spcPct val="120000"/>
+                </a:lnSpc>
+                <a:defRPr sz="1600">
+                  <a:solidFill>
+                    <a:srgbClr val="133455"/>
+                  </a:solidFill>
+                  <a:latin typeface="+mj-lt"/>
+                  <a:ea typeface="+mj-ea"/>
+                  <a:cs typeface="+mj-cs"/>
+                  <a:sym typeface="Helvetica Neue"/>
+                </a:defRPr>
+              </a:pPr>
+              <a:r>
+                <a:rPr sz="1600"/>
+                <a:t>Waterford Institute of Technology</a:t>
+              </a:r>
+            </a:p>
+          </p:txBody>
+        </p:sp>
+        <p:sp>
+          <p:nvSpPr>
+            <p:cNvPr id="211" name="Shape 211"/>
+            <p:cNvSpPr/>
+            <p:nvPr/>
+          </p:nvSpPr>
+          <p:spPr>
+            <a:xfrm>
+              <a:off x="0" y="560227"/>
+              <a:ext cx="1909513" cy="539862"/>
+            </a:xfrm>
+            <a:prstGeom prst="rect">
+              <a:avLst/>
+            </a:prstGeom>
+            <a:noFill/>
+            <a:ln w="12700" cap="flat">
+              <a:noFill/>
+              <a:miter lim="400000"/>
+            </a:ln>
+            <a:effectLst/>
+            <a:extLst>
+              <a:ext uri="{C572A759-6A51-4108-AA02-DFA0A04FC94B}">
+                <ma14:wrappingTextBoxFlag xmlns="" xmlns:ma14="http://schemas.microsoft.com/office/mac/drawingml/2011/main" val="1"/>
+              </a:ext>
+            </a:extLst>
+          </p:spPr>
+          <p:txBody>
+            <a:bodyPr wrap="none" lIns="50800" tIns="50800" rIns="50800" bIns="50800" numCol="1" anchor="ctr">
+              <a:spAutoFit/>
+            </a:bodyPr>
+            <a:lstStyle>
+              <a:lvl1pPr defTabSz="584200">
+                <a:defRPr>
+                  <a:latin typeface="+mj-lt"/>
+                  <a:ea typeface="+mj-ea"/>
+                  <a:cs typeface="+mj-cs"/>
+                  <a:sym typeface="Helvetica Neue"/>
+                  <a:hlinkClick r:id="" action="ppaction://noaction"/>
+                </a:defRPr>
+              </a:lvl1pPr>
+            </a:lstStyle>
+            <a:p>
+              <a:r>
+                <a:rPr sz="1800">
+                  <a:hlinkClick r:id="rId4"/>
+                </a:rPr>
+                <a:t>http://www.wit.ie</a:t>
+              </a:r>
+            </a:p>
+          </p:txBody>
+        </p:sp>
+        <p:sp>
+          <p:nvSpPr>
+            <p:cNvPr id="212" name="Shape 212"/>
+            <p:cNvSpPr/>
+            <p:nvPr/>
+          </p:nvSpPr>
+          <p:spPr>
+            <a:xfrm>
+              <a:off x="0" y="865027"/>
+              <a:ext cx="2329252" cy="539862"/>
+            </a:xfrm>
+            <a:prstGeom prst="rect">
+              <a:avLst/>
+            </a:prstGeom>
+            <a:noFill/>
+            <a:ln w="12700" cap="flat">
+              <a:noFill/>
+              <a:miter lim="400000"/>
+            </a:ln>
+            <a:effectLst/>
+            <a:extLst>
+              <a:ext uri="{C572A759-6A51-4108-AA02-DFA0A04FC94B}">
+                <ma14:wrappingTextBoxFlag xmlns="" xmlns:ma14="http://schemas.microsoft.com/office/mac/drawingml/2011/main" val="1"/>
+              </a:ext>
+            </a:extLst>
+          </p:spPr>
+          <p:txBody>
+            <a:bodyPr wrap="none" lIns="50800" tIns="50800" rIns="50800" bIns="50800" numCol="1" anchor="ctr">
+              <a:spAutoFit/>
+            </a:bodyPr>
+            <a:lstStyle>
+              <a:lvl1pPr defTabSz="584200">
+                <a:defRPr>
+                  <a:latin typeface="+mj-lt"/>
+                  <a:ea typeface="+mj-ea"/>
+                  <a:cs typeface="+mj-cs"/>
+                  <a:sym typeface="Helvetica Neue"/>
+                  <a:hlinkClick r:id="" action="ppaction://noaction"/>
+                </a:defRPr>
+              </a:lvl1pPr>
+            </a:lstStyle>
+            <a:p>
+              <a:r>
+                <a:rPr sz="1800">
+                  <a:hlinkClick r:id="rId4"/>
+                </a:rPr>
+                <a:t>http://elearning.wit.ie</a:t>
+              </a:r>
+            </a:p>
+          </p:txBody>
+        </p:sp>
+      </p:grpSp>
+      <p:sp>
+        <p:nvSpPr>
+          <p:cNvPr id="214" name="Shape 214"/>
+          <p:cNvSpPr>
+            <a:spLocks noGrp="1"/>
+          </p:cNvSpPr>
+          <p:nvPr>
+            <p:ph type="body" sz="quarter" idx="13"/>
+          </p:nvPr>
+        </p:nvSpPr>
+        <p:spPr>
+          <a:xfrm>
+            <a:off x="839391" y="2428449"/>
+            <a:ext cx="10537031" cy="400110"/>
+          </a:xfrm>
+          <a:prstGeom prst="rect">
+            <a:avLst/>
+          </a:prstGeom>
+        </p:spPr>
+        <p:txBody>
+          <a:bodyPr anchor="ctr">
+            <a:spAutoFit/>
+          </a:bodyPr>
+          <a:lstStyle>
+            <a:lvl1pPr marL="0" indent="0">
+              <a:spcBef>
+                <a:spcPts val="0"/>
+              </a:spcBef>
+              <a:buSzTx/>
+              <a:buNone/>
+              <a:defRPr sz="2000">
+                <a:solidFill>
+                  <a:srgbClr val="606060"/>
+                </a:solidFill>
+              </a:defRPr>
+            </a:lvl1pPr>
+          </a:lstStyle>
+          <a:p>
+            <a:pPr lvl="0"/>
+            <a:r>
+              <a:rPr lang="en-GB"/>
+              <a:t>Click to edit Master text styles</a:t>
+            </a:r>
+          </a:p>
+        </p:txBody>
+      </p:sp>
+      <p:sp>
+        <p:nvSpPr>
+          <p:cNvPr id="215" name="Shape 215"/>
+          <p:cNvSpPr>
+            <a:spLocks noGrp="1"/>
+          </p:cNvSpPr>
+          <p:nvPr>
+            <p:ph type="title"/>
+          </p:nvPr>
+        </p:nvSpPr>
+        <p:spPr>
+          <a:xfrm>
+            <a:off x="833438" y="1665388"/>
+            <a:ext cx="10537031" cy="723305"/>
+          </a:xfrm>
+          <a:prstGeom prst="rect">
+            <a:avLst/>
+          </a:prstGeom>
+        </p:spPr>
+        <p:txBody>
+          <a:bodyPr anchor="ctr"/>
+          <a:lstStyle>
+            <a:lvl1pPr>
+              <a:defRPr sz="3100">
+                <a:latin typeface="+mj-lt"/>
+                <a:ea typeface="+mj-ea"/>
+                <a:cs typeface="+mj-cs"/>
+                <a:sym typeface="Helvetica Neue"/>
+              </a:defRPr>
+            </a:lvl1pPr>
+          </a:lstStyle>
+          <a:p>
+            <a:r>
+              <a:rPr lang="en-GB"/>
+              <a:t>Click to edit Master title style</a:t>
+            </a:r>
+            <a:endParaRPr/>
+          </a:p>
+        </p:txBody>
+      </p:sp>
+      <p:sp>
+        <p:nvSpPr>
+          <p:cNvPr id="216" name="Shape 216"/>
+          <p:cNvSpPr>
+            <a:spLocks noGrp="1"/>
+          </p:cNvSpPr>
+          <p:nvPr>
+            <p:ph type="body" sz="quarter" idx="1"/>
+          </p:nvPr>
+        </p:nvSpPr>
+        <p:spPr>
+          <a:xfrm>
+            <a:off x="3494484" y="3330774"/>
+            <a:ext cx="5417344" cy="1393031"/>
+          </a:xfrm>
+          <a:prstGeom prst="rect">
+            <a:avLst/>
+          </a:prstGeom>
+        </p:spPr>
+        <p:txBody>
+          <a:bodyPr/>
+          <a:lstStyle>
+            <a:lvl1pPr marL="0" indent="0">
+              <a:lnSpc>
+                <a:spcPct val="120000"/>
+              </a:lnSpc>
+              <a:spcBef>
+                <a:spcPts val="0"/>
+              </a:spcBef>
+              <a:buSzTx/>
+              <a:buNone/>
+              <a:defRPr sz="1300"/>
+            </a:lvl1pPr>
+            <a:lvl2pPr marL="0" indent="0">
+              <a:lnSpc>
+                <a:spcPct val="120000"/>
+              </a:lnSpc>
+              <a:spcBef>
+                <a:spcPts val="0"/>
+              </a:spcBef>
+              <a:buSzTx/>
+              <a:buNone/>
+              <a:defRPr sz="1300"/>
+            </a:lvl2pPr>
+            <a:lvl3pPr marL="0" indent="0">
+              <a:lnSpc>
+                <a:spcPct val="120000"/>
+              </a:lnSpc>
+              <a:spcBef>
+                <a:spcPts val="0"/>
+              </a:spcBef>
+              <a:buSzTx/>
+              <a:buNone/>
+              <a:defRPr sz="1300"/>
+            </a:lvl3pPr>
+            <a:lvl4pPr marL="0" indent="0">
+              <a:lnSpc>
+                <a:spcPct val="120000"/>
+              </a:lnSpc>
+              <a:spcBef>
+                <a:spcPts val="0"/>
+              </a:spcBef>
+              <a:buSzTx/>
+              <a:buNone/>
+              <a:defRPr sz="1300"/>
+            </a:lvl4pPr>
+            <a:lvl5pPr marL="0" indent="0">
+              <a:lnSpc>
+                <a:spcPct val="120000"/>
+              </a:lnSpc>
+              <a:spcBef>
+                <a:spcPts val="0"/>
+              </a:spcBef>
+              <a:buSzTx/>
+              <a:buNone/>
+              <a:defRPr sz="1300"/>
+            </a:lvl5pPr>
+          </a:lstStyle>
+          <a:p>
+            <a:pPr lvl="0"/>
+            <a:r>
+              <a:rPr lang="en-GB"/>
+              <a:t>Click to edit Master text styles</a:t>
+            </a:r>
+          </a:p>
+          <a:p>
+            <a:pPr lvl="1"/>
+            <a:r>
+              <a:rPr lang="en-GB"/>
+              <a:t>Second level</a:t>
+            </a:r>
+          </a:p>
+          <a:p>
+            <a:pPr lvl="2"/>
+            <a:r>
+              <a:rPr lang="en-GB"/>
+              <a:t>Third level</a:t>
+            </a:r>
+          </a:p>
+          <a:p>
+            <a:pPr lvl="3"/>
+            <a:r>
+              <a:rPr lang="en-GB"/>
+              <a:t>Fourth level</a:t>
+            </a:r>
+          </a:p>
+          <a:p>
+            <a:pPr lvl="4"/>
+            <a:r>
+              <a:rPr lang="en-GB"/>
+              <a:t>Fifth level</a:t>
+            </a:r>
+            <a:endParaRPr/>
+          </a:p>
+        </p:txBody>
+      </p:sp>
+      <p:sp>
+        <p:nvSpPr>
+          <p:cNvPr id="217" name="Shape 217"/>
+          <p:cNvSpPr>
+            <a:spLocks noGrp="1"/>
+          </p:cNvSpPr>
+          <p:nvPr>
+            <p:ph type="sldNum" sz="quarter" idx="2"/>
+          </p:nvPr>
+        </p:nvSpPr>
+        <p:spPr>
+          <a:xfrm>
+            <a:off x="5935265" y="6527601"/>
+            <a:ext cx="297656" cy="241102"/>
+          </a:xfrm>
+          <a:prstGeom prst="rect">
+            <a:avLst/>
+          </a:prstGeom>
+        </p:spPr>
+        <p:txBody>
+          <a:bodyPr/>
+          <a:lstStyle>
+            <a:lvl1pPr algn="ctr">
+              <a:defRPr sz="1100">
+                <a:latin typeface="Gill Sans"/>
+                <a:ea typeface="Gill Sans"/>
+                <a:cs typeface="Gill Sans"/>
+                <a:sym typeface="Gill Sans"/>
+              </a:defRPr>
+            </a:lvl1pPr>
+          </a:lstStyle>
+          <a:p>
+            <a:fld id="{B6F15528-21DE-4FAA-801E-634DDDAF4B2B}" type="slidenum">
+              <a:rPr lang="en-US" smtClean="0"/>
+              <a:pPr/>
+              <a:t>‹#›</a:t>
+            </a:fld>
+            <a:endParaRPr lang="en-US"/>
+          </a:p>
+        </p:txBody>
+      </p:sp>
+    </p:spTree>
+    <p:extLst>
+      <p:ext uri="{BB962C8B-B14F-4D97-AF65-F5344CB8AC3E}">
+        <p14:creationId xmlns:p14="http://schemas.microsoft.com/office/powerpoint/2010/main" val="271576635"/>
+      </p:ext>
+    </p:extLst>
+  </p:cSld>
+  <p:clrMapOvr>
+    <a:masterClrMapping/>
+  </p:clrMapOvr>
+  <p:transition spd="med"/>
+  <p:hf sldNum="0" hdr="0" ftr="0" dt="0"/>
+</p:sldLayout>
+</file>
+
+<file path=ppt/slideLayouts/slideLayout13.xml><?xml version="1.0" encoding="utf-8"?>
+<p:sldLayout xmlns:a="http://schemas.openxmlformats.org/drawingml/2006/main" xmlns:r="http://schemas.openxmlformats.org/officeDocument/2006/relationships" xmlns:p="http://schemas.openxmlformats.org/presentationml/2006/main" showMasterSp="0">
+  <p:cSld name="1_Blank">
+    <p:spTree>
+      <p:nvGrpSpPr>
+        <p:cNvPr id="1" name=""/>
+        <p:cNvGrpSpPr/>
+        <p:nvPr/>
+      </p:nvGrpSpPr>
+      <p:grpSpPr>
+        <a:xfrm>
+          <a:off x="0" y="0"/>
+          <a:ext cx="0" cy="0"/>
+          <a:chOff x="0" y="0"/>
+          <a:chExt cx="0" cy="0"/>
+        </a:xfrm>
+      </p:grpSpPr>
+      <p:pic>
+        <p:nvPicPr>
+          <p:cNvPr id="6" name="Picture 5" descr="Text&#10;&#10;Description automatically generated">
+            <a:extLst>
+              <a:ext uri="{FF2B5EF4-FFF2-40B4-BE49-F238E27FC236}">
+                <a16:creationId xmlns:a16="http://schemas.microsoft.com/office/drawing/2014/main" id="{A2F7B6B3-CC24-4207-D53D-6E6E9BFD53B0}"/>
+              </a:ext>
+            </a:extLst>
+          </p:cNvPr>
+          <p:cNvPicPr>
+            <a:picLocks noChangeAspect="1"/>
+          </p:cNvPicPr>
+          <p:nvPr/>
+        </p:nvPicPr>
+        <p:blipFill>
+          <a:blip r:embed="rId2"/>
+          <a:stretch>
+            <a:fillRect/>
+          </a:stretch>
+        </p:blipFill>
+        <p:spPr>
+          <a:xfrm>
+            <a:off x="10467415" y="6013271"/>
+            <a:ext cx="1743635" cy="977493"/>
+          </a:xfrm>
+          <a:prstGeom prst="rect">
+            <a:avLst/>
+          </a:prstGeom>
+        </p:spPr>
+      </p:pic>
+      <p:sp>
+        <p:nvSpPr>
+          <p:cNvPr id="7" name="TextBox 6">
+            <a:extLst>
+              <a:ext uri="{FF2B5EF4-FFF2-40B4-BE49-F238E27FC236}">
+                <a16:creationId xmlns:a16="http://schemas.microsoft.com/office/drawing/2014/main" id="{89B32805-1A5C-6896-174B-545E3B3CB158}"/>
+              </a:ext>
+            </a:extLst>
+          </p:cNvPr>
+          <p:cNvSpPr txBox="1"/>
+          <p:nvPr/>
+        </p:nvSpPr>
+        <p:spPr>
+          <a:xfrm>
+            <a:off x="259216" y="6209629"/>
+            <a:ext cx="2132315" cy="584775"/>
+          </a:xfrm>
+          <a:prstGeom prst="rect">
+            <a:avLst/>
+          </a:prstGeom>
+          <a:noFill/>
+        </p:spPr>
+        <p:txBody>
+          <a:bodyPr wrap="none" rtlCol="0">
+            <a:spAutoFit/>
+          </a:bodyPr>
+          <a:lstStyle/>
+          <a:p>
+            <a:r>
+              <a:rPr lang="en-US" sz="1600" dirty="0">
+                <a:solidFill>
+                  <a:srgbClr val="FCCA3A"/>
+                </a:solidFill>
+                <a:latin typeface="Inter Medium" panose="02000503000000020004" pitchFamily="2" charset="0"/>
+                <a:ea typeface="Inter Medium" panose="02000503000000020004" pitchFamily="2" charset="0"/>
+              </a:rPr>
+              <a:t>Dave Hearne</a:t>
+            </a:r>
+          </a:p>
+          <a:p>
+            <a:r>
+              <a:rPr lang="en-US" sz="1600" dirty="0" err="1">
+                <a:solidFill>
+                  <a:srgbClr val="FCCA3A"/>
+                </a:solidFill>
+                <a:latin typeface="Inter Medium" panose="02000503000000020004" pitchFamily="2" charset="0"/>
+                <a:ea typeface="Inter Medium" panose="02000503000000020004" pitchFamily="2" charset="0"/>
+              </a:rPr>
+              <a:t>dave.hearne@wit.ie</a:t>
+            </a:r>
+            <a:endParaRPr lang="en-US" sz="1600" dirty="0">
+              <a:solidFill>
+                <a:srgbClr val="FCCA3A"/>
+              </a:solidFill>
+              <a:latin typeface="Inter Medium" panose="02000503000000020004" pitchFamily="2" charset="0"/>
+              <a:ea typeface="Inter Medium" panose="02000503000000020004" pitchFamily="2" charset="0"/>
+            </a:endParaRPr>
+          </a:p>
+        </p:txBody>
+      </p:sp>
+      <p:sp>
+        <p:nvSpPr>
+          <p:cNvPr id="8" name="Slide Number Placeholder 4">
+            <a:extLst>
+              <a:ext uri="{FF2B5EF4-FFF2-40B4-BE49-F238E27FC236}">
+                <a16:creationId xmlns:a16="http://schemas.microsoft.com/office/drawing/2014/main" id="{E802365A-5338-0BFB-EE6B-1D00D5A95D71}"/>
+              </a:ext>
+            </a:extLst>
+          </p:cNvPr>
+          <p:cNvSpPr>
+            <a:spLocks noGrp="1"/>
+          </p:cNvSpPr>
+          <p:nvPr>
+            <p:ph type="sldNum" sz="quarter" idx="12"/>
+          </p:nvPr>
+        </p:nvSpPr>
+        <p:spPr>
+          <a:xfrm>
+            <a:off x="4718957" y="6365301"/>
+            <a:ext cx="2743200" cy="365125"/>
+          </a:xfrm>
+          <a:prstGeom prst="rect">
+            <a:avLst/>
+          </a:prstGeom>
+        </p:spPr>
+        <p:txBody>
+          <a:bodyPr/>
+          <a:lstStyle>
+            <a:lvl1pPr algn="ctr">
+              <a:defRPr sz="1400">
+                <a:solidFill>
+                  <a:schemeClr val="bg1"/>
+                </a:solidFill>
+                <a:latin typeface="Inter" panose="02000503000000020004" pitchFamily="2" charset="0"/>
+                <a:ea typeface="Inter" panose="02000503000000020004" pitchFamily="2" charset="0"/>
+              </a:defRPr>
+            </a:lvl1pPr>
+          </a:lstStyle>
+          <a:p>
+            <a:fld id="{B6F15528-21DE-4FAA-801E-634DDDAF4B2B}" type="slidenum">
+              <a:rPr lang="en-US" smtClean="0"/>
+              <a:pPr/>
+              <a:t>‹#›</a:t>
+            </a:fld>
+            <a:endParaRPr lang="en-US"/>
+          </a:p>
+        </p:txBody>
+      </p:sp>
+      <p:pic>
+        <p:nvPicPr>
+          <p:cNvPr id="9" name="Picture 8" descr="A picture containing icon&#10;&#10;Description automatically generated">
+            <a:extLst>
+              <a:ext uri="{FF2B5EF4-FFF2-40B4-BE49-F238E27FC236}">
+                <a16:creationId xmlns:a16="http://schemas.microsoft.com/office/drawing/2014/main" id="{B45F8394-F9E9-67F3-F785-4190DC911D73}"/>
+              </a:ext>
+            </a:extLst>
+          </p:cNvPr>
+          <p:cNvPicPr>
+            <a:picLocks noChangeAspect="1"/>
+          </p:cNvPicPr>
+          <p:nvPr/>
+        </p:nvPicPr>
+        <p:blipFill>
+          <a:blip r:embed="rId3">
+            <a:alphaModFix amt="11000"/>
+            <a:extLst>
+              <a:ext uri="{BEBA8EAE-BF5A-486C-A8C5-ECC9F3942E4B}">
+                <a14:imgProps xmlns:a14="http://schemas.microsoft.com/office/drawing/2010/main">
+                  <a14:imgLayer r:embed="rId4">
+                    <a14:imgEffect>
+                      <a14:colorTemperature colorTemp="1500"/>
+                    </a14:imgEffect>
+                    <a14:imgEffect>
+                      <a14:saturation sat="0"/>
+                    </a14:imgEffect>
+                  </a14:imgLayer>
+                </a14:imgProps>
+              </a:ext>
+            </a:extLst>
+          </a:blip>
+          <a:stretch>
+            <a:fillRect/>
+          </a:stretch>
+        </p:blipFill>
+        <p:spPr>
+          <a:xfrm>
+            <a:off x="-2632673" y="433462"/>
+            <a:ext cx="5443765" cy="5486295"/>
+          </a:xfrm>
+          <a:prstGeom prst="rect">
+            <a:avLst/>
+          </a:prstGeom>
+        </p:spPr>
+      </p:pic>
+      <p:sp>
+        <p:nvSpPr>
+          <p:cNvPr id="2" name="Title 1">
+            <a:extLst>
+              <a:ext uri="{FF2B5EF4-FFF2-40B4-BE49-F238E27FC236}">
+                <a16:creationId xmlns:a16="http://schemas.microsoft.com/office/drawing/2014/main" id="{566D9E16-657A-4218-0444-F0A4D4BC3481}"/>
+              </a:ext>
+            </a:extLst>
+          </p:cNvPr>
+          <p:cNvSpPr>
+            <a:spLocks noGrp="1"/>
+          </p:cNvSpPr>
+          <p:nvPr>
+            <p:ph type="title"/>
+          </p:nvPr>
+        </p:nvSpPr>
+        <p:spPr>
+          <a:xfrm>
+            <a:off x="832757" y="2324554"/>
+            <a:ext cx="10515600" cy="1325563"/>
+          </a:xfrm>
+        </p:spPr>
+        <p:txBody>
+          <a:bodyPr/>
+          <a:lstStyle>
+            <a:lvl1pPr algn="ctr">
+              <a:defRPr>
+                <a:solidFill>
+                  <a:schemeClr val="bg1"/>
+                </a:solidFill>
+              </a:defRPr>
+            </a:lvl1pPr>
+          </a:lstStyle>
+          <a:p>
+            <a:r>
+              <a:rPr lang="en-GB"/>
+              <a:t>Click to edit Master title style</a:t>
+            </a:r>
+            <a:endParaRPr lang="en-US" dirty="0"/>
+          </a:p>
+        </p:txBody>
+      </p:sp>
+      <p:pic>
+        <p:nvPicPr>
+          <p:cNvPr id="3" name="Graphic 2">
+            <a:extLst>
+              <a:ext uri="{FF2B5EF4-FFF2-40B4-BE49-F238E27FC236}">
+                <a16:creationId xmlns:a16="http://schemas.microsoft.com/office/drawing/2014/main" id="{9ABFD17A-A184-4C60-C2D7-B6CD6ACBCF90}"/>
+              </a:ext>
+            </a:extLst>
+          </p:cNvPr>
+          <p:cNvPicPr>
+            <a:picLocks noChangeAspect="1"/>
+          </p:cNvPicPr>
+          <p:nvPr/>
+        </p:nvPicPr>
+        <p:blipFill>
+          <a:blip>
+            <a:extLst>
+              <a:ext uri="{96DAC541-7B7A-43D3-8B79-37D633B846F1}">
+                <asvg:svgBlip xmlns:asvg="http://schemas.microsoft.com/office/drawing/2016/SVG/main" r:embed="rId5"/>
+              </a:ext>
+            </a:extLst>
+          </a:blip>
+          <a:stretch>
+            <a:fillRect/>
+          </a:stretch>
+        </p:blipFill>
+        <p:spPr>
+          <a:xfrm>
+            <a:off x="9203245" y="6153874"/>
+            <a:ext cx="1120090" cy="603766"/>
+          </a:xfrm>
+          <a:prstGeom prst="rect">
+            <a:avLst/>
+          </a:prstGeom>
+        </p:spPr>
+      </p:pic>
+    </p:spTree>
+    <p:extLst>
+      <p:ext uri="{BB962C8B-B14F-4D97-AF65-F5344CB8AC3E}">
+        <p14:creationId xmlns:p14="http://schemas.microsoft.com/office/powerpoint/2010/main" val="3964478946"/>
+      </p:ext>
+    </p:extLst>
+  </p:cSld>
+  <p:clrMapOvr>
+    <a:masterClrMapping/>
+  </p:clrMapOvr>
+  <p:transition spd="slow">
+    <p:push dir="u"/>
+  </p:transition>
+  <p:hf sldNum="0" hdr="0" ftr="0" dt="0"/>
+</p:sldLayout>
+</file>
+
+<file path=ppt/slideLayouts/slideLayout14.xml><?xml version="1.0" encoding="utf-8"?>
+<p:sldLayout xmlns:a="http://schemas.openxmlformats.org/drawingml/2006/main" xmlns:r="http://schemas.openxmlformats.org/officeDocument/2006/relationships" xmlns:p="http://schemas.openxmlformats.org/presentationml/2006/main" showMasterSp="0" preserve="1">
+  <p:cSld name="2_Blank">
+    <p:spTree>
+      <p:nvGrpSpPr>
+        <p:cNvPr id="1" name=""/>
+        <p:cNvGrpSpPr/>
+        <p:nvPr/>
+      </p:nvGrpSpPr>
+      <p:grpSpPr>
+        <a:xfrm>
+          <a:off x="0" y="0"/>
+          <a:ext cx="0" cy="0"/>
+          <a:chOff x="0" y="0"/>
+          <a:chExt cx="0" cy="0"/>
+        </a:xfrm>
+      </p:grpSpPr>
+      <p:sp>
+        <p:nvSpPr>
+          <p:cNvPr id="5" name="Rectangle 4">
+            <a:extLst>
+              <a:ext uri="{FF2B5EF4-FFF2-40B4-BE49-F238E27FC236}">
+                <a16:creationId xmlns:a16="http://schemas.microsoft.com/office/drawing/2014/main" id="{1845881D-2D8D-1975-AB67-071538DA5B41}"/>
+              </a:ext>
+            </a:extLst>
+          </p:cNvPr>
+          <p:cNvSpPr/>
+          <p:nvPr/>
+        </p:nvSpPr>
+        <p:spPr>
+          <a:xfrm>
+            <a:off x="-440871" y="6104965"/>
+            <a:ext cx="13062857" cy="885799"/>
+          </a:xfrm>
+          <a:prstGeom prst="rect">
+            <a:avLst/>
+          </a:prstGeom>
+          <a:solidFill>
+            <a:srgbClr val="435765"/>
+          </a:solidFill>
+        </p:spPr>
+        <p:style>
+          <a:lnRef idx="2">
+            <a:schemeClr val="accent1">
+              <a:shade val="50000"/>
+            </a:schemeClr>
+          </a:lnRef>
+          <a:fillRef idx="1">
+            <a:schemeClr val="accent1"/>
+          </a:fillRef>
+          <a:effectRef idx="0">
+            <a:schemeClr val="accent1"/>
+          </a:effectRef>
+          <a:fontRef idx="minor">
+            <a:schemeClr val="lt1"/>
+          </a:fontRef>
+        </p:style>
+        <p:txBody>
+          <a:bodyPr rtlCol="0" anchor="ctr"/>
+          <a:lstStyle/>
+          <a:p>
+            <a:pPr algn="ctr"/>
+            <a:endParaRPr lang="en-US"/>
+          </a:p>
+        </p:txBody>
+      </p:sp>
+      <p:pic>
+        <p:nvPicPr>
+          <p:cNvPr id="6" name="Picture 5" descr="Text&#10;&#10;Description automatically generated">
+            <a:extLst>
+              <a:ext uri="{FF2B5EF4-FFF2-40B4-BE49-F238E27FC236}">
+                <a16:creationId xmlns:a16="http://schemas.microsoft.com/office/drawing/2014/main" id="{A2F7B6B3-CC24-4207-D53D-6E6E9BFD53B0}"/>
+              </a:ext>
+            </a:extLst>
+          </p:cNvPr>
+          <p:cNvPicPr>
+            <a:picLocks noChangeAspect="1"/>
+          </p:cNvPicPr>
+          <p:nvPr/>
+        </p:nvPicPr>
+        <p:blipFill>
+          <a:blip r:embed="rId2"/>
+          <a:stretch>
+            <a:fillRect/>
+          </a:stretch>
+        </p:blipFill>
+        <p:spPr>
+          <a:xfrm>
+            <a:off x="10467415" y="6013271"/>
+            <a:ext cx="1743635" cy="977493"/>
+          </a:xfrm>
+          <a:prstGeom prst="rect">
+            <a:avLst/>
+          </a:prstGeom>
+        </p:spPr>
+      </p:pic>
+      <p:sp>
+        <p:nvSpPr>
+          <p:cNvPr id="7" name="TextBox 6">
+            <a:extLst>
+              <a:ext uri="{FF2B5EF4-FFF2-40B4-BE49-F238E27FC236}">
+                <a16:creationId xmlns:a16="http://schemas.microsoft.com/office/drawing/2014/main" id="{89B32805-1A5C-6896-174B-545E3B3CB158}"/>
+              </a:ext>
+            </a:extLst>
+          </p:cNvPr>
+          <p:cNvSpPr txBox="1"/>
+          <p:nvPr/>
+        </p:nvSpPr>
+        <p:spPr>
+          <a:xfrm>
+            <a:off x="259216" y="6209629"/>
+            <a:ext cx="2132315" cy="584775"/>
+          </a:xfrm>
+          <a:prstGeom prst="rect">
+            <a:avLst/>
+          </a:prstGeom>
+          <a:noFill/>
+        </p:spPr>
+        <p:txBody>
+          <a:bodyPr wrap="none" rtlCol="0">
+            <a:spAutoFit/>
+          </a:bodyPr>
+          <a:lstStyle/>
+          <a:p>
+            <a:r>
+              <a:rPr lang="en-US" sz="1600" dirty="0">
+                <a:solidFill>
+                  <a:srgbClr val="FCCA3A"/>
+                </a:solidFill>
+                <a:latin typeface="Inter Medium" panose="02000503000000020004" pitchFamily="2" charset="0"/>
+                <a:ea typeface="Inter Medium" panose="02000503000000020004" pitchFamily="2" charset="0"/>
+              </a:rPr>
+              <a:t>Dave Hearne</a:t>
+            </a:r>
+          </a:p>
+          <a:p>
+            <a:r>
+              <a:rPr lang="en-US" sz="1600" dirty="0" err="1">
+                <a:solidFill>
+                  <a:srgbClr val="FCCA3A"/>
+                </a:solidFill>
+                <a:latin typeface="Inter Medium" panose="02000503000000020004" pitchFamily="2" charset="0"/>
+                <a:ea typeface="Inter Medium" panose="02000503000000020004" pitchFamily="2" charset="0"/>
+              </a:rPr>
+              <a:t>dave.hearne@wit.ie</a:t>
+            </a:r>
+            <a:endParaRPr lang="en-US" sz="1600" dirty="0">
+              <a:solidFill>
+                <a:srgbClr val="FCCA3A"/>
+              </a:solidFill>
+              <a:latin typeface="Inter Medium" panose="02000503000000020004" pitchFamily="2" charset="0"/>
+              <a:ea typeface="Inter Medium" panose="02000503000000020004" pitchFamily="2" charset="0"/>
+            </a:endParaRPr>
+          </a:p>
+        </p:txBody>
+      </p:sp>
+      <p:sp>
+        <p:nvSpPr>
+          <p:cNvPr id="8" name="Slide Number Placeholder 4">
+            <a:extLst>
+              <a:ext uri="{FF2B5EF4-FFF2-40B4-BE49-F238E27FC236}">
+                <a16:creationId xmlns:a16="http://schemas.microsoft.com/office/drawing/2014/main" id="{E802365A-5338-0BFB-EE6B-1D00D5A95D71}"/>
+              </a:ext>
+            </a:extLst>
+          </p:cNvPr>
+          <p:cNvSpPr>
+            <a:spLocks noGrp="1"/>
+          </p:cNvSpPr>
+          <p:nvPr>
+            <p:ph type="sldNum" sz="quarter" idx="12"/>
+          </p:nvPr>
+        </p:nvSpPr>
+        <p:spPr>
+          <a:xfrm>
+            <a:off x="4718957" y="6365301"/>
+            <a:ext cx="2743200" cy="365125"/>
+          </a:xfrm>
+          <a:prstGeom prst="rect">
+            <a:avLst/>
+          </a:prstGeom>
+        </p:spPr>
+        <p:txBody>
+          <a:bodyPr/>
+          <a:lstStyle>
+            <a:lvl1pPr algn="ctr">
+              <a:defRPr sz="1400">
+                <a:solidFill>
+                  <a:schemeClr val="bg1"/>
+                </a:solidFill>
+                <a:latin typeface="Inter" panose="02000503000000020004" pitchFamily="2" charset="0"/>
+                <a:ea typeface="Inter" panose="02000503000000020004" pitchFamily="2" charset="0"/>
+              </a:defRPr>
+            </a:lvl1pPr>
+          </a:lstStyle>
+          <a:p>
+            <a:fld id="{B6F15528-21DE-4FAA-801E-634DDDAF4B2B}" type="slidenum">
+              <a:rPr lang="en-US" smtClean="0"/>
+              <a:pPr/>
+              <a:t>‹#›</a:t>
+            </a:fld>
+            <a:endParaRPr lang="en-US"/>
+          </a:p>
+        </p:txBody>
+      </p:sp>
+      <p:pic>
+        <p:nvPicPr>
+          <p:cNvPr id="9" name="Picture 8" descr="A picture containing icon&#10;&#10;Description automatically generated">
+            <a:extLst>
+              <a:ext uri="{FF2B5EF4-FFF2-40B4-BE49-F238E27FC236}">
+                <a16:creationId xmlns:a16="http://schemas.microsoft.com/office/drawing/2014/main" id="{B45F8394-F9E9-67F3-F785-4190DC911D73}"/>
+              </a:ext>
+            </a:extLst>
+          </p:cNvPr>
+          <p:cNvPicPr>
+            <a:picLocks noChangeAspect="1"/>
+          </p:cNvPicPr>
+          <p:nvPr/>
+        </p:nvPicPr>
+        <p:blipFill>
+          <a:blip r:embed="rId3">
+            <a:alphaModFix amt="19000"/>
+          </a:blip>
+          <a:stretch>
+            <a:fillRect/>
+          </a:stretch>
+        </p:blipFill>
+        <p:spPr>
+          <a:xfrm>
+            <a:off x="-2721883" y="422310"/>
+            <a:ext cx="5443765" cy="5486295"/>
+          </a:xfrm>
+          <a:prstGeom prst="rect">
+            <a:avLst/>
+          </a:prstGeom>
+        </p:spPr>
+      </p:pic>
+      <p:sp>
+        <p:nvSpPr>
+          <p:cNvPr id="11" name="Text Placeholder 10">
+            <a:extLst>
+              <a:ext uri="{FF2B5EF4-FFF2-40B4-BE49-F238E27FC236}">
+                <a16:creationId xmlns:a16="http://schemas.microsoft.com/office/drawing/2014/main" id="{969350A5-0F76-7CA1-01EE-0506A29F03B5}"/>
+              </a:ext>
+            </a:extLst>
+          </p:cNvPr>
+          <p:cNvSpPr>
+            <a:spLocks noGrp="1"/>
+          </p:cNvSpPr>
+          <p:nvPr>
+            <p:ph type="body" sz="quarter" idx="13" hasCustomPrompt="1"/>
+          </p:nvPr>
+        </p:nvSpPr>
+        <p:spPr>
+          <a:xfrm>
+            <a:off x="2525939" y="2422507"/>
+            <a:ext cx="8618538" cy="1485900"/>
+          </a:xfrm>
+        </p:spPr>
+        <p:txBody>
+          <a:bodyPr>
+            <a:normAutofit/>
+          </a:bodyPr>
+          <a:lstStyle>
+            <a:lvl3pPr marL="914400" indent="0" algn="ctr">
+              <a:buNone/>
+              <a:defRPr sz="6000">
+                <a:latin typeface="DM Sans" pitchFamily="2" charset="77"/>
+              </a:defRPr>
+            </a:lvl3pPr>
+          </a:lstStyle>
+          <a:p>
+            <a:pPr lvl="2"/>
+            <a:r>
+              <a:rPr lang="en-US" dirty="0"/>
+              <a:t>Title Section</a:t>
+            </a:r>
+          </a:p>
+        </p:txBody>
+      </p:sp>
+      <p:pic>
+        <p:nvPicPr>
+          <p:cNvPr id="2" name="Graphic 1">
+            <a:extLst>
+              <a:ext uri="{FF2B5EF4-FFF2-40B4-BE49-F238E27FC236}">
+                <a16:creationId xmlns:a16="http://schemas.microsoft.com/office/drawing/2014/main" id="{DB1747D0-142F-29F0-C111-4CA4BB0024EB}"/>
+              </a:ext>
+            </a:extLst>
+          </p:cNvPr>
+          <p:cNvPicPr>
+            <a:picLocks noChangeAspect="1"/>
+          </p:cNvPicPr>
+          <p:nvPr/>
+        </p:nvPicPr>
+        <p:blipFill>
+          <a:blip>
+            <a:extLst>
+              <a:ext uri="{96DAC541-7B7A-43D3-8B79-37D633B846F1}">
+                <asvg:svgBlip xmlns:asvg="http://schemas.microsoft.com/office/drawing/2016/SVG/main" r:embed="rId4"/>
+              </a:ext>
+            </a:extLst>
+          </a:blip>
+          <a:stretch>
+            <a:fillRect/>
+          </a:stretch>
+        </p:blipFill>
+        <p:spPr>
+          <a:xfrm>
+            <a:off x="9203245" y="6176176"/>
+            <a:ext cx="1120090" cy="603766"/>
+          </a:xfrm>
+          <a:prstGeom prst="rect">
+            <a:avLst/>
+          </a:prstGeom>
+        </p:spPr>
+      </p:pic>
+    </p:spTree>
+    <p:extLst>
+      <p:ext uri="{BB962C8B-B14F-4D97-AF65-F5344CB8AC3E}">
+        <p14:creationId xmlns:p14="http://schemas.microsoft.com/office/powerpoint/2010/main" val="258119295"/>
+      </p:ext>
+    </p:extLst>
+  </p:cSld>
+  <p:clrMapOvr>
+    <a:masterClrMapping/>
+  </p:clrMapOvr>
+  <p:transition spd="slow">
+    <p:push dir="u"/>
+  </p:transition>
+  <p:hf sldNum="0" hdr="0" ftr="0" dt="0"/>
+</p:sldLayout>
+</file>
+
+<file path=ppt/slideLayouts/slideLayout15.xml><?xml version="1.0" encoding="utf-8"?>
 <p:sldLayout xmlns:a="http://schemas.openxmlformats.org/drawingml/2006/main" xmlns:r="http://schemas.openxmlformats.org/officeDocument/2006/relationships" xmlns:p="http://schemas.openxmlformats.org/presentationml/2006/main" showMasterSp="0" userDrawn="1">
-  <p:cSld name="1_Blank">
+  <p:cSld name="3_Blank">
     <p:spTree>
       <p:nvGrpSpPr>
         <p:cNvPr id="1" name=""/>
@@ -3607,9 +5233,9 @@
 </p:sldLayout>
 </file>
 
-<file path=ppt/slideLayouts/slideLayout13.xml><?xml version="1.0" encoding="utf-8"?>
+<file path=ppt/slideLayouts/slideLayout16.xml><?xml version="1.0" encoding="utf-8"?>
 <p:sldLayout xmlns:a="http://schemas.openxmlformats.org/drawingml/2006/main" xmlns:r="http://schemas.openxmlformats.org/officeDocument/2006/relationships" xmlns:p="http://schemas.openxmlformats.org/presentationml/2006/main" showMasterSp="0" userDrawn="1">
-  <p:cSld name="2_Blank">
+  <p:cSld name="4_Blank">
     <p:spTree>
       <p:nvGrpSpPr>
         <p:cNvPr id="1" name=""/>
@@ -3927,13 +5553,24 @@
         <p:spPr/>
         <p:txBody>
           <a:bodyPr/>
-          <a:lstStyle/>
+          <a:lstStyle>
+            <a:lvl1pPr algn="l">
+              <a:defRPr>
+                <a:solidFill>
+                  <a:schemeClr val="tx1">
+                    <a:lumMod val="65000"/>
+                    <a:lumOff val="35000"/>
+                  </a:schemeClr>
+                </a:solidFill>
+              </a:defRPr>
+            </a:lvl1pPr>
+          </a:lstStyle>
           <a:p>
             <a:r>
               <a:rPr lang="en-GB"/>
               <a:t>Click to edit Master title style</a:t>
             </a:r>
-            <a:endParaRPr lang="en-IE"/>
+            <a:endParaRPr lang="en-US" dirty="0"/>
           </a:p>
         </p:txBody>
       </p:sp>
@@ -3985,7 +5622,7 @@
               <a:rPr lang="en-GB"/>
               <a:t>Fifth level</a:t>
             </a:r>
-            <a:endParaRPr lang="en-IE"/>
+            <a:endParaRPr lang="en-US"/>
           </a:p>
         </p:txBody>
       </p:sp>
@@ -4007,7 +5644,7 @@
             <a:fld id="{1D8BD707-D9CF-40AE-B4C6-C98DA3205C09}" type="datetimeFigureOut">
               <a:rPr lang="en-US" smtClean="0"/>
               <a:pPr/>
-              <a:t>3/12/26</a:t>
+              <a:t>3/13/26</a:t>
             </a:fld>
             <a:endParaRPr lang="en-US"/>
           </a:p>
@@ -4053,19 +5690,19 @@
       </p:sp>
       <p:cxnSp>
         <p:nvCxnSpPr>
-          <p:cNvPr id="8" name="Straight Connector 7"/>
+          <p:cNvPr id="7" name="Straight Connector 6"/>
           <p:cNvCxnSpPr/>
           <p:nvPr/>
         </p:nvCxnSpPr>
         <p:spPr>
           <a:xfrm>
             <a:off x="609600" y="1447800"/>
-            <a:ext cx="10972800" cy="0"/>
+            <a:ext cx="11074400" cy="0"/>
           </a:xfrm>
           <a:prstGeom prst="line">
             <a:avLst/>
           </a:prstGeom>
-          <a:ln w="6350">
+          <a:ln w="12700">
             <a:solidFill>
               <a:schemeClr val="tx1">
                 <a:lumMod val="50000"/>
@@ -4091,15 +5728,15 @@
       </p:cxnSp>
       <p:sp>
         <p:nvSpPr>
-          <p:cNvPr id="7" name="Rectangle 6">
+          <p:cNvPr id="8" name="Rectangle 7">
             <a:extLst>
               <a:ext uri="{FF2B5EF4-FFF2-40B4-BE49-F238E27FC236}">
-                <a16:creationId xmlns:a16="http://schemas.microsoft.com/office/drawing/2014/main" id="{1D2B9C66-BBA7-7758-385E-9B69979A7106}"/>
+                <a16:creationId xmlns:a16="http://schemas.microsoft.com/office/drawing/2014/main" id="{35B90E7F-8316-1B52-2E2C-81F3D7F83F69}"/>
               </a:ext>
             </a:extLst>
           </p:cNvPr>
           <p:cNvSpPr/>
-          <p:nvPr userDrawn="1"/>
+          <p:nvPr/>
         </p:nvSpPr>
         <p:spPr>
           <a:xfrm>
@@ -4143,7 +5780,182 @@
           <p:cNvPr id="9" name="Picture 8" descr="Text&#10;&#10;Description automatically generated">
             <a:extLst>
               <a:ext uri="{FF2B5EF4-FFF2-40B4-BE49-F238E27FC236}">
-                <a16:creationId xmlns:a16="http://schemas.microsoft.com/office/drawing/2014/main" id="{4A6789EA-D749-97F5-A7B8-3CBBE70E0FF1}"/>
+                <a16:creationId xmlns:a16="http://schemas.microsoft.com/office/drawing/2014/main" id="{997B3506-34A4-C04B-DDB2-EA7F73E364B1}"/>
+              </a:ext>
+            </a:extLst>
+          </p:cNvPr>
+          <p:cNvPicPr>
+            <a:picLocks noChangeAspect="1"/>
+          </p:cNvPicPr>
+          <p:nvPr/>
+        </p:nvPicPr>
+        <p:blipFill>
+          <a:blip r:embed="rId2"/>
+          <a:stretch>
+            <a:fillRect/>
+          </a:stretch>
+        </p:blipFill>
+        <p:spPr>
+          <a:xfrm>
+            <a:off x="10467415" y="6013271"/>
+            <a:ext cx="1743635" cy="977493"/>
+          </a:xfrm>
+          <a:prstGeom prst="rect">
+            <a:avLst/>
+          </a:prstGeom>
+        </p:spPr>
+      </p:pic>
+      <p:sp>
+        <p:nvSpPr>
+          <p:cNvPr id="10" name="TextBox 9">
+            <a:extLst>
+              <a:ext uri="{FF2B5EF4-FFF2-40B4-BE49-F238E27FC236}">
+                <a16:creationId xmlns:a16="http://schemas.microsoft.com/office/drawing/2014/main" id="{A567B9BF-B31A-18AA-45F3-41C8972B3501}"/>
+              </a:ext>
+            </a:extLst>
+          </p:cNvPr>
+          <p:cNvSpPr txBox="1"/>
+          <p:nvPr/>
+        </p:nvSpPr>
+        <p:spPr>
+          <a:xfrm>
+            <a:off x="259216" y="6209629"/>
+            <a:ext cx="2132315" cy="584775"/>
+          </a:xfrm>
+          <a:prstGeom prst="rect">
+            <a:avLst/>
+          </a:prstGeom>
+          <a:noFill/>
+        </p:spPr>
+        <p:txBody>
+          <a:bodyPr wrap="none" rtlCol="0">
+            <a:spAutoFit/>
+          </a:bodyPr>
+          <a:lstStyle/>
+          <a:p>
+            <a:r>
+              <a:rPr lang="en-US" sz="1600" dirty="0">
+                <a:solidFill>
+                  <a:srgbClr val="FCCA3A"/>
+                </a:solidFill>
+                <a:latin typeface="Inter Medium" panose="02000503000000020004" pitchFamily="2" charset="0"/>
+                <a:ea typeface="Inter Medium" panose="02000503000000020004" pitchFamily="2" charset="0"/>
+              </a:rPr>
+              <a:t>Dave Hearne</a:t>
+            </a:r>
+          </a:p>
+          <a:p>
+            <a:r>
+              <a:rPr lang="en-US" sz="1600" dirty="0" err="1">
+                <a:solidFill>
+                  <a:srgbClr val="FCCA3A"/>
+                </a:solidFill>
+                <a:latin typeface="Inter Medium" panose="02000503000000020004" pitchFamily="2" charset="0"/>
+                <a:ea typeface="Inter Medium" panose="02000503000000020004" pitchFamily="2" charset="0"/>
+              </a:rPr>
+              <a:t>dave.hearne@wit.ie</a:t>
+            </a:r>
+            <a:endParaRPr lang="en-US" sz="1600" dirty="0">
+              <a:solidFill>
+                <a:srgbClr val="FCCA3A"/>
+              </a:solidFill>
+              <a:latin typeface="Inter Medium" panose="02000503000000020004" pitchFamily="2" charset="0"/>
+              <a:ea typeface="Inter Medium" panose="02000503000000020004" pitchFamily="2" charset="0"/>
+            </a:endParaRPr>
+          </a:p>
+        </p:txBody>
+      </p:sp>
+      <p:pic>
+        <p:nvPicPr>
+          <p:cNvPr id="11" name="Graphic 10">
+            <a:extLst>
+              <a:ext uri="{FF2B5EF4-FFF2-40B4-BE49-F238E27FC236}">
+                <a16:creationId xmlns:a16="http://schemas.microsoft.com/office/drawing/2014/main" id="{CA8F898C-C0E3-480E-25C7-77D1FA5ADF8A}"/>
+              </a:ext>
+            </a:extLst>
+          </p:cNvPr>
+          <p:cNvPicPr>
+            <a:picLocks noChangeAspect="1"/>
+          </p:cNvPicPr>
+          <p:nvPr/>
+        </p:nvPicPr>
+        <p:blipFill>
+          <a:blip>
+            <a:extLst>
+              <a:ext uri="{96DAC541-7B7A-43D3-8B79-37D633B846F1}">
+                <asvg:svgBlip xmlns:asvg="http://schemas.microsoft.com/office/drawing/2016/SVG/main" r:embed="rId3"/>
+              </a:ext>
+            </a:extLst>
+          </a:blip>
+          <a:stretch>
+            <a:fillRect/>
+          </a:stretch>
+        </p:blipFill>
+        <p:spPr>
+          <a:xfrm>
+            <a:off x="9203245" y="6176176"/>
+            <a:ext cx="1120090" cy="603766"/>
+          </a:xfrm>
+          <a:prstGeom prst="rect">
+            <a:avLst/>
+          </a:prstGeom>
+        </p:spPr>
+      </p:pic>
+      <p:sp>
+        <p:nvSpPr>
+          <p:cNvPr id="12" name="Rectangle 11">
+            <a:extLst>
+              <a:ext uri="{FF2B5EF4-FFF2-40B4-BE49-F238E27FC236}">
+                <a16:creationId xmlns:a16="http://schemas.microsoft.com/office/drawing/2014/main" id="{AB778E68-0BA0-3988-2048-55EB8C4E7C0B}"/>
+              </a:ext>
+            </a:extLst>
+          </p:cNvPr>
+          <p:cNvSpPr/>
+          <p:nvPr userDrawn="1"/>
+        </p:nvSpPr>
+        <p:spPr>
+          <a:xfrm>
+            <a:off x="-440871" y="6104965"/>
+            <a:ext cx="13062857" cy="885799"/>
+          </a:xfrm>
+          <a:prstGeom prst="rect">
+            <a:avLst/>
+          </a:prstGeom>
+          <a:solidFill>
+            <a:srgbClr val="435765"/>
+          </a:solidFill>
+        </p:spPr>
+        <p:style>
+          <a:lnRef idx="2">
+            <a:schemeClr val="accent1">
+              <a:shade val="50000"/>
+            </a:schemeClr>
+          </a:lnRef>
+          <a:fillRef idx="1">
+            <a:schemeClr val="accent1"/>
+          </a:fillRef>
+          <a:effectRef idx="0">
+            <a:schemeClr val="accent1"/>
+          </a:effectRef>
+          <a:fontRef idx="minor">
+            <a:schemeClr val="lt1"/>
+          </a:fontRef>
+        </p:style>
+        <p:txBody>
+          <a:bodyPr rtlCol="0" anchor="ctr"/>
+          <a:lstStyle/>
+          <a:p>
+            <a:pPr algn="ctr"/>
+            <a:endParaRPr lang="en-US"/>
+          </a:p>
+        </p:txBody>
+      </p:sp>
+      <p:pic>
+        <p:nvPicPr>
+          <p:cNvPr id="13" name="Picture 12" descr="Text&#10;&#10;Description automatically generated">
+            <a:extLst>
+              <a:ext uri="{FF2B5EF4-FFF2-40B4-BE49-F238E27FC236}">
+                <a16:creationId xmlns:a16="http://schemas.microsoft.com/office/drawing/2014/main" id="{94BE3A10-4680-DC4C-8B80-E4CCE1240149}"/>
               </a:ext>
             </a:extLst>
           </p:cNvPr>
@@ -4170,10 +5982,10 @@
       </p:pic>
       <p:sp>
         <p:nvSpPr>
-          <p:cNvPr id="10" name="TextBox 9">
+          <p:cNvPr id="14" name="TextBox 13">
             <a:extLst>
               <a:ext uri="{FF2B5EF4-FFF2-40B4-BE49-F238E27FC236}">
-                <a16:creationId xmlns:a16="http://schemas.microsoft.com/office/drawing/2014/main" id="{06544501-28CF-0682-0AEE-7BEA9BCC1C68}"/>
+                <a16:creationId xmlns:a16="http://schemas.microsoft.com/office/drawing/2014/main" id="{AD04AE86-C025-80CA-1689-1469F06787F6}"/>
               </a:ext>
             </a:extLst>
           </p:cNvPr>
@@ -4230,10 +6042,10 @@
       </p:sp>
       <p:pic>
         <p:nvPicPr>
-          <p:cNvPr id="11" name="Graphic 10">
+          <p:cNvPr id="15" name="Graphic 14">
             <a:extLst>
               <a:ext uri="{FF2B5EF4-FFF2-40B4-BE49-F238E27FC236}">
-                <a16:creationId xmlns:a16="http://schemas.microsoft.com/office/drawing/2014/main" id="{5AF478BE-7F52-558F-1AAA-95CC8CB58F6A}"/>
+                <a16:creationId xmlns:a16="http://schemas.microsoft.com/office/drawing/2014/main" id="{2FA64BED-F2D2-BE0D-7B08-6DA99D7E9883}"/>
               </a:ext>
             </a:extLst>
           </p:cNvPr>
@@ -4267,7 +6079,7 @@
     </p:spTree>
     <p:extLst>
       <p:ext uri="{BB962C8B-B14F-4D97-AF65-F5344CB8AC3E}">
-        <p14:creationId xmlns:p14="http://schemas.microsoft.com/office/powerpoint/2010/main" val="3757737074"/>
+        <p14:creationId xmlns:p14="http://schemas.microsoft.com/office/powerpoint/2010/main" val="2375894267"/>
       </p:ext>
     </p:extLst>
   </p:cSld>
@@ -4325,7 +6137,7 @@
               <a:rPr lang="en-GB"/>
               <a:t>Click to edit Master title style</a:t>
             </a:r>
-            <a:endParaRPr lang="en-IE"/>
+            <a:endParaRPr lang="en-US"/>
           </a:p>
         </p:txBody>
       </p:sp>
@@ -4466,7 +6278,7 @@
             <a:fld id="{1D8BD707-D9CF-40AE-B4C6-C98DA3205C09}" type="datetimeFigureOut">
               <a:rPr lang="en-US" smtClean="0"/>
               <a:pPr/>
-              <a:t>3/12/26</a:t>
+              <a:t>3/13/26</a:t>
             </a:fld>
             <a:endParaRPr lang="en-US"/>
           </a:p>
@@ -4515,12 +6327,12 @@
           <p:cNvPr id="7" name="Rectangle 6">
             <a:extLst>
               <a:ext uri="{FF2B5EF4-FFF2-40B4-BE49-F238E27FC236}">
-                <a16:creationId xmlns:a16="http://schemas.microsoft.com/office/drawing/2014/main" id="{66ADFA68-4D53-076A-7A4B-666064060A12}"/>
+                <a16:creationId xmlns:a16="http://schemas.microsoft.com/office/drawing/2014/main" id="{3A31E431-00B6-EE54-C821-A404D6B608AD}"/>
               </a:ext>
             </a:extLst>
           </p:cNvPr>
           <p:cNvSpPr/>
-          <p:nvPr userDrawn="1"/>
+          <p:nvPr/>
         </p:nvSpPr>
         <p:spPr>
           <a:xfrm>
@@ -4564,7 +6376,182 @@
           <p:cNvPr id="8" name="Picture 7" descr="Text&#10;&#10;Description automatically generated">
             <a:extLst>
               <a:ext uri="{FF2B5EF4-FFF2-40B4-BE49-F238E27FC236}">
-                <a16:creationId xmlns:a16="http://schemas.microsoft.com/office/drawing/2014/main" id="{BB2F9A7D-DC88-417E-9381-00A553292898}"/>
+                <a16:creationId xmlns:a16="http://schemas.microsoft.com/office/drawing/2014/main" id="{041A00BE-8E3E-096D-3796-1CAB399C6C2F}"/>
+              </a:ext>
+            </a:extLst>
+          </p:cNvPr>
+          <p:cNvPicPr>
+            <a:picLocks noChangeAspect="1"/>
+          </p:cNvPicPr>
+          <p:nvPr/>
+        </p:nvPicPr>
+        <p:blipFill>
+          <a:blip r:embed="rId2"/>
+          <a:stretch>
+            <a:fillRect/>
+          </a:stretch>
+        </p:blipFill>
+        <p:spPr>
+          <a:xfrm>
+            <a:off x="10467415" y="6013271"/>
+            <a:ext cx="1743635" cy="977493"/>
+          </a:xfrm>
+          <a:prstGeom prst="rect">
+            <a:avLst/>
+          </a:prstGeom>
+        </p:spPr>
+      </p:pic>
+      <p:sp>
+        <p:nvSpPr>
+          <p:cNvPr id="9" name="TextBox 8">
+            <a:extLst>
+              <a:ext uri="{FF2B5EF4-FFF2-40B4-BE49-F238E27FC236}">
+                <a16:creationId xmlns:a16="http://schemas.microsoft.com/office/drawing/2014/main" id="{65110D9F-BD3E-4CBB-3724-08D0FAC94444}"/>
+              </a:ext>
+            </a:extLst>
+          </p:cNvPr>
+          <p:cNvSpPr txBox="1"/>
+          <p:nvPr/>
+        </p:nvSpPr>
+        <p:spPr>
+          <a:xfrm>
+            <a:off x="259216" y="6209629"/>
+            <a:ext cx="2132315" cy="584775"/>
+          </a:xfrm>
+          <a:prstGeom prst="rect">
+            <a:avLst/>
+          </a:prstGeom>
+          <a:noFill/>
+        </p:spPr>
+        <p:txBody>
+          <a:bodyPr wrap="none" rtlCol="0">
+            <a:spAutoFit/>
+          </a:bodyPr>
+          <a:lstStyle/>
+          <a:p>
+            <a:r>
+              <a:rPr lang="en-US" sz="1600" dirty="0">
+                <a:solidFill>
+                  <a:srgbClr val="FCCA3A"/>
+                </a:solidFill>
+                <a:latin typeface="Inter Medium" panose="02000503000000020004" pitchFamily="2" charset="0"/>
+                <a:ea typeface="Inter Medium" panose="02000503000000020004" pitchFamily="2" charset="0"/>
+              </a:rPr>
+              <a:t>Dave Hearne</a:t>
+            </a:r>
+          </a:p>
+          <a:p>
+            <a:r>
+              <a:rPr lang="en-US" sz="1600" dirty="0" err="1">
+                <a:solidFill>
+                  <a:srgbClr val="FCCA3A"/>
+                </a:solidFill>
+                <a:latin typeface="Inter Medium" panose="02000503000000020004" pitchFamily="2" charset="0"/>
+                <a:ea typeface="Inter Medium" panose="02000503000000020004" pitchFamily="2" charset="0"/>
+              </a:rPr>
+              <a:t>dave.hearne@wit.ie</a:t>
+            </a:r>
+            <a:endParaRPr lang="en-US" sz="1600" dirty="0">
+              <a:solidFill>
+                <a:srgbClr val="FCCA3A"/>
+              </a:solidFill>
+              <a:latin typeface="Inter Medium" panose="02000503000000020004" pitchFamily="2" charset="0"/>
+              <a:ea typeface="Inter Medium" panose="02000503000000020004" pitchFamily="2" charset="0"/>
+            </a:endParaRPr>
+          </a:p>
+        </p:txBody>
+      </p:sp>
+      <p:pic>
+        <p:nvPicPr>
+          <p:cNvPr id="10" name="Graphic 9">
+            <a:extLst>
+              <a:ext uri="{FF2B5EF4-FFF2-40B4-BE49-F238E27FC236}">
+                <a16:creationId xmlns:a16="http://schemas.microsoft.com/office/drawing/2014/main" id="{F7C50EE8-2F77-1742-7405-7EA144F13AEE}"/>
+              </a:ext>
+            </a:extLst>
+          </p:cNvPr>
+          <p:cNvPicPr>
+            <a:picLocks noChangeAspect="1"/>
+          </p:cNvPicPr>
+          <p:nvPr/>
+        </p:nvPicPr>
+        <p:blipFill>
+          <a:blip>
+            <a:extLst>
+              <a:ext uri="{96DAC541-7B7A-43D3-8B79-37D633B846F1}">
+                <asvg:svgBlip xmlns:asvg="http://schemas.microsoft.com/office/drawing/2016/SVG/main" r:embed="rId3"/>
+              </a:ext>
+            </a:extLst>
+          </a:blip>
+          <a:stretch>
+            <a:fillRect/>
+          </a:stretch>
+        </p:blipFill>
+        <p:spPr>
+          <a:xfrm>
+            <a:off x="9203245" y="6176176"/>
+            <a:ext cx="1120090" cy="603766"/>
+          </a:xfrm>
+          <a:prstGeom prst="rect">
+            <a:avLst/>
+          </a:prstGeom>
+        </p:spPr>
+      </p:pic>
+      <p:sp>
+        <p:nvSpPr>
+          <p:cNvPr id="11" name="Rectangle 10">
+            <a:extLst>
+              <a:ext uri="{FF2B5EF4-FFF2-40B4-BE49-F238E27FC236}">
+                <a16:creationId xmlns:a16="http://schemas.microsoft.com/office/drawing/2014/main" id="{225BFE3F-D119-8C3D-DF5A-BC073AD26CD7}"/>
+              </a:ext>
+            </a:extLst>
+          </p:cNvPr>
+          <p:cNvSpPr/>
+          <p:nvPr userDrawn="1"/>
+        </p:nvSpPr>
+        <p:spPr>
+          <a:xfrm>
+            <a:off x="-440871" y="6104965"/>
+            <a:ext cx="13062857" cy="885799"/>
+          </a:xfrm>
+          <a:prstGeom prst="rect">
+            <a:avLst/>
+          </a:prstGeom>
+          <a:solidFill>
+            <a:srgbClr val="435765"/>
+          </a:solidFill>
+        </p:spPr>
+        <p:style>
+          <a:lnRef idx="2">
+            <a:schemeClr val="accent1">
+              <a:shade val="50000"/>
+            </a:schemeClr>
+          </a:lnRef>
+          <a:fillRef idx="1">
+            <a:schemeClr val="accent1"/>
+          </a:fillRef>
+          <a:effectRef idx="0">
+            <a:schemeClr val="accent1"/>
+          </a:effectRef>
+          <a:fontRef idx="minor">
+            <a:schemeClr val="lt1"/>
+          </a:fontRef>
+        </p:style>
+        <p:txBody>
+          <a:bodyPr rtlCol="0" anchor="ctr"/>
+          <a:lstStyle/>
+          <a:p>
+            <a:pPr algn="ctr"/>
+            <a:endParaRPr lang="en-US"/>
+          </a:p>
+        </p:txBody>
+      </p:sp>
+      <p:pic>
+        <p:nvPicPr>
+          <p:cNvPr id="12" name="Picture 11" descr="Text&#10;&#10;Description automatically generated">
+            <a:extLst>
+              <a:ext uri="{FF2B5EF4-FFF2-40B4-BE49-F238E27FC236}">
+                <a16:creationId xmlns:a16="http://schemas.microsoft.com/office/drawing/2014/main" id="{BFC9FEB1-AD9E-58CD-859B-F6ED56F9E51E}"/>
               </a:ext>
             </a:extLst>
           </p:cNvPr>
@@ -4591,10 +6578,10 @@
       </p:pic>
       <p:sp>
         <p:nvSpPr>
-          <p:cNvPr id="9" name="TextBox 8">
+          <p:cNvPr id="13" name="TextBox 12">
             <a:extLst>
               <a:ext uri="{FF2B5EF4-FFF2-40B4-BE49-F238E27FC236}">
-                <a16:creationId xmlns:a16="http://schemas.microsoft.com/office/drawing/2014/main" id="{BFDB2401-9613-5C90-733A-9947C2AF906B}"/>
+                <a16:creationId xmlns:a16="http://schemas.microsoft.com/office/drawing/2014/main" id="{DEA7E417-D3E2-1E4E-9FB9-FFB5A3C79ED2}"/>
               </a:ext>
             </a:extLst>
           </p:cNvPr>
@@ -4651,10 +6638,10 @@
       </p:sp>
       <p:pic>
         <p:nvPicPr>
-          <p:cNvPr id="10" name="Graphic 9">
+          <p:cNvPr id="14" name="Graphic 13">
             <a:extLst>
               <a:ext uri="{FF2B5EF4-FFF2-40B4-BE49-F238E27FC236}">
-                <a16:creationId xmlns:a16="http://schemas.microsoft.com/office/drawing/2014/main" id="{D1B1468B-F705-C43B-D7C3-AB7A8471A852}"/>
+                <a16:creationId xmlns:a16="http://schemas.microsoft.com/office/drawing/2014/main" id="{CC755B1C-CD37-604B-8391-7FED61681D33}"/>
               </a:ext>
             </a:extLst>
           </p:cNvPr>
@@ -4688,7 +6675,7 @@
     </p:spTree>
     <p:extLst>
       <p:ext uri="{BB962C8B-B14F-4D97-AF65-F5344CB8AC3E}">
-        <p14:creationId xmlns:p14="http://schemas.microsoft.com/office/powerpoint/2010/main" val="3093658911"/>
+        <p14:creationId xmlns:p14="http://schemas.microsoft.com/office/powerpoint/2010/main" val="3633813042"/>
       </p:ext>
     </p:extLst>
   </p:cSld>
@@ -4731,13 +6718,24 @@
         <p:spPr/>
         <p:txBody>
           <a:bodyPr/>
-          <a:lstStyle/>
+          <a:lstStyle>
+            <a:lvl1pPr algn="l">
+              <a:defRPr>
+                <a:solidFill>
+                  <a:schemeClr val="tx1">
+                    <a:lumMod val="65000"/>
+                    <a:lumOff val="35000"/>
+                  </a:schemeClr>
+                </a:solidFill>
+              </a:defRPr>
+            </a:lvl1pPr>
+          </a:lstStyle>
           <a:p>
             <a:r>
               <a:rPr lang="en-GB"/>
               <a:t>Click to edit Master title style</a:t>
             </a:r>
-            <a:endParaRPr lang="en-IE"/>
+            <a:endParaRPr lang="en-US" dirty="0"/>
           </a:p>
         </p:txBody>
       </p:sp>
@@ -4822,7 +6820,7 @@
               <a:rPr lang="en-GB"/>
               <a:t>Fifth level</a:t>
             </a:r>
-            <a:endParaRPr lang="en-IE"/>
+            <a:endParaRPr lang="en-US"/>
           </a:p>
         </p:txBody>
       </p:sp>
@@ -4907,7 +6905,7 @@
               <a:rPr lang="en-GB"/>
               <a:t>Fifth level</a:t>
             </a:r>
-            <a:endParaRPr lang="en-IE"/>
+            <a:endParaRPr lang="en-US"/>
           </a:p>
         </p:txBody>
       </p:sp>
@@ -4929,7 +6927,7 @@
             <a:fld id="{1D8BD707-D9CF-40AE-B4C6-C98DA3205C09}" type="datetimeFigureOut">
               <a:rPr lang="en-US" smtClean="0"/>
               <a:pPr/>
-              <a:t>3/12/26</a:t>
+              <a:t>3/13/26</a:t>
             </a:fld>
             <a:endParaRPr lang="en-US"/>
           </a:p>
@@ -4973,17 +6971,52 @@
           </a:p>
         </p:txBody>
       </p:sp>
+      <p:cxnSp>
+        <p:nvCxnSpPr>
+          <p:cNvPr id="8" name="Straight Connector 7"/>
+          <p:cNvCxnSpPr/>
+          <p:nvPr/>
+        </p:nvCxnSpPr>
+        <p:spPr>
+          <a:xfrm>
+            <a:off x="609600" y="1447800"/>
+            <a:ext cx="11074400" cy="0"/>
+          </a:xfrm>
+          <a:prstGeom prst="line">
+            <a:avLst/>
+          </a:prstGeom>
+          <a:ln w="12700">
+            <a:solidFill>
+              <a:schemeClr val="tx1"/>
+            </a:solidFill>
+          </a:ln>
+        </p:spPr>
+        <p:style>
+          <a:lnRef idx="1">
+            <a:schemeClr val="accent1"/>
+          </a:lnRef>
+          <a:fillRef idx="0">
+            <a:schemeClr val="accent1"/>
+          </a:fillRef>
+          <a:effectRef idx="0">
+            <a:schemeClr val="accent1"/>
+          </a:effectRef>
+          <a:fontRef idx="minor">
+            <a:schemeClr val="tx1"/>
+          </a:fontRef>
+        </p:style>
+      </p:cxnSp>
       <p:sp>
         <p:nvSpPr>
-          <p:cNvPr id="8" name="Rectangle 7">
+          <p:cNvPr id="9" name="Rectangle 8">
             <a:extLst>
               <a:ext uri="{FF2B5EF4-FFF2-40B4-BE49-F238E27FC236}">
-                <a16:creationId xmlns:a16="http://schemas.microsoft.com/office/drawing/2014/main" id="{36202D4B-7A5C-DFCD-4E23-B52BAB386C2B}"/>
+                <a16:creationId xmlns:a16="http://schemas.microsoft.com/office/drawing/2014/main" id="{767E5627-0EF7-18DE-16C3-F31A5B7908BB}"/>
               </a:ext>
             </a:extLst>
           </p:cNvPr>
           <p:cNvSpPr/>
-          <p:nvPr userDrawn="1"/>
+          <p:nvPr/>
         </p:nvSpPr>
         <p:spPr>
           <a:xfrm>
@@ -5024,10 +7057,185 @@
       </p:sp>
       <p:pic>
         <p:nvPicPr>
-          <p:cNvPr id="9" name="Picture 8" descr="Text&#10;&#10;Description automatically generated">
+          <p:cNvPr id="10" name="Picture 9" descr="Text&#10;&#10;Description automatically generated">
             <a:extLst>
               <a:ext uri="{FF2B5EF4-FFF2-40B4-BE49-F238E27FC236}">
-                <a16:creationId xmlns:a16="http://schemas.microsoft.com/office/drawing/2014/main" id="{CE485345-2769-0E26-38B0-5837FC4611F1}"/>
+                <a16:creationId xmlns:a16="http://schemas.microsoft.com/office/drawing/2014/main" id="{C8D9B1F3-35F6-12EF-5C28-E8A0EFFFF3B8}"/>
+              </a:ext>
+            </a:extLst>
+          </p:cNvPr>
+          <p:cNvPicPr>
+            <a:picLocks noChangeAspect="1"/>
+          </p:cNvPicPr>
+          <p:nvPr/>
+        </p:nvPicPr>
+        <p:blipFill>
+          <a:blip r:embed="rId2"/>
+          <a:stretch>
+            <a:fillRect/>
+          </a:stretch>
+        </p:blipFill>
+        <p:spPr>
+          <a:xfrm>
+            <a:off x="10467415" y="6013271"/>
+            <a:ext cx="1743635" cy="977493"/>
+          </a:xfrm>
+          <a:prstGeom prst="rect">
+            <a:avLst/>
+          </a:prstGeom>
+        </p:spPr>
+      </p:pic>
+      <p:sp>
+        <p:nvSpPr>
+          <p:cNvPr id="11" name="TextBox 10">
+            <a:extLst>
+              <a:ext uri="{FF2B5EF4-FFF2-40B4-BE49-F238E27FC236}">
+                <a16:creationId xmlns:a16="http://schemas.microsoft.com/office/drawing/2014/main" id="{B5486929-80C9-21EF-24A9-623C9BEA4E4D}"/>
+              </a:ext>
+            </a:extLst>
+          </p:cNvPr>
+          <p:cNvSpPr txBox="1"/>
+          <p:nvPr/>
+        </p:nvSpPr>
+        <p:spPr>
+          <a:xfrm>
+            <a:off x="259216" y="6209629"/>
+            <a:ext cx="2132315" cy="584775"/>
+          </a:xfrm>
+          <a:prstGeom prst="rect">
+            <a:avLst/>
+          </a:prstGeom>
+          <a:noFill/>
+        </p:spPr>
+        <p:txBody>
+          <a:bodyPr wrap="none" rtlCol="0">
+            <a:spAutoFit/>
+          </a:bodyPr>
+          <a:lstStyle/>
+          <a:p>
+            <a:r>
+              <a:rPr lang="en-US" sz="1600" dirty="0">
+                <a:solidFill>
+                  <a:srgbClr val="FCCA3A"/>
+                </a:solidFill>
+                <a:latin typeface="Inter Medium" panose="02000503000000020004" pitchFamily="2" charset="0"/>
+                <a:ea typeface="Inter Medium" panose="02000503000000020004" pitchFamily="2" charset="0"/>
+              </a:rPr>
+              <a:t>Dave Hearne</a:t>
+            </a:r>
+          </a:p>
+          <a:p>
+            <a:r>
+              <a:rPr lang="en-US" sz="1600" dirty="0" err="1">
+                <a:solidFill>
+                  <a:srgbClr val="FCCA3A"/>
+                </a:solidFill>
+                <a:latin typeface="Inter Medium" panose="02000503000000020004" pitchFamily="2" charset="0"/>
+                <a:ea typeface="Inter Medium" panose="02000503000000020004" pitchFamily="2" charset="0"/>
+              </a:rPr>
+              <a:t>dave.hearne@wit.ie</a:t>
+            </a:r>
+            <a:endParaRPr lang="en-US" sz="1600" dirty="0">
+              <a:solidFill>
+                <a:srgbClr val="FCCA3A"/>
+              </a:solidFill>
+              <a:latin typeface="Inter Medium" panose="02000503000000020004" pitchFamily="2" charset="0"/>
+              <a:ea typeface="Inter Medium" panose="02000503000000020004" pitchFamily="2" charset="0"/>
+            </a:endParaRPr>
+          </a:p>
+        </p:txBody>
+      </p:sp>
+      <p:pic>
+        <p:nvPicPr>
+          <p:cNvPr id="12" name="Graphic 11">
+            <a:extLst>
+              <a:ext uri="{FF2B5EF4-FFF2-40B4-BE49-F238E27FC236}">
+                <a16:creationId xmlns:a16="http://schemas.microsoft.com/office/drawing/2014/main" id="{382FD2D1-302C-F2B6-6930-0BDF28BA4AB8}"/>
+              </a:ext>
+            </a:extLst>
+          </p:cNvPr>
+          <p:cNvPicPr>
+            <a:picLocks noChangeAspect="1"/>
+          </p:cNvPicPr>
+          <p:nvPr/>
+        </p:nvPicPr>
+        <p:blipFill>
+          <a:blip>
+            <a:extLst>
+              <a:ext uri="{96DAC541-7B7A-43D3-8B79-37D633B846F1}">
+                <asvg:svgBlip xmlns:asvg="http://schemas.microsoft.com/office/drawing/2016/SVG/main" r:embed="rId3"/>
+              </a:ext>
+            </a:extLst>
+          </a:blip>
+          <a:stretch>
+            <a:fillRect/>
+          </a:stretch>
+        </p:blipFill>
+        <p:spPr>
+          <a:xfrm>
+            <a:off x="9203245" y="6176176"/>
+            <a:ext cx="1120090" cy="603766"/>
+          </a:xfrm>
+          <a:prstGeom prst="rect">
+            <a:avLst/>
+          </a:prstGeom>
+        </p:spPr>
+      </p:pic>
+      <p:sp>
+        <p:nvSpPr>
+          <p:cNvPr id="13" name="Rectangle 12">
+            <a:extLst>
+              <a:ext uri="{FF2B5EF4-FFF2-40B4-BE49-F238E27FC236}">
+                <a16:creationId xmlns:a16="http://schemas.microsoft.com/office/drawing/2014/main" id="{B94026CB-2D20-FFFD-1A39-E6974CD3186B}"/>
+              </a:ext>
+            </a:extLst>
+          </p:cNvPr>
+          <p:cNvSpPr/>
+          <p:nvPr userDrawn="1"/>
+        </p:nvSpPr>
+        <p:spPr>
+          <a:xfrm>
+            <a:off x="-440871" y="6104965"/>
+            <a:ext cx="13062857" cy="885799"/>
+          </a:xfrm>
+          <a:prstGeom prst="rect">
+            <a:avLst/>
+          </a:prstGeom>
+          <a:solidFill>
+            <a:srgbClr val="435765"/>
+          </a:solidFill>
+        </p:spPr>
+        <p:style>
+          <a:lnRef idx="2">
+            <a:schemeClr val="accent1">
+              <a:shade val="50000"/>
+            </a:schemeClr>
+          </a:lnRef>
+          <a:fillRef idx="1">
+            <a:schemeClr val="accent1"/>
+          </a:fillRef>
+          <a:effectRef idx="0">
+            <a:schemeClr val="accent1"/>
+          </a:effectRef>
+          <a:fontRef idx="minor">
+            <a:schemeClr val="lt1"/>
+          </a:fontRef>
+        </p:style>
+        <p:txBody>
+          <a:bodyPr rtlCol="0" anchor="ctr"/>
+          <a:lstStyle/>
+          <a:p>
+            <a:pPr algn="ctr"/>
+            <a:endParaRPr lang="en-US"/>
+          </a:p>
+        </p:txBody>
+      </p:sp>
+      <p:pic>
+        <p:nvPicPr>
+          <p:cNvPr id="14" name="Picture 13" descr="Text&#10;&#10;Description automatically generated">
+            <a:extLst>
+              <a:ext uri="{FF2B5EF4-FFF2-40B4-BE49-F238E27FC236}">
+                <a16:creationId xmlns:a16="http://schemas.microsoft.com/office/drawing/2014/main" id="{AC6BEB87-AB60-212B-83C6-3A41E922EE0B}"/>
               </a:ext>
             </a:extLst>
           </p:cNvPr>
@@ -5054,10 +7262,10 @@
       </p:pic>
       <p:sp>
         <p:nvSpPr>
-          <p:cNvPr id="10" name="TextBox 9">
+          <p:cNvPr id="15" name="TextBox 14">
             <a:extLst>
               <a:ext uri="{FF2B5EF4-FFF2-40B4-BE49-F238E27FC236}">
-                <a16:creationId xmlns:a16="http://schemas.microsoft.com/office/drawing/2014/main" id="{2103F164-7135-2751-8A01-C2F26DED14E2}"/>
+                <a16:creationId xmlns:a16="http://schemas.microsoft.com/office/drawing/2014/main" id="{F7A71A05-F9F2-5F25-728E-7B2DC06B77D9}"/>
               </a:ext>
             </a:extLst>
           </p:cNvPr>
@@ -5114,10 +7322,10 @@
       </p:sp>
       <p:pic>
         <p:nvPicPr>
-          <p:cNvPr id="11" name="Graphic 10">
+          <p:cNvPr id="16" name="Graphic 15">
             <a:extLst>
               <a:ext uri="{FF2B5EF4-FFF2-40B4-BE49-F238E27FC236}">
-                <a16:creationId xmlns:a16="http://schemas.microsoft.com/office/drawing/2014/main" id="{EAA99D1C-BE1B-68D4-6382-C3DC54918C6C}"/>
+                <a16:creationId xmlns:a16="http://schemas.microsoft.com/office/drawing/2014/main" id="{04ABAEA5-BA4F-C5CC-972E-E26465F28548}"/>
               </a:ext>
             </a:extLst>
           </p:cNvPr>
@@ -5151,7 +7359,7 @@
     </p:spTree>
     <p:extLst>
       <p:ext uri="{BB962C8B-B14F-4D97-AF65-F5344CB8AC3E}">
-        <p14:creationId xmlns:p14="http://schemas.microsoft.com/office/powerpoint/2010/main" val="1548832460"/>
+        <p14:creationId xmlns:p14="http://schemas.microsoft.com/office/powerpoint/2010/main" val="1018322045"/>
       </p:ext>
     </p:extLst>
   </p:cSld>
@@ -5195,8 +7403,15 @@
         <p:txBody>
           <a:bodyPr/>
           <a:lstStyle>
-            <a:lvl1pPr>
-              <a:defRPr/>
+            <a:lvl1pPr algn="l">
+              <a:defRPr>
+                <a:solidFill>
+                  <a:schemeClr val="tx1">
+                    <a:lumMod val="65000"/>
+                    <a:lumOff val="35000"/>
+                  </a:schemeClr>
+                </a:solidFill>
+              </a:defRPr>
             </a:lvl1pPr>
           </a:lstStyle>
           <a:p>
@@ -5204,7 +7419,7 @@
               <a:rPr lang="en-GB"/>
               <a:t>Click to edit Master title style</a:t>
             </a:r>
-            <a:endParaRPr lang="en-IE"/>
+            <a:endParaRPr lang="en-US" dirty="0"/>
           </a:p>
         </p:txBody>
       </p:sp>
@@ -5354,7 +7569,7 @@
               <a:rPr lang="en-GB"/>
               <a:t>Fifth level</a:t>
             </a:r>
-            <a:endParaRPr lang="en-IE"/>
+            <a:endParaRPr lang="en-US"/>
           </a:p>
         </p:txBody>
       </p:sp>
@@ -5504,7 +7719,7 @@
               <a:rPr lang="en-GB"/>
               <a:t>Fifth level</a:t>
             </a:r>
-            <a:endParaRPr lang="en-IE"/>
+            <a:endParaRPr lang="en-US"/>
           </a:p>
         </p:txBody>
       </p:sp>
@@ -5526,7 +7741,7 @@
             <a:fld id="{1D8BD707-D9CF-40AE-B4C6-C98DA3205C09}" type="datetimeFigureOut">
               <a:rPr lang="en-US" smtClean="0"/>
               <a:pPr/>
-              <a:t>3/12/26</a:t>
+              <a:t>3/13/26</a:t>
             </a:fld>
             <a:endParaRPr lang="en-US"/>
           </a:p>
@@ -5570,17 +7785,52 @@
           </a:p>
         </p:txBody>
       </p:sp>
+      <p:cxnSp>
+        <p:nvCxnSpPr>
+          <p:cNvPr id="10" name="Straight Connector 9"/>
+          <p:cNvCxnSpPr/>
+          <p:nvPr/>
+        </p:nvCxnSpPr>
+        <p:spPr>
+          <a:xfrm>
+            <a:off x="609600" y="1447800"/>
+            <a:ext cx="11074400" cy="0"/>
+          </a:xfrm>
+          <a:prstGeom prst="line">
+            <a:avLst/>
+          </a:prstGeom>
+          <a:ln w="12700">
+            <a:solidFill>
+              <a:schemeClr val="tx1"/>
+            </a:solidFill>
+          </a:ln>
+        </p:spPr>
+        <p:style>
+          <a:lnRef idx="1">
+            <a:schemeClr val="accent1"/>
+          </a:lnRef>
+          <a:fillRef idx="0">
+            <a:schemeClr val="accent1"/>
+          </a:fillRef>
+          <a:effectRef idx="0">
+            <a:schemeClr val="accent1"/>
+          </a:effectRef>
+          <a:fontRef idx="minor">
+            <a:schemeClr val="tx1"/>
+          </a:fontRef>
+        </p:style>
+      </p:cxnSp>
       <p:sp>
         <p:nvSpPr>
-          <p:cNvPr id="10" name="Rectangle 9">
+          <p:cNvPr id="11" name="Rectangle 10">
             <a:extLst>
               <a:ext uri="{FF2B5EF4-FFF2-40B4-BE49-F238E27FC236}">
-                <a16:creationId xmlns:a16="http://schemas.microsoft.com/office/drawing/2014/main" id="{21FD9F02-5C57-E6A0-E5CF-7A31EF03B80A}"/>
+                <a16:creationId xmlns:a16="http://schemas.microsoft.com/office/drawing/2014/main" id="{4CE9CA0D-C99E-6F52-A000-3CF31AB92E6E}"/>
               </a:ext>
             </a:extLst>
           </p:cNvPr>
           <p:cNvSpPr/>
-          <p:nvPr userDrawn="1"/>
+          <p:nvPr/>
         </p:nvSpPr>
         <p:spPr>
           <a:xfrm>
@@ -5621,10 +7871,185 @@
       </p:sp>
       <p:pic>
         <p:nvPicPr>
-          <p:cNvPr id="11" name="Picture 10" descr="Text&#10;&#10;Description automatically generated">
+          <p:cNvPr id="12" name="Picture 11" descr="Text&#10;&#10;Description automatically generated">
             <a:extLst>
               <a:ext uri="{FF2B5EF4-FFF2-40B4-BE49-F238E27FC236}">
-                <a16:creationId xmlns:a16="http://schemas.microsoft.com/office/drawing/2014/main" id="{460FA012-A931-85B6-9090-9C1046C0E2F3}"/>
+                <a16:creationId xmlns:a16="http://schemas.microsoft.com/office/drawing/2014/main" id="{37C2A4E0-C329-DE85-4BEB-46312FB9085A}"/>
+              </a:ext>
+            </a:extLst>
+          </p:cNvPr>
+          <p:cNvPicPr>
+            <a:picLocks noChangeAspect="1"/>
+          </p:cNvPicPr>
+          <p:nvPr/>
+        </p:nvPicPr>
+        <p:blipFill>
+          <a:blip r:embed="rId2"/>
+          <a:stretch>
+            <a:fillRect/>
+          </a:stretch>
+        </p:blipFill>
+        <p:spPr>
+          <a:xfrm>
+            <a:off x="10467415" y="6013271"/>
+            <a:ext cx="1743635" cy="977493"/>
+          </a:xfrm>
+          <a:prstGeom prst="rect">
+            <a:avLst/>
+          </a:prstGeom>
+        </p:spPr>
+      </p:pic>
+      <p:sp>
+        <p:nvSpPr>
+          <p:cNvPr id="13" name="TextBox 12">
+            <a:extLst>
+              <a:ext uri="{FF2B5EF4-FFF2-40B4-BE49-F238E27FC236}">
+                <a16:creationId xmlns:a16="http://schemas.microsoft.com/office/drawing/2014/main" id="{BFA13D82-9BA2-546C-0EA3-1544D905C036}"/>
+              </a:ext>
+            </a:extLst>
+          </p:cNvPr>
+          <p:cNvSpPr txBox="1"/>
+          <p:nvPr/>
+        </p:nvSpPr>
+        <p:spPr>
+          <a:xfrm>
+            <a:off x="259216" y="6209629"/>
+            <a:ext cx="2132315" cy="584775"/>
+          </a:xfrm>
+          <a:prstGeom prst="rect">
+            <a:avLst/>
+          </a:prstGeom>
+          <a:noFill/>
+        </p:spPr>
+        <p:txBody>
+          <a:bodyPr wrap="none" rtlCol="0">
+            <a:spAutoFit/>
+          </a:bodyPr>
+          <a:lstStyle/>
+          <a:p>
+            <a:r>
+              <a:rPr lang="en-US" sz="1600" dirty="0">
+                <a:solidFill>
+                  <a:srgbClr val="FCCA3A"/>
+                </a:solidFill>
+                <a:latin typeface="Inter Medium" panose="02000503000000020004" pitchFamily="2" charset="0"/>
+                <a:ea typeface="Inter Medium" panose="02000503000000020004" pitchFamily="2" charset="0"/>
+              </a:rPr>
+              <a:t>Dave Hearne</a:t>
+            </a:r>
+          </a:p>
+          <a:p>
+            <a:r>
+              <a:rPr lang="en-US" sz="1600" dirty="0" err="1">
+                <a:solidFill>
+                  <a:srgbClr val="FCCA3A"/>
+                </a:solidFill>
+                <a:latin typeface="Inter Medium" panose="02000503000000020004" pitchFamily="2" charset="0"/>
+                <a:ea typeface="Inter Medium" panose="02000503000000020004" pitchFamily="2" charset="0"/>
+              </a:rPr>
+              <a:t>dave.hearne@wit.ie</a:t>
+            </a:r>
+            <a:endParaRPr lang="en-US" sz="1600" dirty="0">
+              <a:solidFill>
+                <a:srgbClr val="FCCA3A"/>
+              </a:solidFill>
+              <a:latin typeface="Inter Medium" panose="02000503000000020004" pitchFamily="2" charset="0"/>
+              <a:ea typeface="Inter Medium" panose="02000503000000020004" pitchFamily="2" charset="0"/>
+            </a:endParaRPr>
+          </a:p>
+        </p:txBody>
+      </p:sp>
+      <p:pic>
+        <p:nvPicPr>
+          <p:cNvPr id="14" name="Graphic 13">
+            <a:extLst>
+              <a:ext uri="{FF2B5EF4-FFF2-40B4-BE49-F238E27FC236}">
+                <a16:creationId xmlns:a16="http://schemas.microsoft.com/office/drawing/2014/main" id="{6194DFDC-5F2C-D3BC-B45F-82556F0E39D8}"/>
+              </a:ext>
+            </a:extLst>
+          </p:cNvPr>
+          <p:cNvPicPr>
+            <a:picLocks noChangeAspect="1"/>
+          </p:cNvPicPr>
+          <p:nvPr/>
+        </p:nvPicPr>
+        <p:blipFill>
+          <a:blip>
+            <a:extLst>
+              <a:ext uri="{96DAC541-7B7A-43D3-8B79-37D633B846F1}">
+                <asvg:svgBlip xmlns:asvg="http://schemas.microsoft.com/office/drawing/2016/SVG/main" r:embed="rId3"/>
+              </a:ext>
+            </a:extLst>
+          </a:blip>
+          <a:stretch>
+            <a:fillRect/>
+          </a:stretch>
+        </p:blipFill>
+        <p:spPr>
+          <a:xfrm>
+            <a:off x="9203245" y="6176176"/>
+            <a:ext cx="1120090" cy="603766"/>
+          </a:xfrm>
+          <a:prstGeom prst="rect">
+            <a:avLst/>
+          </a:prstGeom>
+        </p:spPr>
+      </p:pic>
+      <p:sp>
+        <p:nvSpPr>
+          <p:cNvPr id="15" name="Rectangle 14">
+            <a:extLst>
+              <a:ext uri="{FF2B5EF4-FFF2-40B4-BE49-F238E27FC236}">
+                <a16:creationId xmlns:a16="http://schemas.microsoft.com/office/drawing/2014/main" id="{08C81D10-E2C4-9492-153A-83861B7D568F}"/>
+              </a:ext>
+            </a:extLst>
+          </p:cNvPr>
+          <p:cNvSpPr/>
+          <p:nvPr userDrawn="1"/>
+        </p:nvSpPr>
+        <p:spPr>
+          <a:xfrm>
+            <a:off x="-440871" y="6104965"/>
+            <a:ext cx="13062857" cy="885799"/>
+          </a:xfrm>
+          <a:prstGeom prst="rect">
+            <a:avLst/>
+          </a:prstGeom>
+          <a:solidFill>
+            <a:srgbClr val="435765"/>
+          </a:solidFill>
+        </p:spPr>
+        <p:style>
+          <a:lnRef idx="2">
+            <a:schemeClr val="accent1">
+              <a:shade val="50000"/>
+            </a:schemeClr>
+          </a:lnRef>
+          <a:fillRef idx="1">
+            <a:schemeClr val="accent1"/>
+          </a:fillRef>
+          <a:effectRef idx="0">
+            <a:schemeClr val="accent1"/>
+          </a:effectRef>
+          <a:fontRef idx="minor">
+            <a:schemeClr val="lt1"/>
+          </a:fontRef>
+        </p:style>
+        <p:txBody>
+          <a:bodyPr rtlCol="0" anchor="ctr"/>
+          <a:lstStyle/>
+          <a:p>
+            <a:pPr algn="ctr"/>
+            <a:endParaRPr lang="en-US"/>
+          </a:p>
+        </p:txBody>
+      </p:sp>
+      <p:pic>
+        <p:nvPicPr>
+          <p:cNvPr id="16" name="Picture 15" descr="Text&#10;&#10;Description automatically generated">
+            <a:extLst>
+              <a:ext uri="{FF2B5EF4-FFF2-40B4-BE49-F238E27FC236}">
+                <a16:creationId xmlns:a16="http://schemas.microsoft.com/office/drawing/2014/main" id="{790782E4-527A-1813-4EAD-05313350C9CC}"/>
               </a:ext>
             </a:extLst>
           </p:cNvPr>
@@ -5651,10 +8076,10 @@
       </p:pic>
       <p:sp>
         <p:nvSpPr>
-          <p:cNvPr id="12" name="TextBox 11">
+          <p:cNvPr id="17" name="TextBox 16">
             <a:extLst>
               <a:ext uri="{FF2B5EF4-FFF2-40B4-BE49-F238E27FC236}">
-                <a16:creationId xmlns:a16="http://schemas.microsoft.com/office/drawing/2014/main" id="{2040A62C-85DB-7BD4-908F-A84D91C27FCE}"/>
+                <a16:creationId xmlns:a16="http://schemas.microsoft.com/office/drawing/2014/main" id="{C6AF8203-A96C-1776-0CA6-AAA883BE0087}"/>
               </a:ext>
             </a:extLst>
           </p:cNvPr>
@@ -5711,10 +8136,10 @@
       </p:sp>
       <p:pic>
         <p:nvPicPr>
-          <p:cNvPr id="13" name="Graphic 12">
+          <p:cNvPr id="18" name="Graphic 17">
             <a:extLst>
               <a:ext uri="{FF2B5EF4-FFF2-40B4-BE49-F238E27FC236}">
-                <a16:creationId xmlns:a16="http://schemas.microsoft.com/office/drawing/2014/main" id="{CD3594CD-5D35-D344-EFD1-FF0FCFAD203F}"/>
+                <a16:creationId xmlns:a16="http://schemas.microsoft.com/office/drawing/2014/main" id="{4CA1DEBB-530E-D3DE-2727-A9909F72AA7A}"/>
               </a:ext>
             </a:extLst>
           </p:cNvPr>
@@ -5748,7 +8173,7 @@
     </p:spTree>
     <p:extLst>
       <p:ext uri="{BB962C8B-B14F-4D97-AF65-F5344CB8AC3E}">
-        <p14:creationId xmlns:p14="http://schemas.microsoft.com/office/powerpoint/2010/main" val="271303830"/>
+        <p14:creationId xmlns:p14="http://schemas.microsoft.com/office/powerpoint/2010/main" val="441898246"/>
       </p:ext>
     </p:extLst>
   </p:cSld>
@@ -5791,13 +8216,24 @@
         <p:spPr/>
         <p:txBody>
           <a:bodyPr/>
-          <a:lstStyle/>
+          <a:lstStyle>
+            <a:lvl1pPr algn="l">
+              <a:defRPr>
+                <a:solidFill>
+                  <a:schemeClr val="tx1">
+                    <a:lumMod val="65000"/>
+                    <a:lumOff val="35000"/>
+                  </a:schemeClr>
+                </a:solidFill>
+              </a:defRPr>
+            </a:lvl1pPr>
+          </a:lstStyle>
           <a:p>
             <a:r>
               <a:rPr lang="en-GB"/>
               <a:t>Click to edit Master title style</a:t>
             </a:r>
-            <a:endParaRPr lang="en-IE"/>
+            <a:endParaRPr lang="en-US" dirty="0"/>
           </a:p>
         </p:txBody>
       </p:sp>
@@ -5819,7 +8255,7 @@
             <a:fld id="{1D8BD707-D9CF-40AE-B4C6-C98DA3205C09}" type="datetimeFigureOut">
               <a:rPr lang="en-US" smtClean="0"/>
               <a:pPr/>
-              <a:t>3/12/26</a:t>
+              <a:t>3/13/26</a:t>
             </a:fld>
             <a:endParaRPr lang="en-US"/>
           </a:p>
@@ -5863,17 +8299,52 @@
           </a:p>
         </p:txBody>
       </p:sp>
+      <p:cxnSp>
+        <p:nvCxnSpPr>
+          <p:cNvPr id="6" name="Straight Connector 5"/>
+          <p:cNvCxnSpPr/>
+          <p:nvPr/>
+        </p:nvCxnSpPr>
+        <p:spPr>
+          <a:xfrm>
+            <a:off x="609600" y="1447800"/>
+            <a:ext cx="11074400" cy="0"/>
+          </a:xfrm>
+          <a:prstGeom prst="line">
+            <a:avLst/>
+          </a:prstGeom>
+          <a:ln w="12700">
+            <a:solidFill>
+              <a:schemeClr val="tx1"/>
+            </a:solidFill>
+          </a:ln>
+        </p:spPr>
+        <p:style>
+          <a:lnRef idx="1">
+            <a:schemeClr val="accent1"/>
+          </a:lnRef>
+          <a:fillRef idx="0">
+            <a:schemeClr val="accent1"/>
+          </a:fillRef>
+          <a:effectRef idx="0">
+            <a:schemeClr val="accent1"/>
+          </a:effectRef>
+          <a:fontRef idx="minor">
+            <a:schemeClr val="tx1"/>
+          </a:fontRef>
+        </p:style>
+      </p:cxnSp>
       <p:sp>
         <p:nvSpPr>
-          <p:cNvPr id="6" name="Rectangle 5">
+          <p:cNvPr id="7" name="Rectangle 6">
             <a:extLst>
               <a:ext uri="{FF2B5EF4-FFF2-40B4-BE49-F238E27FC236}">
-                <a16:creationId xmlns:a16="http://schemas.microsoft.com/office/drawing/2014/main" id="{5731B68E-C22C-5F83-8572-DCC164821CC8}"/>
+                <a16:creationId xmlns:a16="http://schemas.microsoft.com/office/drawing/2014/main" id="{32B67E4D-088A-44ED-977B-85EFFB31FE83}"/>
               </a:ext>
             </a:extLst>
           </p:cNvPr>
           <p:cNvSpPr/>
-          <p:nvPr userDrawn="1"/>
+          <p:nvPr/>
         </p:nvSpPr>
         <p:spPr>
           <a:xfrm>
@@ -5914,10 +8385,185 @@
       </p:sp>
       <p:pic>
         <p:nvPicPr>
-          <p:cNvPr id="7" name="Picture 6" descr="Text&#10;&#10;Description automatically generated">
+          <p:cNvPr id="8" name="Picture 7" descr="Text&#10;&#10;Description automatically generated">
             <a:extLst>
               <a:ext uri="{FF2B5EF4-FFF2-40B4-BE49-F238E27FC236}">
-                <a16:creationId xmlns:a16="http://schemas.microsoft.com/office/drawing/2014/main" id="{E89C3015-3022-CE61-4F57-D9DF7F0A2A5D}"/>
+                <a16:creationId xmlns:a16="http://schemas.microsoft.com/office/drawing/2014/main" id="{A50B2B93-DB50-CA1C-49AA-531B70FAFF00}"/>
+              </a:ext>
+            </a:extLst>
+          </p:cNvPr>
+          <p:cNvPicPr>
+            <a:picLocks noChangeAspect="1"/>
+          </p:cNvPicPr>
+          <p:nvPr/>
+        </p:nvPicPr>
+        <p:blipFill>
+          <a:blip r:embed="rId2"/>
+          <a:stretch>
+            <a:fillRect/>
+          </a:stretch>
+        </p:blipFill>
+        <p:spPr>
+          <a:xfrm>
+            <a:off x="10467415" y="6013271"/>
+            <a:ext cx="1743635" cy="977493"/>
+          </a:xfrm>
+          <a:prstGeom prst="rect">
+            <a:avLst/>
+          </a:prstGeom>
+        </p:spPr>
+      </p:pic>
+      <p:sp>
+        <p:nvSpPr>
+          <p:cNvPr id="9" name="TextBox 8">
+            <a:extLst>
+              <a:ext uri="{FF2B5EF4-FFF2-40B4-BE49-F238E27FC236}">
+                <a16:creationId xmlns:a16="http://schemas.microsoft.com/office/drawing/2014/main" id="{F2DC79E3-F895-FC6C-B65D-F8D0CB232DD5}"/>
+              </a:ext>
+            </a:extLst>
+          </p:cNvPr>
+          <p:cNvSpPr txBox="1"/>
+          <p:nvPr/>
+        </p:nvSpPr>
+        <p:spPr>
+          <a:xfrm>
+            <a:off x="259216" y="6209629"/>
+            <a:ext cx="2132315" cy="584775"/>
+          </a:xfrm>
+          <a:prstGeom prst="rect">
+            <a:avLst/>
+          </a:prstGeom>
+          <a:noFill/>
+        </p:spPr>
+        <p:txBody>
+          <a:bodyPr wrap="none" rtlCol="0">
+            <a:spAutoFit/>
+          </a:bodyPr>
+          <a:lstStyle/>
+          <a:p>
+            <a:r>
+              <a:rPr lang="en-US" sz="1600" dirty="0">
+                <a:solidFill>
+                  <a:srgbClr val="FCCA3A"/>
+                </a:solidFill>
+                <a:latin typeface="Inter Medium" panose="02000503000000020004" pitchFamily="2" charset="0"/>
+                <a:ea typeface="Inter Medium" panose="02000503000000020004" pitchFamily="2" charset="0"/>
+              </a:rPr>
+              <a:t>Dave Hearne</a:t>
+            </a:r>
+          </a:p>
+          <a:p>
+            <a:r>
+              <a:rPr lang="en-US" sz="1600" dirty="0" err="1">
+                <a:solidFill>
+                  <a:srgbClr val="FCCA3A"/>
+                </a:solidFill>
+                <a:latin typeface="Inter Medium" panose="02000503000000020004" pitchFamily="2" charset="0"/>
+                <a:ea typeface="Inter Medium" panose="02000503000000020004" pitchFamily="2" charset="0"/>
+              </a:rPr>
+              <a:t>dave.hearne@wit.ie</a:t>
+            </a:r>
+            <a:endParaRPr lang="en-US" sz="1600" dirty="0">
+              <a:solidFill>
+                <a:srgbClr val="FCCA3A"/>
+              </a:solidFill>
+              <a:latin typeface="Inter Medium" panose="02000503000000020004" pitchFamily="2" charset="0"/>
+              <a:ea typeface="Inter Medium" panose="02000503000000020004" pitchFamily="2" charset="0"/>
+            </a:endParaRPr>
+          </a:p>
+        </p:txBody>
+      </p:sp>
+      <p:pic>
+        <p:nvPicPr>
+          <p:cNvPr id="10" name="Graphic 9">
+            <a:extLst>
+              <a:ext uri="{FF2B5EF4-FFF2-40B4-BE49-F238E27FC236}">
+                <a16:creationId xmlns:a16="http://schemas.microsoft.com/office/drawing/2014/main" id="{B905DE66-C703-C172-68C5-64C9B8AE82EC}"/>
+              </a:ext>
+            </a:extLst>
+          </p:cNvPr>
+          <p:cNvPicPr>
+            <a:picLocks noChangeAspect="1"/>
+          </p:cNvPicPr>
+          <p:nvPr/>
+        </p:nvPicPr>
+        <p:blipFill>
+          <a:blip>
+            <a:extLst>
+              <a:ext uri="{96DAC541-7B7A-43D3-8B79-37D633B846F1}">
+                <asvg:svgBlip xmlns:asvg="http://schemas.microsoft.com/office/drawing/2016/SVG/main" r:embed="rId3"/>
+              </a:ext>
+            </a:extLst>
+          </a:blip>
+          <a:stretch>
+            <a:fillRect/>
+          </a:stretch>
+        </p:blipFill>
+        <p:spPr>
+          <a:xfrm>
+            <a:off x="9203245" y="6153874"/>
+            <a:ext cx="1120090" cy="603766"/>
+          </a:xfrm>
+          <a:prstGeom prst="rect">
+            <a:avLst/>
+          </a:prstGeom>
+        </p:spPr>
+      </p:pic>
+      <p:sp>
+        <p:nvSpPr>
+          <p:cNvPr id="11" name="Rectangle 10">
+            <a:extLst>
+              <a:ext uri="{FF2B5EF4-FFF2-40B4-BE49-F238E27FC236}">
+                <a16:creationId xmlns:a16="http://schemas.microsoft.com/office/drawing/2014/main" id="{B08A322D-4595-FCC9-5217-0B11E93BE656}"/>
+              </a:ext>
+            </a:extLst>
+          </p:cNvPr>
+          <p:cNvSpPr/>
+          <p:nvPr userDrawn="1"/>
+        </p:nvSpPr>
+        <p:spPr>
+          <a:xfrm>
+            <a:off x="-440871" y="6104965"/>
+            <a:ext cx="13062857" cy="885799"/>
+          </a:xfrm>
+          <a:prstGeom prst="rect">
+            <a:avLst/>
+          </a:prstGeom>
+          <a:solidFill>
+            <a:srgbClr val="435765"/>
+          </a:solidFill>
+        </p:spPr>
+        <p:style>
+          <a:lnRef idx="2">
+            <a:schemeClr val="accent1">
+              <a:shade val="50000"/>
+            </a:schemeClr>
+          </a:lnRef>
+          <a:fillRef idx="1">
+            <a:schemeClr val="accent1"/>
+          </a:fillRef>
+          <a:effectRef idx="0">
+            <a:schemeClr val="accent1"/>
+          </a:effectRef>
+          <a:fontRef idx="minor">
+            <a:schemeClr val="lt1"/>
+          </a:fontRef>
+        </p:style>
+        <p:txBody>
+          <a:bodyPr rtlCol="0" anchor="ctr"/>
+          <a:lstStyle/>
+          <a:p>
+            <a:pPr algn="ctr"/>
+            <a:endParaRPr lang="en-US"/>
+          </a:p>
+        </p:txBody>
+      </p:sp>
+      <p:pic>
+        <p:nvPicPr>
+          <p:cNvPr id="12" name="Picture 11" descr="Text&#10;&#10;Description automatically generated">
+            <a:extLst>
+              <a:ext uri="{FF2B5EF4-FFF2-40B4-BE49-F238E27FC236}">
+                <a16:creationId xmlns:a16="http://schemas.microsoft.com/office/drawing/2014/main" id="{6B832050-D04F-5373-78E0-8675AEDD8439}"/>
               </a:ext>
             </a:extLst>
           </p:cNvPr>
@@ -5944,10 +8590,10 @@
       </p:pic>
       <p:sp>
         <p:nvSpPr>
-          <p:cNvPr id="8" name="TextBox 7">
+          <p:cNvPr id="13" name="TextBox 12">
             <a:extLst>
               <a:ext uri="{FF2B5EF4-FFF2-40B4-BE49-F238E27FC236}">
-                <a16:creationId xmlns:a16="http://schemas.microsoft.com/office/drawing/2014/main" id="{19CDD9F3-7312-AB68-2778-B8D9F4F95B59}"/>
+                <a16:creationId xmlns:a16="http://schemas.microsoft.com/office/drawing/2014/main" id="{0943ED14-ED84-A645-DE99-F80AA5380883}"/>
               </a:ext>
             </a:extLst>
           </p:cNvPr>
@@ -6004,10 +8650,10 @@
       </p:sp>
       <p:pic>
         <p:nvPicPr>
-          <p:cNvPr id="9" name="Graphic 8">
+          <p:cNvPr id="14" name="Graphic 13">
             <a:extLst>
               <a:ext uri="{FF2B5EF4-FFF2-40B4-BE49-F238E27FC236}">
-                <a16:creationId xmlns:a16="http://schemas.microsoft.com/office/drawing/2014/main" id="{567EB333-0E1F-591D-FE8A-35E076FC91DC}"/>
+                <a16:creationId xmlns:a16="http://schemas.microsoft.com/office/drawing/2014/main" id="{E85CDCA0-D739-75EC-4372-77AF00BAED71}"/>
               </a:ext>
             </a:extLst>
           </p:cNvPr>
@@ -6041,7 +8687,7 @@
     </p:spTree>
     <p:extLst>
       <p:ext uri="{BB962C8B-B14F-4D97-AF65-F5344CB8AC3E}">
-        <p14:creationId xmlns:p14="http://schemas.microsoft.com/office/powerpoint/2010/main" val="2830143538"/>
+        <p14:creationId xmlns:p14="http://schemas.microsoft.com/office/powerpoint/2010/main" val="2284302348"/>
       </p:ext>
     </p:extLst>
   </p:cSld>
@@ -6089,7 +8735,7 @@
             <a:fld id="{1D8BD707-D9CF-40AE-B4C6-C98DA3205C09}" type="datetimeFigureOut">
               <a:rPr lang="en-US" smtClean="0"/>
               <a:pPr/>
-              <a:t>3/12/26</a:t>
+              <a:t>3/13/26</a:t>
             </a:fld>
             <a:endParaRPr lang="en-US"/>
           </a:p>
@@ -6141,7 +8787,7 @@
     </p:spTree>
     <p:extLst>
       <p:ext uri="{BB962C8B-B14F-4D97-AF65-F5344CB8AC3E}">
-        <p14:creationId xmlns:p14="http://schemas.microsoft.com/office/powerpoint/2010/main" val="3689712921"/>
+        <p14:creationId xmlns:p14="http://schemas.microsoft.com/office/powerpoint/2010/main" val="1012392529"/>
       </p:ext>
     </p:extLst>
   </p:cSld>
@@ -6197,7 +8843,7 @@
               <a:rPr lang="en-GB"/>
               <a:t>Click to edit Master title style</a:t>
             </a:r>
-            <a:endParaRPr lang="en-IE"/>
+            <a:endParaRPr lang="en-US"/>
           </a:p>
         </p:txBody>
       </p:sp>
@@ -6282,7 +8928,7 @@
               <a:rPr lang="en-GB"/>
               <a:t>Fifth level</a:t>
             </a:r>
-            <a:endParaRPr lang="en-IE"/>
+            <a:endParaRPr lang="en-US"/>
           </a:p>
         </p:txBody>
       </p:sp>
@@ -6369,7 +9015,7 @@
             <a:fld id="{1D8BD707-D9CF-40AE-B4C6-C98DA3205C09}" type="datetimeFigureOut">
               <a:rPr lang="en-US" smtClean="0"/>
               <a:pPr/>
-              <a:t>3/12/26</a:t>
+              <a:t>3/13/26</a:t>
             </a:fld>
             <a:endParaRPr lang="en-US"/>
           </a:p>
@@ -6418,12 +9064,12 @@
           <p:cNvPr id="8" name="Rectangle 7">
             <a:extLst>
               <a:ext uri="{FF2B5EF4-FFF2-40B4-BE49-F238E27FC236}">
-                <a16:creationId xmlns:a16="http://schemas.microsoft.com/office/drawing/2014/main" id="{02FB14DA-ABED-436F-CF89-3885DA0BD59C}"/>
+                <a16:creationId xmlns:a16="http://schemas.microsoft.com/office/drawing/2014/main" id="{AD03E582-0FAD-F29C-E82A-E33817FB1224}"/>
               </a:ext>
             </a:extLst>
           </p:cNvPr>
           <p:cNvSpPr/>
-          <p:nvPr userDrawn="1"/>
+          <p:nvPr/>
         </p:nvSpPr>
         <p:spPr>
           <a:xfrm>
@@ -6467,7 +9113,182 @@
           <p:cNvPr id="9" name="Picture 8" descr="Text&#10;&#10;Description automatically generated">
             <a:extLst>
               <a:ext uri="{FF2B5EF4-FFF2-40B4-BE49-F238E27FC236}">
-                <a16:creationId xmlns:a16="http://schemas.microsoft.com/office/drawing/2014/main" id="{FFD60E0C-C41C-5241-890B-8ACA4B8B6832}"/>
+                <a16:creationId xmlns:a16="http://schemas.microsoft.com/office/drawing/2014/main" id="{D5C6BF17-CDFD-8E4D-126C-E89CE9421479}"/>
+              </a:ext>
+            </a:extLst>
+          </p:cNvPr>
+          <p:cNvPicPr>
+            <a:picLocks noChangeAspect="1"/>
+          </p:cNvPicPr>
+          <p:nvPr/>
+        </p:nvPicPr>
+        <p:blipFill>
+          <a:blip r:embed="rId2"/>
+          <a:stretch>
+            <a:fillRect/>
+          </a:stretch>
+        </p:blipFill>
+        <p:spPr>
+          <a:xfrm>
+            <a:off x="10467415" y="6013271"/>
+            <a:ext cx="1743635" cy="977493"/>
+          </a:xfrm>
+          <a:prstGeom prst="rect">
+            <a:avLst/>
+          </a:prstGeom>
+        </p:spPr>
+      </p:pic>
+      <p:sp>
+        <p:nvSpPr>
+          <p:cNvPr id="10" name="TextBox 9">
+            <a:extLst>
+              <a:ext uri="{FF2B5EF4-FFF2-40B4-BE49-F238E27FC236}">
+                <a16:creationId xmlns:a16="http://schemas.microsoft.com/office/drawing/2014/main" id="{3D83607A-80E1-F720-EBF6-49135EA11DBD}"/>
+              </a:ext>
+            </a:extLst>
+          </p:cNvPr>
+          <p:cNvSpPr txBox="1"/>
+          <p:nvPr/>
+        </p:nvSpPr>
+        <p:spPr>
+          <a:xfrm>
+            <a:off x="259216" y="6209629"/>
+            <a:ext cx="2132315" cy="584775"/>
+          </a:xfrm>
+          <a:prstGeom prst="rect">
+            <a:avLst/>
+          </a:prstGeom>
+          <a:noFill/>
+        </p:spPr>
+        <p:txBody>
+          <a:bodyPr wrap="none" rtlCol="0">
+            <a:spAutoFit/>
+          </a:bodyPr>
+          <a:lstStyle/>
+          <a:p>
+            <a:r>
+              <a:rPr lang="en-US" sz="1600" dirty="0">
+                <a:solidFill>
+                  <a:srgbClr val="FCCA3A"/>
+                </a:solidFill>
+                <a:latin typeface="Inter Medium" panose="02000503000000020004" pitchFamily="2" charset="0"/>
+                <a:ea typeface="Inter Medium" panose="02000503000000020004" pitchFamily="2" charset="0"/>
+              </a:rPr>
+              <a:t>Dave Hearne</a:t>
+            </a:r>
+          </a:p>
+          <a:p>
+            <a:r>
+              <a:rPr lang="en-US" sz="1600" dirty="0" err="1">
+                <a:solidFill>
+                  <a:srgbClr val="FCCA3A"/>
+                </a:solidFill>
+                <a:latin typeface="Inter Medium" panose="02000503000000020004" pitchFamily="2" charset="0"/>
+                <a:ea typeface="Inter Medium" panose="02000503000000020004" pitchFamily="2" charset="0"/>
+              </a:rPr>
+              <a:t>dave.hearne@wit.ie</a:t>
+            </a:r>
+            <a:endParaRPr lang="en-US" sz="1600" dirty="0">
+              <a:solidFill>
+                <a:srgbClr val="FCCA3A"/>
+              </a:solidFill>
+              <a:latin typeface="Inter Medium" panose="02000503000000020004" pitchFamily="2" charset="0"/>
+              <a:ea typeface="Inter Medium" panose="02000503000000020004" pitchFamily="2" charset="0"/>
+            </a:endParaRPr>
+          </a:p>
+        </p:txBody>
+      </p:sp>
+      <p:pic>
+        <p:nvPicPr>
+          <p:cNvPr id="11" name="Graphic 10">
+            <a:extLst>
+              <a:ext uri="{FF2B5EF4-FFF2-40B4-BE49-F238E27FC236}">
+                <a16:creationId xmlns:a16="http://schemas.microsoft.com/office/drawing/2014/main" id="{3F0CECAA-3297-C82A-3667-A24949AD7C3F}"/>
+              </a:ext>
+            </a:extLst>
+          </p:cNvPr>
+          <p:cNvPicPr>
+            <a:picLocks noChangeAspect="1"/>
+          </p:cNvPicPr>
+          <p:nvPr/>
+        </p:nvPicPr>
+        <p:blipFill>
+          <a:blip>
+            <a:extLst>
+              <a:ext uri="{96DAC541-7B7A-43D3-8B79-37D633B846F1}">
+                <asvg:svgBlip xmlns:asvg="http://schemas.microsoft.com/office/drawing/2016/SVG/main" r:embed="rId3"/>
+              </a:ext>
+            </a:extLst>
+          </a:blip>
+          <a:stretch>
+            <a:fillRect/>
+          </a:stretch>
+        </p:blipFill>
+        <p:spPr>
+          <a:xfrm>
+            <a:off x="9203245" y="6176176"/>
+            <a:ext cx="1120090" cy="603766"/>
+          </a:xfrm>
+          <a:prstGeom prst="rect">
+            <a:avLst/>
+          </a:prstGeom>
+        </p:spPr>
+      </p:pic>
+      <p:sp>
+        <p:nvSpPr>
+          <p:cNvPr id="12" name="Rectangle 11">
+            <a:extLst>
+              <a:ext uri="{FF2B5EF4-FFF2-40B4-BE49-F238E27FC236}">
+                <a16:creationId xmlns:a16="http://schemas.microsoft.com/office/drawing/2014/main" id="{D9A050F7-58B3-A218-C3E1-A61197A075C9}"/>
+              </a:ext>
+            </a:extLst>
+          </p:cNvPr>
+          <p:cNvSpPr/>
+          <p:nvPr userDrawn="1"/>
+        </p:nvSpPr>
+        <p:spPr>
+          <a:xfrm>
+            <a:off x="-440871" y="6104965"/>
+            <a:ext cx="13062857" cy="885799"/>
+          </a:xfrm>
+          <a:prstGeom prst="rect">
+            <a:avLst/>
+          </a:prstGeom>
+          <a:solidFill>
+            <a:srgbClr val="435765"/>
+          </a:solidFill>
+        </p:spPr>
+        <p:style>
+          <a:lnRef idx="2">
+            <a:schemeClr val="accent1">
+              <a:shade val="50000"/>
+            </a:schemeClr>
+          </a:lnRef>
+          <a:fillRef idx="1">
+            <a:schemeClr val="accent1"/>
+          </a:fillRef>
+          <a:effectRef idx="0">
+            <a:schemeClr val="accent1"/>
+          </a:effectRef>
+          <a:fontRef idx="minor">
+            <a:schemeClr val="lt1"/>
+          </a:fontRef>
+        </p:style>
+        <p:txBody>
+          <a:bodyPr rtlCol="0" anchor="ctr"/>
+          <a:lstStyle/>
+          <a:p>
+            <a:pPr algn="ctr"/>
+            <a:endParaRPr lang="en-US"/>
+          </a:p>
+        </p:txBody>
+      </p:sp>
+      <p:pic>
+        <p:nvPicPr>
+          <p:cNvPr id="13" name="Picture 12" descr="Text&#10;&#10;Description automatically generated">
+            <a:extLst>
+              <a:ext uri="{FF2B5EF4-FFF2-40B4-BE49-F238E27FC236}">
+                <a16:creationId xmlns:a16="http://schemas.microsoft.com/office/drawing/2014/main" id="{E918BABC-B69C-8F80-D588-7EBC4684E736}"/>
               </a:ext>
             </a:extLst>
           </p:cNvPr>
@@ -6494,10 +9315,10 @@
       </p:pic>
       <p:sp>
         <p:nvSpPr>
-          <p:cNvPr id="10" name="TextBox 9">
+          <p:cNvPr id="14" name="TextBox 13">
             <a:extLst>
               <a:ext uri="{FF2B5EF4-FFF2-40B4-BE49-F238E27FC236}">
-                <a16:creationId xmlns:a16="http://schemas.microsoft.com/office/drawing/2014/main" id="{F7BDD665-175E-EAEB-6E64-4430067EFD0F}"/>
+                <a16:creationId xmlns:a16="http://schemas.microsoft.com/office/drawing/2014/main" id="{328A2082-EA1B-D014-1067-053DDF550437}"/>
               </a:ext>
             </a:extLst>
           </p:cNvPr>
@@ -6554,10 +9375,10 @@
       </p:sp>
       <p:pic>
         <p:nvPicPr>
-          <p:cNvPr id="11" name="Graphic 10">
+          <p:cNvPr id="15" name="Graphic 14">
             <a:extLst>
               <a:ext uri="{FF2B5EF4-FFF2-40B4-BE49-F238E27FC236}">
-                <a16:creationId xmlns:a16="http://schemas.microsoft.com/office/drawing/2014/main" id="{EBD0E256-8149-C647-97BF-0F74EF72C378}"/>
+                <a16:creationId xmlns:a16="http://schemas.microsoft.com/office/drawing/2014/main" id="{121F929F-FB0B-AE03-B238-186D36B028FE}"/>
               </a:ext>
             </a:extLst>
           </p:cNvPr>
@@ -6591,7 +9412,7 @@
     </p:spTree>
     <p:extLst>
       <p:ext uri="{BB962C8B-B14F-4D97-AF65-F5344CB8AC3E}">
-        <p14:creationId xmlns:p14="http://schemas.microsoft.com/office/powerpoint/2010/main" val="1791456694"/>
+        <p14:creationId xmlns:p14="http://schemas.microsoft.com/office/powerpoint/2010/main" val="3095634027"/>
       </p:ext>
     </p:extLst>
   </p:cSld>
@@ -6649,7 +9470,7 @@
               <a:rPr lang="en-GB"/>
               <a:t>Click to edit Master title style</a:t>
             </a:r>
-            <a:endParaRPr lang="en-IE"/>
+            <a:endParaRPr lang="en-US"/>
           </a:p>
         </p:txBody>
       </p:sp>
@@ -6714,7 +9535,7 @@
               <a:rPr lang="en-GB"/>
               <a:t>Click icon to add picture</a:t>
             </a:r>
-            <a:endParaRPr lang="en-IE"/>
+            <a:endParaRPr lang="en-US"/>
           </a:p>
         </p:txBody>
       </p:sp>
@@ -6801,7 +9622,7 @@
             <a:fld id="{1D8BD707-D9CF-40AE-B4C6-C98DA3205C09}" type="datetimeFigureOut">
               <a:rPr lang="en-US" smtClean="0"/>
               <a:pPr/>
-              <a:t>3/12/26</a:t>
+              <a:t>3/13/26</a:t>
             </a:fld>
             <a:endParaRPr lang="en-US"/>
           </a:p>
@@ -6850,12 +9671,12 @@
           <p:cNvPr id="8" name="Rectangle 7">
             <a:extLst>
               <a:ext uri="{FF2B5EF4-FFF2-40B4-BE49-F238E27FC236}">
-                <a16:creationId xmlns:a16="http://schemas.microsoft.com/office/drawing/2014/main" id="{E56206A1-BF55-8EB0-5D93-028BA5A07708}"/>
+                <a16:creationId xmlns:a16="http://schemas.microsoft.com/office/drawing/2014/main" id="{2F5E5528-DD2A-F645-2BDC-722E86C75CA9}"/>
               </a:ext>
             </a:extLst>
           </p:cNvPr>
           <p:cNvSpPr/>
-          <p:nvPr userDrawn="1"/>
+          <p:nvPr/>
         </p:nvSpPr>
         <p:spPr>
           <a:xfrm>
@@ -6899,7 +9720,182 @@
           <p:cNvPr id="9" name="Picture 8" descr="Text&#10;&#10;Description automatically generated">
             <a:extLst>
               <a:ext uri="{FF2B5EF4-FFF2-40B4-BE49-F238E27FC236}">
-                <a16:creationId xmlns:a16="http://schemas.microsoft.com/office/drawing/2014/main" id="{F1DCCA6B-D204-BD46-4FCB-7D4883503385}"/>
+                <a16:creationId xmlns:a16="http://schemas.microsoft.com/office/drawing/2014/main" id="{B7DC3E30-BC0D-887C-75BF-167E0C844351}"/>
+              </a:ext>
+            </a:extLst>
+          </p:cNvPr>
+          <p:cNvPicPr>
+            <a:picLocks noChangeAspect="1"/>
+          </p:cNvPicPr>
+          <p:nvPr/>
+        </p:nvPicPr>
+        <p:blipFill>
+          <a:blip r:embed="rId2"/>
+          <a:stretch>
+            <a:fillRect/>
+          </a:stretch>
+        </p:blipFill>
+        <p:spPr>
+          <a:xfrm>
+            <a:off x="10467415" y="6013271"/>
+            <a:ext cx="1743635" cy="977493"/>
+          </a:xfrm>
+          <a:prstGeom prst="rect">
+            <a:avLst/>
+          </a:prstGeom>
+        </p:spPr>
+      </p:pic>
+      <p:sp>
+        <p:nvSpPr>
+          <p:cNvPr id="10" name="TextBox 9">
+            <a:extLst>
+              <a:ext uri="{FF2B5EF4-FFF2-40B4-BE49-F238E27FC236}">
+                <a16:creationId xmlns:a16="http://schemas.microsoft.com/office/drawing/2014/main" id="{8B584527-7F6C-5E69-907E-267B01B901CE}"/>
+              </a:ext>
+            </a:extLst>
+          </p:cNvPr>
+          <p:cNvSpPr txBox="1"/>
+          <p:nvPr/>
+        </p:nvSpPr>
+        <p:spPr>
+          <a:xfrm>
+            <a:off x="259216" y="6209629"/>
+            <a:ext cx="2132315" cy="584775"/>
+          </a:xfrm>
+          <a:prstGeom prst="rect">
+            <a:avLst/>
+          </a:prstGeom>
+          <a:noFill/>
+        </p:spPr>
+        <p:txBody>
+          <a:bodyPr wrap="none" rtlCol="0">
+            <a:spAutoFit/>
+          </a:bodyPr>
+          <a:lstStyle/>
+          <a:p>
+            <a:r>
+              <a:rPr lang="en-US" sz="1600" dirty="0">
+                <a:solidFill>
+                  <a:srgbClr val="FCCA3A"/>
+                </a:solidFill>
+                <a:latin typeface="Inter Medium" panose="02000503000000020004" pitchFamily="2" charset="0"/>
+                <a:ea typeface="Inter Medium" panose="02000503000000020004" pitchFamily="2" charset="0"/>
+              </a:rPr>
+              <a:t>Dave Hearne</a:t>
+            </a:r>
+          </a:p>
+          <a:p>
+            <a:r>
+              <a:rPr lang="en-US" sz="1600" dirty="0" err="1">
+                <a:solidFill>
+                  <a:srgbClr val="FCCA3A"/>
+                </a:solidFill>
+                <a:latin typeface="Inter Medium" panose="02000503000000020004" pitchFamily="2" charset="0"/>
+                <a:ea typeface="Inter Medium" panose="02000503000000020004" pitchFamily="2" charset="0"/>
+              </a:rPr>
+              <a:t>dave.hearne@wit.ie</a:t>
+            </a:r>
+            <a:endParaRPr lang="en-US" sz="1600" dirty="0">
+              <a:solidFill>
+                <a:srgbClr val="FCCA3A"/>
+              </a:solidFill>
+              <a:latin typeface="Inter Medium" panose="02000503000000020004" pitchFamily="2" charset="0"/>
+              <a:ea typeface="Inter Medium" panose="02000503000000020004" pitchFamily="2" charset="0"/>
+            </a:endParaRPr>
+          </a:p>
+        </p:txBody>
+      </p:sp>
+      <p:pic>
+        <p:nvPicPr>
+          <p:cNvPr id="11" name="Graphic 10">
+            <a:extLst>
+              <a:ext uri="{FF2B5EF4-FFF2-40B4-BE49-F238E27FC236}">
+                <a16:creationId xmlns:a16="http://schemas.microsoft.com/office/drawing/2014/main" id="{07660EFC-9285-FE2E-133C-4C95F8B3E8F8}"/>
+              </a:ext>
+            </a:extLst>
+          </p:cNvPr>
+          <p:cNvPicPr>
+            <a:picLocks noChangeAspect="1"/>
+          </p:cNvPicPr>
+          <p:nvPr/>
+        </p:nvPicPr>
+        <p:blipFill>
+          <a:blip>
+            <a:extLst>
+              <a:ext uri="{96DAC541-7B7A-43D3-8B79-37D633B846F1}">
+                <asvg:svgBlip xmlns:asvg="http://schemas.microsoft.com/office/drawing/2016/SVG/main" r:embed="rId3"/>
+              </a:ext>
+            </a:extLst>
+          </a:blip>
+          <a:stretch>
+            <a:fillRect/>
+          </a:stretch>
+        </p:blipFill>
+        <p:spPr>
+          <a:xfrm>
+            <a:off x="9203245" y="6176176"/>
+            <a:ext cx="1120090" cy="603766"/>
+          </a:xfrm>
+          <a:prstGeom prst="rect">
+            <a:avLst/>
+          </a:prstGeom>
+        </p:spPr>
+      </p:pic>
+      <p:sp>
+        <p:nvSpPr>
+          <p:cNvPr id="12" name="Rectangle 11">
+            <a:extLst>
+              <a:ext uri="{FF2B5EF4-FFF2-40B4-BE49-F238E27FC236}">
+                <a16:creationId xmlns:a16="http://schemas.microsoft.com/office/drawing/2014/main" id="{C4E4659A-6561-5CE8-B0C8-CB9DC9F19816}"/>
+              </a:ext>
+            </a:extLst>
+          </p:cNvPr>
+          <p:cNvSpPr/>
+          <p:nvPr userDrawn="1"/>
+        </p:nvSpPr>
+        <p:spPr>
+          <a:xfrm>
+            <a:off x="-440871" y="6104965"/>
+            <a:ext cx="13062857" cy="885799"/>
+          </a:xfrm>
+          <a:prstGeom prst="rect">
+            <a:avLst/>
+          </a:prstGeom>
+          <a:solidFill>
+            <a:srgbClr val="435765"/>
+          </a:solidFill>
+        </p:spPr>
+        <p:style>
+          <a:lnRef idx="2">
+            <a:schemeClr val="accent1">
+              <a:shade val="50000"/>
+            </a:schemeClr>
+          </a:lnRef>
+          <a:fillRef idx="1">
+            <a:schemeClr val="accent1"/>
+          </a:fillRef>
+          <a:effectRef idx="0">
+            <a:schemeClr val="accent1"/>
+          </a:effectRef>
+          <a:fontRef idx="minor">
+            <a:schemeClr val="lt1"/>
+          </a:fontRef>
+        </p:style>
+        <p:txBody>
+          <a:bodyPr rtlCol="0" anchor="ctr"/>
+          <a:lstStyle/>
+          <a:p>
+            <a:pPr algn="ctr"/>
+            <a:endParaRPr lang="en-US"/>
+          </a:p>
+        </p:txBody>
+      </p:sp>
+      <p:pic>
+        <p:nvPicPr>
+          <p:cNvPr id="13" name="Picture 12" descr="Text&#10;&#10;Description automatically generated">
+            <a:extLst>
+              <a:ext uri="{FF2B5EF4-FFF2-40B4-BE49-F238E27FC236}">
+                <a16:creationId xmlns:a16="http://schemas.microsoft.com/office/drawing/2014/main" id="{D5C460B9-D1B9-B034-B492-218783EFAFC1}"/>
               </a:ext>
             </a:extLst>
           </p:cNvPr>
@@ -6926,10 +9922,10 @@
       </p:pic>
       <p:sp>
         <p:nvSpPr>
-          <p:cNvPr id="10" name="TextBox 9">
+          <p:cNvPr id="14" name="TextBox 13">
             <a:extLst>
               <a:ext uri="{FF2B5EF4-FFF2-40B4-BE49-F238E27FC236}">
-                <a16:creationId xmlns:a16="http://schemas.microsoft.com/office/drawing/2014/main" id="{37278D8C-3BE7-512E-E379-E864140DA06B}"/>
+                <a16:creationId xmlns:a16="http://schemas.microsoft.com/office/drawing/2014/main" id="{9A1C95BB-1A4E-9C12-B0D2-D37D7ED6C0EF}"/>
               </a:ext>
             </a:extLst>
           </p:cNvPr>
@@ -6986,10 +9982,10 @@
       </p:sp>
       <p:pic>
         <p:nvPicPr>
-          <p:cNvPr id="11" name="Graphic 10">
+          <p:cNvPr id="15" name="Graphic 14">
             <a:extLst>
               <a:ext uri="{FF2B5EF4-FFF2-40B4-BE49-F238E27FC236}">
-                <a16:creationId xmlns:a16="http://schemas.microsoft.com/office/drawing/2014/main" id="{0ADE644D-653A-CB78-2F67-D13C281E1426}"/>
+                <a16:creationId xmlns:a16="http://schemas.microsoft.com/office/drawing/2014/main" id="{91BAF6A4-0958-8FDD-FC30-36FDB1BA03EF}"/>
               </a:ext>
             </a:extLst>
           </p:cNvPr>
@@ -7023,7 +10019,7 @@
     </p:spTree>
     <p:extLst>
       <p:ext uri="{BB962C8B-B14F-4D97-AF65-F5344CB8AC3E}">
-        <p14:creationId xmlns:p14="http://schemas.microsoft.com/office/powerpoint/2010/main" val="2037426617"/>
+        <p14:creationId xmlns:p14="http://schemas.microsoft.com/office/powerpoint/2010/main" val="412493838"/>
       </p:ext>
     </p:extLst>
   </p:cSld>
@@ -7087,7 +10083,7 @@
               <a:rPr lang="en-GB"/>
               <a:t>Click to edit Master title style</a:t>
             </a:r>
-            <a:endParaRPr lang="en-IE"/>
+            <a:endParaRPr lang="en-US"/>
           </a:p>
         </p:txBody>
       </p:sp>
@@ -7149,7 +10145,7 @@
               <a:rPr lang="en-GB"/>
               <a:t>Fifth level</a:t>
             </a:r>
-            <a:endParaRPr lang="en-IE"/>
+            <a:endParaRPr lang="en-US"/>
           </a:p>
         </p:txBody>
       </p:sp>
@@ -7189,7 +10185,7 @@
             <a:fld id="{1D8BD707-D9CF-40AE-B4C6-C98DA3205C09}" type="datetimeFigureOut">
               <a:rPr lang="en-US" smtClean="0"/>
               <a:pPr/>
-              <a:t>3/12/26</a:t>
+              <a:t>3/13/26</a:t>
             </a:fld>
             <a:endParaRPr lang="en-US"/>
           </a:p>
@@ -7279,7 +10275,37 @@
           <p:cNvPr id="7" name="Picture 6" descr="Text&#10;&#10;Description automatically generated">
             <a:extLst>
               <a:ext uri="{FF2B5EF4-FFF2-40B4-BE49-F238E27FC236}">
-                <a16:creationId xmlns:a16="http://schemas.microsoft.com/office/drawing/2014/main" id="{E4E7A57C-D140-9485-AA6E-7E6603AA4931}"/>
+                <a16:creationId xmlns:a16="http://schemas.microsoft.com/office/drawing/2014/main" id="{4058DA34-23F6-495F-530B-6D0E9FD24FAB}"/>
+              </a:ext>
+            </a:extLst>
+          </p:cNvPr>
+          <p:cNvPicPr>
+            <a:picLocks noChangeAspect="1"/>
+          </p:cNvPicPr>
+          <p:nvPr/>
+        </p:nvPicPr>
+        <p:blipFill>
+          <a:blip r:embed="rId18"/>
+          <a:stretch>
+            <a:fillRect/>
+          </a:stretch>
+        </p:blipFill>
+        <p:spPr>
+          <a:xfrm>
+            <a:off x="10467415" y="6013271"/>
+            <a:ext cx="1743635" cy="977493"/>
+          </a:xfrm>
+          <a:prstGeom prst="rect">
+            <a:avLst/>
+          </a:prstGeom>
+        </p:spPr>
+      </p:pic>
+      <p:pic>
+        <p:nvPicPr>
+          <p:cNvPr id="8" name="Picture 7" descr="Text&#10;&#10;Description automatically generated">
+            <a:extLst>
+              <a:ext uri="{FF2B5EF4-FFF2-40B4-BE49-F238E27FC236}">
+                <a16:creationId xmlns:a16="http://schemas.microsoft.com/office/drawing/2014/main" id="{99A80BAB-EB76-CBF2-A90D-51593E3B663B}"/>
               </a:ext>
             </a:extLst>
           </p:cNvPr>
@@ -7289,7 +10315,7 @@
           <p:nvPr userDrawn="1"/>
         </p:nvPicPr>
         <p:blipFill>
-          <a:blip r:embed="rId15"/>
+          <a:blip r:embed="rId18"/>
           <a:stretch>
             <a:fillRect/>
           </a:stretch>
@@ -7307,25 +10333,28 @@
     </p:spTree>
     <p:extLst>
       <p:ext uri="{BB962C8B-B14F-4D97-AF65-F5344CB8AC3E}">
-        <p14:creationId xmlns:p14="http://schemas.microsoft.com/office/powerpoint/2010/main" val="864418588"/>
+        <p14:creationId xmlns:p14="http://schemas.microsoft.com/office/powerpoint/2010/main" val="498756391"/>
       </p:ext>
     </p:extLst>
   </p:cSld>
   <p:clrMap bg1="lt1" tx1="dk1" bg2="lt2" tx2="dk2" accent1="accent1" accent2="accent2" accent3="accent3" accent4="accent4" accent5="accent5" accent6="accent6" hlink="hlink" folHlink="folHlink"/>
   <p:sldLayoutIdLst>
-    <p:sldLayoutId id="2147483662" r:id="rId1"/>
-    <p:sldLayoutId id="2147483663" r:id="rId2"/>
-    <p:sldLayoutId id="2147483664" r:id="rId3"/>
-    <p:sldLayoutId id="2147483665" r:id="rId4"/>
-    <p:sldLayoutId id="2147483666" r:id="rId5"/>
-    <p:sldLayoutId id="2147483667" r:id="rId6"/>
-    <p:sldLayoutId id="2147483668" r:id="rId7"/>
-    <p:sldLayoutId id="2147483669" r:id="rId8"/>
-    <p:sldLayoutId id="2147483670" r:id="rId9"/>
-    <p:sldLayoutId id="2147483671" r:id="rId10"/>
-    <p:sldLayoutId id="2147483672" r:id="rId11"/>
-    <p:sldLayoutId id="2147483673" r:id="rId12"/>
-    <p:sldLayoutId id="2147483674" r:id="rId13"/>
+    <p:sldLayoutId id="2147483676" r:id="rId1"/>
+    <p:sldLayoutId id="2147483677" r:id="rId2"/>
+    <p:sldLayoutId id="2147483678" r:id="rId3"/>
+    <p:sldLayoutId id="2147483679" r:id="rId4"/>
+    <p:sldLayoutId id="2147483680" r:id="rId5"/>
+    <p:sldLayoutId id="2147483681" r:id="rId6"/>
+    <p:sldLayoutId id="2147483682" r:id="rId7"/>
+    <p:sldLayoutId id="2147483683" r:id="rId8"/>
+    <p:sldLayoutId id="2147483684" r:id="rId9"/>
+    <p:sldLayoutId id="2147483685" r:id="rId10"/>
+    <p:sldLayoutId id="2147483686" r:id="rId11"/>
+    <p:sldLayoutId id="2147483687" r:id="rId12"/>
+    <p:sldLayoutId id="2147483688" r:id="rId13"/>
+    <p:sldLayoutId id="2147483689" r:id="rId14"/>
+    <p:sldLayoutId id="2147483673" r:id="rId15"/>
+    <p:sldLayoutId id="2147483674" r:id="rId16"/>
   </p:sldLayoutIdLst>
   <p:transition spd="slow">
     <p:push dir="u"/>
@@ -7353,7 +10382,7 @@
         <a:spcBef>
           <a:spcPct val="20000"/>
         </a:spcBef>
-        <a:buFont typeface="Arial" panose="020B0604020202020204" pitchFamily="34" charset="0"/>
+        <a:buFont typeface="Arial" pitchFamily="34" charset="0"/>
         <a:buChar char="•"/>
         <a:defRPr sz="3200" kern="1200">
           <a:solidFill>
@@ -7368,7 +10397,7 @@
         <a:spcBef>
           <a:spcPct val="20000"/>
         </a:spcBef>
-        <a:buFont typeface="Arial" panose="020B0604020202020204" pitchFamily="34" charset="0"/>
+        <a:buFont typeface="Arial" pitchFamily="34" charset="0"/>
         <a:buChar char="–"/>
         <a:defRPr sz="2800" kern="1200">
           <a:solidFill>
@@ -7383,7 +10412,7 @@
         <a:spcBef>
           <a:spcPct val="20000"/>
         </a:spcBef>
-        <a:buFont typeface="Arial" panose="020B0604020202020204" pitchFamily="34" charset="0"/>
+        <a:buFont typeface="Arial" pitchFamily="34" charset="0"/>
         <a:buChar char="•"/>
         <a:defRPr sz="2400" kern="1200">
           <a:solidFill>
@@ -7398,7 +10427,7 @@
         <a:spcBef>
           <a:spcPct val="20000"/>
         </a:spcBef>
-        <a:buFont typeface="Arial" panose="020B0604020202020204" pitchFamily="34" charset="0"/>
+        <a:buFont typeface="Arial" pitchFamily="34" charset="0"/>
         <a:buChar char="–"/>
         <a:defRPr sz="2000" kern="1200">
           <a:solidFill>
@@ -7413,7 +10442,7 @@
         <a:spcBef>
           <a:spcPct val="20000"/>
         </a:spcBef>
-        <a:buFont typeface="Arial" panose="020B0604020202020204" pitchFamily="34" charset="0"/>
+        <a:buFont typeface="Arial" pitchFamily="34" charset="0"/>
         <a:buChar char="»"/>
         <a:defRPr sz="2000" kern="1200">
           <a:solidFill>
@@ -7428,7 +10457,7 @@
         <a:spcBef>
           <a:spcPct val="20000"/>
         </a:spcBef>
-        <a:buFont typeface="Arial" panose="020B0604020202020204" pitchFamily="34" charset="0"/>
+        <a:buFont typeface="Arial" pitchFamily="34" charset="0"/>
         <a:buChar char="•"/>
         <a:defRPr sz="2000" kern="1200">
           <a:solidFill>
@@ -7443,7 +10472,7 @@
         <a:spcBef>
           <a:spcPct val="20000"/>
         </a:spcBef>
-        <a:buFont typeface="Arial" panose="020B0604020202020204" pitchFamily="34" charset="0"/>
+        <a:buFont typeface="Arial" pitchFamily="34" charset="0"/>
         <a:buChar char="•"/>
         <a:defRPr sz="2000" kern="1200">
           <a:solidFill>
@@ -7458,7 +10487,7 @@
         <a:spcBef>
           <a:spcPct val="20000"/>
         </a:spcBef>
-        <a:buFont typeface="Arial" panose="020B0604020202020204" pitchFamily="34" charset="0"/>
+        <a:buFont typeface="Arial" pitchFamily="34" charset="0"/>
         <a:buChar char="•"/>
         <a:defRPr sz="2000" kern="1200">
           <a:solidFill>
@@ -7473,7 +10502,7 @@
         <a:spcBef>
           <a:spcPct val="20000"/>
         </a:spcBef>
-        <a:buFont typeface="Arial" panose="020B0604020202020204" pitchFamily="34" charset="0"/>
+        <a:buFont typeface="Arial" pitchFamily="34" charset="0"/>
         <a:buChar char="•"/>
         <a:defRPr sz="2000" kern="1200">
           <a:solidFill>
@@ -7661,7 +10690,7 @@
                 </a:solidFill>
                 <a:latin typeface="DM Sans" pitchFamily="2" charset="77"/>
               </a:rPr>
-              <a:t>Programming Fundamentals</a:t>
+              <a:t>Inheritance </a:t>
             </a:r>
           </a:p>
         </p:txBody>
@@ -7682,14 +10711,19 @@
             <p:ph type="subTitle" idx="1"/>
           </p:nvPr>
         </p:nvSpPr>
-        <p:spPr/>
+        <p:spPr>
+          <a:xfrm>
+            <a:off x="1878764" y="3429000"/>
+            <a:ext cx="8534400" cy="1752600"/>
+          </a:xfrm>
+        </p:spPr>
         <p:txBody>
           <a:bodyPr/>
           <a:lstStyle/>
           <a:p>
             <a:r>
               <a:rPr lang="en-IE" sz="2400" dirty="0"/>
-              <a:t>Inheritance: Sub Classes</a:t>
+              <a:t>Introduction</a:t>
             </a:r>
           </a:p>
         </p:txBody>
@@ -7726,10 +10760,246 @@
       </p:pic>
       <p:sp>
         <p:nvSpPr>
-          <p:cNvPr id="4" name="TextBox 3">
+          <p:cNvPr id="6" name="Subtitle 2">
             <a:extLst>
               <a:ext uri="{FF2B5EF4-FFF2-40B4-BE49-F238E27FC236}">
-                <a16:creationId xmlns:a16="http://schemas.microsoft.com/office/drawing/2014/main" id="{BE2C7499-CC2E-E18D-EDDF-B6BB380CF21C}"/>
+                <a16:creationId xmlns:a16="http://schemas.microsoft.com/office/drawing/2014/main" id="{214B2387-07C1-6E9B-67C0-0AA76030E49F}"/>
+              </a:ext>
+            </a:extLst>
+          </p:cNvPr>
+          <p:cNvSpPr txBox="1">
+            <a:spLocks/>
+          </p:cNvSpPr>
+          <p:nvPr/>
+        </p:nvSpPr>
+        <p:spPr>
+          <a:xfrm>
+            <a:off x="2571569" y="4702355"/>
+            <a:ext cx="1866900" cy="1066800"/>
+          </a:xfrm>
+          <a:prstGeom prst="rect">
+            <a:avLst/>
+          </a:prstGeom>
+        </p:spPr>
+        <p:txBody>
+          <a:bodyPr vert="horz" lIns="91440" tIns="45720" rIns="91440" bIns="45720" rtlCol="0">
+            <a:normAutofit/>
+          </a:bodyPr>
+          <a:lstStyle>
+            <a:lvl1pPr marL="0" indent="0" algn="ctr" defTabSz="914400" rtl="0" eaLnBrk="1" latinLnBrk="0" hangingPunct="1">
+              <a:lnSpc>
+                <a:spcPct val="150000"/>
+              </a:lnSpc>
+              <a:spcBef>
+                <a:spcPts val="1000"/>
+              </a:spcBef>
+              <a:buClr>
+                <a:srgbClr val="435765"/>
+              </a:buClr>
+              <a:buFont typeface="Arial" panose="020B0604020202020204" pitchFamily="34" charset="0"/>
+              <a:buNone/>
+              <a:defRPr sz="2400" kern="1200">
+                <a:solidFill>
+                  <a:srgbClr val="435765"/>
+                </a:solidFill>
+                <a:latin typeface="Inter" panose="02000503000000020004" pitchFamily="2" charset="0"/>
+                <a:ea typeface="Inter" panose="02000503000000020004" pitchFamily="2" charset="0"/>
+                <a:cs typeface="+mn-cs"/>
+              </a:defRPr>
+            </a:lvl1pPr>
+            <a:lvl2pPr marL="457200" indent="0" algn="ctr" defTabSz="914400" rtl="0" eaLnBrk="1" latinLnBrk="0" hangingPunct="1">
+              <a:lnSpc>
+                <a:spcPct val="150000"/>
+              </a:lnSpc>
+              <a:spcBef>
+                <a:spcPts val="500"/>
+              </a:spcBef>
+              <a:buClr>
+                <a:srgbClr val="435765"/>
+              </a:buClr>
+              <a:buFont typeface="Arial" panose="020B0604020202020204" pitchFamily="34" charset="0"/>
+              <a:buNone/>
+              <a:defRPr sz="2000" kern="1200">
+                <a:solidFill>
+                  <a:srgbClr val="435765"/>
+                </a:solidFill>
+                <a:latin typeface="Inter" panose="02000503000000020004" pitchFamily="2" charset="0"/>
+                <a:ea typeface="Inter" panose="02000503000000020004" pitchFamily="2" charset="0"/>
+                <a:cs typeface="+mn-cs"/>
+              </a:defRPr>
+            </a:lvl2pPr>
+            <a:lvl3pPr marL="914400" indent="0" algn="ctr" defTabSz="914400" rtl="0" eaLnBrk="1" latinLnBrk="0" hangingPunct="1">
+              <a:lnSpc>
+                <a:spcPct val="150000"/>
+              </a:lnSpc>
+              <a:spcBef>
+                <a:spcPts val="500"/>
+              </a:spcBef>
+              <a:buClr>
+                <a:srgbClr val="435765"/>
+              </a:buClr>
+              <a:buFont typeface="Arial" panose="020B0604020202020204" pitchFamily="34" charset="0"/>
+              <a:buNone/>
+              <a:defRPr sz="1800" kern="1200">
+                <a:solidFill>
+                  <a:srgbClr val="435765"/>
+                </a:solidFill>
+                <a:latin typeface="Inter" panose="02000503000000020004" pitchFamily="2" charset="0"/>
+                <a:ea typeface="Inter" panose="02000503000000020004" pitchFamily="2" charset="0"/>
+                <a:cs typeface="+mn-cs"/>
+              </a:defRPr>
+            </a:lvl3pPr>
+            <a:lvl4pPr marL="1371600" indent="0" algn="ctr" defTabSz="914400" rtl="0" eaLnBrk="1" latinLnBrk="0" hangingPunct="1">
+              <a:lnSpc>
+                <a:spcPct val="150000"/>
+              </a:lnSpc>
+              <a:spcBef>
+                <a:spcPts val="500"/>
+              </a:spcBef>
+              <a:buClr>
+                <a:srgbClr val="435765"/>
+              </a:buClr>
+              <a:buFont typeface="Arial" panose="020B0604020202020204" pitchFamily="34" charset="0"/>
+              <a:buNone/>
+              <a:defRPr sz="1600" kern="1200">
+                <a:solidFill>
+                  <a:srgbClr val="435765"/>
+                </a:solidFill>
+                <a:latin typeface="Inter" panose="02000503000000020004" pitchFamily="2" charset="0"/>
+                <a:ea typeface="Inter" panose="02000503000000020004" pitchFamily="2" charset="0"/>
+                <a:cs typeface="+mn-cs"/>
+              </a:defRPr>
+            </a:lvl4pPr>
+            <a:lvl5pPr marL="1828800" indent="0" algn="ctr" defTabSz="914400" rtl="0" eaLnBrk="1" latinLnBrk="0" hangingPunct="1">
+              <a:lnSpc>
+                <a:spcPct val="150000"/>
+              </a:lnSpc>
+              <a:spcBef>
+                <a:spcPts val="500"/>
+              </a:spcBef>
+              <a:buClr>
+                <a:srgbClr val="435765"/>
+              </a:buClr>
+              <a:buFont typeface="Arial" panose="020B0604020202020204" pitchFamily="34" charset="0"/>
+              <a:buNone/>
+              <a:defRPr sz="1600" kern="1200">
+                <a:solidFill>
+                  <a:srgbClr val="435765"/>
+                </a:solidFill>
+                <a:latin typeface="Inter" panose="02000503000000020004" pitchFamily="2" charset="0"/>
+                <a:ea typeface="Inter" panose="02000503000000020004" pitchFamily="2" charset="0"/>
+                <a:cs typeface="+mn-cs"/>
+              </a:defRPr>
+            </a:lvl5pPr>
+            <a:lvl6pPr marL="2286000" indent="0" algn="ctr" defTabSz="914400" rtl="0" eaLnBrk="1" latinLnBrk="0" hangingPunct="1">
+              <a:lnSpc>
+                <a:spcPct val="90000"/>
+              </a:lnSpc>
+              <a:spcBef>
+                <a:spcPts val="500"/>
+              </a:spcBef>
+              <a:buFont typeface="Arial" panose="020B0604020202020204" pitchFamily="34" charset="0"/>
+              <a:buNone/>
+              <a:defRPr sz="1600" kern="1200">
+                <a:solidFill>
+                  <a:schemeClr val="tx1"/>
+                </a:solidFill>
+                <a:latin typeface="+mn-lt"/>
+                <a:ea typeface="+mn-ea"/>
+                <a:cs typeface="+mn-cs"/>
+              </a:defRPr>
+            </a:lvl6pPr>
+            <a:lvl7pPr marL="2743200" indent="0" algn="ctr" defTabSz="914400" rtl="0" eaLnBrk="1" latinLnBrk="0" hangingPunct="1">
+              <a:lnSpc>
+                <a:spcPct val="90000"/>
+              </a:lnSpc>
+              <a:spcBef>
+                <a:spcPts val="500"/>
+              </a:spcBef>
+              <a:buFont typeface="Arial" panose="020B0604020202020204" pitchFamily="34" charset="0"/>
+              <a:buNone/>
+              <a:defRPr sz="1600" kern="1200">
+                <a:solidFill>
+                  <a:schemeClr val="tx1"/>
+                </a:solidFill>
+                <a:latin typeface="+mn-lt"/>
+                <a:ea typeface="+mn-ea"/>
+                <a:cs typeface="+mn-cs"/>
+              </a:defRPr>
+            </a:lvl7pPr>
+            <a:lvl8pPr marL="3200400" indent="0" algn="ctr" defTabSz="914400" rtl="0" eaLnBrk="1" latinLnBrk="0" hangingPunct="1">
+              <a:lnSpc>
+                <a:spcPct val="90000"/>
+              </a:lnSpc>
+              <a:spcBef>
+                <a:spcPts val="500"/>
+              </a:spcBef>
+              <a:buFont typeface="Arial" panose="020B0604020202020204" pitchFamily="34" charset="0"/>
+              <a:buNone/>
+              <a:defRPr sz="1600" kern="1200">
+                <a:solidFill>
+                  <a:schemeClr val="tx1"/>
+                </a:solidFill>
+                <a:latin typeface="+mn-lt"/>
+                <a:ea typeface="+mn-ea"/>
+                <a:cs typeface="+mn-cs"/>
+              </a:defRPr>
+            </a:lvl8pPr>
+            <a:lvl9pPr marL="3657600" indent="0" algn="ctr" defTabSz="914400" rtl="0" eaLnBrk="1" latinLnBrk="0" hangingPunct="1">
+              <a:lnSpc>
+                <a:spcPct val="90000"/>
+              </a:lnSpc>
+              <a:spcBef>
+                <a:spcPts val="500"/>
+              </a:spcBef>
+              <a:buFont typeface="Arial" panose="020B0604020202020204" pitchFamily="34" charset="0"/>
+              <a:buNone/>
+              <a:defRPr sz="1600" kern="1200">
+                <a:solidFill>
+                  <a:schemeClr val="tx1"/>
+                </a:solidFill>
+                <a:latin typeface="+mn-lt"/>
+                <a:ea typeface="+mn-ea"/>
+                <a:cs typeface="+mn-cs"/>
+              </a:defRPr>
+            </a:lvl9pPr>
+          </a:lstStyle>
+          <a:p>
+            <a:pPr algn="r">
+              <a:lnSpc>
+                <a:spcPct val="110000"/>
+              </a:lnSpc>
+              <a:spcBef>
+                <a:spcPts val="0"/>
+              </a:spcBef>
+            </a:pPr>
+            <a:r>
+              <a:rPr lang="en-IE" dirty="0"/>
+              <a:t>Produced </a:t>
+            </a:r>
+          </a:p>
+          <a:p>
+            <a:pPr algn="r">
+              <a:lnSpc>
+                <a:spcPct val="110000"/>
+              </a:lnSpc>
+              <a:spcBef>
+                <a:spcPts val="0"/>
+              </a:spcBef>
+            </a:pPr>
+            <a:r>
+              <a:rPr lang="en-IE" dirty="0"/>
+              <a:t>by:</a:t>
+            </a:r>
+          </a:p>
+        </p:txBody>
+      </p:sp>
+      <p:sp>
+        <p:nvSpPr>
+          <p:cNvPr id="7" name="TextBox 6">
+            <a:extLst>
+              <a:ext uri="{FF2B5EF4-FFF2-40B4-BE49-F238E27FC236}">
+                <a16:creationId xmlns:a16="http://schemas.microsoft.com/office/drawing/2014/main" id="{5BFD1D16-FA13-ED18-7A5B-A5523B5E77BE}"/>
               </a:ext>
             </a:extLst>
           </p:cNvPr>
@@ -7738,8 +11008,8 @@
         </p:nvSpPr>
         <p:spPr>
           <a:xfrm>
-            <a:off x="159203" y="6247817"/>
-            <a:ext cx="10253961" cy="523220"/>
+            <a:off x="4993889" y="4354889"/>
+            <a:ext cx="3581400" cy="2308324"/>
           </a:xfrm>
           <a:prstGeom prst="rect">
             <a:avLst/>
@@ -7747,120 +11017,210 @@
           <a:noFill/>
         </p:spPr>
         <p:txBody>
-          <a:bodyPr wrap="none" rtlCol="0">
+          <a:bodyPr wrap="square" rtlCol="0">
             <a:spAutoFit/>
           </a:bodyPr>
-          <a:lstStyle/>
+          <a:lstStyle>
+            <a:defPPr>
+              <a:defRPr lang="en-US"/>
+            </a:defPPr>
+            <a:lvl1pPr marL="0" algn="l" defTabSz="914400" rtl="0" eaLnBrk="1" latinLnBrk="0" hangingPunct="1">
+              <a:defRPr sz="1800" kern="1200">
+                <a:solidFill>
+                  <a:schemeClr val="tx1"/>
+                </a:solidFill>
+                <a:latin typeface="+mn-lt"/>
+                <a:ea typeface="+mn-ea"/>
+                <a:cs typeface="+mn-cs"/>
+              </a:defRPr>
+            </a:lvl1pPr>
+            <a:lvl2pPr marL="457200" algn="l" defTabSz="914400" rtl="0" eaLnBrk="1" latinLnBrk="0" hangingPunct="1">
+              <a:defRPr sz="1800" kern="1200">
+                <a:solidFill>
+                  <a:schemeClr val="tx1"/>
+                </a:solidFill>
+                <a:latin typeface="+mn-lt"/>
+                <a:ea typeface="+mn-ea"/>
+                <a:cs typeface="+mn-cs"/>
+              </a:defRPr>
+            </a:lvl2pPr>
+            <a:lvl3pPr marL="914400" algn="l" defTabSz="914400" rtl="0" eaLnBrk="1" latinLnBrk="0" hangingPunct="1">
+              <a:defRPr sz="1800" kern="1200">
+                <a:solidFill>
+                  <a:schemeClr val="tx1"/>
+                </a:solidFill>
+                <a:latin typeface="+mn-lt"/>
+                <a:ea typeface="+mn-ea"/>
+                <a:cs typeface="+mn-cs"/>
+              </a:defRPr>
+            </a:lvl3pPr>
+            <a:lvl4pPr marL="1371600" algn="l" defTabSz="914400" rtl="0" eaLnBrk="1" latinLnBrk="0" hangingPunct="1">
+              <a:defRPr sz="1800" kern="1200">
+                <a:solidFill>
+                  <a:schemeClr val="tx1"/>
+                </a:solidFill>
+                <a:latin typeface="+mn-lt"/>
+                <a:ea typeface="+mn-ea"/>
+                <a:cs typeface="+mn-cs"/>
+              </a:defRPr>
+            </a:lvl4pPr>
+            <a:lvl5pPr marL="1828800" algn="l" defTabSz="914400" rtl="0" eaLnBrk="1" latinLnBrk="0" hangingPunct="1">
+              <a:defRPr sz="1800" kern="1200">
+                <a:solidFill>
+                  <a:schemeClr val="tx1"/>
+                </a:solidFill>
+                <a:latin typeface="+mn-lt"/>
+                <a:ea typeface="+mn-ea"/>
+                <a:cs typeface="+mn-cs"/>
+              </a:defRPr>
+            </a:lvl5pPr>
+            <a:lvl6pPr marL="2286000" algn="l" defTabSz="914400" rtl="0" eaLnBrk="1" latinLnBrk="0" hangingPunct="1">
+              <a:defRPr sz="1800" kern="1200">
+                <a:solidFill>
+                  <a:schemeClr val="tx1"/>
+                </a:solidFill>
+                <a:latin typeface="+mn-lt"/>
+                <a:ea typeface="+mn-ea"/>
+                <a:cs typeface="+mn-cs"/>
+              </a:defRPr>
+            </a:lvl6pPr>
+            <a:lvl7pPr marL="2743200" algn="l" defTabSz="914400" rtl="0" eaLnBrk="1" latinLnBrk="0" hangingPunct="1">
+              <a:defRPr sz="1800" kern="1200">
+                <a:solidFill>
+                  <a:schemeClr val="tx1"/>
+                </a:solidFill>
+                <a:latin typeface="+mn-lt"/>
+                <a:ea typeface="+mn-ea"/>
+                <a:cs typeface="+mn-cs"/>
+              </a:defRPr>
+            </a:lvl7pPr>
+            <a:lvl8pPr marL="3200400" algn="l" defTabSz="914400" rtl="0" eaLnBrk="1" latinLnBrk="0" hangingPunct="1">
+              <a:defRPr sz="1800" kern="1200">
+                <a:solidFill>
+                  <a:schemeClr val="tx1"/>
+                </a:solidFill>
+                <a:latin typeface="+mn-lt"/>
+                <a:ea typeface="+mn-ea"/>
+                <a:cs typeface="+mn-cs"/>
+              </a:defRPr>
+            </a:lvl8pPr>
+            <a:lvl9pPr marL="3657600" algn="l" defTabSz="914400" rtl="0" eaLnBrk="1" latinLnBrk="0" hangingPunct="1">
+              <a:defRPr sz="1800" kern="1200">
+                <a:solidFill>
+                  <a:schemeClr val="tx1"/>
+                </a:solidFill>
+                <a:latin typeface="+mn-lt"/>
+                <a:ea typeface="+mn-ea"/>
+                <a:cs typeface="+mn-cs"/>
+              </a:defRPr>
+            </a:lvl9pPr>
+          </a:lstStyle>
           <a:p>
             <a:r>
-              <a:rPr lang="en-IE" sz="1400" b="1" dirty="0">
+              <a:rPr lang="en-IE" sz="2400" dirty="0">
+                <a:solidFill>
+                  <a:schemeClr val="tx1">
+                    <a:lumMod val="75000"/>
+                    <a:lumOff val="25000"/>
+                  </a:schemeClr>
+                </a:solidFill>
+              </a:rPr>
+              <a:t>Mr. Dave Hearne</a:t>
+            </a:r>
+          </a:p>
+          <a:p>
+            <a:r>
+              <a:rPr lang="en-IE" sz="2400" dirty="0">
+                <a:solidFill>
+                  <a:schemeClr val="tx1">
+                    <a:lumMod val="75000"/>
+                    <a:lumOff val="25000"/>
+                  </a:schemeClr>
+                </a:solidFill>
+              </a:rPr>
+              <a:t>Dr. Siobhán Drohan</a:t>
+            </a:r>
+          </a:p>
+          <a:p>
+            <a:r>
+              <a:rPr lang="en-IE" sz="2400" dirty="0">
                 <a:solidFill>
                   <a:srgbClr val="435765"/>
                 </a:solidFill>
                 <a:latin typeface="Inter" panose="02000503000000020004" pitchFamily="2" charset="0"/>
                 <a:ea typeface="Inter" panose="02000503000000020004" pitchFamily="2" charset="0"/>
               </a:rPr>
-              <a:t>Produced By: </a:t>
+              <a:t>Mr. Colm Dunphy</a:t>
             </a:r>
+            <a:endParaRPr lang="en-IE" sz="2400" dirty="0">
+              <a:solidFill>
+                <a:schemeClr val="tx1">
+                  <a:lumMod val="75000"/>
+                  <a:lumOff val="25000"/>
+                </a:schemeClr>
+              </a:solidFill>
+            </a:endParaRPr>
           </a:p>
           <a:p>
             <a:r>
-              <a:rPr lang="en-IE" sz="1400" dirty="0">
+              <a:rPr lang="en-IE" sz="2400" dirty="0">
                 <a:solidFill>
-                  <a:srgbClr val="435765"/>
+                  <a:schemeClr val="tx1">
+                    <a:lumMod val="75000"/>
+                    <a:lumOff val="25000"/>
+                  </a:schemeClr>
                 </a:solidFill>
-                <a:latin typeface="Inter" panose="02000503000000020004" pitchFamily="2" charset="0"/>
-                <a:ea typeface="Inter" panose="02000503000000020004" pitchFamily="2" charset="0"/>
               </a:rPr>
-              <a:t>Mr. Dave Hearne, </a:t>
+              <a:t>Ms. </a:t>
             </a:r>
             <a:r>
-              <a:rPr lang="en-IE" sz="1400" dirty="0" err="1">
+              <a:rPr lang="en-IE" sz="2400" dirty="0" err="1">
                 <a:solidFill>
-                  <a:srgbClr val="435765"/>
+                  <a:schemeClr val="tx1">
+                    <a:lumMod val="75000"/>
+                    <a:lumOff val="25000"/>
+                  </a:schemeClr>
                 </a:solidFill>
-                <a:latin typeface="Inter" panose="02000503000000020004" pitchFamily="2" charset="0"/>
-                <a:ea typeface="Inter" panose="02000503000000020004" pitchFamily="2" charset="0"/>
               </a:rPr>
-              <a:t>Dr.</a:t>
+              <a:t>Mairéad</a:t>
             </a:r>
             <a:r>
-              <a:rPr lang="en-IE" sz="1400" dirty="0">
+              <a:rPr lang="en-IE" sz="2400" dirty="0">
                 <a:solidFill>
-                  <a:srgbClr val="435765"/>
+                  <a:schemeClr val="tx1">
+                    <a:lumMod val="75000"/>
+                    <a:lumOff val="25000"/>
+                  </a:schemeClr>
                 </a:solidFill>
-                <a:latin typeface="Inter" panose="02000503000000020004" pitchFamily="2" charset="0"/>
-                <a:ea typeface="Inter" panose="02000503000000020004" pitchFamily="2" charset="0"/>
               </a:rPr>
-              <a:t> </a:t>
+              <a:t> Meagher</a:t>
             </a:r>
+          </a:p>
+          <a:p>
             <a:r>
-              <a:rPr lang="en-IE" sz="1400" dirty="0" err="1">
+              <a:rPr lang="en-IE" sz="2400" dirty="0">
                 <a:solidFill>
-                  <a:srgbClr val="435765"/>
+                  <a:schemeClr val="tx1">
+                    <a:lumMod val="75000"/>
+                    <a:lumOff val="25000"/>
+                  </a:schemeClr>
                 </a:solidFill>
-                <a:latin typeface="Inter" panose="02000503000000020004" pitchFamily="2" charset="0"/>
-                <a:ea typeface="Inter" panose="02000503000000020004" pitchFamily="2" charset="0"/>
               </a:rPr>
-              <a:t>Siobhán</a:t>
+              <a:t>Ms Siobhan Roche</a:t>
             </a:r>
+          </a:p>
+          <a:p>
             <a:r>
-              <a:rPr lang="en-IE" sz="1400" dirty="0">
+              <a:rPr lang="en-IE" sz="2400" dirty="0">
                 <a:solidFill>
-                  <a:srgbClr val="435765"/>
+                  <a:schemeClr val="tx1">
+                    <a:lumMod val="75000"/>
+                    <a:lumOff val="25000"/>
+                  </a:schemeClr>
                 </a:solidFill>
-                <a:latin typeface="Inter" panose="02000503000000020004" pitchFamily="2" charset="0"/>
-                <a:ea typeface="Inter" panose="02000503000000020004" pitchFamily="2" charset="0"/>
               </a:rPr>
-              <a:t> </a:t>
+              <a:t>Mr Pete Windle</a:t>
             </a:r>
-            <a:r>
-              <a:rPr lang="en-IE" sz="1400" dirty="0" err="1">
-                <a:solidFill>
-                  <a:srgbClr val="435765"/>
-                </a:solidFill>
-                <a:latin typeface="Inter" panose="02000503000000020004" pitchFamily="2" charset="0"/>
-                <a:ea typeface="Inter" panose="02000503000000020004" pitchFamily="2" charset="0"/>
-              </a:rPr>
-              <a:t>Drohan</a:t>
-            </a:r>
-            <a:r>
-              <a:rPr lang="en-IE" sz="1400" dirty="0">
-                <a:solidFill>
-                  <a:srgbClr val="435765"/>
-                </a:solidFill>
-                <a:latin typeface="Inter" panose="02000503000000020004" pitchFamily="2" charset="0"/>
-                <a:ea typeface="Inter" panose="02000503000000020004" pitchFamily="2" charset="0"/>
-              </a:rPr>
-              <a:t>, Mr. Colm Dunphy, Mr. Diarmuid O’Connor, </a:t>
-            </a:r>
-            <a:r>
-              <a:rPr lang="en-IE" sz="1400" dirty="0" err="1">
-                <a:solidFill>
-                  <a:srgbClr val="435765"/>
-                </a:solidFill>
-                <a:latin typeface="Inter" panose="02000503000000020004" pitchFamily="2" charset="0"/>
-                <a:ea typeface="Inter" panose="02000503000000020004" pitchFamily="2" charset="0"/>
-              </a:rPr>
-              <a:t>Dr.</a:t>
-            </a:r>
-            <a:r>
-              <a:rPr lang="en-IE" sz="1400" dirty="0">
-                <a:solidFill>
-                  <a:srgbClr val="435765"/>
-                </a:solidFill>
-                <a:latin typeface="Inter" panose="02000503000000020004" pitchFamily="2" charset="0"/>
-                <a:ea typeface="Inter" panose="02000503000000020004" pitchFamily="2" charset="0"/>
-              </a:rPr>
-              <a:t> Frank Walsh, Ms Mairead Meagher, Ms Siobhan Roche</a:t>
-            </a:r>
-            <a:endParaRPr lang="en-US" sz="1400" dirty="0">
-              <a:solidFill>
-                <a:srgbClr val="435765"/>
-              </a:solidFill>
-              <a:latin typeface="Inter" panose="02000503000000020004" pitchFamily="2" charset="0"/>
-              <a:ea typeface="Inter" panose="02000503000000020004" pitchFamily="2" charset="0"/>
-            </a:endParaRPr>
           </a:p>
         </p:txBody>
       </p:sp>
@@ -11929,8 +15289,8 @@
         </p:nvSpPr>
         <p:spPr>
           <a:xfrm>
-            <a:off x="963084" y="242864"/>
-            <a:ext cx="10363200" cy="1362075"/>
+            <a:off x="510679" y="262319"/>
+            <a:ext cx="11170641" cy="1362075"/>
           </a:xfrm>
         </p:spPr>
         <p:txBody>
@@ -11962,14 +15322,19 @@
             <p:ph type="body" idx="1"/>
           </p:nvPr>
         </p:nvSpPr>
-        <p:spPr/>
+        <p:spPr>
+          <a:xfrm>
+            <a:off x="1196548" y="5357813"/>
+            <a:ext cx="10363200" cy="1500187"/>
+          </a:xfrm>
+        </p:spPr>
         <p:txBody>
           <a:bodyPr>
             <a:normAutofit fontScale="25000" lnSpcReduction="20000"/>
           </a:bodyPr>
           <a:lstStyle/>
           <a:p>
-            <a:pPr marL="342900" marR="0" lvl="0" indent="-342900" algn="l" defTabSz="914400" rtl="0" eaLnBrk="1" fontAlgn="auto" latinLnBrk="0" hangingPunct="1">
+            <a:pPr marL="342900" marR="0" lvl="0" indent="-342900" fontAlgn="auto">
               <a:lnSpc>
                 <a:spcPct val="100000"/>
               </a:lnSpc>
@@ -11987,36 +15352,17 @@
               <a:defRPr/>
             </a:pPr>
             <a:r>
-              <a:rPr kumimoji="0" lang="en-GB" sz="3000" b="0" i="0" u="none" strike="noStrike" kern="1200" cap="none" spc="0" normalizeH="0" baseline="0" noProof="0" dirty="0">
-                <a:ln>
-                  <a:noFill/>
-                </a:ln>
+              <a:rPr lang="en-GB" sz="11200" dirty="0">
                 <a:solidFill>
                   <a:srgbClr val="435765"/>
                 </a:solidFill>
-                <a:effectLst/>
-                <a:uLnTx/>
-                <a:uFillTx/>
+                <a:latin typeface="Inter" panose="02000503000000020004" pitchFamily="2" charset="0"/>
               </a:rPr>
-              <a:t>define one </a:t>
+              <a:t>define one superclass</a:t>
             </a:r>
-            <a:r>
-              <a:rPr kumimoji="0" lang="en-GB" sz="3000" b="1" i="0" u="none" strike="noStrike" kern="1200" cap="none" spc="0" normalizeH="0" baseline="0" noProof="0" dirty="0">
-                <a:ln>
-                  <a:noFill/>
-                </a:ln>
-                <a:solidFill>
-                  <a:srgbClr val="435765"/>
-                </a:solidFill>
-                <a:effectLst/>
-                <a:uLnTx/>
-                <a:uFillTx/>
-              </a:rPr>
-              <a:t>superclass</a:t>
-            </a:r>
-          </a:p>
-          <a:p>
-            <a:pPr marL="742950" marR="0" lvl="1" indent="-285750" algn="l" defTabSz="914400" rtl="0" eaLnBrk="1" fontAlgn="auto" latinLnBrk="0" hangingPunct="1">
+          </a:p>
+          <a:p>
+            <a:pPr marL="742950" marR="0" lvl="1" indent="-285750" fontAlgn="auto">
               <a:lnSpc>
                 <a:spcPct val="100000"/>
               </a:lnSpc>
@@ -12034,49 +15380,31 @@
               <a:defRPr/>
             </a:pPr>
             <a:r>
-              <a:rPr kumimoji="0" lang="en-GB" sz="2600" b="1" i="0" u="none" strike="noStrike" kern="1200" cap="none" spc="0" normalizeH="0" baseline="0" noProof="0" dirty="0">
-                <a:ln>
-                  <a:noFill/>
-                </a:ln>
+              <a:rPr lang="en-GB" sz="11200" dirty="0">
                 <a:solidFill>
                   <a:srgbClr val="435765"/>
                 </a:solidFill>
-                <a:effectLst/>
-                <a:uLnTx/>
-                <a:uFillTx/>
-                <a:cs typeface="Courier New"/>
+                <a:latin typeface="Inter" panose="02000503000000020004" pitchFamily="2" charset="0"/>
               </a:rPr>
               <a:t>Post</a:t>
             </a:r>
             <a:br>
-              <a:rPr kumimoji="0" lang="en-GB" sz="2600" b="1" i="0" u="none" strike="noStrike" kern="1200" cap="none" spc="0" normalizeH="0" baseline="0" noProof="0" dirty="0">
-                <a:ln>
-                  <a:noFill/>
-                </a:ln>
+              <a:rPr lang="en-GB" sz="11200" dirty="0">
                 <a:solidFill>
                   <a:srgbClr val="435765"/>
                 </a:solidFill>
-                <a:effectLst/>
-                <a:uLnTx/>
-                <a:uFillTx/>
-                <a:cs typeface="Courier New"/>
+                <a:latin typeface="Inter" panose="02000503000000020004" pitchFamily="2" charset="0"/>
               </a:rPr>
             </a:br>
-            <a:endParaRPr kumimoji="0" lang="en-GB" sz="2600" b="1" i="0" u="none" strike="noStrike" kern="1200" cap="none" spc="0" normalizeH="0" baseline="0" noProof="0" dirty="0">
-              <a:ln>
-                <a:noFill/>
-              </a:ln>
+            <a:endParaRPr lang="en-GB" sz="11200" dirty="0">
               <a:solidFill>
                 <a:srgbClr val="435765"/>
               </a:solidFill>
-              <a:effectLst/>
-              <a:uLnTx/>
-              <a:uFillTx/>
-              <a:cs typeface="Courier New"/>
+              <a:latin typeface="Inter" panose="02000503000000020004" pitchFamily="2" charset="0"/>
             </a:endParaRPr>
           </a:p>
           <a:p>
-            <a:pPr marL="342900" marR="0" lvl="0" indent="-342900" algn="l" defTabSz="914400" rtl="0" eaLnBrk="1" fontAlgn="auto" latinLnBrk="0" hangingPunct="1">
+            <a:pPr marL="342900" marR="0" lvl="0" indent="-342900" fontAlgn="auto">
               <a:lnSpc>
                 <a:spcPct val="100000"/>
               </a:lnSpc>
@@ -12094,50 +15422,17 @@
               <a:defRPr/>
             </a:pPr>
             <a:r>
-              <a:rPr kumimoji="0" lang="en-GB" sz="3000" b="0" i="0" u="none" strike="noStrike" kern="1200" cap="none" spc="0" normalizeH="0" baseline="0" noProof="0" dirty="0">
-                <a:ln>
-                  <a:noFill/>
-                </a:ln>
+              <a:rPr lang="en-GB" sz="11200" dirty="0">
                 <a:solidFill>
                   <a:srgbClr val="435765"/>
                 </a:solidFill>
-                <a:effectLst/>
-                <a:uLnTx/>
-                <a:uFillTx/>
+                <a:latin typeface="Inter" panose="02000503000000020004" pitchFamily="2" charset="0"/>
               </a:rPr>
-              <a:t>define </a:t>
+              <a:t>define subclasses for </a:t>
             </a:r>
-            <a:r>
-              <a:rPr kumimoji="0" lang="en-GB" sz="3000" b="1" i="0" u="none" strike="noStrike" kern="1200" cap="none" spc="0" normalizeH="0" baseline="0" noProof="0" dirty="0">
-                <a:ln>
-                  <a:noFill/>
-                </a:ln>
-                <a:solidFill>
-                  <a:srgbClr val="435765"/>
-                </a:solidFill>
-                <a:effectLst/>
-                <a:uLnTx/>
-                <a:uFillTx/>
-              </a:rPr>
-              <a:t>subclasses</a:t>
-            </a:r>
-            <a:r>
-              <a:rPr kumimoji="0" lang="en-GB" sz="3000" b="0" i="0" u="none" strike="noStrike" kern="1200" cap="none" spc="0" normalizeH="0" baseline="0" noProof="0" dirty="0">
-                <a:ln>
-                  <a:noFill/>
-                </a:ln>
-                <a:solidFill>
-                  <a:srgbClr val="435765"/>
-                </a:solidFill>
-                <a:effectLst/>
-                <a:uLnTx/>
-                <a:uFillTx/>
-              </a:rPr>
-              <a:t> for </a:t>
-            </a:r>
-          </a:p>
-          <a:p>
-            <a:pPr marL="742950" marR="0" lvl="1" indent="-285750" algn="l" defTabSz="914400" rtl="0" eaLnBrk="1" fontAlgn="auto" latinLnBrk="0" hangingPunct="1">
+          </a:p>
+          <a:p>
+            <a:pPr marL="742950" marR="0" lvl="1" indent="-285750" fontAlgn="auto">
               <a:lnSpc>
                 <a:spcPct val="100000"/>
               </a:lnSpc>
@@ -12155,43 +15450,26 @@
               <a:defRPr/>
             </a:pPr>
             <a:r>
-              <a:rPr kumimoji="0" lang="en-GB" sz="2600" b="1" i="0" u="none" strike="noStrike" kern="1200" cap="none" spc="0" normalizeH="0" baseline="0" noProof="0" dirty="0" err="1">
-                <a:ln>
-                  <a:noFill/>
-                </a:ln>
+              <a:rPr lang="en-GB" sz="11200" dirty="0" err="1">
                 <a:solidFill>
                   <a:srgbClr val="435765"/>
                 </a:solidFill>
-                <a:effectLst/>
-                <a:highlight>
-                  <a:srgbClr val="FCCA3A"/>
-                </a:highlight>
-                <a:uLnTx/>
-                <a:uFillTx/>
-                <a:cs typeface="Courier New"/>
+                <a:latin typeface="Inter" panose="02000503000000020004" pitchFamily="2" charset="0"/>
               </a:rPr>
               <a:t>MessagePost</a:t>
             </a:r>
             <a:r>
-              <a:rPr kumimoji="0" lang="en-GB" sz="2600" b="0" i="0" u="none" strike="noStrike" kern="1200" cap="none" spc="0" normalizeH="0" baseline="0" noProof="0" dirty="0">
-                <a:ln>
-                  <a:noFill/>
-                </a:ln>
+              <a:rPr lang="en-GB" sz="11200" dirty="0">
                 <a:solidFill>
                   <a:srgbClr val="435765"/>
                 </a:solidFill>
-                <a:effectLst/>
-                <a:highlight>
-                  <a:srgbClr val="FCCA3A"/>
-                </a:highlight>
-                <a:uLnTx/>
-                <a:uFillTx/>
+                <a:latin typeface="Inter" panose="02000503000000020004" pitchFamily="2" charset="0"/>
               </a:rPr>
               <a:t> </a:t>
             </a:r>
           </a:p>
           <a:p>
-            <a:pPr marL="742950" marR="0" lvl="1" indent="-285750" algn="l" defTabSz="914400" rtl="0" eaLnBrk="1" fontAlgn="auto" latinLnBrk="0" hangingPunct="1">
+            <a:pPr marL="742950" marR="0" lvl="1" indent="-285750" fontAlgn="auto">
               <a:lnSpc>
                 <a:spcPct val="100000"/>
               </a:lnSpc>
@@ -12209,52 +15487,31 @@
               <a:defRPr/>
             </a:pPr>
             <a:r>
-              <a:rPr kumimoji="0" lang="en-GB" sz="2600" b="1" i="0" u="none" strike="noStrike" kern="1200" cap="none" spc="0" normalizeH="0" baseline="0" noProof="0" dirty="0" err="1">
-                <a:ln>
-                  <a:noFill/>
-                </a:ln>
+              <a:rPr lang="en-GB" sz="11200" dirty="0" err="1">
                 <a:solidFill>
                   <a:srgbClr val="435765"/>
                 </a:solidFill>
-                <a:effectLst/>
-                <a:highlight>
-                  <a:srgbClr val="FCCA3A"/>
-                </a:highlight>
-                <a:uLnTx/>
-                <a:uFillTx/>
-                <a:cs typeface="Courier New"/>
+                <a:latin typeface="Inter" panose="02000503000000020004" pitchFamily="2" charset="0"/>
               </a:rPr>
               <a:t>PhotoPost</a:t>
             </a:r>
             <a:br>
-              <a:rPr kumimoji="0" lang="en-GB" sz="2600" b="1" i="0" u="none" strike="noStrike" kern="1200" cap="none" spc="0" normalizeH="0" baseline="0" noProof="0" dirty="0">
-                <a:ln>
-                  <a:noFill/>
-                </a:ln>
+              <a:rPr lang="en-GB" sz="11200" dirty="0">
                 <a:solidFill>
                   <a:srgbClr val="435765"/>
                 </a:solidFill>
-                <a:effectLst/>
-                <a:uLnTx/>
-                <a:uFillTx/>
-                <a:cs typeface="Courier New"/>
+                <a:latin typeface="Inter" panose="02000503000000020004" pitchFamily="2" charset="0"/>
               </a:rPr>
             </a:br>
-            <a:endParaRPr kumimoji="0" lang="en-GB" sz="2600" b="1" i="0" u="none" strike="noStrike" kern="1200" cap="none" spc="0" normalizeH="0" baseline="0" noProof="0" dirty="0">
-              <a:ln>
-                <a:noFill/>
-              </a:ln>
+            <a:endParaRPr lang="en-GB" sz="11200" dirty="0">
               <a:solidFill>
                 <a:srgbClr val="435765"/>
               </a:solidFill>
-              <a:effectLst/>
-              <a:uLnTx/>
-              <a:uFillTx/>
-              <a:cs typeface="Courier New"/>
+              <a:latin typeface="Inter" panose="02000503000000020004" pitchFamily="2" charset="0"/>
             </a:endParaRPr>
           </a:p>
           <a:p>
-            <a:pPr marL="342900" marR="0" lvl="0" indent="-342900" algn="l" defTabSz="914400" rtl="0" eaLnBrk="1" fontAlgn="auto" latinLnBrk="0" hangingPunct="1">
+            <a:pPr marL="342900" marR="0" lvl="0" indent="-342900" fontAlgn="auto">
               <a:lnSpc>
                 <a:spcPct val="100000"/>
               </a:lnSpc>
@@ -12272,50 +15529,17 @@
               <a:defRPr/>
             </a:pPr>
             <a:r>
-              <a:rPr kumimoji="0" lang="en-GB" sz="3000" b="0" i="0" u="none" strike="noStrike" kern="1200" cap="none" spc="0" normalizeH="0" baseline="0" noProof="0" dirty="0">
-                <a:ln>
-                  <a:noFill/>
-                </a:ln>
+              <a:rPr lang="en-GB" sz="11200" dirty="0">
                 <a:solidFill>
                   <a:srgbClr val="435765"/>
                 </a:solidFill>
-                <a:effectLst/>
-                <a:uLnTx/>
-                <a:uFillTx/>
+                <a:latin typeface="Inter" panose="02000503000000020004" pitchFamily="2" charset="0"/>
               </a:rPr>
-              <a:t>the </a:t>
+              <a:t>the superclass </a:t>
             </a:r>
-            <a:r>
-              <a:rPr kumimoji="0" lang="en-GB" sz="3000" b="1" i="0" u="none" strike="noStrike" kern="1200" cap="none" spc="0" normalizeH="0" baseline="0" noProof="0" dirty="0">
-                <a:ln>
-                  <a:noFill/>
-                </a:ln>
-                <a:solidFill>
-                  <a:srgbClr val="435765"/>
-                </a:solidFill>
-                <a:effectLst/>
-                <a:uLnTx/>
-                <a:uFillTx/>
-              </a:rPr>
-              <a:t>super</a:t>
-            </a:r>
-            <a:r>
-              <a:rPr kumimoji="0" lang="en-GB" sz="3000" b="0" i="0" u="none" strike="noStrike" kern="1200" cap="none" spc="0" normalizeH="0" baseline="0" noProof="0" dirty="0">
-                <a:ln>
-                  <a:noFill/>
-                </a:ln>
-                <a:solidFill>
-                  <a:srgbClr val="435765"/>
-                </a:solidFill>
-                <a:effectLst/>
-                <a:uLnTx/>
-                <a:uFillTx/>
-              </a:rPr>
-              <a:t>class </a:t>
-            </a:r>
-          </a:p>
-          <a:p>
-            <a:pPr marL="742950" marR="0" lvl="1" indent="-285750" algn="l" defTabSz="914400" rtl="0" eaLnBrk="1" fontAlgn="auto" latinLnBrk="0" hangingPunct="1">
+          </a:p>
+          <a:p>
+            <a:pPr marL="742950" marR="0" lvl="1" indent="-285750" fontAlgn="auto">
               <a:lnSpc>
                 <a:spcPct val="100000"/>
               </a:lnSpc>
@@ -12333,74 +15557,31 @@
               <a:defRPr/>
             </a:pPr>
             <a:r>
-              <a:rPr kumimoji="0" lang="en-GB" sz="2600" b="0" i="0" u="none" strike="noStrike" kern="1200" cap="none" spc="0" normalizeH="0" baseline="0" noProof="0" dirty="0">
-                <a:ln>
-                  <a:noFill/>
-                </a:ln>
+              <a:rPr lang="en-GB" sz="11200" dirty="0">
                 <a:solidFill>
                   <a:srgbClr val="435765"/>
                 </a:solidFill>
-                <a:effectLst/>
-                <a:uLnTx/>
-                <a:uFillTx/>
+                <a:latin typeface="Inter" panose="02000503000000020004" pitchFamily="2" charset="0"/>
               </a:rPr>
-              <a:t>defines </a:t>
+              <a:t>defines common attributes (via fields)</a:t>
             </a:r>
-            <a:r>
-              <a:rPr kumimoji="0" lang="en-GB" sz="2600" b="0" i="0" u="sng" strike="noStrike" kern="1200" cap="none" spc="0" normalizeH="0" baseline="0" noProof="0" dirty="0">
-                <a:ln>
-                  <a:noFill/>
-                </a:ln>
+            <a:br>
+              <a:rPr lang="en-GB" sz="11200" dirty="0">
                 <a:solidFill>
                   <a:srgbClr val="435765"/>
                 </a:solidFill>
-                <a:effectLst/>
-                <a:uLnTx/>
-                <a:uFillTx/>
-              </a:rPr>
-              <a:t>common</a:t>
-            </a:r>
-            <a:r>
-              <a:rPr kumimoji="0" lang="en-GB" sz="2600" b="0" i="0" u="none" strike="noStrike" kern="1200" cap="none" spc="0" normalizeH="0" baseline="0" noProof="0" dirty="0">
-                <a:ln>
-                  <a:noFill/>
-                </a:ln>
-                <a:solidFill>
-                  <a:srgbClr val="435765"/>
-                </a:solidFill>
-                <a:effectLst/>
-                <a:uLnTx/>
-                <a:uFillTx/>
-              </a:rPr>
-              <a:t> attributes (via fields)</a:t>
-            </a:r>
-            <a:br>
-              <a:rPr kumimoji="0" lang="en-GB" sz="2600" b="0" i="0" u="none" strike="noStrike" kern="1200" cap="none" spc="0" normalizeH="0" baseline="0" noProof="0" dirty="0">
-                <a:ln>
-                  <a:noFill/>
-                </a:ln>
-                <a:solidFill>
-                  <a:srgbClr val="435765"/>
-                </a:solidFill>
-                <a:effectLst/>
-                <a:uLnTx/>
-                <a:uFillTx/>
+                <a:latin typeface="Inter" panose="02000503000000020004" pitchFamily="2" charset="0"/>
               </a:rPr>
             </a:br>
-            <a:endParaRPr kumimoji="0" lang="en-GB" sz="2600" b="0" i="0" u="none" strike="noStrike" kern="1200" cap="none" spc="0" normalizeH="0" baseline="0" noProof="0" dirty="0">
-              <a:ln>
-                <a:noFill/>
-              </a:ln>
+            <a:endParaRPr lang="en-GB" sz="11200" dirty="0">
               <a:solidFill>
                 <a:srgbClr val="435765"/>
               </a:solidFill>
-              <a:effectLst/>
-              <a:uLnTx/>
-              <a:uFillTx/>
+              <a:latin typeface="Inter" panose="02000503000000020004" pitchFamily="2" charset="0"/>
             </a:endParaRPr>
           </a:p>
           <a:p>
-            <a:pPr marL="342900" marR="0" lvl="0" indent="-342900" algn="l" defTabSz="914400" rtl="0" eaLnBrk="1" fontAlgn="auto" latinLnBrk="0" hangingPunct="1">
+            <a:pPr marL="342900" marR="0" lvl="0" indent="-342900" fontAlgn="auto">
               <a:lnSpc>
                 <a:spcPct val="100000"/>
               </a:lnSpc>
@@ -12418,50 +15599,17 @@
               <a:defRPr/>
             </a:pPr>
             <a:r>
-              <a:rPr kumimoji="0" lang="en-GB" sz="3000" b="0" i="0" u="none" strike="noStrike" kern="1200" cap="none" spc="0" normalizeH="0" baseline="0" noProof="0" dirty="0">
-                <a:ln>
-                  <a:noFill/>
-                </a:ln>
+              <a:rPr lang="en-GB" sz="11200" dirty="0">
                 <a:solidFill>
                   <a:srgbClr val="435765"/>
                 </a:solidFill>
-                <a:effectLst/>
-                <a:uLnTx/>
-                <a:uFillTx/>
+                <a:latin typeface="Inter" panose="02000503000000020004" pitchFamily="2" charset="0"/>
               </a:rPr>
-              <a:t>the </a:t>
+              <a:t>the subclasses </a:t>
             </a:r>
-            <a:r>
-              <a:rPr kumimoji="0" lang="en-GB" sz="3000" b="1" i="0" u="none" strike="noStrike" kern="1200" cap="none" spc="0" normalizeH="0" baseline="0" noProof="0" dirty="0">
-                <a:ln>
-                  <a:noFill/>
-                </a:ln>
-                <a:solidFill>
-                  <a:srgbClr val="435765"/>
-                </a:solidFill>
-                <a:effectLst/>
-                <a:uLnTx/>
-                <a:uFillTx/>
-              </a:rPr>
-              <a:t>sub</a:t>
-            </a:r>
-            <a:r>
-              <a:rPr kumimoji="0" lang="en-GB" sz="3000" b="0" i="0" u="none" strike="noStrike" kern="1200" cap="none" spc="0" normalizeH="0" baseline="0" noProof="0" dirty="0">
-                <a:ln>
-                  <a:noFill/>
-                </a:ln>
-                <a:solidFill>
-                  <a:srgbClr val="435765"/>
-                </a:solidFill>
-                <a:effectLst/>
-                <a:uLnTx/>
-                <a:uFillTx/>
-              </a:rPr>
-              <a:t>classes </a:t>
-            </a:r>
-          </a:p>
-          <a:p>
-            <a:pPr marL="742950" marR="0" lvl="1" indent="-285750" algn="l" defTabSz="914400" rtl="0" eaLnBrk="1" fontAlgn="auto" latinLnBrk="0" hangingPunct="1">
+          </a:p>
+          <a:p>
+            <a:pPr marL="742950" marR="0" lvl="1" indent="-285750" fontAlgn="auto">
               <a:lnSpc>
                 <a:spcPct val="100000"/>
               </a:lnSpc>
@@ -12479,36 +15627,17 @@
               <a:defRPr/>
             </a:pPr>
             <a:r>
-              <a:rPr kumimoji="0" lang="en-GB" sz="2600" b="1" i="0" u="none" strike="noStrike" kern="1200" cap="none" spc="0" normalizeH="0" baseline="0" noProof="0" dirty="0">
-                <a:ln>
-                  <a:noFill/>
-                </a:ln>
+              <a:rPr lang="en-GB" sz="11200" dirty="0">
                 <a:solidFill>
                   <a:srgbClr val="435765"/>
                 </a:solidFill>
-                <a:effectLst/>
-                <a:uLnTx/>
-                <a:uFillTx/>
+                <a:latin typeface="Inter" panose="02000503000000020004" pitchFamily="2" charset="0"/>
               </a:rPr>
-              <a:t>inherit</a:t>
+              <a:t>inherit the superclass attributes (fields)</a:t>
             </a:r>
-            <a:r>
-              <a:rPr kumimoji="0" lang="en-GB" sz="2600" b="0" i="0" u="none" strike="noStrike" kern="1200" cap="none" spc="0" normalizeH="0" baseline="0" noProof="0" dirty="0">
-                <a:ln>
-                  <a:noFill/>
-                </a:ln>
-                <a:solidFill>
-                  <a:srgbClr val="435765"/>
-                </a:solidFill>
-                <a:effectLst/>
-                <a:uLnTx/>
-                <a:uFillTx/>
-              </a:rPr>
-              <a:t> the superclass attributes (fields)</a:t>
-            </a:r>
-          </a:p>
-          <a:p>
-            <a:pPr marL="742950" marR="0" lvl="1" indent="-285750" algn="l" defTabSz="914400" rtl="0" eaLnBrk="1" fontAlgn="auto" latinLnBrk="0" hangingPunct="1">
+          </a:p>
+          <a:p>
+            <a:pPr marL="742950" marR="0" lvl="1" indent="-285750" fontAlgn="auto">
               <a:lnSpc>
                 <a:spcPct val="100000"/>
               </a:lnSpc>
@@ -12526,16 +15655,11 @@
               <a:defRPr/>
             </a:pPr>
             <a:r>
-              <a:rPr kumimoji="0" lang="en-GB" sz="2600" b="0" i="0" u="none" strike="noStrike" kern="1200" cap="none" spc="0" normalizeH="0" baseline="0" noProof="0" dirty="0">
-                <a:ln>
-                  <a:noFill/>
-                </a:ln>
+              <a:rPr lang="en-GB" sz="11200" dirty="0">
                 <a:solidFill>
                   <a:srgbClr val="435765"/>
                 </a:solidFill>
-                <a:effectLst/>
-                <a:uLnTx/>
-                <a:uFillTx/>
+                <a:latin typeface="Inter" panose="02000503000000020004" pitchFamily="2" charset="0"/>
               </a:rPr>
               <a:t>add other specific attributes (fields)</a:t>
             </a:r>
@@ -12558,6 +15682,418 @@
   <p:transition spd="slow">
     <p:push dir="u"/>
   </p:transition>
+  <p:timing>
+    <p:tnLst>
+      <p:par>
+        <p:cTn id="1" dur="indefinite" restart="never" nodeType="tmRoot">
+          <p:childTnLst>
+            <p:seq concurrent="1" nextAc="seek">
+              <p:cTn id="2" dur="indefinite" nodeType="mainSeq">
+                <p:childTnLst>
+                  <p:par>
+                    <p:cTn id="3" fill="hold">
+                      <p:stCondLst>
+                        <p:cond delay="indefinite"/>
+                      </p:stCondLst>
+                      <p:childTnLst>
+                        <p:par>
+                          <p:cTn id="4" fill="hold">
+                            <p:stCondLst>
+                              <p:cond delay="0"/>
+                            </p:stCondLst>
+                            <p:childTnLst>
+                              <p:par>
+                                <p:cTn id="5" presetID="1" presetClass="entr" presetSubtype="0" fill="hold" nodeType="clickEffect">
+                                  <p:stCondLst>
+                                    <p:cond delay="0"/>
+                                  </p:stCondLst>
+                                  <p:childTnLst>
+                                    <p:set>
+                                      <p:cBhvr>
+                                        <p:cTn id="6" dur="1" fill="hold">
+                                          <p:stCondLst>
+                                            <p:cond delay="0"/>
+                                          </p:stCondLst>
+                                        </p:cTn>
+                                        <p:tgtEl>
+                                          <p:spTgt spid="3">
+                                            <p:txEl>
+                                              <p:pRg st="0" end="0"/>
+                                            </p:txEl>
+                                          </p:spTgt>
+                                        </p:tgtEl>
+                                        <p:attrNameLst>
+                                          <p:attrName>style.visibility</p:attrName>
+                                        </p:attrNameLst>
+                                      </p:cBhvr>
+                                      <p:to>
+                                        <p:strVal val="visible"/>
+                                      </p:to>
+                                    </p:set>
+                                  </p:childTnLst>
+                                </p:cTn>
+                              </p:par>
+                              <p:par>
+                                <p:cTn id="7" presetID="1" presetClass="entr" presetSubtype="0" fill="hold" nodeType="withEffect">
+                                  <p:stCondLst>
+                                    <p:cond delay="0"/>
+                                  </p:stCondLst>
+                                  <p:childTnLst>
+                                    <p:set>
+                                      <p:cBhvr>
+                                        <p:cTn id="8" dur="1" fill="hold">
+                                          <p:stCondLst>
+                                            <p:cond delay="0"/>
+                                          </p:stCondLst>
+                                        </p:cTn>
+                                        <p:tgtEl>
+                                          <p:spTgt spid="3">
+                                            <p:txEl>
+                                              <p:pRg st="1" end="1"/>
+                                            </p:txEl>
+                                          </p:spTgt>
+                                        </p:tgtEl>
+                                        <p:attrNameLst>
+                                          <p:attrName>style.visibility</p:attrName>
+                                        </p:attrNameLst>
+                                      </p:cBhvr>
+                                      <p:to>
+                                        <p:strVal val="visible"/>
+                                      </p:to>
+                                    </p:set>
+                                  </p:childTnLst>
+                                </p:cTn>
+                              </p:par>
+                            </p:childTnLst>
+                          </p:cTn>
+                        </p:par>
+                      </p:childTnLst>
+                    </p:cTn>
+                  </p:par>
+                  <p:par>
+                    <p:cTn id="9" fill="hold">
+                      <p:stCondLst>
+                        <p:cond delay="indefinite"/>
+                      </p:stCondLst>
+                      <p:childTnLst>
+                        <p:par>
+                          <p:cTn id="10" fill="hold">
+                            <p:stCondLst>
+                              <p:cond delay="0"/>
+                            </p:stCondLst>
+                            <p:childTnLst>
+                              <p:par>
+                                <p:cTn id="11" presetID="1" presetClass="entr" presetSubtype="0" fill="hold" nodeType="clickEffect">
+                                  <p:stCondLst>
+                                    <p:cond delay="0"/>
+                                  </p:stCondLst>
+                                  <p:childTnLst>
+                                    <p:set>
+                                      <p:cBhvr>
+                                        <p:cTn id="12" dur="1" fill="hold">
+                                          <p:stCondLst>
+                                            <p:cond delay="0"/>
+                                          </p:stCondLst>
+                                        </p:cTn>
+                                        <p:tgtEl>
+                                          <p:spTgt spid="3">
+                                            <p:txEl>
+                                              <p:pRg st="2" end="2"/>
+                                            </p:txEl>
+                                          </p:spTgt>
+                                        </p:tgtEl>
+                                        <p:attrNameLst>
+                                          <p:attrName>style.visibility</p:attrName>
+                                        </p:attrNameLst>
+                                      </p:cBhvr>
+                                      <p:to>
+                                        <p:strVal val="visible"/>
+                                      </p:to>
+                                    </p:set>
+                                  </p:childTnLst>
+                                </p:cTn>
+                              </p:par>
+                              <p:par>
+                                <p:cTn id="13" presetID="1" presetClass="entr" presetSubtype="0" fill="hold" nodeType="withEffect">
+                                  <p:stCondLst>
+                                    <p:cond delay="0"/>
+                                  </p:stCondLst>
+                                  <p:childTnLst>
+                                    <p:set>
+                                      <p:cBhvr>
+                                        <p:cTn id="14" dur="1" fill="hold">
+                                          <p:stCondLst>
+                                            <p:cond delay="0"/>
+                                          </p:stCondLst>
+                                        </p:cTn>
+                                        <p:tgtEl>
+                                          <p:spTgt spid="3">
+                                            <p:txEl>
+                                              <p:pRg st="3" end="3"/>
+                                            </p:txEl>
+                                          </p:spTgt>
+                                        </p:tgtEl>
+                                        <p:attrNameLst>
+                                          <p:attrName>style.visibility</p:attrName>
+                                        </p:attrNameLst>
+                                      </p:cBhvr>
+                                      <p:to>
+                                        <p:strVal val="visible"/>
+                                      </p:to>
+                                    </p:set>
+                                  </p:childTnLst>
+                                </p:cTn>
+                              </p:par>
+                              <p:par>
+                                <p:cTn id="15" presetID="1" presetClass="entr" presetSubtype="0" fill="hold" nodeType="withEffect">
+                                  <p:stCondLst>
+                                    <p:cond delay="0"/>
+                                  </p:stCondLst>
+                                  <p:childTnLst>
+                                    <p:set>
+                                      <p:cBhvr>
+                                        <p:cTn id="16" dur="1" fill="hold">
+                                          <p:stCondLst>
+                                            <p:cond delay="0"/>
+                                          </p:stCondLst>
+                                        </p:cTn>
+                                        <p:tgtEl>
+                                          <p:spTgt spid="3">
+                                            <p:txEl>
+                                              <p:pRg st="4" end="4"/>
+                                            </p:txEl>
+                                          </p:spTgt>
+                                        </p:tgtEl>
+                                        <p:attrNameLst>
+                                          <p:attrName>style.visibility</p:attrName>
+                                        </p:attrNameLst>
+                                      </p:cBhvr>
+                                      <p:to>
+                                        <p:strVal val="visible"/>
+                                      </p:to>
+                                    </p:set>
+                                  </p:childTnLst>
+                                </p:cTn>
+                              </p:par>
+                            </p:childTnLst>
+                          </p:cTn>
+                        </p:par>
+                      </p:childTnLst>
+                    </p:cTn>
+                  </p:par>
+                  <p:par>
+                    <p:cTn id="17" fill="hold">
+                      <p:stCondLst>
+                        <p:cond delay="indefinite"/>
+                      </p:stCondLst>
+                      <p:childTnLst>
+                        <p:par>
+                          <p:cTn id="18" fill="hold">
+                            <p:stCondLst>
+                              <p:cond delay="0"/>
+                            </p:stCondLst>
+                            <p:childTnLst>
+                              <p:par>
+                                <p:cTn id="19" presetID="1" presetClass="entr" presetSubtype="0" fill="hold" nodeType="clickEffect">
+                                  <p:stCondLst>
+                                    <p:cond delay="0"/>
+                                  </p:stCondLst>
+                                  <p:childTnLst>
+                                    <p:set>
+                                      <p:cBhvr>
+                                        <p:cTn id="20" dur="1" fill="hold">
+                                          <p:stCondLst>
+                                            <p:cond delay="0"/>
+                                          </p:stCondLst>
+                                        </p:cTn>
+                                        <p:tgtEl>
+                                          <p:spTgt spid="3">
+                                            <p:txEl>
+                                              <p:pRg st="5" end="5"/>
+                                            </p:txEl>
+                                          </p:spTgt>
+                                        </p:tgtEl>
+                                        <p:attrNameLst>
+                                          <p:attrName>style.visibility</p:attrName>
+                                        </p:attrNameLst>
+                                      </p:cBhvr>
+                                      <p:to>
+                                        <p:strVal val="visible"/>
+                                      </p:to>
+                                    </p:set>
+                                  </p:childTnLst>
+                                </p:cTn>
+                              </p:par>
+                              <p:par>
+                                <p:cTn id="21" presetID="1" presetClass="entr" presetSubtype="0" fill="hold" nodeType="withEffect">
+                                  <p:stCondLst>
+                                    <p:cond delay="0"/>
+                                  </p:stCondLst>
+                                  <p:childTnLst>
+                                    <p:set>
+                                      <p:cBhvr>
+                                        <p:cTn id="22" dur="1" fill="hold">
+                                          <p:stCondLst>
+                                            <p:cond delay="0"/>
+                                          </p:stCondLst>
+                                        </p:cTn>
+                                        <p:tgtEl>
+                                          <p:spTgt spid="3">
+                                            <p:txEl>
+                                              <p:pRg st="6" end="6"/>
+                                            </p:txEl>
+                                          </p:spTgt>
+                                        </p:tgtEl>
+                                        <p:attrNameLst>
+                                          <p:attrName>style.visibility</p:attrName>
+                                        </p:attrNameLst>
+                                      </p:cBhvr>
+                                      <p:to>
+                                        <p:strVal val="visible"/>
+                                      </p:to>
+                                    </p:set>
+                                  </p:childTnLst>
+                                </p:cTn>
+                              </p:par>
+                            </p:childTnLst>
+                          </p:cTn>
+                        </p:par>
+                      </p:childTnLst>
+                    </p:cTn>
+                  </p:par>
+                  <p:par>
+                    <p:cTn id="23" fill="hold">
+                      <p:stCondLst>
+                        <p:cond delay="indefinite"/>
+                      </p:stCondLst>
+                      <p:childTnLst>
+                        <p:par>
+                          <p:cTn id="24" fill="hold">
+                            <p:stCondLst>
+                              <p:cond delay="0"/>
+                            </p:stCondLst>
+                            <p:childTnLst>
+                              <p:par>
+                                <p:cTn id="25" presetID="1" presetClass="entr" presetSubtype="0" fill="hold" nodeType="clickEffect">
+                                  <p:stCondLst>
+                                    <p:cond delay="0"/>
+                                  </p:stCondLst>
+                                  <p:childTnLst>
+                                    <p:set>
+                                      <p:cBhvr>
+                                        <p:cTn id="26" dur="1" fill="hold">
+                                          <p:stCondLst>
+                                            <p:cond delay="0"/>
+                                          </p:stCondLst>
+                                        </p:cTn>
+                                        <p:tgtEl>
+                                          <p:spTgt spid="3">
+                                            <p:txEl>
+                                              <p:pRg st="7" end="7"/>
+                                            </p:txEl>
+                                          </p:spTgt>
+                                        </p:tgtEl>
+                                        <p:attrNameLst>
+                                          <p:attrName>style.visibility</p:attrName>
+                                        </p:attrNameLst>
+                                      </p:cBhvr>
+                                      <p:to>
+                                        <p:strVal val="visible"/>
+                                      </p:to>
+                                    </p:set>
+                                  </p:childTnLst>
+                                </p:cTn>
+                              </p:par>
+                              <p:par>
+                                <p:cTn id="27" presetID="1" presetClass="entr" presetSubtype="0" fill="hold" nodeType="withEffect">
+                                  <p:stCondLst>
+                                    <p:cond delay="0"/>
+                                  </p:stCondLst>
+                                  <p:childTnLst>
+                                    <p:set>
+                                      <p:cBhvr>
+                                        <p:cTn id="28" dur="1" fill="hold">
+                                          <p:stCondLst>
+                                            <p:cond delay="0"/>
+                                          </p:stCondLst>
+                                        </p:cTn>
+                                        <p:tgtEl>
+                                          <p:spTgt spid="3">
+                                            <p:txEl>
+                                              <p:pRg st="8" end="8"/>
+                                            </p:txEl>
+                                          </p:spTgt>
+                                        </p:tgtEl>
+                                        <p:attrNameLst>
+                                          <p:attrName>style.visibility</p:attrName>
+                                        </p:attrNameLst>
+                                      </p:cBhvr>
+                                      <p:to>
+                                        <p:strVal val="visible"/>
+                                      </p:to>
+                                    </p:set>
+                                  </p:childTnLst>
+                                </p:cTn>
+                              </p:par>
+                              <p:par>
+                                <p:cTn id="29" presetID="1" presetClass="entr" presetSubtype="0" fill="hold" nodeType="withEffect">
+                                  <p:stCondLst>
+                                    <p:cond delay="0"/>
+                                  </p:stCondLst>
+                                  <p:childTnLst>
+                                    <p:set>
+                                      <p:cBhvr>
+                                        <p:cTn id="30" dur="1" fill="hold">
+                                          <p:stCondLst>
+                                            <p:cond delay="0"/>
+                                          </p:stCondLst>
+                                        </p:cTn>
+                                        <p:tgtEl>
+                                          <p:spTgt spid="3">
+                                            <p:txEl>
+                                              <p:pRg st="9" end="9"/>
+                                            </p:txEl>
+                                          </p:spTgt>
+                                        </p:tgtEl>
+                                        <p:attrNameLst>
+                                          <p:attrName>style.visibility</p:attrName>
+                                        </p:attrNameLst>
+                                      </p:cBhvr>
+                                      <p:to>
+                                        <p:strVal val="visible"/>
+                                      </p:to>
+                                    </p:set>
+                                  </p:childTnLst>
+                                </p:cTn>
+                              </p:par>
+                            </p:childTnLst>
+                          </p:cTn>
+                        </p:par>
+                      </p:childTnLst>
+                    </p:cTn>
+                  </p:par>
+                </p:childTnLst>
+              </p:cTn>
+              <p:prevCondLst>
+                <p:cond evt="onPrev" delay="0">
+                  <p:tgtEl>
+                    <p:sldTgt/>
+                  </p:tgtEl>
+                </p:cond>
+              </p:prevCondLst>
+              <p:nextCondLst>
+                <p:cond evt="onNext" delay="0">
+                  <p:tgtEl>
+                    <p:sldTgt/>
+                  </p:tgtEl>
+                </p:cond>
+              </p:nextCondLst>
+            </p:seq>
+          </p:childTnLst>
+        </p:cTn>
+      </p:par>
+    </p:tnLst>
+  </p:timing>
 </p:sld>
 </file>
 
@@ -14826,8 +18362,8 @@
         </p:nvSpPr>
         <p:spPr>
           <a:xfrm>
-            <a:off x="140777" y="127574"/>
-            <a:ext cx="10515600" cy="1344766"/>
+            <a:off x="140776" y="127574"/>
+            <a:ext cx="12051223" cy="1344766"/>
           </a:xfrm>
         </p:spPr>
         <p:txBody>
@@ -14838,14 +18374,7 @@
           <a:p>
             <a:r>
               <a:rPr lang="en-US" dirty="0"/>
-              <a:t>Inheritance &amp; Constructors</a:t>
-            </a:r>
-            <a:br>
-              <a:rPr lang="en-US" dirty="0"/>
-            </a:br>
-            <a:r>
-              <a:rPr lang="en-US" dirty="0"/>
-              <a:t>- superclass</a:t>
+              <a:t>Inheritance &amp; Constructors   -   superclass</a:t>
             </a:r>
           </a:p>
         </p:txBody>
@@ -14872,7 +18401,7 @@
         </p:blipFill>
         <p:spPr>
           <a:xfrm>
-            <a:off x="7780149" y="329596"/>
+            <a:off x="7819060" y="1089259"/>
             <a:ext cx="3886295" cy="5641167"/>
           </a:xfrm>
           <a:prstGeom prst="rect">
@@ -14902,7 +18431,7 @@
         <p:spPr>
           <a:xfrm>
             <a:off x="140777" y="1596326"/>
-            <a:ext cx="3865161" cy="369332"/>
+            <a:ext cx="5095819" cy="523220"/>
           </a:xfrm>
           <a:prstGeom prst="rect">
             <a:avLst/>
@@ -14916,7 +18445,7 @@
           <a:lstStyle/>
           <a:p>
             <a:r>
-              <a:rPr lang="en-US" dirty="0">
+              <a:rPr lang="en-US" sz="2800" dirty="0">
                 <a:solidFill>
                   <a:srgbClr val="435765"/>
                 </a:solidFill>
@@ -14991,14 +18520,7 @@
           <a:p>
             <a:r>
               <a:rPr lang="en-US" dirty="0"/>
-              <a:t>Inheritance &amp; Constructors</a:t>
-            </a:r>
-            <a:br>
-              <a:rPr lang="en-US" dirty="0"/>
-            </a:br>
-            <a:r>
-              <a:rPr lang="en-US" dirty="0"/>
-              <a:t>- subclass</a:t>
+              <a:t>Inheritance &amp; Constructors - subclass</a:t>
             </a:r>
           </a:p>
         </p:txBody>
@@ -15024,7 +18546,7 @@
         </p:blipFill>
         <p:spPr>
           <a:xfrm>
-            <a:off x="6850252" y="728452"/>
+            <a:off x="6884854" y="1275552"/>
             <a:ext cx="5033169" cy="5229045"/>
           </a:xfrm>
           <a:prstGeom prst="rect">
@@ -15054,7 +18576,7 @@
         <p:spPr>
           <a:xfrm>
             <a:off x="140777" y="1596326"/>
-            <a:ext cx="4432624" cy="646331"/>
+            <a:ext cx="5713102" cy="954107"/>
           </a:xfrm>
           <a:prstGeom prst="rect">
             <a:avLst/>
@@ -15072,7 +18594,7 @@
               <a:buChar char="•"/>
             </a:pPr>
             <a:r>
-              <a:rPr lang="en-US" dirty="0">
+              <a:rPr lang="en-US" sz="2800" dirty="0">
                 <a:solidFill>
                   <a:srgbClr val="435765"/>
                 </a:solidFill>
@@ -15088,7 +18610,7 @@
               <a:buChar char="•"/>
             </a:pPr>
             <a:r>
-              <a:rPr lang="en-US" dirty="0">
+              <a:rPr lang="en-US" sz="2800" dirty="0">
                 <a:solidFill>
                   <a:srgbClr val="435765"/>
                 </a:solidFill>
@@ -15114,7 +18636,7 @@
         </p:nvSpPr>
         <p:spPr>
           <a:xfrm>
-            <a:off x="9252488" y="960895"/>
+            <a:off x="9252488" y="1596326"/>
             <a:ext cx="1403889" cy="635431"/>
           </a:xfrm>
           <a:prstGeom prst="roundRect">
@@ -15166,7 +18688,7 @@
         </p:nvSpPr>
         <p:spPr>
           <a:xfrm>
-            <a:off x="7669078" y="3890075"/>
+            <a:off x="7669078" y="4465289"/>
             <a:ext cx="1403889" cy="371959"/>
           </a:xfrm>
           <a:prstGeom prst="roundRect">
@@ -15932,10 +19454,15 @@
             <p:ph type="body" idx="1"/>
           </p:nvPr>
         </p:nvSpPr>
-        <p:spPr/>
+        <p:spPr>
+          <a:xfrm>
+            <a:off x="1060361" y="1284051"/>
+            <a:ext cx="10363200" cy="5000017"/>
+          </a:xfrm>
+        </p:spPr>
         <p:txBody>
           <a:bodyPr>
-            <a:normAutofit fontScale="85000" lnSpcReduction="20000"/>
+            <a:normAutofit/>
           </a:bodyPr>
           <a:lstStyle/>
           <a:p>
@@ -15945,7 +19472,7 @@
               <a:defRPr/>
             </a:pPr>
             <a:r>
-              <a:rPr lang="en-GB" dirty="0">
+              <a:rPr lang="en-GB" sz="2800" dirty="0">
                 <a:solidFill>
                   <a:srgbClr val="435765"/>
                 </a:solidFill>
@@ -15955,7 +19482,7 @@
               <a:t>Subclass constructors </a:t>
             </a:r>
             <a:r>
-              <a:rPr lang="en-GB" u="sng" dirty="0">
+              <a:rPr lang="en-GB" sz="2800" u="sng" dirty="0">
                 <a:solidFill>
                   <a:srgbClr val="E74751"/>
                 </a:solidFill>
@@ -15965,7 +19492,7 @@
               <a:t>must</a:t>
             </a:r>
             <a:r>
-              <a:rPr lang="en-GB" dirty="0">
+              <a:rPr lang="en-GB" sz="2800" dirty="0">
                 <a:solidFill>
                   <a:srgbClr val="435765"/>
                 </a:solidFill>
@@ -15975,7 +19502,7 @@
               <a:t> always contain a </a:t>
             </a:r>
             <a:r>
-              <a:rPr lang="en-GB" b="1" dirty="0">
+              <a:rPr lang="en-GB" sz="2800" b="1" dirty="0">
                 <a:solidFill>
                   <a:srgbClr val="435765"/>
                 </a:solidFill>
@@ -15988,7 +19515,7 @@
               <a:t>super</a:t>
             </a:r>
             <a:r>
-              <a:rPr lang="en-GB" dirty="0">
+              <a:rPr lang="en-GB" sz="2800" dirty="0">
                 <a:solidFill>
                   <a:srgbClr val="435765"/>
                 </a:solidFill>
@@ -15998,7 +19525,7 @@
               <a:t> call.</a:t>
             </a:r>
             <a:br>
-              <a:rPr lang="en-GB" dirty="0">
+              <a:rPr lang="en-GB" sz="2800" dirty="0">
                 <a:solidFill>
                   <a:srgbClr val="435765"/>
                 </a:solidFill>
@@ -16006,7 +19533,7 @@
                 <a:cs typeface="+mn-cs"/>
               </a:rPr>
             </a:br>
-            <a:endParaRPr lang="en-GB" dirty="0">
+            <a:endParaRPr lang="en-GB" sz="2800" dirty="0">
               <a:solidFill>
                 <a:srgbClr val="435765"/>
               </a:solidFill>
@@ -16021,7 +19548,7 @@
               <a:defRPr/>
             </a:pPr>
             <a:r>
-              <a:rPr lang="en-GB" dirty="0">
+              <a:rPr lang="en-GB" sz="2800" dirty="0">
                 <a:solidFill>
                   <a:srgbClr val="435765"/>
                 </a:solidFill>
@@ -16038,7 +19565,7 @@
               <a:defRPr/>
             </a:pPr>
             <a:r>
-              <a:rPr lang="en-GB" dirty="0">
+              <a:rPr lang="en-GB" sz="2800" dirty="0">
                 <a:solidFill>
                   <a:srgbClr val="435765"/>
                 </a:solidFill>
@@ -16047,14 +19574,14 @@
               <a:t>works only, if the superclass has a constructor without parameters</a:t>
             </a:r>
             <a:br>
-              <a:rPr lang="en-GB" dirty="0">
+              <a:rPr lang="en-GB" sz="2800" dirty="0">
                 <a:solidFill>
                   <a:srgbClr val="435765"/>
                 </a:solidFill>
                 <a:ea typeface="+mn-ea"/>
               </a:rPr>
             </a:br>
-            <a:endParaRPr lang="en-GB" dirty="0">
+            <a:endParaRPr lang="en-GB" sz="2800" dirty="0">
               <a:solidFill>
                 <a:srgbClr val="435765"/>
               </a:solidFill>
@@ -16068,7 +19595,7 @@
               <a:defRPr/>
             </a:pPr>
             <a:r>
-              <a:rPr lang="en-GB" b="1" dirty="0">
+              <a:rPr lang="en-GB" sz="2800" b="1" dirty="0">
                 <a:solidFill>
                   <a:srgbClr val="435765"/>
                 </a:solidFill>
@@ -16079,7 +19606,7 @@
               <a:t>super</a:t>
             </a:r>
             <a:r>
-              <a:rPr lang="en-GB" dirty="0">
+              <a:rPr lang="en-GB" sz="2800" dirty="0">
                 <a:solidFill>
                   <a:srgbClr val="435765"/>
                 </a:solidFill>
@@ -16089,7 +19616,7 @@
               <a:t> call must be the </a:t>
             </a:r>
             <a:r>
-              <a:rPr lang="en-GB" u="sng" dirty="0">
+              <a:rPr lang="en-GB" sz="2800" u="sng" dirty="0">
                 <a:solidFill>
                   <a:srgbClr val="E74751"/>
                 </a:solidFill>
@@ -16099,7 +19626,7 @@
               <a:t>first statement </a:t>
             </a:r>
             <a:r>
-              <a:rPr lang="en-GB" dirty="0">
+              <a:rPr lang="en-GB" sz="2800" dirty="0">
                 <a:solidFill>
                   <a:srgbClr val="435765"/>
                 </a:solidFill>
@@ -16127,6 +19654,214 @@
   <p:transition spd="slow">
     <p:push dir="u"/>
   </p:transition>
+  <p:timing>
+    <p:tnLst>
+      <p:par>
+        <p:cTn id="1" dur="indefinite" restart="never" nodeType="tmRoot">
+          <p:childTnLst>
+            <p:seq concurrent="1" nextAc="seek">
+              <p:cTn id="2" dur="indefinite" nodeType="mainSeq">
+                <p:childTnLst>
+                  <p:par>
+                    <p:cTn id="3" fill="hold">
+                      <p:stCondLst>
+                        <p:cond delay="indefinite"/>
+                      </p:stCondLst>
+                      <p:childTnLst>
+                        <p:par>
+                          <p:cTn id="4" fill="hold">
+                            <p:stCondLst>
+                              <p:cond delay="0"/>
+                            </p:stCondLst>
+                            <p:childTnLst>
+                              <p:par>
+                                <p:cTn id="5" presetID="1" presetClass="entr" presetSubtype="0" fill="hold" nodeType="clickEffect">
+                                  <p:stCondLst>
+                                    <p:cond delay="0"/>
+                                  </p:stCondLst>
+                                  <p:childTnLst>
+                                    <p:set>
+                                      <p:cBhvr>
+                                        <p:cTn id="6" dur="1" fill="hold">
+                                          <p:stCondLst>
+                                            <p:cond delay="0"/>
+                                          </p:stCondLst>
+                                        </p:cTn>
+                                        <p:tgtEl>
+                                          <p:spTgt spid="3">
+                                            <p:txEl>
+                                              <p:pRg st="0" end="0"/>
+                                            </p:txEl>
+                                          </p:spTgt>
+                                        </p:tgtEl>
+                                        <p:attrNameLst>
+                                          <p:attrName>style.visibility</p:attrName>
+                                        </p:attrNameLst>
+                                      </p:cBhvr>
+                                      <p:to>
+                                        <p:strVal val="visible"/>
+                                      </p:to>
+                                    </p:set>
+                                  </p:childTnLst>
+                                </p:cTn>
+                              </p:par>
+                            </p:childTnLst>
+                          </p:cTn>
+                        </p:par>
+                      </p:childTnLst>
+                    </p:cTn>
+                  </p:par>
+                  <p:par>
+                    <p:cTn id="7" fill="hold">
+                      <p:stCondLst>
+                        <p:cond delay="indefinite"/>
+                      </p:stCondLst>
+                      <p:childTnLst>
+                        <p:par>
+                          <p:cTn id="8" fill="hold">
+                            <p:stCondLst>
+                              <p:cond delay="0"/>
+                            </p:stCondLst>
+                            <p:childTnLst>
+                              <p:par>
+                                <p:cTn id="9" presetID="1" presetClass="entr" presetSubtype="0" fill="hold" nodeType="clickEffect">
+                                  <p:stCondLst>
+                                    <p:cond delay="0"/>
+                                  </p:stCondLst>
+                                  <p:childTnLst>
+                                    <p:set>
+                                      <p:cBhvr>
+                                        <p:cTn id="10" dur="1" fill="hold">
+                                          <p:stCondLst>
+                                            <p:cond delay="0"/>
+                                          </p:stCondLst>
+                                        </p:cTn>
+                                        <p:tgtEl>
+                                          <p:spTgt spid="3">
+                                            <p:txEl>
+                                              <p:pRg st="1" end="1"/>
+                                            </p:txEl>
+                                          </p:spTgt>
+                                        </p:tgtEl>
+                                        <p:attrNameLst>
+                                          <p:attrName>style.visibility</p:attrName>
+                                        </p:attrNameLst>
+                                      </p:cBhvr>
+                                      <p:to>
+                                        <p:strVal val="visible"/>
+                                      </p:to>
+                                    </p:set>
+                                  </p:childTnLst>
+                                </p:cTn>
+                              </p:par>
+                              <p:par>
+                                <p:cTn id="11" presetID="1" presetClass="entr" presetSubtype="0" fill="hold" nodeType="withEffect">
+                                  <p:stCondLst>
+                                    <p:cond delay="0"/>
+                                  </p:stCondLst>
+                                  <p:childTnLst>
+                                    <p:set>
+                                      <p:cBhvr>
+                                        <p:cTn id="12" dur="1" fill="hold">
+                                          <p:stCondLst>
+                                            <p:cond delay="0"/>
+                                          </p:stCondLst>
+                                        </p:cTn>
+                                        <p:tgtEl>
+                                          <p:spTgt spid="3">
+                                            <p:txEl>
+                                              <p:pRg st="2" end="2"/>
+                                            </p:txEl>
+                                          </p:spTgt>
+                                        </p:tgtEl>
+                                        <p:attrNameLst>
+                                          <p:attrName>style.visibility</p:attrName>
+                                        </p:attrNameLst>
+                                      </p:cBhvr>
+                                      <p:to>
+                                        <p:strVal val="visible"/>
+                                      </p:to>
+                                    </p:set>
+                                  </p:childTnLst>
+                                </p:cTn>
+                              </p:par>
+                            </p:childTnLst>
+                          </p:cTn>
+                        </p:par>
+                      </p:childTnLst>
+                    </p:cTn>
+                  </p:par>
+                  <p:par>
+                    <p:cTn id="13" fill="hold">
+                      <p:stCondLst>
+                        <p:cond delay="indefinite"/>
+                      </p:stCondLst>
+                      <p:childTnLst>
+                        <p:par>
+                          <p:cTn id="14" fill="hold">
+                            <p:stCondLst>
+                              <p:cond delay="0"/>
+                            </p:stCondLst>
+                            <p:childTnLst>
+                              <p:par>
+                                <p:cTn id="15" presetID="1" presetClass="entr" presetSubtype="0" fill="hold" nodeType="clickEffect">
+                                  <p:stCondLst>
+                                    <p:cond delay="0"/>
+                                  </p:stCondLst>
+                                  <p:childTnLst>
+                                    <p:set>
+                                      <p:cBhvr>
+                                        <p:cTn id="16" dur="1" fill="hold">
+                                          <p:stCondLst>
+                                            <p:cond delay="0"/>
+                                          </p:stCondLst>
+                                        </p:cTn>
+                                        <p:tgtEl>
+                                          <p:spTgt spid="3">
+                                            <p:txEl>
+                                              <p:pRg st="3" end="3"/>
+                                            </p:txEl>
+                                          </p:spTgt>
+                                        </p:tgtEl>
+                                        <p:attrNameLst>
+                                          <p:attrName>style.visibility</p:attrName>
+                                        </p:attrNameLst>
+                                      </p:cBhvr>
+                                      <p:to>
+                                        <p:strVal val="visible"/>
+                                      </p:to>
+                                    </p:set>
+                                  </p:childTnLst>
+                                </p:cTn>
+                              </p:par>
+                            </p:childTnLst>
+                          </p:cTn>
+                        </p:par>
+                      </p:childTnLst>
+                    </p:cTn>
+                  </p:par>
+                </p:childTnLst>
+              </p:cTn>
+              <p:prevCondLst>
+                <p:cond evt="onPrev" delay="0">
+                  <p:tgtEl>
+                    <p:sldTgt/>
+                  </p:tgtEl>
+                </p:cond>
+              </p:prevCondLst>
+              <p:nextCondLst>
+                <p:cond evt="onNext" delay="0">
+                  <p:tgtEl>
+                    <p:sldTgt/>
+                  </p:tgtEl>
+                </p:cond>
+              </p:nextCondLst>
+            </p:seq>
+          </p:childTnLst>
+        </p:cTn>
+      </p:par>
+    </p:tnLst>
+  </p:timing>
 </p:sld>
 </file>
 
@@ -20070,70 +23805,6 @@
           </a:fontRef>
         </p:style>
       </p:cxnSp>
-      <p:sp>
-        <p:nvSpPr>
-          <p:cNvPr id="60" name="TextBox 59">
-            <a:extLst>
-              <a:ext uri="{FF2B5EF4-FFF2-40B4-BE49-F238E27FC236}">
-                <a16:creationId xmlns:a16="http://schemas.microsoft.com/office/drawing/2014/main" id="{EC84F91D-A7DA-3641-B232-885C8ADC91EF}"/>
-              </a:ext>
-            </a:extLst>
-          </p:cNvPr>
-          <p:cNvSpPr txBox="1"/>
-          <p:nvPr/>
-        </p:nvSpPr>
-        <p:spPr>
-          <a:xfrm>
-            <a:off x="857879" y="975030"/>
-            <a:ext cx="8704627" cy="369332"/>
-          </a:xfrm>
-          <a:prstGeom prst="rect">
-            <a:avLst/>
-          </a:prstGeom>
-          <a:noFill/>
-        </p:spPr>
-        <p:txBody>
-          <a:bodyPr wrap="none" rtlCol="0">
-            <a:spAutoFit/>
-          </a:bodyPr>
-          <a:lstStyle/>
-          <a:p>
-            <a:r>
-              <a:rPr lang="en-US" dirty="0">
-                <a:solidFill>
-                  <a:srgbClr val="435765"/>
-                </a:solidFill>
-                <a:highlight>
-                  <a:srgbClr val="FCCA3A"/>
-                </a:highlight>
-                <a:latin typeface="Inter" panose="02000503000000020004" pitchFamily="2" charset="0"/>
-                <a:ea typeface="Inter" panose="02000503000000020004" pitchFamily="2" charset="0"/>
-              </a:rPr>
-              <a:t>Question: </a:t>
-            </a:r>
-            <a:r>
-              <a:rPr lang="en-GB" dirty="0">
-                <a:solidFill>
-                  <a:srgbClr val="435765"/>
-                </a:solidFill>
-                <a:latin typeface="Inter" panose="02000503000000020004" pitchFamily="2" charset="0"/>
-                <a:ea typeface="Inter" panose="02000503000000020004" pitchFamily="2" charset="0"/>
-              </a:rPr>
-              <a:t>Create an inheritance hierarchy for something that you can relate to</a:t>
-            </a:r>
-            <a:endParaRPr lang="en-US" dirty="0">
-              <a:solidFill>
-                <a:srgbClr val="435765"/>
-              </a:solidFill>
-              <a:highlight>
-                <a:srgbClr val="FCCA3A"/>
-              </a:highlight>
-              <a:latin typeface="Inter" panose="02000503000000020004" pitchFamily="2" charset="0"/>
-              <a:ea typeface="Inter" panose="02000503000000020004" pitchFamily="2" charset="0"/>
-            </a:endParaRPr>
-          </a:p>
-        </p:txBody>
-      </p:sp>
     </p:spTree>
     <p:extLst>
       <p:ext uri="{BB962C8B-B14F-4D97-AF65-F5344CB8AC3E}">
@@ -22675,24 +26346,29 @@
       </p:sp>
       <p:sp>
         <p:nvSpPr>
-          <p:cNvPr id="3" name="Text Placeholder 2">
+          <p:cNvPr id="7" name="TextBox 6">
             <a:extLst>
               <a:ext uri="{FF2B5EF4-FFF2-40B4-BE49-F238E27FC236}">
-                <a16:creationId xmlns:a16="http://schemas.microsoft.com/office/drawing/2014/main" id="{293C51C2-2A3D-4E1A-A7A0-A49F6D43AEF3}"/>
+                <a16:creationId xmlns:a16="http://schemas.microsoft.com/office/drawing/2014/main" id="{D517B4C7-9B70-83F2-0AF6-C301E67D4ADE}"/>
               </a:ext>
             </a:extLst>
           </p:cNvPr>
-          <p:cNvSpPr>
-            <a:spLocks noGrp="1"/>
-          </p:cNvSpPr>
-          <p:nvPr>
-            <p:ph type="body" idx="1"/>
-          </p:nvPr>
+          <p:cNvSpPr txBox="1"/>
+          <p:nvPr/>
         </p:nvSpPr>
-        <p:spPr/>
+        <p:spPr>
+          <a:xfrm>
+            <a:off x="1438101" y="1604939"/>
+            <a:ext cx="10100304" cy="4401205"/>
+          </a:xfrm>
+          <a:prstGeom prst="rect">
+            <a:avLst/>
+          </a:prstGeom>
+          <a:noFill/>
+        </p:spPr>
         <p:txBody>
-          <a:bodyPr>
-            <a:normAutofit fontScale="77500" lnSpcReduction="20000"/>
+          <a:bodyPr wrap="square">
+            <a:spAutoFit/>
           </a:bodyPr>
           <a:lstStyle/>
           <a:p>
@@ -22701,10 +26377,11 @@
               <a:buChar char="•"/>
             </a:pPr>
             <a:r>
-              <a:rPr lang="en-US" dirty="0">
+              <a:rPr lang="en-US" sz="2800" dirty="0">
                 <a:solidFill>
                   <a:srgbClr val="435765"/>
                 </a:solidFill>
+                <a:latin typeface="Inter" panose="02000503000000020004" pitchFamily="2" charset="0"/>
               </a:rPr>
               <a:t>Code duplication:</a:t>
             </a:r>
@@ -22715,51 +26392,50 @@
               <a:buChar char="•"/>
             </a:pPr>
             <a:r>
-              <a:rPr lang="en-US" dirty="0" err="1">
+              <a:rPr lang="en-US" sz="2800" b="1" dirty="0" err="1">
                 <a:solidFill>
                   <a:srgbClr val="435765"/>
                 </a:solidFill>
-                <a:highlight>
-                  <a:srgbClr val="FCCA3A"/>
-                </a:highlight>
+                <a:latin typeface="Inter" panose="02000503000000020004" pitchFamily="2" charset="0"/>
               </a:rPr>
               <a:t>MessagePost</a:t>
             </a:r>
             <a:r>
-              <a:rPr lang="en-US" dirty="0">
+              <a:rPr lang="en-US" sz="2800" dirty="0">
                 <a:solidFill>
                   <a:srgbClr val="435765"/>
                 </a:solidFill>
+                <a:latin typeface="Inter" panose="02000503000000020004" pitchFamily="2" charset="0"/>
               </a:rPr>
               <a:t> and </a:t>
             </a:r>
             <a:r>
-              <a:rPr lang="en-US" dirty="0" err="1">
+              <a:rPr lang="en-US" sz="2800" b="1" dirty="0" err="1">
                 <a:solidFill>
                   <a:srgbClr val="435765"/>
                 </a:solidFill>
-                <a:highlight>
-                  <a:srgbClr val="FCCA3A"/>
-                </a:highlight>
+                <a:latin typeface="Inter" panose="02000503000000020004" pitchFamily="2" charset="0"/>
               </a:rPr>
               <a:t>PhotoPost</a:t>
             </a:r>
             <a:r>
-              <a:rPr lang="en-US" dirty="0">
+              <a:rPr lang="en-US" sz="2800" dirty="0">
                 <a:solidFill>
                   <a:srgbClr val="435765"/>
                 </a:solidFill>
+                <a:latin typeface="Inter" panose="02000503000000020004" pitchFamily="2" charset="0"/>
               </a:rPr>
-              <a:t> classes </a:t>
+              <a:t> classes very similar (large parts are identical)</a:t>
             </a:r>
-            <a:r>
-              <a:rPr lang="en-US" i="1" dirty="0">
-                <a:solidFill>
-                  <a:srgbClr val="435765"/>
-                </a:solidFill>
-              </a:rPr>
-              <a:t>very similar (large parts are identical)</a:t>
-            </a:r>
+          </a:p>
+          <a:p>
+            <a:pPr lvl="1"/>
+            <a:endParaRPr lang="en-US" sz="2800" dirty="0">
+              <a:solidFill>
+                <a:srgbClr val="435765"/>
+              </a:solidFill>
+              <a:latin typeface="Inter" panose="02000503000000020004" pitchFamily="2" charset="0"/>
+            </a:endParaRPr>
           </a:p>
           <a:p>
             <a:pPr marL="800100" lvl="1" indent="-342900">
@@ -22767,29 +26443,23 @@
               <a:buChar char="•"/>
             </a:pPr>
             <a:r>
-              <a:rPr lang="en-US" dirty="0">
+              <a:rPr lang="en-US" sz="2800" dirty="0">
                 <a:solidFill>
                   <a:srgbClr val="435765"/>
                 </a:solidFill>
+                <a:latin typeface="Inter" panose="02000503000000020004" pitchFamily="2" charset="0"/>
               </a:rPr>
-              <a:t>makes </a:t>
+              <a:t>makes maintenance difficult/more work</a:t>
             </a:r>
-            <a:r>
-              <a:rPr lang="en-US" b="1" dirty="0">
-                <a:solidFill>
-                  <a:srgbClr val="435765"/>
-                </a:solidFill>
-              </a:rPr>
-              <a:t>maintenance</a:t>
-            </a:r>
-            <a:r>
-              <a:rPr lang="en-US" dirty="0">
-                <a:solidFill>
-                  <a:srgbClr val="435765"/>
-                </a:solidFill>
-              </a:rPr>
-              <a:t> difficult/more work</a:t>
-            </a:r>
+          </a:p>
+          <a:p>
+            <a:pPr lvl="1"/>
+            <a:endParaRPr lang="en-US" sz="2800" dirty="0">
+              <a:solidFill>
+                <a:srgbClr val="435765"/>
+              </a:solidFill>
+              <a:latin typeface="Inter" panose="02000503000000020004" pitchFamily="2" charset="0"/>
+            </a:endParaRPr>
           </a:p>
           <a:p>
             <a:pPr marL="800100" lvl="1" indent="-342900">
@@ -22797,39 +26467,29 @@
               <a:buChar char="•"/>
             </a:pPr>
             <a:r>
-              <a:rPr lang="en-US" dirty="0">
+              <a:rPr lang="en-US" sz="2800" dirty="0">
                 <a:solidFill>
                   <a:srgbClr val="435765"/>
                 </a:solidFill>
+                <a:latin typeface="Inter" panose="02000503000000020004" pitchFamily="2" charset="0"/>
               </a:rPr>
-              <a:t>introduces </a:t>
+              <a:t>introduces danger of bugs through incorrect maintenance</a:t>
             </a:r>
-            <a:r>
-              <a:rPr lang="en-US" b="1" dirty="0">
-                <a:solidFill>
-                  <a:srgbClr val="435765"/>
-                </a:solidFill>
-              </a:rPr>
-              <a:t>danger of bugs </a:t>
-            </a:r>
-            <a:r>
-              <a:rPr lang="en-US" dirty="0">
-                <a:solidFill>
-                  <a:srgbClr val="435765"/>
-                </a:solidFill>
-              </a:rPr>
-              <a:t>through incorrect maintenance</a:t>
-            </a:r>
-          </a:p>
-          <a:p>
-            <a:pPr marL="342900" indent="-342900">
-              <a:buFont typeface="Arial" panose="020B0604020202020204" pitchFamily="34" charset="0"/>
-              <a:buChar char="•"/>
-            </a:pPr>
-            <a:endParaRPr lang="en-US" dirty="0">
+          </a:p>
+          <a:p>
+            <a:endParaRPr lang="en-US" sz="2800" dirty="0">
               <a:solidFill>
                 <a:srgbClr val="435765"/>
               </a:solidFill>
+              <a:latin typeface="Inter" panose="02000503000000020004" pitchFamily="2" charset="0"/>
+            </a:endParaRPr>
+          </a:p>
+          <a:p>
+            <a:endParaRPr lang="en-US" sz="2800" dirty="0">
+              <a:solidFill>
+                <a:srgbClr val="435765"/>
+              </a:solidFill>
+              <a:latin typeface="Inter" panose="02000503000000020004" pitchFamily="2" charset="0"/>
             </a:endParaRPr>
           </a:p>
           <a:p>
@@ -22838,51 +26498,32 @@
               <a:buChar char="•"/>
             </a:pPr>
             <a:r>
-              <a:rPr lang="en-US" dirty="0">
+              <a:rPr lang="en-US" sz="2800" dirty="0">
                 <a:solidFill>
                   <a:srgbClr val="435765"/>
                 </a:solidFill>
+                <a:latin typeface="Inter" panose="02000503000000020004" pitchFamily="2" charset="0"/>
               </a:rPr>
               <a:t>Code duplication in </a:t>
             </a:r>
             <a:r>
-              <a:rPr lang="en-US" b="1" dirty="0" err="1">
+              <a:rPr lang="en-US" sz="2800" dirty="0" err="1">
                 <a:solidFill>
                   <a:srgbClr val="435765"/>
                 </a:solidFill>
+                <a:latin typeface="Inter" panose="02000503000000020004" pitchFamily="2" charset="0"/>
               </a:rPr>
               <a:t>NewsFeed</a:t>
             </a:r>
             <a:r>
-              <a:rPr lang="en-US" b="1" dirty="0">
+              <a:rPr lang="en-US" sz="2800" dirty="0">
                 <a:solidFill>
                   <a:srgbClr val="435765"/>
                 </a:solidFill>
+                <a:latin typeface="Inter" panose="02000503000000020004" pitchFamily="2" charset="0"/>
               </a:rPr>
-              <a:t> class </a:t>
+              <a:t> class as well.</a:t>
             </a:r>
-            <a:r>
-              <a:rPr lang="en-US" dirty="0">
-                <a:solidFill>
-                  <a:srgbClr val="435765"/>
-                </a:solidFill>
-              </a:rPr>
-              <a:t>as well.</a:t>
-            </a:r>
-          </a:p>
-          <a:p>
-            <a:pPr marL="342900" indent="-342900">
-              <a:buFont typeface="Arial" panose="020B0604020202020204" pitchFamily="34" charset="0"/>
-              <a:buChar char="•"/>
-            </a:pPr>
-            <a:endParaRPr lang="en-US" dirty="0"/>
-          </a:p>
-          <a:p>
-            <a:pPr marL="342900" indent="-342900">
-              <a:buFont typeface="Arial" panose="020B0604020202020204" pitchFamily="34" charset="0"/>
-              <a:buChar char="•"/>
-            </a:pPr>
-            <a:endParaRPr lang="en-US" dirty="0"/>
           </a:p>
         </p:txBody>
       </p:sp>
@@ -22899,11 +26540,237 @@
   <p:transition spd="slow">
     <p:push dir="u"/>
   </p:transition>
+  <p:timing>
+    <p:tnLst>
+      <p:par>
+        <p:cTn id="1" dur="indefinite" restart="never" nodeType="tmRoot">
+          <p:childTnLst>
+            <p:seq concurrent="1" nextAc="seek">
+              <p:cTn id="2" dur="indefinite" nodeType="mainSeq">
+                <p:childTnLst>
+                  <p:par>
+                    <p:cTn id="3" fill="hold">
+                      <p:stCondLst>
+                        <p:cond delay="indefinite"/>
+                      </p:stCondLst>
+                      <p:childTnLst>
+                        <p:par>
+                          <p:cTn id="4" fill="hold">
+                            <p:stCondLst>
+                              <p:cond delay="0"/>
+                            </p:stCondLst>
+                            <p:childTnLst>
+                              <p:par>
+                                <p:cTn id="5" presetID="1" presetClass="entr" presetSubtype="0" fill="hold" nodeType="clickEffect">
+                                  <p:stCondLst>
+                                    <p:cond delay="0"/>
+                                  </p:stCondLst>
+                                  <p:childTnLst>
+                                    <p:set>
+                                      <p:cBhvr>
+                                        <p:cTn id="6" dur="1" fill="hold">
+                                          <p:stCondLst>
+                                            <p:cond delay="0"/>
+                                          </p:stCondLst>
+                                        </p:cTn>
+                                        <p:tgtEl>
+                                          <p:spTgt spid="7">
+                                            <p:txEl>
+                                              <p:pRg st="1" end="1"/>
+                                            </p:txEl>
+                                          </p:spTgt>
+                                        </p:tgtEl>
+                                        <p:attrNameLst>
+                                          <p:attrName>style.visibility</p:attrName>
+                                        </p:attrNameLst>
+                                      </p:cBhvr>
+                                      <p:to>
+                                        <p:strVal val="visible"/>
+                                      </p:to>
+                                    </p:set>
+                                  </p:childTnLst>
+                                </p:cTn>
+                              </p:par>
+                            </p:childTnLst>
+                          </p:cTn>
+                        </p:par>
+                      </p:childTnLst>
+                    </p:cTn>
+                  </p:par>
+                  <p:par>
+                    <p:cTn id="7" fill="hold">
+                      <p:stCondLst>
+                        <p:cond delay="indefinite"/>
+                      </p:stCondLst>
+                      <p:childTnLst>
+                        <p:par>
+                          <p:cTn id="8" fill="hold">
+                            <p:stCondLst>
+                              <p:cond delay="0"/>
+                            </p:stCondLst>
+                            <p:childTnLst>
+                              <p:par>
+                                <p:cTn id="9" presetID="1" presetClass="entr" presetSubtype="0" fill="hold" nodeType="clickEffect">
+                                  <p:stCondLst>
+                                    <p:cond delay="0"/>
+                                  </p:stCondLst>
+                                  <p:childTnLst>
+                                    <p:set>
+                                      <p:cBhvr>
+                                        <p:cTn id="10" dur="1" fill="hold">
+                                          <p:stCondLst>
+                                            <p:cond delay="0"/>
+                                          </p:stCondLst>
+                                        </p:cTn>
+                                        <p:tgtEl>
+                                          <p:spTgt spid="7">
+                                            <p:txEl>
+                                              <p:pRg st="3" end="3"/>
+                                            </p:txEl>
+                                          </p:spTgt>
+                                        </p:tgtEl>
+                                        <p:attrNameLst>
+                                          <p:attrName>style.visibility</p:attrName>
+                                        </p:attrNameLst>
+                                      </p:cBhvr>
+                                      <p:to>
+                                        <p:strVal val="visible"/>
+                                      </p:to>
+                                    </p:set>
+                                  </p:childTnLst>
+                                </p:cTn>
+                              </p:par>
+                            </p:childTnLst>
+                          </p:cTn>
+                        </p:par>
+                      </p:childTnLst>
+                    </p:cTn>
+                  </p:par>
+                  <p:par>
+                    <p:cTn id="11" fill="hold">
+                      <p:stCondLst>
+                        <p:cond delay="indefinite"/>
+                      </p:stCondLst>
+                      <p:childTnLst>
+                        <p:par>
+                          <p:cTn id="12" fill="hold">
+                            <p:stCondLst>
+                              <p:cond delay="0"/>
+                            </p:stCondLst>
+                            <p:childTnLst>
+                              <p:par>
+                                <p:cTn id="13" presetID="1" presetClass="entr" presetSubtype="0" fill="hold" nodeType="clickEffect">
+                                  <p:stCondLst>
+                                    <p:cond delay="0"/>
+                                  </p:stCondLst>
+                                  <p:childTnLst>
+                                    <p:set>
+                                      <p:cBhvr>
+                                        <p:cTn id="14" dur="1" fill="hold">
+                                          <p:stCondLst>
+                                            <p:cond delay="0"/>
+                                          </p:stCondLst>
+                                        </p:cTn>
+                                        <p:tgtEl>
+                                          <p:spTgt spid="7">
+                                            <p:txEl>
+                                              <p:pRg st="5" end="5"/>
+                                            </p:txEl>
+                                          </p:spTgt>
+                                        </p:tgtEl>
+                                        <p:attrNameLst>
+                                          <p:attrName>style.visibility</p:attrName>
+                                        </p:attrNameLst>
+                                      </p:cBhvr>
+                                      <p:to>
+                                        <p:strVal val="visible"/>
+                                      </p:to>
+                                    </p:set>
+                                  </p:childTnLst>
+                                </p:cTn>
+                              </p:par>
+                            </p:childTnLst>
+                          </p:cTn>
+                        </p:par>
+                      </p:childTnLst>
+                    </p:cTn>
+                  </p:par>
+                  <p:par>
+                    <p:cTn id="15" fill="hold">
+                      <p:stCondLst>
+                        <p:cond delay="indefinite"/>
+                      </p:stCondLst>
+                      <p:childTnLst>
+                        <p:par>
+                          <p:cTn id="16" fill="hold">
+                            <p:stCondLst>
+                              <p:cond delay="0"/>
+                            </p:stCondLst>
+                            <p:childTnLst>
+                              <p:par>
+                                <p:cTn id="17" presetID="1" presetClass="entr" presetSubtype="0" fill="hold" nodeType="clickEffect">
+                                  <p:stCondLst>
+                                    <p:cond delay="0"/>
+                                  </p:stCondLst>
+                                  <p:childTnLst>
+                                    <p:set>
+                                      <p:cBhvr>
+                                        <p:cTn id="18" dur="1" fill="hold">
+                                          <p:stCondLst>
+                                            <p:cond delay="0"/>
+                                          </p:stCondLst>
+                                        </p:cTn>
+                                        <p:tgtEl>
+                                          <p:spTgt spid="7">
+                                            <p:txEl>
+                                              <p:pRg st="8" end="8"/>
+                                            </p:txEl>
+                                          </p:spTgt>
+                                        </p:tgtEl>
+                                        <p:attrNameLst>
+                                          <p:attrName>style.visibility</p:attrName>
+                                        </p:attrNameLst>
+                                      </p:cBhvr>
+                                      <p:to>
+                                        <p:strVal val="visible"/>
+                                      </p:to>
+                                    </p:set>
+                                  </p:childTnLst>
+                                </p:cTn>
+                              </p:par>
+                            </p:childTnLst>
+                          </p:cTn>
+                        </p:par>
+                      </p:childTnLst>
+                    </p:cTn>
+                  </p:par>
+                </p:childTnLst>
+              </p:cTn>
+              <p:prevCondLst>
+                <p:cond evt="onPrev" delay="0">
+                  <p:tgtEl>
+                    <p:sldTgt/>
+                  </p:tgtEl>
+                </p:cond>
+              </p:prevCondLst>
+              <p:nextCondLst>
+                <p:cond evt="onNext" delay="0">
+                  <p:tgtEl>
+                    <p:sldTgt/>
+                  </p:tgtEl>
+                </p:cond>
+              </p:nextCondLst>
+            </p:seq>
+          </p:childTnLst>
+        </p:cTn>
+      </p:par>
+    </p:tnLst>
+  </p:timing>
 </p:sld>
 </file>
 
 <file path=ppt/theme/theme1.xml><?xml version="1.0" encoding="utf-8"?>
-<a:theme xmlns:a="http://schemas.openxmlformats.org/drawingml/2006/main" name="b-intro-to-arraylists">
+<a:theme xmlns:a="http://schemas.openxmlformats.org/drawingml/2006/main" name="c-prog-fund-2-junit-terminology">
   <a:themeElements>
     <a:clrScheme name="Office">
       <a:dk1>
@@ -22977,7 +26844,6 @@
         <a:font script="Mong" typeface="Mongolian Baiti"/>
         <a:font script="Viet" typeface="Times New Roman"/>
         <a:font script="Uigh" typeface="Microsoft Uighur"/>
-        <a:font script="Geor" typeface="Sylfaen"/>
       </a:majorFont>
       <a:minorFont>
         <a:latin typeface="Calibri"/>
@@ -23012,7 +26878,6 @@
         <a:font script="Mong" typeface="Mongolian Baiti"/>
         <a:font script="Viet" typeface="Arial"/>
         <a:font script="Uigh" typeface="Microsoft Uighur"/>
-        <a:font script="Geor" typeface="Sylfaen"/>
       </a:minorFont>
     </a:fontScheme>
     <a:fmtScheme name="Office">
@@ -23483,14 +27348,6 @@
 </file>
 
 <file path=customXml/item1.xml><?xml version="1.0" encoding="utf-8"?>
-<p:properties xmlns:p="http://schemas.microsoft.com/office/2006/metadata/properties" xmlns:xsi="http://www.w3.org/2001/XMLSchema-instance" xmlns:pc="http://schemas.microsoft.com/office/infopath/2007/PartnerControls">
-  <documentManagement>
-    <_activity xmlns="2e073d95-02bc-4c31-9707-1f7b5f2564cb" xsi:nil="true"/>
-  </documentManagement>
-</p:properties>
-</file>
-
-<file path=customXml/item2.xml><?xml version="1.0" encoding="utf-8"?>
 <ct:contentTypeSchema xmlns:ct="http://schemas.microsoft.com/office/2006/metadata/contentType" xmlns:ma="http://schemas.microsoft.com/office/2006/metadata/properties/metaAttributes" ct:_="" ma:_="" ma:contentTypeName="Document" ma:contentTypeID="0x01010074A7B4F4F87092419B4836663A979F72" ma:contentTypeVersion="12" ma:contentTypeDescription="Create a new document." ma:contentTypeScope="" ma:versionID="1705185788f4f7b8606867508f74a2eb">
   <xsd:schema xmlns:xsd="http://www.w3.org/2001/XMLSchema" xmlns:xs="http://www.w3.org/2001/XMLSchema" xmlns:p="http://schemas.microsoft.com/office/2006/metadata/properties" xmlns:ns3="2e073d95-02bc-4c31-9707-1f7b5f2564cb" xmlns:ns4="ecd595b7-854d-4129-8908-394d58e21de0" targetNamespace="http://schemas.microsoft.com/office/2006/metadata/properties" ma:root="true" ma:fieldsID="784458e58d0eaf4d4fb689770e9f109b" ns3:_="" ns4:_="">
     <xsd:import namespace="2e073d95-02bc-4c31-9707-1f7b5f2564cb"/>
@@ -23705,6 +27562,14 @@
 </ct:contentTypeSchema>
 </file>
 
+<file path=customXml/item2.xml><?xml version="1.0" encoding="utf-8"?>
+<p:properties xmlns:p="http://schemas.microsoft.com/office/2006/metadata/properties" xmlns:xsi="http://www.w3.org/2001/XMLSchema-instance" xmlns:pc="http://schemas.microsoft.com/office/infopath/2007/PartnerControls">
+  <documentManagement>
+    <_activity xmlns="2e073d95-02bc-4c31-9707-1f7b5f2564cb" xsi:nil="true"/>
+  </documentManagement>
+</p:properties>
+</file>
+
 <file path=customXml/item3.xml><?xml version="1.0" encoding="utf-8"?>
 <?mso-contentType ?>
 <FormTemplates xmlns="http://schemas.microsoft.com/sharepoint/v3/contenttype/forms">
@@ -23715,23 +27580,6 @@
 </file>
 
 <file path=customXml/itemProps1.xml><?xml version="1.0" encoding="utf-8"?>
-<ds:datastoreItem xmlns:ds="http://schemas.openxmlformats.org/officeDocument/2006/customXml" ds:itemID="{7B7BD72B-E314-4A2C-A344-AF1319C38FF7}">
-  <ds:schemaRefs>
-    <ds:schemaRef ds:uri="http://schemas.microsoft.com/office/infopath/2007/PartnerControls"/>
-    <ds:schemaRef ds:uri="http://purl.org/dc/dcmitype/"/>
-    <ds:schemaRef ds:uri="http://schemas.microsoft.com/office/2006/metadata/properties"/>
-    <ds:schemaRef ds:uri="http://schemas.openxmlformats.org/package/2006/metadata/core-properties"/>
-    <ds:schemaRef ds:uri="http://purl.org/dc/terms/"/>
-    <ds:schemaRef ds:uri="http://schemas.microsoft.com/office/2006/documentManagement/types"/>
-    <ds:schemaRef ds:uri="http://purl.org/dc/elements/1.1/"/>
-    <ds:schemaRef ds:uri="ecd595b7-854d-4129-8908-394d58e21de0"/>
-    <ds:schemaRef ds:uri="2e073d95-02bc-4c31-9707-1f7b5f2564cb"/>
-    <ds:schemaRef ds:uri="http://www.w3.org/XML/1998/namespace"/>
-  </ds:schemaRefs>
-</ds:datastoreItem>
-</file>
-
-<file path=customXml/itemProps2.xml><?xml version="1.0" encoding="utf-8"?>
 <ds:datastoreItem xmlns:ds="http://schemas.openxmlformats.org/officeDocument/2006/customXml" ds:itemID="{5A847694-5366-4F35-BB14-1B44805440D6}">
   <ds:schemaRefs>
     <ds:schemaRef ds:uri="http://schemas.microsoft.com/office/2006/metadata/contentType"/>
@@ -23750,6 +27598,23 @@
 </ds:datastoreItem>
 </file>
 
+<file path=customXml/itemProps2.xml><?xml version="1.0" encoding="utf-8"?>
+<ds:datastoreItem xmlns:ds="http://schemas.openxmlformats.org/officeDocument/2006/customXml" ds:itemID="{7B7BD72B-E314-4A2C-A344-AF1319C38FF7}">
+  <ds:schemaRefs>
+    <ds:schemaRef ds:uri="http://schemas.microsoft.com/office/infopath/2007/PartnerControls"/>
+    <ds:schemaRef ds:uri="http://purl.org/dc/dcmitype/"/>
+    <ds:schemaRef ds:uri="http://schemas.microsoft.com/office/2006/metadata/properties"/>
+    <ds:schemaRef ds:uri="http://schemas.openxmlformats.org/package/2006/metadata/core-properties"/>
+    <ds:schemaRef ds:uri="http://purl.org/dc/terms/"/>
+    <ds:schemaRef ds:uri="http://schemas.microsoft.com/office/2006/documentManagement/types"/>
+    <ds:schemaRef ds:uri="http://purl.org/dc/elements/1.1/"/>
+    <ds:schemaRef ds:uri="ecd595b7-854d-4129-8908-394d58e21de0"/>
+    <ds:schemaRef ds:uri="2e073d95-02bc-4c31-9707-1f7b5f2564cb"/>
+    <ds:schemaRef ds:uri="http://www.w3.org/XML/1998/namespace"/>
+  </ds:schemaRefs>
+</ds:datastoreItem>
+</file>
+
 <file path=customXml/itemProps3.xml><?xml version="1.0" encoding="utf-8"?>
 <ds:datastoreItem xmlns:ds="http://schemas.openxmlformats.org/officeDocument/2006/customXml" ds:itemID="{9F0734DE-2FC5-4E40-8FD1-4F58D8D2451F}">
   <ds:schemaRefs>

--- a/topic08-inheritance/unit-08a-lectures/talk-3-inheritance-v2/a-inheritance-v2.pptx
+++ b/topic08-inheritance/unit-08a-lectures/talk-3-inheritance-v2/a-inheritance-v2.pptx
@@ -270,7 +270,7 @@
           <a:p>
             <a:fld id="{73FB268A-CA3A-0048-9013-6E7C8FF5127F}" type="datetimeFigureOut">
               <a:rPr lang="en-US" smtClean="0"/>
-              <a:t>3/13/26</a:t>
+              <a:t>3/18/26</a:t>
             </a:fld>
             <a:endParaRPr lang="en-US"/>
           </a:p>
@@ -2486,7 +2486,7 @@
             <a:fld id="{1D8BD707-D9CF-40AE-B4C6-C98DA3205C09}" type="datetimeFigureOut">
               <a:rPr lang="en-US" smtClean="0"/>
               <a:pPr/>
-              <a:t>3/13/26</a:t>
+              <a:t>3/18/26</a:t>
             </a:fld>
             <a:endParaRPr lang="en-US"/>
           </a:p>
@@ -2721,7 +2721,7 @@
             <a:fld id="{1D8BD707-D9CF-40AE-B4C6-C98DA3205C09}" type="datetimeFigureOut">
               <a:rPr lang="en-US" smtClean="0"/>
               <a:pPr/>
-              <a:t>3/13/26</a:t>
+              <a:t>3/18/26</a:t>
             </a:fld>
             <a:endParaRPr lang="en-US"/>
           </a:p>
@@ -3251,7 +3251,7 @@
             <a:fld id="{1D8BD707-D9CF-40AE-B4C6-C98DA3205C09}" type="datetimeFigureOut">
               <a:rPr lang="en-US" smtClean="0"/>
               <a:pPr/>
-              <a:t>3/13/26</a:t>
+              <a:t>3/18/26</a:t>
             </a:fld>
             <a:endParaRPr lang="en-US"/>
           </a:p>
@@ -3780,7 +3780,7 @@
           </a:ln>
           <a:extLst>
             <a:ext uri="{C572A759-6A51-4108-AA02-DFA0A04FC94B}">
-              <ma14:wrappingTextBoxFlag xmlns="" xmlns:ma14="http://schemas.microsoft.com/office/mac/drawingml/2011/main" val="1"/>
+              <ma14:wrappingTextBoxFlag xmlns:ma14="http://schemas.microsoft.com/office/mac/drawingml/2011/main" xmlns="" val="1"/>
             </a:ext>
           </a:extLst>
         </p:spPr>
@@ -3867,7 +3867,7 @@
             <a:effectLst/>
             <a:extLst>
               <a:ext uri="{C572A759-6A51-4108-AA02-DFA0A04FC94B}">
-                <ma14:wrappingTextBoxFlag xmlns="" xmlns:ma14="http://schemas.microsoft.com/office/mac/drawingml/2011/main" val="1"/>
+                <ma14:wrappingTextBoxFlag xmlns:ma14="http://schemas.microsoft.com/office/mac/drawingml/2011/main" xmlns="" val="1"/>
               </a:ext>
             </a:extLst>
           </p:spPr>
@@ -3940,7 +3940,7 @@
             <a:effectLst/>
             <a:extLst>
               <a:ext uri="{C572A759-6A51-4108-AA02-DFA0A04FC94B}">
-                <ma14:wrappingTextBoxFlag xmlns="" xmlns:ma14="http://schemas.microsoft.com/office/mac/drawingml/2011/main" val="1"/>
+                <ma14:wrappingTextBoxFlag xmlns:ma14="http://schemas.microsoft.com/office/mac/drawingml/2011/main" xmlns="" val="1"/>
               </a:ext>
             </a:extLst>
           </p:spPr>
@@ -3991,7 +3991,7 @@
             <a:effectLst/>
             <a:extLst>
               <a:ext uri="{C572A759-6A51-4108-AA02-DFA0A04FC94B}">
-                <ma14:wrappingTextBoxFlag xmlns="" xmlns:ma14="http://schemas.microsoft.com/office/mac/drawingml/2011/main" val="1"/>
+                <ma14:wrappingTextBoxFlag xmlns:ma14="http://schemas.microsoft.com/office/mac/drawingml/2011/main" xmlns="" val="1"/>
               </a:ext>
             </a:extLst>
           </p:spPr>
@@ -5644,7 +5644,7 @@
             <a:fld id="{1D8BD707-D9CF-40AE-B4C6-C98DA3205C09}" type="datetimeFigureOut">
               <a:rPr lang="en-US" smtClean="0"/>
               <a:pPr/>
-              <a:t>3/13/26</a:t>
+              <a:t>3/18/26</a:t>
             </a:fld>
             <a:endParaRPr lang="en-US"/>
           </a:p>
@@ -6278,7 +6278,7 @@
             <a:fld id="{1D8BD707-D9CF-40AE-B4C6-C98DA3205C09}" type="datetimeFigureOut">
               <a:rPr lang="en-US" smtClean="0"/>
               <a:pPr/>
-              <a:t>3/13/26</a:t>
+              <a:t>3/18/26</a:t>
             </a:fld>
             <a:endParaRPr lang="en-US"/>
           </a:p>
@@ -6927,7 +6927,7 @@
             <a:fld id="{1D8BD707-D9CF-40AE-B4C6-C98DA3205C09}" type="datetimeFigureOut">
               <a:rPr lang="en-US" smtClean="0"/>
               <a:pPr/>
-              <a:t>3/13/26</a:t>
+              <a:t>3/18/26</a:t>
             </a:fld>
             <a:endParaRPr lang="en-US"/>
           </a:p>
@@ -7741,7 +7741,7 @@
             <a:fld id="{1D8BD707-D9CF-40AE-B4C6-C98DA3205C09}" type="datetimeFigureOut">
               <a:rPr lang="en-US" smtClean="0"/>
               <a:pPr/>
-              <a:t>3/13/26</a:t>
+              <a:t>3/18/26</a:t>
             </a:fld>
             <a:endParaRPr lang="en-US"/>
           </a:p>
@@ -8255,7 +8255,7 @@
             <a:fld id="{1D8BD707-D9CF-40AE-B4C6-C98DA3205C09}" type="datetimeFigureOut">
               <a:rPr lang="en-US" smtClean="0"/>
               <a:pPr/>
-              <a:t>3/13/26</a:t>
+              <a:t>3/18/26</a:t>
             </a:fld>
             <a:endParaRPr lang="en-US"/>
           </a:p>
@@ -8735,7 +8735,7 @@
             <a:fld id="{1D8BD707-D9CF-40AE-B4C6-C98DA3205C09}" type="datetimeFigureOut">
               <a:rPr lang="en-US" smtClean="0"/>
               <a:pPr/>
-              <a:t>3/13/26</a:t>
+              <a:t>3/18/26</a:t>
             </a:fld>
             <a:endParaRPr lang="en-US"/>
           </a:p>
@@ -9015,7 +9015,7 @@
             <a:fld id="{1D8BD707-D9CF-40AE-B4C6-C98DA3205C09}" type="datetimeFigureOut">
               <a:rPr lang="en-US" smtClean="0"/>
               <a:pPr/>
-              <a:t>3/13/26</a:t>
+              <a:t>3/18/26</a:t>
             </a:fld>
             <a:endParaRPr lang="en-US"/>
           </a:p>
@@ -9622,7 +9622,7 @@
             <a:fld id="{1D8BD707-D9CF-40AE-B4C6-C98DA3205C09}" type="datetimeFigureOut">
               <a:rPr lang="en-US" smtClean="0"/>
               <a:pPr/>
-              <a:t>3/13/26</a:t>
+              <a:t>3/18/26</a:t>
             </a:fld>
             <a:endParaRPr lang="en-US"/>
           </a:p>
@@ -10185,7 +10185,7 @@
             <a:fld id="{1D8BD707-D9CF-40AE-B4C6-C98DA3205C09}" type="datetimeFigureOut">
               <a:rPr lang="en-US" smtClean="0"/>
               <a:pPr/>
-              <a:t>3/13/26</a:t>
+              <a:t>3/18/26</a:t>
             </a:fld>
             <a:endParaRPr lang="en-US"/>
           </a:p>
@@ -27348,6 +27348,23 @@
 </file>
 
 <file path=customXml/item1.xml><?xml version="1.0" encoding="utf-8"?>
+<?mso-contentType ?>
+<FormTemplates xmlns="http://schemas.microsoft.com/sharepoint/v3/contenttype/forms">
+  <Display>DocumentLibraryForm</Display>
+  <Edit>DocumentLibraryForm</Edit>
+  <New>DocumentLibraryForm</New>
+</FormTemplates>
+</file>
+
+<file path=customXml/item2.xml><?xml version="1.0" encoding="utf-8"?>
+<p:properties xmlns:p="http://schemas.microsoft.com/office/2006/metadata/properties" xmlns:xsi="http://www.w3.org/2001/XMLSchema-instance" xmlns:pc="http://schemas.microsoft.com/office/infopath/2007/PartnerControls">
+  <documentManagement>
+    <_activity xmlns="2e073d95-02bc-4c31-9707-1f7b5f2564cb" xsi:nil="true"/>
+  </documentManagement>
+</p:properties>
+</file>
+
+<file path=customXml/item3.xml><?xml version="1.0" encoding="utf-8"?>
 <ct:contentTypeSchema xmlns:ct="http://schemas.microsoft.com/office/2006/metadata/contentType" xmlns:ma="http://schemas.microsoft.com/office/2006/metadata/properties/metaAttributes" ct:_="" ma:_="" ma:contentTypeName="Document" ma:contentTypeID="0x01010074A7B4F4F87092419B4836663A979F72" ma:contentTypeVersion="12" ma:contentTypeDescription="Create a new document." ma:contentTypeScope="" ma:versionID="1705185788f4f7b8606867508f74a2eb">
   <xsd:schema xmlns:xsd="http://www.w3.org/2001/XMLSchema" xmlns:xs="http://www.w3.org/2001/XMLSchema" xmlns:p="http://schemas.microsoft.com/office/2006/metadata/properties" xmlns:ns3="2e073d95-02bc-4c31-9707-1f7b5f2564cb" xmlns:ns4="ecd595b7-854d-4129-8908-394d58e21de0" targetNamespace="http://schemas.microsoft.com/office/2006/metadata/properties" ma:root="true" ma:fieldsID="784458e58d0eaf4d4fb689770e9f109b" ns3:_="" ns4:_="">
     <xsd:import namespace="2e073d95-02bc-4c31-9707-1f7b5f2564cb"/>
@@ -27562,38 +27579,10 @@
 </ct:contentTypeSchema>
 </file>
 
-<file path=customXml/item2.xml><?xml version="1.0" encoding="utf-8"?>
-<p:properties xmlns:p="http://schemas.microsoft.com/office/2006/metadata/properties" xmlns:xsi="http://www.w3.org/2001/XMLSchema-instance" xmlns:pc="http://schemas.microsoft.com/office/infopath/2007/PartnerControls">
-  <documentManagement>
-    <_activity xmlns="2e073d95-02bc-4c31-9707-1f7b5f2564cb" xsi:nil="true"/>
-  </documentManagement>
-</p:properties>
-</file>
-
-<file path=customXml/item3.xml><?xml version="1.0" encoding="utf-8"?>
-<?mso-contentType ?>
-<FormTemplates xmlns="http://schemas.microsoft.com/sharepoint/v3/contenttype/forms">
-  <Display>DocumentLibraryForm</Display>
-  <Edit>DocumentLibraryForm</Edit>
-  <New>DocumentLibraryForm</New>
-</FormTemplates>
-</file>
-
 <file path=customXml/itemProps1.xml><?xml version="1.0" encoding="utf-8"?>
-<ds:datastoreItem xmlns:ds="http://schemas.openxmlformats.org/officeDocument/2006/customXml" ds:itemID="{5A847694-5366-4F35-BB14-1B44805440D6}">
+<ds:datastoreItem xmlns:ds="http://schemas.openxmlformats.org/officeDocument/2006/customXml" ds:itemID="{9F0734DE-2FC5-4E40-8FD1-4F58D8D2451F}">
   <ds:schemaRefs>
-    <ds:schemaRef ds:uri="http://schemas.microsoft.com/office/2006/metadata/contentType"/>
-    <ds:schemaRef ds:uri="http://schemas.microsoft.com/office/2006/metadata/properties/metaAttributes"/>
-    <ds:schemaRef ds:uri="http://www.w3.org/2001/XMLSchema"/>
-    <ds:schemaRef ds:uri="http://schemas.microsoft.com/office/2006/metadata/properties"/>
-    <ds:schemaRef ds:uri="2e073d95-02bc-4c31-9707-1f7b5f2564cb"/>
-    <ds:schemaRef ds:uri="ecd595b7-854d-4129-8908-394d58e21de0"/>
-    <ds:schemaRef ds:uri="http://schemas.microsoft.com/office/2006/documentManagement/types"/>
-    <ds:schemaRef ds:uri="http://schemas.microsoft.com/office/infopath/2007/PartnerControls"/>
-    <ds:schemaRef ds:uri="http://schemas.openxmlformats.org/package/2006/metadata/core-properties"/>
-    <ds:schemaRef ds:uri="http://purl.org/dc/elements/1.1/"/>
-    <ds:schemaRef ds:uri="http://purl.org/dc/terms/"/>
-    <ds:schemaRef ds:uri="http://schemas.microsoft.com/internal/obd"/>
+    <ds:schemaRef ds:uri="http://schemas.microsoft.com/sharepoint/v3/contenttype/forms"/>
   </ds:schemaRefs>
 </ds:datastoreItem>
 </file>
@@ -27616,9 +27605,20 @@
 </file>
 
 <file path=customXml/itemProps3.xml><?xml version="1.0" encoding="utf-8"?>
-<ds:datastoreItem xmlns:ds="http://schemas.openxmlformats.org/officeDocument/2006/customXml" ds:itemID="{9F0734DE-2FC5-4E40-8FD1-4F58D8D2451F}">
+<ds:datastoreItem xmlns:ds="http://schemas.openxmlformats.org/officeDocument/2006/customXml" ds:itemID="{5A847694-5366-4F35-BB14-1B44805440D6}">
   <ds:schemaRefs>
-    <ds:schemaRef ds:uri="http://schemas.microsoft.com/sharepoint/v3/contenttype/forms"/>
+    <ds:schemaRef ds:uri="http://schemas.microsoft.com/office/2006/metadata/contentType"/>
+    <ds:schemaRef ds:uri="http://schemas.microsoft.com/office/2006/metadata/properties/metaAttributes"/>
+    <ds:schemaRef ds:uri="http://www.w3.org/2001/XMLSchema"/>
+    <ds:schemaRef ds:uri="http://schemas.microsoft.com/office/2006/metadata/properties"/>
+    <ds:schemaRef ds:uri="2e073d95-02bc-4c31-9707-1f7b5f2564cb"/>
+    <ds:schemaRef ds:uri="ecd595b7-854d-4129-8908-394d58e21de0"/>
+    <ds:schemaRef ds:uri="http://schemas.microsoft.com/office/2006/documentManagement/types"/>
+    <ds:schemaRef ds:uri="http://schemas.microsoft.com/office/infopath/2007/PartnerControls"/>
+    <ds:schemaRef ds:uri="http://schemas.openxmlformats.org/package/2006/metadata/core-properties"/>
+    <ds:schemaRef ds:uri="http://purl.org/dc/elements/1.1/"/>
+    <ds:schemaRef ds:uri="http://purl.org/dc/terms/"/>
+    <ds:schemaRef ds:uri="http://schemas.microsoft.com/internal/obd"/>
   </ds:schemaRefs>
 </ds:datastoreItem>
 </file>